--- a/slides/business-lite.pptx
+++ b/slides/business-lite.pptx
@@ -12,6 +12,11 @@
     <p:sldId id="260" r:id="rId11"/>
     <p:sldId id="261" r:id="rId12"/>
     <p:sldId id="262" r:id="rId13"/>
+    <p:sldId id="263" r:id="rId14"/>
+    <p:sldId id="264" r:id="rId15"/>
+    <p:sldId id="265" r:id="rId16"/>
+    <p:sldId id="266" r:id="rId17"/>
+    <p:sldId id="267" r:id="rId18"/>
   </p:sldIdLst>
   <p:sldSz cx="9144000" cy="5143500" type="screen4x3"/>
   <p:notesSz cx="6858000" cy="9144000"/>
@@ -3090,7 +3095,7 @@
     <p:bg>
       <p:bgPr>
         <a:solidFill>
-          <a:srgbClr val="FBF7F2"/>
+          <a:srgbClr val="FFFAF5"/>
         </a:solidFill>
         <a:effectLst/>
       </p:bgPr>
@@ -3104,14 +3109,341 @@
       <p:grpSpPr/>
       <p:sp>
         <p:nvSpPr>
-          <p:cNvPr id="2" name="Rectangle 1"/>
+          <p:cNvPr id="2" name="Oval 1"/>
           <p:cNvSpPr/>
           <p:nvPr/>
         </p:nvSpPr>
         <p:spPr>
           <a:xfrm>
-            <a:off x="0" y="0"/>
-            <a:ext cx="9144000" cy="118872"/>
+            <a:off x="7680960" y="-365760"/>
+            <a:ext cx="2011680" cy="2011680"/>
+          </a:xfrm>
+          <a:prstGeom prst="ellipse">
+            <a:avLst/>
+          </a:prstGeom>
+          <a:solidFill>
+            <a:srgbClr val="1A6FD6"/>
+          </a:solidFill>
+          <a:ln>
+            <a:noFill/>
+          </a:ln>
+        </p:spPr>
+        <p:style>
+          <a:lnRef idx="1">
+            <a:schemeClr val="accent1"/>
+          </a:lnRef>
+          <a:fillRef idx="3">
+            <a:schemeClr val="accent1"/>
+          </a:fillRef>
+          <a:effectRef idx="2">
+            <a:schemeClr val="accent1"/>
+          </a:effectRef>
+          <a:fontRef idx="minor">
+            <a:schemeClr val="lt1"/>
+          </a:fontRef>
+        </p:style>
+        <p:txBody>
+          <a:bodyPr rtlCol="0" anchor="ctr"/>
+          <a:lstStyle/>
+          <a:p>
+            <a:pPr algn="ctr"/>
+          </a:p>
+        </p:txBody>
+      </p:sp>
+      <p:sp>
+        <p:nvSpPr>
+          <p:cNvPr id="3" name="TextBox 2"/>
+          <p:cNvSpPr txBox="1"/>
+          <p:nvPr/>
+        </p:nvSpPr>
+        <p:spPr>
+          <a:xfrm>
+            <a:off x="640080" y="868680"/>
+            <a:ext cx="6995160" cy="1234440"/>
+          </a:xfrm>
+          <a:prstGeom prst="rect">
+            <a:avLst/>
+          </a:prstGeom>
+          <a:noFill/>
+        </p:spPr>
+        <p:txBody>
+          <a:bodyPr wrap="square" lIns="27432" rIns="27432" tIns="18288" bIns="18288">
+            <a:spAutoFit/>
+          </a:bodyPr>
+          <a:lstStyle/>
+          <a:p>
+            <a:r>
+              <a:rPr sz="2600" b="1">
+                <a:solidFill>
+                  <a:srgbClr val="1B1B2C"/>
+                </a:solidFill>
+                <a:latin typeface="Segoe UI"/>
+              </a:rPr>
+              <a:t>Microsoft 365 Copilot &amp; Cowork: what to use when</a:t>
+            </a:r>
+          </a:p>
+        </p:txBody>
+      </p:sp>
+      <p:sp>
+        <p:nvSpPr>
+          <p:cNvPr id="4" name="TextBox 3"/>
+          <p:cNvSpPr txBox="1"/>
+          <p:nvPr/>
+        </p:nvSpPr>
+        <p:spPr>
+          <a:xfrm>
+            <a:off x="658368" y="2212848"/>
+            <a:ext cx="7726679" cy="1005840"/>
+          </a:xfrm>
+          <a:prstGeom prst="rect">
+            <a:avLst/>
+          </a:prstGeom>
+          <a:noFill/>
+        </p:spPr>
+        <p:txBody>
+          <a:bodyPr wrap="square" lIns="27432" rIns="27432" tIns="18288" bIns="18288">
+            <a:spAutoFit/>
+          </a:bodyPr>
+          <a:lstStyle/>
+          <a:p>
+            <a:r>
+              <a:rPr sz="1400" b="0">
+                <a:solidFill>
+                  <a:srgbClr val="5A6078"/>
+                </a:solidFill>
+                <a:latin typeface="Segoe UI"/>
+              </a:rPr>
+              <a:t>Microsoft 365 Copilot is your everyday AI assistant. Copilot Cowork is the AI coworker that does the work for you. This guide helps you pick the right one for each task. Every claim is grounded in Microsoft Learn or microsoft.com, with links at the bottom.</a:t>
+            </a:r>
+          </a:p>
+        </p:txBody>
+      </p:sp>
+      <p:sp>
+        <p:nvSpPr>
+          <p:cNvPr id="5" name="TextBox 4"/>
+          <p:cNvSpPr txBox="1"/>
+          <p:nvPr/>
+        </p:nvSpPr>
+        <p:spPr>
+          <a:xfrm>
+            <a:off x="658368" y="4389120"/>
+            <a:ext cx="4114800" cy="274320"/>
+          </a:xfrm>
+          <a:prstGeom prst="rect">
+            <a:avLst/>
+          </a:prstGeom>
+          <a:noFill/>
+        </p:spPr>
+        <p:txBody>
+          <a:bodyPr wrap="square" lIns="27432" rIns="27432" tIns="18288" bIns="18288">
+            <a:spAutoFit/>
+          </a:bodyPr>
+          <a:lstStyle/>
+          <a:p>
+            <a:r>
+              <a:rPr sz="1200" b="1">
+                <a:solidFill>
+                  <a:srgbClr val="1A6FD6"/>
+                </a:solidFill>
+                <a:latin typeface="Segoe UI"/>
+              </a:rPr>
+              <a:t>Warm customer guide</a:t>
+            </a:r>
+          </a:p>
+        </p:txBody>
+      </p:sp>
+    </p:spTree>
+  </p:cSld>
+  <p:clrMapOvr>
+    <a:masterClrMapping/>
+  </p:clrMapOvr>
+</p:sld>
+</file>
+
+<file path=ppt/slides/slide10.xml><?xml version="1.0" encoding="utf-8"?>
+<p:sld xmlns:a="http://schemas.openxmlformats.org/drawingml/2006/main" xmlns:p="http://schemas.openxmlformats.org/presentationml/2006/main" xmlns:r="http://schemas.openxmlformats.org/officeDocument/2006/relationships">
+  <p:cSld>
+    <p:bg>
+      <p:bgPr>
+        <a:solidFill>
+          <a:srgbClr val="FFFAF5"/>
+        </a:solidFill>
+        <a:effectLst/>
+      </p:bgPr>
+    </p:bg>
+    <p:spTree>
+      <p:nvGrpSpPr>
+        <p:cNvPr id="1" name=""/>
+        <p:cNvGrpSpPr/>
+        <p:nvPr/>
+      </p:nvGrpSpPr>
+      <p:grpSpPr/>
+      <p:sp>
+        <p:nvSpPr>
+          <p:cNvPr id="2" name="TextBox 1"/>
+          <p:cNvSpPr txBox="1"/>
+          <p:nvPr/>
+        </p:nvSpPr>
+        <p:spPr>
+          <a:xfrm>
+            <a:off x="502920" y="228600"/>
+            <a:ext cx="6400800" cy="228600"/>
+          </a:xfrm>
+          <a:prstGeom prst="rect">
+            <a:avLst/>
+          </a:prstGeom>
+          <a:noFill/>
+        </p:spPr>
+        <p:txBody>
+          <a:bodyPr wrap="square" lIns="27432" rIns="27432" tIns="18288" bIns="18288">
+            <a:spAutoFit/>
+          </a:bodyPr>
+          <a:lstStyle/>
+          <a:p>
+            <a:r>
+              <a:rPr sz="900" b="1">
+                <a:solidFill>
+                  <a:srgbClr val="5A6078"/>
+                </a:solidFill>
+                <a:latin typeface="Segoe UI"/>
+              </a:rPr>
+              <a:t>GROUPED BY AUDIENCE</a:t>
+            </a:r>
+          </a:p>
+        </p:txBody>
+      </p:sp>
+      <p:sp>
+        <p:nvSpPr>
+          <p:cNvPr id="3" name="TextBox 2"/>
+          <p:cNvSpPr txBox="1"/>
+          <p:nvPr/>
+        </p:nvSpPr>
+        <p:spPr>
+          <a:xfrm>
+            <a:off x="502920" y="438912"/>
+            <a:ext cx="7955279" cy="658368"/>
+          </a:xfrm>
+          <a:prstGeom prst="rect">
+            <a:avLst/>
+          </a:prstGeom>
+          <a:noFill/>
+        </p:spPr>
+        <p:txBody>
+          <a:bodyPr wrap="square" lIns="27432" rIns="27432" tIns="18288" bIns="18288">
+            <a:spAutoFit/>
+          </a:bodyPr>
+          <a:lstStyle/>
+          <a:p>
+            <a:r>
+              <a:rPr sz="2200" b="1">
+                <a:solidFill>
+                  <a:srgbClr val="1B1B2C"/>
+                </a:solidFill>
+                <a:latin typeface="Segoe UI"/>
+              </a:rPr>
+              <a:t>Cowork tasks: medium</a:t>
+            </a:r>
+          </a:p>
+        </p:txBody>
+      </p:sp>
+      <p:sp>
+        <p:nvSpPr>
+          <p:cNvPr id="4" name="Rectangle 3"/>
+          <p:cNvSpPr/>
+          <p:nvPr/>
+        </p:nvSpPr>
+        <p:spPr>
+          <a:xfrm>
+            <a:off x="502920" y="1115568"/>
+            <a:ext cx="1097280" cy="45720"/>
+          </a:xfrm>
+          <a:prstGeom prst="rect">
+            <a:avLst/>
+          </a:prstGeom>
+          <a:solidFill>
+            <a:srgbClr val="1A6FD6"/>
+          </a:solidFill>
+          <a:ln>
+            <a:noFill/>
+          </a:ln>
+        </p:spPr>
+        <p:style>
+          <a:lnRef idx="1">
+            <a:schemeClr val="accent1"/>
+          </a:lnRef>
+          <a:fillRef idx="3">
+            <a:schemeClr val="accent1"/>
+          </a:fillRef>
+          <a:effectRef idx="2">
+            <a:schemeClr val="accent1"/>
+          </a:effectRef>
+          <a:fontRef idx="minor">
+            <a:schemeClr val="lt1"/>
+          </a:fontRef>
+        </p:style>
+        <p:txBody>
+          <a:bodyPr rtlCol="0" anchor="ctr"/>
+          <a:lstStyle/>
+          <a:p>
+            <a:pPr algn="ctr"/>
+          </a:p>
+        </p:txBody>
+      </p:sp>
+      <p:sp>
+        <p:nvSpPr>
+          <p:cNvPr id="5" name="Rounded Rectangle 4"/>
+          <p:cNvSpPr/>
+          <p:nvPr/>
+        </p:nvSpPr>
+        <p:spPr>
+          <a:xfrm>
+            <a:off x="548640" y="1261872"/>
+            <a:ext cx="3977640" cy="3456432"/>
+          </a:xfrm>
+          <a:prstGeom prst="roundRect">
+            <a:avLst/>
+          </a:prstGeom>
+          <a:solidFill>
+            <a:srgbClr val="FFFFFF"/>
+          </a:solidFill>
+          <a:ln>
+            <a:solidFill>
+              <a:srgbClr val="F6F7FB"/>
+            </a:solidFill>
+          </a:ln>
+        </p:spPr>
+        <p:style>
+          <a:lnRef idx="1">
+            <a:schemeClr val="accent1"/>
+          </a:lnRef>
+          <a:fillRef idx="3">
+            <a:schemeClr val="accent1"/>
+          </a:fillRef>
+          <a:effectRef idx="2">
+            <a:schemeClr val="accent1"/>
+          </a:effectRef>
+          <a:fontRef idx="minor">
+            <a:schemeClr val="lt1"/>
+          </a:fontRef>
+        </p:style>
+        <p:txBody>
+          <a:bodyPr rtlCol="0" anchor="ctr"/>
+          <a:lstStyle/>
+          <a:p>
+            <a:pPr algn="ctr"/>
+          </a:p>
+        </p:txBody>
+      </p:sp>
+      <p:sp>
+        <p:nvSpPr>
+          <p:cNvPr id="6" name="Rectangle 5"/>
+          <p:cNvSpPr/>
+          <p:nvPr/>
+        </p:nvSpPr>
+        <p:spPr>
+          <a:xfrm>
+            <a:off x="548640" y="1261872"/>
+            <a:ext cx="3977640" cy="64008"/>
           </a:xfrm>
           <a:prstGeom prst="rect">
             <a:avLst/>
@@ -3147,14 +3479,14 @@
       </p:sp>
       <p:sp>
         <p:nvSpPr>
-          <p:cNvPr id="3" name="TextBox 2"/>
+          <p:cNvPr id="7" name="TextBox 6"/>
           <p:cNvSpPr txBox="1"/>
           <p:nvPr/>
         </p:nvSpPr>
         <p:spPr>
           <a:xfrm>
-            <a:off x="594360" y="640080"/>
-            <a:ext cx="3657600" cy="274320"/>
+            <a:off x="685800" y="1463040"/>
+            <a:ext cx="3703320" cy="274320"/>
           </a:xfrm>
           <a:prstGeom prst="rect">
             <a:avLst/>
@@ -3162,33 +3494,33 @@
           <a:noFill/>
         </p:spPr>
         <p:txBody>
-          <a:bodyPr wrap="square" lIns="36576" rIns="36576" tIns="36576" bIns="36576">
+          <a:bodyPr wrap="square" lIns="27432" rIns="27432" tIns="18288" bIns="18288">
             <a:spAutoFit/>
           </a:bodyPr>
           <a:lstStyle/>
           <a:p>
             <a:r>
-              <a:rPr sz="1200" b="1">
+              <a:rPr sz="1300" b="1">
                 <a:solidFill>
                   <a:srgbClr val="0E8E92"/>
                 </a:solidFill>
                 <a:latin typeface="Segoe UI"/>
               </a:rPr>
-              <a:t>Business lite view</a:t>
-            </a:r>
-          </a:p>
-        </p:txBody>
-      </p:sp>
-      <p:sp>
-        <p:nvSpPr>
-          <p:cNvPr id="4" name="TextBox 3"/>
+              <a:t>All teams</a:t>
+            </a:r>
+          </a:p>
+        </p:txBody>
+      </p:sp>
+      <p:sp>
+        <p:nvSpPr>
+          <p:cNvPr id="8" name="TextBox 7"/>
           <p:cNvSpPr txBox="1"/>
           <p:nvPr/>
         </p:nvSpPr>
         <p:spPr>
           <a:xfrm>
-            <a:off x="594360" y="1051560"/>
-            <a:ext cx="7772400" cy="1005840"/>
+            <a:off x="713232" y="1828800"/>
+            <a:ext cx="3648456" cy="228600"/>
           </a:xfrm>
           <a:prstGeom prst="rect">
             <a:avLst/>
@@ -3196,33 +3528,33 @@
           <a:noFill/>
         </p:spPr>
         <p:txBody>
-          <a:bodyPr wrap="square" lIns="36576" rIns="36576" tIns="36576" bIns="36576">
+          <a:bodyPr wrap="square" lIns="27432" rIns="27432" tIns="18288" bIns="18288">
             <a:spAutoFit/>
           </a:bodyPr>
           <a:lstStyle/>
           <a:p>
             <a:r>
-              <a:rPr sz="3600" b="1">
+              <a:rPr sz="1000" b="1">
                 <a:solidFill>
                   <a:srgbClr val="1B1B2C"/>
                 </a:solidFill>
                 <a:latin typeface="Segoe UI"/>
               </a:rPr>
-              <a:t>Microsoft 365 Copilot and Cowork</a:t>
-            </a:r>
-          </a:p>
-        </p:txBody>
-      </p:sp>
-      <p:sp>
-        <p:nvSpPr>
-          <p:cNvPr id="5" name="TextBox 4"/>
+              <a:t>Turn inbox noise into a curated intelligence brief</a:t>
+            </a:r>
+          </a:p>
+        </p:txBody>
+      </p:sp>
+      <p:sp>
+        <p:nvSpPr>
+          <p:cNvPr id="9" name="TextBox 8"/>
           <p:cNvSpPr txBox="1"/>
           <p:nvPr/>
         </p:nvSpPr>
         <p:spPr>
           <a:xfrm>
-            <a:off x="621792" y="2148840"/>
-            <a:ext cx="7315200" cy="640080"/>
+            <a:off x="713232" y="2048256"/>
+            <a:ext cx="3648456" cy="301752"/>
           </a:xfrm>
           <a:prstGeom prst="rect">
             <a:avLst/>
@@ -3230,33 +3562,33 @@
           <a:noFill/>
         </p:spPr>
         <p:txBody>
-          <a:bodyPr wrap="square" lIns="36576" rIns="36576" tIns="36576" bIns="36576">
+          <a:bodyPr wrap="square" lIns="27432" rIns="27432" tIns="18288" bIns="18288">
             <a:spAutoFit/>
           </a:bodyPr>
           <a:lstStyle/>
           <a:p>
             <a:r>
-              <a:rPr sz="1600" b="0">
-                <a:solidFill>
-                  <a:srgbClr val="5F667C"/>
+              <a:rPr sz="900" b="0">
+                <a:solidFill>
+                  <a:srgbClr val="5A6078"/>
                 </a:solidFill>
                 <a:latin typeface="Segoe UI"/>
               </a:rPr>
-              <a:t>A simpler guide focused on everyday Copilot and the AI coworker that takes action.</a:t>
-            </a:r>
-          </a:p>
-        </p:txBody>
-      </p:sp>
-      <p:sp>
-        <p:nvSpPr>
-          <p:cNvPr id="6" name="Rounded Rectangle 5"/>
+              <a:t>Create a weekly trend brief from the publications you follow.</a:t>
+            </a:r>
+          </a:p>
+        </p:txBody>
+      </p:sp>
+      <p:sp>
+        <p:nvSpPr>
+          <p:cNvPr id="10" name="Rounded Rectangle 9"/>
           <p:cNvSpPr/>
           <p:nvPr/>
         </p:nvSpPr>
         <p:spPr>
           <a:xfrm>
-            <a:off x="640080" y="3246120"/>
-            <a:ext cx="2240280" cy="1005840"/>
+            <a:off x="4681728" y="1261872"/>
+            <a:ext cx="3977640" cy="3456432"/>
           </a:xfrm>
           <a:prstGeom prst="roundRect">
             <a:avLst/>
@@ -3266,7 +3598,7 @@
           </a:solidFill>
           <a:ln>
             <a:solidFill>
-              <a:srgbClr val="E6DED4"/>
+              <a:srgbClr val="F6F7FB"/>
             </a:solidFill>
           </a:ln>
         </p:spPr>
@@ -3294,14 +3626,14 @@
       </p:sp>
       <p:sp>
         <p:nvSpPr>
-          <p:cNvPr id="7" name="Rectangle 6"/>
+          <p:cNvPr id="11" name="Rectangle 10"/>
           <p:cNvSpPr/>
           <p:nvPr/>
         </p:nvSpPr>
         <p:spPr>
           <a:xfrm>
-            <a:off x="640080" y="3246120"/>
-            <a:ext cx="64008" cy="1005840"/>
+            <a:off x="4681728" y="1261872"/>
+            <a:ext cx="3977640" cy="64008"/>
           </a:xfrm>
           <a:prstGeom prst="rect">
             <a:avLst/>
@@ -3337,14 +3669,14 @@
       </p:sp>
       <p:sp>
         <p:nvSpPr>
-          <p:cNvPr id="8" name="TextBox 7"/>
+          <p:cNvPr id="12" name="TextBox 11"/>
           <p:cNvSpPr txBox="1"/>
           <p:nvPr/>
         </p:nvSpPr>
         <p:spPr>
           <a:xfrm>
-            <a:off x="804671" y="3355848"/>
-            <a:ext cx="1965960" cy="256032"/>
+            <a:off x="4818888" y="1463040"/>
+            <a:ext cx="3703320" cy="274320"/>
           </a:xfrm>
           <a:prstGeom prst="rect">
             <a:avLst/>
@@ -3352,7 +3684,7 @@
           <a:noFill/>
         </p:spPr>
         <p:txBody>
-          <a:bodyPr wrap="square" lIns="36576" rIns="36576" tIns="36576" bIns="36576">
+          <a:bodyPr wrap="square" lIns="27432" rIns="27432" tIns="18288" bIns="18288">
             <a:spAutoFit/>
           </a:bodyPr>
           <a:lstStyle/>
@@ -3360,25 +3692,59 @@
             <a:r>
               <a:rPr sz="1300" b="1">
                 <a:solidFill>
+                  <a:srgbClr val="0E8E92"/>
+                </a:solidFill>
+                <a:latin typeface="Segoe UI"/>
+              </a:rPr>
+              <a:t>Marketing</a:t>
+            </a:r>
+          </a:p>
+        </p:txBody>
+      </p:sp>
+      <p:sp>
+        <p:nvSpPr>
+          <p:cNvPr id="13" name="TextBox 12"/>
+          <p:cNvSpPr txBox="1"/>
+          <p:nvPr/>
+        </p:nvSpPr>
+        <p:spPr>
+          <a:xfrm>
+            <a:off x="4846320" y="1828800"/>
+            <a:ext cx="3648456" cy="228600"/>
+          </a:xfrm>
+          <a:prstGeom prst="rect">
+            <a:avLst/>
+          </a:prstGeom>
+          <a:noFill/>
+        </p:spPr>
+        <p:txBody>
+          <a:bodyPr wrap="square" lIns="27432" rIns="27432" tIns="18288" bIns="18288">
+            <a:spAutoFit/>
+          </a:bodyPr>
+          <a:lstStyle/>
+          <a:p>
+            <a:r>
+              <a:rPr sz="1000" b="1">
+                <a:solidFill>
                   <a:srgbClr val="1B1B2C"/>
                 </a:solidFill>
                 <a:latin typeface="Segoe UI"/>
               </a:rPr>
-              <a:t>Choose</a:t>
-            </a:r>
-          </a:p>
-        </p:txBody>
-      </p:sp>
-      <p:sp>
-        <p:nvSpPr>
-          <p:cNvPr id="9" name="TextBox 8"/>
+              <a:t>Partner and channel activation kit</a:t>
+            </a:r>
+          </a:p>
+        </p:txBody>
+      </p:sp>
+      <p:sp>
+        <p:nvSpPr>
+          <p:cNvPr id="14" name="TextBox 13"/>
           <p:cNvSpPr txBox="1"/>
           <p:nvPr/>
         </p:nvSpPr>
         <p:spPr>
           <a:xfrm>
-            <a:off x="804671" y="3685031"/>
-            <a:ext cx="1965960" cy="502920"/>
+            <a:off x="4846320" y="2048256"/>
+            <a:ext cx="3648456" cy="301752"/>
           </a:xfrm>
           <a:prstGeom prst="rect">
             <a:avLst/>
@@ -3386,78 +3752,127 @@
           <a:noFill/>
         </p:spPr>
         <p:txBody>
-          <a:bodyPr wrap="square" lIns="36576" rIns="36576" tIns="36576" bIns="36576">
+          <a:bodyPr wrap="square" lIns="27432" rIns="27432" tIns="18288" bIns="18288">
             <a:spAutoFit/>
           </a:bodyPr>
           <a:lstStyle/>
           <a:p>
             <a:r>
-              <a:rPr sz="1100" b="0">
-                <a:solidFill>
-                  <a:srgbClr val="5F667C"/>
+              <a:rPr sz="900" b="0">
+                <a:solidFill>
+                  <a:srgbClr val="5A6078"/>
                 </a:solidFill>
                 <a:latin typeface="Segoe UI"/>
               </a:rPr>
-              <a:t>Pick by audience and depth</a:t>
-            </a:r>
-          </a:p>
-        </p:txBody>
-      </p:sp>
-      <p:sp>
-        <p:nvSpPr>
-          <p:cNvPr id="10" name="Rounded Rectangle 9"/>
+              <a:t>Produce partner-ready and channel-ready kits with a routing plan.</a:t>
+            </a:r>
+          </a:p>
+        </p:txBody>
+      </p:sp>
+    </p:spTree>
+  </p:cSld>
+  <p:clrMapOvr>
+    <a:masterClrMapping/>
+  </p:clrMapOvr>
+</p:sld>
+</file>
+
+<file path=ppt/slides/slide11.xml><?xml version="1.0" encoding="utf-8"?>
+<p:sld xmlns:a="http://schemas.openxmlformats.org/drawingml/2006/main" xmlns:p="http://schemas.openxmlformats.org/presentationml/2006/main" xmlns:r="http://schemas.openxmlformats.org/officeDocument/2006/relationships">
+  <p:cSld>
+    <p:bg>
+      <p:bgPr>
+        <a:solidFill>
+          <a:srgbClr val="FFFAF5"/>
+        </a:solidFill>
+        <a:effectLst/>
+      </p:bgPr>
+    </p:bg>
+    <p:spTree>
+      <p:nvGrpSpPr>
+        <p:cNvPr id="1" name=""/>
+        <p:cNvGrpSpPr/>
+        <p:nvPr/>
+      </p:nvGrpSpPr>
+      <p:grpSpPr/>
+      <p:sp>
+        <p:nvSpPr>
+          <p:cNvPr id="2" name="TextBox 1"/>
+          <p:cNvSpPr txBox="1"/>
+          <p:nvPr/>
+        </p:nvSpPr>
+        <p:spPr>
+          <a:xfrm>
+            <a:off x="502920" y="228600"/>
+            <a:ext cx="6400800" cy="228600"/>
+          </a:xfrm>
+          <a:prstGeom prst="rect">
+            <a:avLst/>
+          </a:prstGeom>
+          <a:noFill/>
+        </p:spPr>
+        <p:txBody>
+          <a:bodyPr wrap="square" lIns="27432" rIns="27432" tIns="18288" bIns="18288">
+            <a:spAutoFit/>
+          </a:bodyPr>
+          <a:lstStyle/>
+          <a:p>
+            <a:r>
+              <a:rPr sz="900" b="1">
+                <a:solidFill>
+                  <a:srgbClr val="5A6078"/>
+                </a:solidFill>
+                <a:latin typeface="Segoe UI"/>
+              </a:rPr>
+              <a:t>GROUPED BY AUDIENCE</a:t>
+            </a:r>
+          </a:p>
+        </p:txBody>
+      </p:sp>
+      <p:sp>
+        <p:nvSpPr>
+          <p:cNvPr id="3" name="TextBox 2"/>
+          <p:cNvSpPr txBox="1"/>
+          <p:nvPr/>
+        </p:nvSpPr>
+        <p:spPr>
+          <a:xfrm>
+            <a:off x="502920" y="438912"/>
+            <a:ext cx="7955279" cy="658368"/>
+          </a:xfrm>
+          <a:prstGeom prst="rect">
+            <a:avLst/>
+          </a:prstGeom>
+          <a:noFill/>
+        </p:spPr>
+        <p:txBody>
+          <a:bodyPr wrap="square" lIns="27432" rIns="27432" tIns="18288" bIns="18288">
+            <a:spAutoFit/>
+          </a:bodyPr>
+          <a:lstStyle/>
+          <a:p>
+            <a:r>
+              <a:rPr sz="2200" b="1">
+                <a:solidFill>
+                  <a:srgbClr val="1B1B2C"/>
+                </a:solidFill>
+                <a:latin typeface="Segoe UI"/>
+              </a:rPr>
+              <a:t>Cowork tasks: heavy</a:t>
+            </a:r>
+          </a:p>
+        </p:txBody>
+      </p:sp>
+      <p:sp>
+        <p:nvSpPr>
+          <p:cNvPr id="4" name="Rectangle 3"/>
           <p:cNvSpPr/>
           <p:nvPr/>
         </p:nvSpPr>
         <p:spPr>
           <a:xfrm>
-            <a:off x="3246120" y="3246120"/>
-            <a:ext cx="2240280" cy="1005840"/>
-          </a:xfrm>
-          <a:prstGeom prst="roundRect">
-            <a:avLst/>
-          </a:prstGeom>
-          <a:solidFill>
-            <a:srgbClr val="FFFFFF"/>
-          </a:solidFill>
-          <a:ln>
-            <a:solidFill>
-              <a:srgbClr val="E6DED4"/>
-            </a:solidFill>
-          </a:ln>
-        </p:spPr>
-        <p:style>
-          <a:lnRef idx="1">
-            <a:schemeClr val="accent1"/>
-          </a:lnRef>
-          <a:fillRef idx="3">
-            <a:schemeClr val="accent1"/>
-          </a:fillRef>
-          <a:effectRef idx="2">
-            <a:schemeClr val="accent1"/>
-          </a:effectRef>
-          <a:fontRef idx="minor">
-            <a:schemeClr val="lt1"/>
-          </a:fontRef>
-        </p:style>
-        <p:txBody>
-          <a:bodyPr rtlCol="0" anchor="ctr"/>
-          <a:lstStyle/>
-          <a:p>
-            <a:pPr algn="ctr"/>
-          </a:p>
-        </p:txBody>
-      </p:sp>
-      <p:sp>
-        <p:nvSpPr>
-          <p:cNvPr id="11" name="Rectangle 10"/>
-          <p:cNvSpPr/>
-          <p:nvPr/>
-        </p:nvSpPr>
-        <p:spPr>
-          <a:xfrm>
-            <a:off x="3246120" y="3246120"/>
-            <a:ext cx="64008" cy="1005840"/>
+            <a:off x="502920" y="1115568"/>
+            <a:ext cx="1097280" cy="45720"/>
           </a:xfrm>
           <a:prstGeom prst="rect">
             <a:avLst/>
@@ -3493,82 +3908,14 @@
       </p:sp>
       <p:sp>
         <p:nvSpPr>
-          <p:cNvPr id="12" name="TextBox 11"/>
-          <p:cNvSpPr txBox="1"/>
-          <p:nvPr/>
-        </p:nvSpPr>
-        <p:spPr>
-          <a:xfrm>
-            <a:off x="3410712" y="3355848"/>
-            <a:ext cx="1965960" cy="256032"/>
-          </a:xfrm>
-          <a:prstGeom prst="rect">
-            <a:avLst/>
-          </a:prstGeom>
-          <a:noFill/>
-        </p:spPr>
-        <p:txBody>
-          <a:bodyPr wrap="square" lIns="36576" rIns="36576" tIns="36576" bIns="36576">
-            <a:spAutoFit/>
-          </a:bodyPr>
-          <a:lstStyle/>
-          <a:p>
-            <a:r>
-              <a:rPr sz="1300" b="1">
-                <a:solidFill>
-                  <a:srgbClr val="1B1B2C"/>
-                </a:solidFill>
-                <a:latin typeface="Segoe UI"/>
-              </a:rPr>
-              <a:t>Decide</a:t>
-            </a:r>
-          </a:p>
-        </p:txBody>
-      </p:sp>
-      <p:sp>
-        <p:nvSpPr>
-          <p:cNvPr id="13" name="TextBox 12"/>
-          <p:cNvSpPr txBox="1"/>
-          <p:nvPr/>
-        </p:nvSpPr>
-        <p:spPr>
-          <a:xfrm>
-            <a:off x="3410712" y="3685031"/>
-            <a:ext cx="1965960" cy="502920"/>
-          </a:xfrm>
-          <a:prstGeom prst="rect">
-            <a:avLst/>
-          </a:prstGeom>
-          <a:noFill/>
-        </p:spPr>
-        <p:txBody>
-          <a:bodyPr wrap="square" lIns="36576" rIns="36576" tIns="36576" bIns="36576">
-            <a:spAutoFit/>
-          </a:bodyPr>
-          <a:lstStyle/>
-          <a:p>
-            <a:r>
-              <a:rPr sz="1100" b="0">
-                <a:solidFill>
-                  <a:srgbClr val="5F667C"/>
-                </a:solidFill>
-                <a:latin typeface="Segoe UI"/>
-              </a:rPr>
-              <a:t>Use the smallest sufficient tool</a:t>
-            </a:r>
-          </a:p>
-        </p:txBody>
-      </p:sp>
-      <p:sp>
-        <p:nvSpPr>
-          <p:cNvPr id="14" name="Rounded Rectangle 13"/>
+          <p:cNvPr id="5" name="Rounded Rectangle 4"/>
           <p:cNvSpPr/>
           <p:nvPr/>
         </p:nvSpPr>
         <p:spPr>
           <a:xfrm>
-            <a:off x="5852160" y="3246120"/>
-            <a:ext cx="2240280" cy="1005840"/>
+            <a:off x="548640" y="1261872"/>
+            <a:ext cx="2636520" cy="3456432"/>
           </a:xfrm>
           <a:prstGeom prst="roundRect">
             <a:avLst/>
@@ -3578,7 +3925,7 @@
           </a:solidFill>
           <a:ln>
             <a:solidFill>
-              <a:srgbClr val="E6DED4"/>
+              <a:srgbClr val="F6F7FB"/>
             </a:solidFill>
           </a:ln>
         </p:spPr>
@@ -3606,20 +3953,20 @@
       </p:sp>
       <p:sp>
         <p:nvSpPr>
-          <p:cNvPr id="15" name="Rectangle 14"/>
+          <p:cNvPr id="6" name="Rectangle 5"/>
           <p:cNvSpPr/>
           <p:nvPr/>
         </p:nvSpPr>
         <p:spPr>
           <a:xfrm>
-            <a:off x="5852160" y="3246120"/>
-            <a:ext cx="64008" cy="1005840"/>
+            <a:off x="548640" y="1261872"/>
+            <a:ext cx="2636520" cy="64008"/>
           </a:xfrm>
           <a:prstGeom prst="rect">
             <a:avLst/>
           </a:prstGeom>
           <a:solidFill>
-            <a:srgbClr val="3E8E22"/>
+            <a:srgbClr val="C73E78"/>
           </a:solidFill>
           <a:ln>
             <a:noFill/>
@@ -3649,14 +3996,14 @@
       </p:sp>
       <p:sp>
         <p:nvSpPr>
-          <p:cNvPr id="16" name="TextBox 15"/>
+          <p:cNvPr id="7" name="TextBox 6"/>
           <p:cNvSpPr txBox="1"/>
           <p:nvPr/>
         </p:nvSpPr>
         <p:spPr>
           <a:xfrm>
-            <a:off x="6016752" y="3355848"/>
-            <a:ext cx="1965960" cy="256032"/>
+            <a:off x="685800" y="1463040"/>
+            <a:ext cx="2362200" cy="274320"/>
           </a:xfrm>
           <a:prstGeom prst="rect">
             <a:avLst/>
@@ -3664,7 +4011,7 @@
           <a:noFill/>
         </p:spPr>
         <p:txBody>
-          <a:bodyPr wrap="square" lIns="36576" rIns="36576" tIns="36576" bIns="36576">
+          <a:bodyPr wrap="square" lIns="27432" rIns="27432" tIns="18288" bIns="18288">
             <a:spAutoFit/>
           </a:bodyPr>
           <a:lstStyle/>
@@ -3672,25 +4019,59 @@
             <a:r>
               <a:rPr sz="1300" b="1">
                 <a:solidFill>
+                  <a:srgbClr val="C73E78"/>
+                </a:solidFill>
+                <a:latin typeface="Segoe UI"/>
+              </a:rPr>
+              <a:t>All teams</a:t>
+            </a:r>
+          </a:p>
+        </p:txBody>
+      </p:sp>
+      <p:sp>
+        <p:nvSpPr>
+          <p:cNvPr id="8" name="TextBox 7"/>
+          <p:cNvSpPr txBox="1"/>
+          <p:nvPr/>
+        </p:nvSpPr>
+        <p:spPr>
+          <a:xfrm>
+            <a:off x="713232" y="1828800"/>
+            <a:ext cx="2307336" cy="384048"/>
+          </a:xfrm>
+          <a:prstGeom prst="rect">
+            <a:avLst/>
+          </a:prstGeom>
+          <a:noFill/>
+        </p:spPr>
+        <p:txBody>
+          <a:bodyPr wrap="square" lIns="27432" rIns="27432" tIns="18288" bIns="18288">
+            <a:spAutoFit/>
+          </a:bodyPr>
+          <a:lstStyle/>
+          <a:p>
+            <a:r>
+              <a:rPr sz="800" b="1">
+                <a:solidFill>
                   <a:srgbClr val="1B1B2C"/>
                 </a:solidFill>
                 <a:latin typeface="Segoe UI"/>
               </a:rPr>
-              <a:t>Act</a:t>
-            </a:r>
-          </a:p>
-        </p:txBody>
-      </p:sp>
-      <p:sp>
-        <p:nvSpPr>
-          <p:cNvPr id="17" name="TextBox 16"/>
+              <a:t>Prepare a complete out-of-office handoff</a:t>
+            </a:r>
+          </a:p>
+        </p:txBody>
+      </p:sp>
+      <p:sp>
+        <p:nvSpPr>
+          <p:cNvPr id="9" name="TextBox 8"/>
           <p:cNvSpPr txBox="1"/>
           <p:nvPr/>
         </p:nvSpPr>
         <p:spPr>
           <a:xfrm>
-            <a:off x="6016752" y="3685031"/>
-            <a:ext cx="1965960" cy="502920"/>
+            <a:off x="713232" y="2139696"/>
+            <a:ext cx="2307336" cy="310896"/>
           </a:xfrm>
           <a:prstGeom prst="rect">
             <a:avLst/>
@@ -3698,19 +4079,1231 @@
           <a:noFill/>
         </p:spPr>
         <p:txBody>
-          <a:bodyPr wrap="square" lIns="36576" rIns="36576" tIns="36576" bIns="36576">
+          <a:bodyPr wrap="square" lIns="27432" rIns="27432" tIns="18288" bIns="18288">
             <a:spAutoFit/>
           </a:bodyPr>
           <a:lstStyle/>
           <a:p>
             <a:r>
-              <a:rPr sz="1100" b="0">
-                <a:solidFill>
-                  <a:srgbClr val="5F667C"/>
+              <a:rPr sz="700" b="0">
+                <a:solidFill>
+                  <a:srgbClr val="5A6078"/>
                 </a:solidFill>
                 <a:latin typeface="Segoe UI"/>
               </a:rPr>
-              <a:t>Move from answer to outcome</a:t>
+              <a:t>Build a handoff from projects, owners, deadlines, and files.</a:t>
+            </a:r>
+          </a:p>
+        </p:txBody>
+      </p:sp>
+      <p:sp>
+        <p:nvSpPr>
+          <p:cNvPr id="10" name="TextBox 9"/>
+          <p:cNvSpPr txBox="1"/>
+          <p:nvPr/>
+        </p:nvSpPr>
+        <p:spPr>
+          <a:xfrm>
+            <a:off x="713232" y="2523744"/>
+            <a:ext cx="2307336" cy="384048"/>
+          </a:xfrm>
+          <a:prstGeom prst="rect">
+            <a:avLst/>
+          </a:prstGeom>
+          <a:noFill/>
+        </p:spPr>
+        <p:txBody>
+          <a:bodyPr wrap="square" lIns="27432" rIns="27432" tIns="18288" bIns="18288">
+            <a:spAutoFit/>
+          </a:bodyPr>
+          <a:lstStyle/>
+          <a:p>
+            <a:r>
+              <a:rPr sz="800" b="1">
+                <a:solidFill>
+                  <a:srgbClr val="1B1B2C"/>
+                </a:solidFill>
+                <a:latin typeface="Segoe UI"/>
+              </a:rPr>
+              <a:t>Analyze and optimize your OneDrive at scale</a:t>
+            </a:r>
+          </a:p>
+        </p:txBody>
+      </p:sp>
+      <p:sp>
+        <p:nvSpPr>
+          <p:cNvPr id="11" name="TextBox 10"/>
+          <p:cNvSpPr txBox="1"/>
+          <p:nvPr/>
+        </p:nvSpPr>
+        <p:spPr>
+          <a:xfrm>
+            <a:off x="713232" y="2834639"/>
+            <a:ext cx="2307336" cy="310896"/>
+          </a:xfrm>
+          <a:prstGeom prst="rect">
+            <a:avLst/>
+          </a:prstGeom>
+          <a:noFill/>
+        </p:spPr>
+        <p:txBody>
+          <a:bodyPr wrap="square" lIns="27432" rIns="27432" tIns="18288" bIns="18288">
+            <a:spAutoFit/>
+          </a:bodyPr>
+          <a:lstStyle/>
+          <a:p>
+            <a:r>
+              <a:rPr sz="700" b="0">
+                <a:solidFill>
+                  <a:srgbClr val="5A6078"/>
+                </a:solidFill>
+                <a:latin typeface="Segoe UI"/>
+              </a:rPr>
+              <a:t>Create a catalog with cleanup decisions queued for approval.</a:t>
+            </a:r>
+          </a:p>
+        </p:txBody>
+      </p:sp>
+      <p:sp>
+        <p:nvSpPr>
+          <p:cNvPr id="12" name="TextBox 11"/>
+          <p:cNvSpPr txBox="1"/>
+          <p:nvPr/>
+        </p:nvSpPr>
+        <p:spPr>
+          <a:xfrm>
+            <a:off x="713232" y="3218687"/>
+            <a:ext cx="2307336" cy="384048"/>
+          </a:xfrm>
+          <a:prstGeom prst="rect">
+            <a:avLst/>
+          </a:prstGeom>
+          <a:noFill/>
+        </p:spPr>
+        <p:txBody>
+          <a:bodyPr wrap="square" lIns="27432" rIns="27432" tIns="18288" bIns="18288">
+            <a:spAutoFit/>
+          </a:bodyPr>
+          <a:lstStyle/>
+          <a:p>
+            <a:r>
+              <a:rPr sz="800" b="1">
+                <a:solidFill>
+                  <a:srgbClr val="1B1B2C"/>
+                </a:solidFill>
+                <a:latin typeface="Segoe UI"/>
+              </a:rPr>
+              <a:t>Audit and surface against a standard</a:t>
+            </a:r>
+          </a:p>
+        </p:txBody>
+      </p:sp>
+      <p:sp>
+        <p:nvSpPr>
+          <p:cNvPr id="13" name="TextBox 12"/>
+          <p:cNvSpPr txBox="1"/>
+          <p:nvPr/>
+        </p:nvSpPr>
+        <p:spPr>
+          <a:xfrm>
+            <a:off x="713232" y="3529583"/>
+            <a:ext cx="2307336" cy="310896"/>
+          </a:xfrm>
+          <a:prstGeom prst="rect">
+            <a:avLst/>
+          </a:prstGeom>
+          <a:noFill/>
+        </p:spPr>
+        <p:txBody>
+          <a:bodyPr wrap="square" lIns="27432" rIns="27432" tIns="18288" bIns="18288">
+            <a:spAutoFit/>
+          </a:bodyPr>
+          <a:lstStyle/>
+          <a:p>
+            <a:r>
+              <a:rPr sz="700" b="0">
+                <a:solidFill>
+                  <a:srgbClr val="5A6078"/>
+                </a:solidFill>
+                <a:latin typeface="Segoe UI"/>
+              </a:rPr>
+              <a:t>Audit files against a policy and return a sortable fix list.</a:t>
+            </a:r>
+          </a:p>
+        </p:txBody>
+      </p:sp>
+      <p:sp>
+        <p:nvSpPr>
+          <p:cNvPr id="14" name="TextBox 13"/>
+          <p:cNvSpPr txBox="1"/>
+          <p:nvPr/>
+        </p:nvSpPr>
+        <p:spPr>
+          <a:xfrm>
+            <a:off x="713232" y="3913631"/>
+            <a:ext cx="2307336" cy="384048"/>
+          </a:xfrm>
+          <a:prstGeom prst="rect">
+            <a:avLst/>
+          </a:prstGeom>
+          <a:noFill/>
+        </p:spPr>
+        <p:txBody>
+          <a:bodyPr wrap="square" lIns="27432" rIns="27432" tIns="18288" bIns="18288">
+            <a:spAutoFit/>
+          </a:bodyPr>
+          <a:lstStyle/>
+          <a:p>
+            <a:r>
+              <a:rPr sz="800" b="1">
+                <a:solidFill>
+                  <a:srgbClr val="1B1B2C"/>
+                </a:solidFill>
+                <a:latin typeface="Segoe UI"/>
+              </a:rPr>
+              <a:t>Onboard a new hire with a complete 30-60-90 plan</a:t>
+            </a:r>
+          </a:p>
+        </p:txBody>
+      </p:sp>
+      <p:sp>
+        <p:nvSpPr>
+          <p:cNvPr id="15" name="TextBox 14"/>
+          <p:cNvSpPr txBox="1"/>
+          <p:nvPr/>
+        </p:nvSpPr>
+        <p:spPr>
+          <a:xfrm>
+            <a:off x="713232" y="4224527"/>
+            <a:ext cx="2307336" cy="310896"/>
+          </a:xfrm>
+          <a:prstGeom prst="rect">
+            <a:avLst/>
+          </a:prstGeom>
+          <a:noFill/>
+        </p:spPr>
+        <p:txBody>
+          <a:bodyPr wrap="square" lIns="27432" rIns="27432" tIns="18288" bIns="18288">
+            <a:spAutoFit/>
+          </a:bodyPr>
+          <a:lstStyle/>
+          <a:p>
+            <a:r>
+              <a:rPr sz="700" b="0">
+                <a:solidFill>
+                  <a:srgbClr val="5A6078"/>
+                </a:solidFill>
+                <a:latin typeface="Segoe UI"/>
+              </a:rPr>
+              <a:t>Create the plan, getting started dashboard, and check-ins.</a:t>
+            </a:r>
+          </a:p>
+        </p:txBody>
+      </p:sp>
+      <p:sp>
+        <p:nvSpPr>
+          <p:cNvPr id="16" name="Rounded Rectangle 15"/>
+          <p:cNvSpPr/>
+          <p:nvPr/>
+        </p:nvSpPr>
+        <p:spPr>
+          <a:xfrm>
+            <a:off x="3340608" y="1261872"/>
+            <a:ext cx="2636520" cy="3456432"/>
+          </a:xfrm>
+          <a:prstGeom prst="roundRect">
+            <a:avLst/>
+          </a:prstGeom>
+          <a:solidFill>
+            <a:srgbClr val="FFFFFF"/>
+          </a:solidFill>
+          <a:ln>
+            <a:solidFill>
+              <a:srgbClr val="F6F7FB"/>
+            </a:solidFill>
+          </a:ln>
+        </p:spPr>
+        <p:style>
+          <a:lnRef idx="1">
+            <a:schemeClr val="accent1"/>
+          </a:lnRef>
+          <a:fillRef idx="3">
+            <a:schemeClr val="accent1"/>
+          </a:fillRef>
+          <a:effectRef idx="2">
+            <a:schemeClr val="accent1"/>
+          </a:effectRef>
+          <a:fontRef idx="minor">
+            <a:schemeClr val="lt1"/>
+          </a:fontRef>
+        </p:style>
+        <p:txBody>
+          <a:bodyPr rtlCol="0" anchor="ctr"/>
+          <a:lstStyle/>
+          <a:p>
+            <a:pPr algn="ctr"/>
+          </a:p>
+        </p:txBody>
+      </p:sp>
+      <p:sp>
+        <p:nvSpPr>
+          <p:cNvPr id="17" name="Rectangle 16"/>
+          <p:cNvSpPr/>
+          <p:nvPr/>
+        </p:nvSpPr>
+        <p:spPr>
+          <a:xfrm>
+            <a:off x="3340608" y="1261872"/>
+            <a:ext cx="2636520" cy="64008"/>
+          </a:xfrm>
+          <a:prstGeom prst="rect">
+            <a:avLst/>
+          </a:prstGeom>
+          <a:solidFill>
+            <a:srgbClr val="C73E78"/>
+          </a:solidFill>
+          <a:ln>
+            <a:noFill/>
+          </a:ln>
+        </p:spPr>
+        <p:style>
+          <a:lnRef idx="1">
+            <a:schemeClr val="accent1"/>
+          </a:lnRef>
+          <a:fillRef idx="3">
+            <a:schemeClr val="accent1"/>
+          </a:fillRef>
+          <a:effectRef idx="2">
+            <a:schemeClr val="accent1"/>
+          </a:effectRef>
+          <a:fontRef idx="minor">
+            <a:schemeClr val="lt1"/>
+          </a:fontRef>
+        </p:style>
+        <p:txBody>
+          <a:bodyPr rtlCol="0" anchor="ctr"/>
+          <a:lstStyle/>
+          <a:p>
+            <a:pPr algn="ctr"/>
+          </a:p>
+        </p:txBody>
+      </p:sp>
+      <p:sp>
+        <p:nvSpPr>
+          <p:cNvPr id="18" name="TextBox 17"/>
+          <p:cNvSpPr txBox="1"/>
+          <p:nvPr/>
+        </p:nvSpPr>
+        <p:spPr>
+          <a:xfrm>
+            <a:off x="3477768" y="1463040"/>
+            <a:ext cx="2362200" cy="274320"/>
+          </a:xfrm>
+          <a:prstGeom prst="rect">
+            <a:avLst/>
+          </a:prstGeom>
+          <a:noFill/>
+        </p:spPr>
+        <p:txBody>
+          <a:bodyPr wrap="square" lIns="27432" rIns="27432" tIns="18288" bIns="18288">
+            <a:spAutoFit/>
+          </a:bodyPr>
+          <a:lstStyle/>
+          <a:p>
+            <a:r>
+              <a:rPr sz="1300" b="1">
+                <a:solidFill>
+                  <a:srgbClr val="C73E78"/>
+                </a:solidFill>
+                <a:latin typeface="Segoe UI"/>
+              </a:rPr>
+              <a:t>Sales</a:t>
+            </a:r>
+          </a:p>
+        </p:txBody>
+      </p:sp>
+      <p:sp>
+        <p:nvSpPr>
+          <p:cNvPr id="19" name="TextBox 18"/>
+          <p:cNvSpPr txBox="1"/>
+          <p:nvPr/>
+        </p:nvSpPr>
+        <p:spPr>
+          <a:xfrm>
+            <a:off x="3505200" y="1828800"/>
+            <a:ext cx="2307336" cy="384048"/>
+          </a:xfrm>
+          <a:prstGeom prst="rect">
+            <a:avLst/>
+          </a:prstGeom>
+          <a:noFill/>
+        </p:spPr>
+        <p:txBody>
+          <a:bodyPr wrap="square" lIns="27432" rIns="27432" tIns="18288" bIns="18288">
+            <a:spAutoFit/>
+          </a:bodyPr>
+          <a:lstStyle/>
+          <a:p>
+            <a:r>
+              <a:rPr sz="800" b="1">
+                <a:solidFill>
+                  <a:srgbClr val="1B1B2C"/>
+                </a:solidFill>
+                <a:latin typeface="Segoe UI"/>
+              </a:rPr>
+              <a:t>Product launch customer pitch</a:t>
+            </a:r>
+          </a:p>
+        </p:txBody>
+      </p:sp>
+      <p:sp>
+        <p:nvSpPr>
+          <p:cNvPr id="20" name="TextBox 19"/>
+          <p:cNvSpPr txBox="1"/>
+          <p:nvPr/>
+        </p:nvSpPr>
+        <p:spPr>
+          <a:xfrm>
+            <a:off x="3505200" y="2139696"/>
+            <a:ext cx="2307336" cy="310896"/>
+          </a:xfrm>
+          <a:prstGeom prst="rect">
+            <a:avLst/>
+          </a:prstGeom>
+          <a:noFill/>
+        </p:spPr>
+        <p:txBody>
+          <a:bodyPr wrap="square" lIns="27432" rIns="27432" tIns="18288" bIns="18288">
+            <a:spAutoFit/>
+          </a:bodyPr>
+          <a:lstStyle/>
+          <a:p>
+            <a:r>
+              <a:rPr sz="700" b="0">
+                <a:solidFill>
+                  <a:srgbClr val="5A6078"/>
+                </a:solidFill>
+                <a:latin typeface="Segoe UI"/>
+              </a:rPr>
+              <a:t>Create the comparison, value prop, and customer-ready pitch deck.</a:t>
+            </a:r>
+          </a:p>
+        </p:txBody>
+      </p:sp>
+      <p:sp>
+        <p:nvSpPr>
+          <p:cNvPr id="21" name="TextBox 20"/>
+          <p:cNvSpPr txBox="1"/>
+          <p:nvPr/>
+        </p:nvSpPr>
+        <p:spPr>
+          <a:xfrm>
+            <a:off x="3505200" y="2523744"/>
+            <a:ext cx="2307336" cy="384048"/>
+          </a:xfrm>
+          <a:prstGeom prst="rect">
+            <a:avLst/>
+          </a:prstGeom>
+          <a:noFill/>
+        </p:spPr>
+        <p:txBody>
+          <a:bodyPr wrap="square" lIns="27432" rIns="27432" tIns="18288" bIns="18288">
+            <a:spAutoFit/>
+          </a:bodyPr>
+          <a:lstStyle/>
+          <a:p>
+            <a:r>
+              <a:rPr sz="800" b="1">
+                <a:solidFill>
+                  <a:srgbClr val="1B1B2C"/>
+                </a:solidFill>
+                <a:latin typeface="Segoe UI"/>
+              </a:rPr>
+              <a:t>New customer onboarding automation</a:t>
+            </a:r>
+          </a:p>
+        </p:txBody>
+      </p:sp>
+      <p:sp>
+        <p:nvSpPr>
+          <p:cNvPr id="22" name="TextBox 21"/>
+          <p:cNvSpPr txBox="1"/>
+          <p:nvPr/>
+        </p:nvSpPr>
+        <p:spPr>
+          <a:xfrm>
+            <a:off x="3505200" y="2834639"/>
+            <a:ext cx="2307336" cy="310896"/>
+          </a:xfrm>
+          <a:prstGeom prst="rect">
+            <a:avLst/>
+          </a:prstGeom>
+          <a:noFill/>
+        </p:spPr>
+        <p:txBody>
+          <a:bodyPr wrap="square" lIns="27432" rIns="27432" tIns="18288" bIns="18288">
+            <a:spAutoFit/>
+          </a:bodyPr>
+          <a:lstStyle/>
+          <a:p>
+            <a:r>
+              <a:rPr sz="700" b="0">
+                <a:solidFill>
+                  <a:srgbClr val="5A6078"/>
+                </a:solidFill>
+                <a:latin typeface="Segoe UI"/>
+              </a:rPr>
+              <a:t>Set up onboarding artifacts, team message, and welcome email.</a:t>
+            </a:r>
+          </a:p>
+        </p:txBody>
+      </p:sp>
+      <p:sp>
+        <p:nvSpPr>
+          <p:cNvPr id="23" name="TextBox 22"/>
+          <p:cNvSpPr txBox="1"/>
+          <p:nvPr/>
+        </p:nvSpPr>
+        <p:spPr>
+          <a:xfrm>
+            <a:off x="3505200" y="3218687"/>
+            <a:ext cx="2307336" cy="384048"/>
+          </a:xfrm>
+          <a:prstGeom prst="rect">
+            <a:avLst/>
+          </a:prstGeom>
+          <a:noFill/>
+        </p:spPr>
+        <p:txBody>
+          <a:bodyPr wrap="square" lIns="27432" rIns="27432" tIns="18288" bIns="18288">
+            <a:spAutoFit/>
+          </a:bodyPr>
+          <a:lstStyle/>
+          <a:p>
+            <a:r>
+              <a:rPr sz="800" b="1">
+                <a:solidFill>
+                  <a:srgbClr val="1B1B2C"/>
+                </a:solidFill>
+                <a:latin typeface="Segoe UI"/>
+              </a:rPr>
+              <a:t>Customer adoption materials</a:t>
+            </a:r>
+          </a:p>
+        </p:txBody>
+      </p:sp>
+      <p:sp>
+        <p:nvSpPr>
+          <p:cNvPr id="24" name="TextBox 23"/>
+          <p:cNvSpPr txBox="1"/>
+          <p:nvPr/>
+        </p:nvSpPr>
+        <p:spPr>
+          <a:xfrm>
+            <a:off x="3505200" y="3529583"/>
+            <a:ext cx="2307336" cy="310896"/>
+          </a:xfrm>
+          <a:prstGeom prst="rect">
+            <a:avLst/>
+          </a:prstGeom>
+          <a:noFill/>
+        </p:spPr>
+        <p:txBody>
+          <a:bodyPr wrap="square" lIns="27432" rIns="27432" tIns="18288" bIns="18288">
+            <a:spAutoFit/>
+          </a:bodyPr>
+          <a:lstStyle/>
+          <a:p>
+            <a:r>
+              <a:rPr sz="700" b="0">
+                <a:solidFill>
+                  <a:srgbClr val="5A6078"/>
+                </a:solidFill>
+                <a:latin typeface="Segoe UI"/>
+              </a:rPr>
+              <a:t>Build persona-tailored learning paths and rollout order.</a:t>
+            </a:r>
+          </a:p>
+        </p:txBody>
+      </p:sp>
+      <p:sp>
+        <p:nvSpPr>
+          <p:cNvPr id="25" name="TextBox 24"/>
+          <p:cNvSpPr txBox="1"/>
+          <p:nvPr/>
+        </p:nvSpPr>
+        <p:spPr>
+          <a:xfrm>
+            <a:off x="3505200" y="3913631"/>
+            <a:ext cx="2307336" cy="384048"/>
+          </a:xfrm>
+          <a:prstGeom prst="rect">
+            <a:avLst/>
+          </a:prstGeom>
+          <a:noFill/>
+        </p:spPr>
+        <p:txBody>
+          <a:bodyPr wrap="square" lIns="27432" rIns="27432" tIns="18288" bIns="18288">
+            <a:spAutoFit/>
+          </a:bodyPr>
+          <a:lstStyle/>
+          <a:p>
+            <a:r>
+              <a:rPr sz="800" b="1">
+                <a:solidFill>
+                  <a:srgbClr val="1B1B2C"/>
+                </a:solidFill>
+                <a:latin typeface="Segoe UI"/>
+              </a:rPr>
+              <a:t>ROI and value selling artifact</a:t>
+            </a:r>
+          </a:p>
+        </p:txBody>
+      </p:sp>
+      <p:sp>
+        <p:nvSpPr>
+          <p:cNvPr id="26" name="TextBox 25"/>
+          <p:cNvSpPr txBox="1"/>
+          <p:nvPr/>
+        </p:nvSpPr>
+        <p:spPr>
+          <a:xfrm>
+            <a:off x="3505200" y="4224527"/>
+            <a:ext cx="2307336" cy="310896"/>
+          </a:xfrm>
+          <a:prstGeom prst="rect">
+            <a:avLst/>
+          </a:prstGeom>
+          <a:noFill/>
+        </p:spPr>
+        <p:txBody>
+          <a:bodyPr wrap="square" lIns="27432" rIns="27432" tIns="18288" bIns="18288">
+            <a:spAutoFit/>
+          </a:bodyPr>
+          <a:lstStyle/>
+          <a:p>
+            <a:r>
+              <a:rPr sz="700" b="0">
+                <a:solidFill>
+                  <a:srgbClr val="5A6078"/>
+                </a:solidFill>
+                <a:latin typeface="Segoe UI"/>
+              </a:rPr>
+              <a:t>Produce an executive deck and microsite with use cases and ROI model.</a:t>
+            </a:r>
+          </a:p>
+        </p:txBody>
+      </p:sp>
+      <p:sp>
+        <p:nvSpPr>
+          <p:cNvPr id="27" name="Rounded Rectangle 26"/>
+          <p:cNvSpPr/>
+          <p:nvPr/>
+        </p:nvSpPr>
+        <p:spPr>
+          <a:xfrm>
+            <a:off x="6132576" y="1261872"/>
+            <a:ext cx="2636520" cy="3456432"/>
+          </a:xfrm>
+          <a:prstGeom prst="roundRect">
+            <a:avLst/>
+          </a:prstGeom>
+          <a:solidFill>
+            <a:srgbClr val="FFFFFF"/>
+          </a:solidFill>
+          <a:ln>
+            <a:solidFill>
+              <a:srgbClr val="F6F7FB"/>
+            </a:solidFill>
+          </a:ln>
+        </p:spPr>
+        <p:style>
+          <a:lnRef idx="1">
+            <a:schemeClr val="accent1"/>
+          </a:lnRef>
+          <a:fillRef idx="3">
+            <a:schemeClr val="accent1"/>
+          </a:fillRef>
+          <a:effectRef idx="2">
+            <a:schemeClr val="accent1"/>
+          </a:effectRef>
+          <a:fontRef idx="minor">
+            <a:schemeClr val="lt1"/>
+          </a:fontRef>
+        </p:style>
+        <p:txBody>
+          <a:bodyPr rtlCol="0" anchor="ctr"/>
+          <a:lstStyle/>
+          <a:p>
+            <a:pPr algn="ctr"/>
+          </a:p>
+        </p:txBody>
+      </p:sp>
+      <p:sp>
+        <p:nvSpPr>
+          <p:cNvPr id="28" name="Rectangle 27"/>
+          <p:cNvSpPr/>
+          <p:nvPr/>
+        </p:nvSpPr>
+        <p:spPr>
+          <a:xfrm>
+            <a:off x="6132576" y="1261872"/>
+            <a:ext cx="2636520" cy="64008"/>
+          </a:xfrm>
+          <a:prstGeom prst="rect">
+            <a:avLst/>
+          </a:prstGeom>
+          <a:solidFill>
+            <a:srgbClr val="C73E78"/>
+          </a:solidFill>
+          <a:ln>
+            <a:noFill/>
+          </a:ln>
+        </p:spPr>
+        <p:style>
+          <a:lnRef idx="1">
+            <a:schemeClr val="accent1"/>
+          </a:lnRef>
+          <a:fillRef idx="3">
+            <a:schemeClr val="accent1"/>
+          </a:fillRef>
+          <a:effectRef idx="2">
+            <a:schemeClr val="accent1"/>
+          </a:effectRef>
+          <a:fontRef idx="minor">
+            <a:schemeClr val="lt1"/>
+          </a:fontRef>
+        </p:style>
+        <p:txBody>
+          <a:bodyPr rtlCol="0" anchor="ctr"/>
+          <a:lstStyle/>
+          <a:p>
+            <a:pPr algn="ctr"/>
+          </a:p>
+        </p:txBody>
+      </p:sp>
+      <p:sp>
+        <p:nvSpPr>
+          <p:cNvPr id="29" name="TextBox 28"/>
+          <p:cNvSpPr txBox="1"/>
+          <p:nvPr/>
+        </p:nvSpPr>
+        <p:spPr>
+          <a:xfrm>
+            <a:off x="6269736" y="1463040"/>
+            <a:ext cx="2362200" cy="274320"/>
+          </a:xfrm>
+          <a:prstGeom prst="rect">
+            <a:avLst/>
+          </a:prstGeom>
+          <a:noFill/>
+        </p:spPr>
+        <p:txBody>
+          <a:bodyPr wrap="square" lIns="27432" rIns="27432" tIns="18288" bIns="18288">
+            <a:spAutoFit/>
+          </a:bodyPr>
+          <a:lstStyle/>
+          <a:p>
+            <a:r>
+              <a:rPr sz="1300" b="1">
+                <a:solidFill>
+                  <a:srgbClr val="C73E78"/>
+                </a:solidFill>
+                <a:latin typeface="Segoe UI"/>
+              </a:rPr>
+              <a:t>Marketing</a:t>
+            </a:r>
+          </a:p>
+        </p:txBody>
+      </p:sp>
+      <p:sp>
+        <p:nvSpPr>
+          <p:cNvPr id="30" name="TextBox 29"/>
+          <p:cNvSpPr txBox="1"/>
+          <p:nvPr/>
+        </p:nvSpPr>
+        <p:spPr>
+          <a:xfrm>
+            <a:off x="6297168" y="1828800"/>
+            <a:ext cx="2307336" cy="384048"/>
+          </a:xfrm>
+          <a:prstGeom prst="rect">
+            <a:avLst/>
+          </a:prstGeom>
+          <a:noFill/>
+        </p:spPr>
+        <p:txBody>
+          <a:bodyPr wrap="square" lIns="27432" rIns="27432" tIns="18288" bIns="18288">
+            <a:spAutoFit/>
+          </a:bodyPr>
+          <a:lstStyle/>
+          <a:p>
+            <a:r>
+              <a:rPr sz="800" b="1">
+                <a:solidFill>
+                  <a:srgbClr val="1B1B2C"/>
+                </a:solidFill>
+                <a:latin typeface="Segoe UI"/>
+              </a:rPr>
+              <a:t>Analyst briefing prep and rehearsal routing</a:t>
+            </a:r>
+          </a:p>
+        </p:txBody>
+      </p:sp>
+      <p:sp>
+        <p:nvSpPr>
+          <p:cNvPr id="31" name="TextBox 30"/>
+          <p:cNvSpPr txBox="1"/>
+          <p:nvPr/>
+        </p:nvSpPr>
+        <p:spPr>
+          <a:xfrm>
+            <a:off x="6297168" y="2139696"/>
+            <a:ext cx="2307336" cy="310896"/>
+          </a:xfrm>
+          <a:prstGeom prst="rect">
+            <a:avLst/>
+          </a:prstGeom>
+          <a:noFill/>
+        </p:spPr>
+        <p:txBody>
+          <a:bodyPr wrap="square" lIns="27432" rIns="27432" tIns="18288" bIns="18288">
+            <a:spAutoFit/>
+          </a:bodyPr>
+          <a:lstStyle/>
+          <a:p>
+            <a:r>
+              <a:rPr sz="700" b="0">
+                <a:solidFill>
+                  <a:srgbClr val="5A6078"/>
+                </a:solidFill>
+                <a:latin typeface="Segoe UI"/>
+              </a:rPr>
+              <a:t>Build a briefing dashboard and lock rehearsal time.</a:t>
+            </a:r>
+          </a:p>
+        </p:txBody>
+      </p:sp>
+      <p:sp>
+        <p:nvSpPr>
+          <p:cNvPr id="32" name="TextBox 31"/>
+          <p:cNvSpPr txBox="1"/>
+          <p:nvPr/>
+        </p:nvSpPr>
+        <p:spPr>
+          <a:xfrm>
+            <a:off x="6297168" y="2523744"/>
+            <a:ext cx="2307336" cy="384048"/>
+          </a:xfrm>
+          <a:prstGeom prst="rect">
+            <a:avLst/>
+          </a:prstGeom>
+          <a:noFill/>
+        </p:spPr>
+        <p:txBody>
+          <a:bodyPr wrap="square" lIns="27432" rIns="27432" tIns="18288" bIns="18288">
+            <a:spAutoFit/>
+          </a:bodyPr>
+          <a:lstStyle/>
+          <a:p>
+            <a:r>
+              <a:rPr sz="800" b="1">
+                <a:solidFill>
+                  <a:srgbClr val="1B1B2C"/>
+                </a:solidFill>
+                <a:latin typeface="Segoe UI"/>
+              </a:rPr>
+              <a:t>Messaging drift audit and remediation routing</a:t>
+            </a:r>
+          </a:p>
+        </p:txBody>
+      </p:sp>
+      <p:sp>
+        <p:nvSpPr>
+          <p:cNvPr id="33" name="TextBox 32"/>
+          <p:cNvSpPr txBox="1"/>
+          <p:nvPr/>
+        </p:nvSpPr>
+        <p:spPr>
+          <a:xfrm>
+            <a:off x="6297168" y="2834639"/>
+            <a:ext cx="2307336" cy="310896"/>
+          </a:xfrm>
+          <a:prstGeom prst="rect">
+            <a:avLst/>
+          </a:prstGeom>
+          <a:noFill/>
+        </p:spPr>
+        <p:txBody>
+          <a:bodyPr wrap="square" lIns="27432" rIns="27432" tIns="18288" bIns="18288">
+            <a:spAutoFit/>
+          </a:bodyPr>
+          <a:lstStyle/>
+          <a:p>
+            <a:r>
+              <a:rPr sz="700" b="0">
+                <a:solidFill>
+                  <a:srgbClr val="5A6078"/>
+                </a:solidFill>
+                <a:latin typeface="Segoe UI"/>
+              </a:rPr>
+              <a:t>Flag inconsistencies with severity, fix, and owner.</a:t>
+            </a:r>
+          </a:p>
+        </p:txBody>
+      </p:sp>
+      <p:sp>
+        <p:nvSpPr>
+          <p:cNvPr id="34" name="TextBox 33"/>
+          <p:cNvSpPr txBox="1"/>
+          <p:nvPr/>
+        </p:nvSpPr>
+        <p:spPr>
+          <a:xfrm>
+            <a:off x="6297168" y="3218687"/>
+            <a:ext cx="2307336" cy="384048"/>
+          </a:xfrm>
+          <a:prstGeom prst="rect">
+            <a:avLst/>
+          </a:prstGeom>
+          <a:noFill/>
+        </p:spPr>
+        <p:txBody>
+          <a:bodyPr wrap="square" lIns="27432" rIns="27432" tIns="18288" bIns="18288">
+            <a:spAutoFit/>
+          </a:bodyPr>
+          <a:lstStyle/>
+          <a:p>
+            <a:r>
+              <a:rPr sz="800" b="1">
+                <a:solidFill>
+                  <a:srgbClr val="1B1B2C"/>
+                </a:solidFill>
+                <a:latin typeface="Segoe UI"/>
+              </a:rPr>
+              <a:t>Scheduled customer signal activation</a:t>
+            </a:r>
+          </a:p>
+        </p:txBody>
+      </p:sp>
+      <p:sp>
+        <p:nvSpPr>
+          <p:cNvPr id="35" name="TextBox 34"/>
+          <p:cNvSpPr txBox="1"/>
+          <p:nvPr/>
+        </p:nvSpPr>
+        <p:spPr>
+          <a:xfrm>
+            <a:off x="6297168" y="3529583"/>
+            <a:ext cx="2307336" cy="310896"/>
+          </a:xfrm>
+          <a:prstGeom prst="rect">
+            <a:avLst/>
+          </a:prstGeom>
+          <a:noFill/>
+        </p:spPr>
+        <p:txBody>
+          <a:bodyPr wrap="square" lIns="27432" rIns="27432" tIns="18288" bIns="18288">
+            <a:spAutoFit/>
+          </a:bodyPr>
+          <a:lstStyle/>
+          <a:p>
+            <a:r>
+              <a:rPr sz="700" b="0">
+                <a:solidFill>
+                  <a:srgbClr val="5A6078"/>
+                </a:solidFill>
+                <a:latin typeface="Segoe UI"/>
+              </a:rPr>
+              <a:t>Create a Friday brief with themes and campaign adjustments.</a:t>
+            </a:r>
+          </a:p>
+        </p:txBody>
+      </p:sp>
+    </p:spTree>
+  </p:cSld>
+  <p:clrMapOvr>
+    <a:masterClrMapping/>
+  </p:clrMapOvr>
+</p:sld>
+</file>
+
+<file path=ppt/slides/slide12.xml><?xml version="1.0" encoding="utf-8"?>
+<p:sld xmlns:a="http://schemas.openxmlformats.org/drawingml/2006/main" xmlns:p="http://schemas.openxmlformats.org/presentationml/2006/main" xmlns:r="http://schemas.openxmlformats.org/officeDocument/2006/relationships">
+  <p:cSld>
+    <p:bg>
+      <p:bgPr>
+        <a:solidFill>
+          <a:srgbClr val="FFFAF5"/>
+        </a:solidFill>
+        <a:effectLst/>
+      </p:bgPr>
+    </p:bg>
+    <p:spTree>
+      <p:nvGrpSpPr>
+        <p:cNvPr id="1" name=""/>
+        <p:cNvGrpSpPr/>
+        <p:nvPr/>
+      </p:nvGrpSpPr>
+      <p:grpSpPr/>
+      <p:sp>
+        <p:nvSpPr>
+          <p:cNvPr id="2" name="TextBox 1"/>
+          <p:cNvSpPr txBox="1"/>
+          <p:nvPr/>
+        </p:nvSpPr>
+        <p:spPr>
+          <a:xfrm>
+            <a:off x="502920" y="228600"/>
+            <a:ext cx="6400800" cy="228600"/>
+          </a:xfrm>
+          <a:prstGeom prst="rect">
+            <a:avLst/>
+          </a:prstGeom>
+          <a:noFill/>
+        </p:spPr>
+        <p:txBody>
+          <a:bodyPr wrap="square" lIns="27432" rIns="27432" tIns="18288" bIns="18288">
+            <a:spAutoFit/>
+          </a:bodyPr>
+          <a:lstStyle/>
+          <a:p>
+            <a:r>
+              <a:rPr sz="900" b="1">
+                <a:solidFill>
+                  <a:srgbClr val="5A6078"/>
+                </a:solidFill>
+                <a:latin typeface="Segoe UI"/>
+              </a:rPr>
+              <a:t>MICROSOFT SOURCES</a:t>
+            </a:r>
+          </a:p>
+        </p:txBody>
+      </p:sp>
+      <p:sp>
+        <p:nvSpPr>
+          <p:cNvPr id="3" name="TextBox 2"/>
+          <p:cNvSpPr txBox="1"/>
+          <p:nvPr/>
+        </p:nvSpPr>
+        <p:spPr>
+          <a:xfrm>
+            <a:off x="502920" y="438912"/>
+            <a:ext cx="7955279" cy="658368"/>
+          </a:xfrm>
+          <a:prstGeom prst="rect">
+            <a:avLst/>
+          </a:prstGeom>
+          <a:noFill/>
+        </p:spPr>
+        <p:txBody>
+          <a:bodyPr wrap="square" lIns="27432" rIns="27432" tIns="18288" bIns="18288">
+            <a:spAutoFit/>
+          </a:bodyPr>
+          <a:lstStyle/>
+          <a:p>
+            <a:r>
+              <a:rPr sz="2200" b="1">
+                <a:solidFill>
+                  <a:srgbClr val="1B1B2C"/>
+                </a:solidFill>
+                <a:latin typeface="Segoe UI"/>
+              </a:rPr>
+              <a:t>References</a:t>
+            </a:r>
+          </a:p>
+        </p:txBody>
+      </p:sp>
+      <p:sp>
+        <p:nvSpPr>
+          <p:cNvPr id="4" name="Rectangle 3"/>
+          <p:cNvSpPr/>
+          <p:nvPr/>
+        </p:nvSpPr>
+        <p:spPr>
+          <a:xfrm>
+            <a:off x="502920" y="1115568"/>
+            <a:ext cx="1097280" cy="45720"/>
+          </a:xfrm>
+          <a:prstGeom prst="rect">
+            <a:avLst/>
+          </a:prstGeom>
+          <a:solidFill>
+            <a:srgbClr val="1A6FD6"/>
+          </a:solidFill>
+          <a:ln>
+            <a:noFill/>
+          </a:ln>
+        </p:spPr>
+        <p:style>
+          <a:lnRef idx="1">
+            <a:schemeClr val="accent1"/>
+          </a:lnRef>
+          <a:fillRef idx="3">
+            <a:schemeClr val="accent1"/>
+          </a:fillRef>
+          <a:effectRef idx="2">
+            <a:schemeClr val="accent1"/>
+          </a:effectRef>
+          <a:fontRef idx="minor">
+            <a:schemeClr val="lt1"/>
+          </a:fontRef>
+        </p:style>
+        <p:txBody>
+          <a:bodyPr rtlCol="0" anchor="ctr"/>
+          <a:lstStyle/>
+          <a:p>
+            <a:pPr algn="ctr"/>
+          </a:p>
+        </p:txBody>
+      </p:sp>
+      <p:sp>
+        <p:nvSpPr>
+          <p:cNvPr id="5" name="TextBox 4"/>
+          <p:cNvSpPr txBox="1"/>
+          <p:nvPr/>
+        </p:nvSpPr>
+        <p:spPr>
+          <a:xfrm>
+            <a:off x="731520" y="1325880"/>
+            <a:ext cx="7680960" cy="3108960"/>
+          </a:xfrm>
+          <a:prstGeom prst="rect">
+            <a:avLst/>
+          </a:prstGeom>
+          <a:noFill/>
+        </p:spPr>
+        <p:txBody>
+          <a:bodyPr wrap="none" lIns="73152" rIns="73152" tIns="36576">
+            <a:spAutoFit/>
+          </a:bodyPr>
+          <a:lstStyle/>
+          <a:p>
+            <a:pPr>
+              <a:spcAft>
+                <a:spcPts val="500"/>
+              </a:spcAft>
+              <a:defRPr sz="1200">
+                <a:solidFill>
+                  <a:srgbClr val="1B1B2C"/>
+                </a:solidFill>
+                <a:latin typeface="Segoe UI"/>
+              </a:defRPr>
+            </a:pPr>
+            <a:r>
+              <a:t>• LEARN Decide which Copilot is right for you</a:t>
+            </a:r>
+          </a:p>
+          <a:p>
+            <a:pPr>
+              <a:spcAft>
+                <a:spcPts val="500"/>
+              </a:spcAft>
+              <a:defRPr sz="1200">
+                <a:solidFill>
+                  <a:srgbClr val="1B1B2C"/>
+                </a:solidFill>
+                <a:latin typeface="Segoe UI"/>
+              </a:defRPr>
+            </a:pPr>
+            <a:r>
+              <a:t>• LEARN Copilot Cowork overview</a:t>
+            </a:r>
+          </a:p>
+          <a:p>
+            <a:pPr>
+              <a:spcAft>
+                <a:spcPts val="500"/>
+              </a:spcAft>
+              <a:defRPr sz="1200">
+                <a:solidFill>
+                  <a:srgbClr val="1B1B2C"/>
+                </a:solidFill>
+                <a:latin typeface="Segoe UI"/>
+              </a:defRPr>
+            </a:pPr>
+            <a:r>
+              <a:t>• LEARN Copilot Cowork common questions</a:t>
+            </a:r>
+          </a:p>
+          <a:p>
+            <a:pPr>
+              <a:spcAft>
+                <a:spcPts val="500"/>
+              </a:spcAft>
+              <a:defRPr sz="1200">
+                <a:solidFill>
+                  <a:srgbClr val="1B1B2C"/>
+                </a:solidFill>
+                <a:latin typeface="Segoe UI"/>
+              </a:defRPr>
+            </a:pPr>
+            <a:r>
+              <a:t>• LEARN Researcher agent in Microsoft 365 Copilot</a:t>
+            </a:r>
+          </a:p>
+          <a:p>
+            <a:pPr>
+              <a:spcAft>
+                <a:spcPts val="500"/>
+              </a:spcAft>
+              <a:defRPr sz="1200">
+                <a:solidFill>
+                  <a:srgbClr val="1B1B2C"/>
+                </a:solidFill>
+                <a:latin typeface="Segoe UI"/>
+              </a:defRPr>
+            </a:pPr>
+            <a:r>
+              <a:t>• LEARN Agents for Microsoft 365 Copilot Chat</a:t>
+            </a:r>
+          </a:p>
+          <a:p>
+            <a:pPr>
+              <a:spcAft>
+                <a:spcPts val="500"/>
+              </a:spcAft>
+              <a:defRPr sz="1200">
+                <a:solidFill>
+                  <a:srgbClr val="1B1B2C"/>
+                </a:solidFill>
+                <a:latin typeface="Segoe UI"/>
+              </a:defRPr>
+            </a:pPr>
+            <a:r>
+              <a:t>• SUPPORT Schedule your most used Copilot prompts</a:t>
+            </a:r>
+          </a:p>
+          <a:p>
+            <a:pPr>
+              <a:spcAft>
+                <a:spcPts val="500"/>
+              </a:spcAft>
+              <a:defRPr sz="1200">
+                <a:solidFill>
+                  <a:srgbClr val="1B1B2C"/>
+                </a:solidFill>
+                <a:latin typeface="Segoe UI"/>
+              </a:defRPr>
+            </a:pPr>
+            <a:r>
+              <a:t>• ADOPT Cowork for the AI user (prompt structure)</a:t>
+            </a:r>
+          </a:p>
+          <a:p>
+            <a:pPr>
+              <a:spcAft>
+                <a:spcPts val="500"/>
+              </a:spcAft>
+              <a:defRPr sz="1200">
+                <a:solidFill>
+                  <a:srgbClr val="1B1B2C"/>
+                </a:solidFill>
+                <a:latin typeface="Segoe UI"/>
+              </a:defRPr>
+            </a:pPr>
+            <a:r>
+              <a:t>• ADOPT Microsoft Copilot Adoption hub</a:t>
             </a:r>
           </a:p>
         </p:txBody>
@@ -3729,7 +5322,7 @@
     <p:bg>
       <p:bgPr>
         <a:solidFill>
-          <a:srgbClr val="FBF7F2"/>
+          <a:srgbClr val="FFFAF5"/>
         </a:solidFill>
         <a:effectLst/>
       </p:bgPr>
@@ -3749,8 +5342,8 @@
         </p:nvSpPr>
         <p:spPr>
           <a:xfrm>
-            <a:off x="502920" y="320040"/>
-            <a:ext cx="1828800" cy="274320"/>
+            <a:off x="502920" y="228600"/>
+            <a:ext cx="6400800" cy="228600"/>
           </a:xfrm>
           <a:prstGeom prst="rect">
             <a:avLst/>
@@ -3758,19 +5351,19 @@
           <a:noFill/>
         </p:spPr>
         <p:txBody>
-          <a:bodyPr wrap="square" lIns="36576" rIns="36576" tIns="36576" bIns="36576">
+          <a:bodyPr wrap="square" lIns="27432" rIns="27432" tIns="18288" bIns="18288">
             <a:spAutoFit/>
           </a:bodyPr>
           <a:lstStyle/>
           <a:p>
             <a:r>
-              <a:rPr sz="1200" b="1">
-                <a:solidFill>
-                  <a:srgbClr val="0E8E92"/>
+              <a:rPr sz="900" b="1">
+                <a:solidFill>
+                  <a:srgbClr val="5A6078"/>
                 </a:solidFill>
                 <a:latin typeface="Segoe UI"/>
               </a:rPr>
-              <a:t>Section 01</a:t>
+              <a:t>SECTION 01</a:t>
             </a:r>
           </a:p>
         </p:txBody>
@@ -3783,8 +5376,8 @@
         </p:nvSpPr>
         <p:spPr>
           <a:xfrm>
-            <a:off x="502920" y="658368"/>
-            <a:ext cx="7863840" cy="594360"/>
+            <a:off x="502920" y="438912"/>
+            <a:ext cx="7955279" cy="658368"/>
           </a:xfrm>
           <a:prstGeom prst="rect">
             <a:avLst/>
@@ -3792,321 +5385,33 @@
           <a:noFill/>
         </p:spPr>
         <p:txBody>
-          <a:bodyPr wrap="square" lIns="36576" rIns="36576" tIns="36576" bIns="36576">
+          <a:bodyPr wrap="square" lIns="27432" rIns="27432" tIns="18288" bIns="18288">
             <a:spAutoFit/>
           </a:bodyPr>
           <a:lstStyle/>
           <a:p>
             <a:r>
-              <a:rPr sz="2700" b="1">
+              <a:rPr sz="2200" b="1">
                 <a:solidFill>
                   <a:srgbClr val="1B1B2C"/>
                 </a:solidFill>
                 <a:latin typeface="Segoe UI"/>
               </a:rPr>
-              <a:t>01. At a glance</a:t>
-            </a:r>
-          </a:p>
-        </p:txBody>
-      </p:sp>
-      <p:sp>
-        <p:nvSpPr>
-          <p:cNvPr id="4" name="TextBox 3"/>
-          <p:cNvSpPr txBox="1"/>
-          <p:nvPr/>
-        </p:nvSpPr>
-        <p:spPr>
-          <a:xfrm>
-            <a:off x="621792" y="1417320"/>
-            <a:ext cx="5120640" cy="3200400"/>
-          </a:xfrm>
-          <a:prstGeom prst="rect">
-            <a:avLst/>
-          </a:prstGeom>
-          <a:noFill/>
-        </p:spPr>
-        <p:txBody>
-          <a:bodyPr wrap="square" lIns="45720" rIns="45720">
-            <a:spAutoFit/>
-          </a:bodyPr>
-          <a:lstStyle/>
-          <a:p>
-            <a:pPr>
-              <a:spcAft>
-                <a:spcPts val="600"/>
-              </a:spcAft>
-            </a:pPr>
-            <a:r>
-              <a:rPr sz="1500">
-                <a:solidFill>
-                  <a:srgbClr val="1B1B2C"/>
-                </a:solidFill>
-                <a:latin typeface="Segoe UI"/>
-              </a:rPr>
-              <a:t>• Microsoft 365 Copilot is the everyday AI assistant</a:t>
-            </a:r>
-          </a:p>
-          <a:p>
-            <a:pPr>
-              <a:spcAft>
-                <a:spcPts val="600"/>
-              </a:spcAft>
-            </a:pPr>
-            <a:r>
-              <a:rPr sz="1500">
-                <a:solidFill>
-                  <a:srgbClr val="1B1B2C"/>
-                </a:solidFill>
-                <a:latin typeface="Segoe UI"/>
-              </a:rPr>
-              <a:t>• Cowork is the AI coworker that does the work from one prompt</a:t>
-            </a:r>
-          </a:p>
-          <a:p>
-            <a:pPr>
-              <a:spcAft>
-                <a:spcPts val="600"/>
-              </a:spcAft>
-            </a:pPr>
-            <a:r>
-              <a:rPr sz="1500">
-                <a:solidFill>
-                  <a:srgbClr val="1B1B2C"/>
-                </a:solidFill>
-                <a:latin typeface="Segoe UI"/>
-              </a:rPr>
-              <a:t>• Copilot is best when you want help in a file or chat</a:t>
-            </a:r>
-          </a:p>
-          <a:p>
-            <a:pPr>
-              <a:spcAft>
-                <a:spcPts val="600"/>
-              </a:spcAft>
-            </a:pPr>
-            <a:r>
-              <a:rPr sz="1500">
-                <a:solidFill>
-                  <a:srgbClr val="1B1B2C"/>
-                </a:solidFill>
-                <a:latin typeface="Segoe UI"/>
-              </a:rPr>
-              <a:t>• Cowork is best when the task spans apps and actions</a:t>
-            </a:r>
-          </a:p>
-        </p:txBody>
-      </p:sp>
-      <p:sp>
-        <p:nvSpPr>
-          <p:cNvPr id="5" name="Rounded Rectangle 4"/>
+              <a:t>At a glance</a:t>
+            </a:r>
+          </a:p>
+        </p:txBody>
+      </p:sp>
+      <p:sp>
+        <p:nvSpPr>
+          <p:cNvPr id="4" name="Rectangle 3"/>
           <p:cNvSpPr/>
           <p:nvPr/>
         </p:nvSpPr>
         <p:spPr>
           <a:xfrm>
-            <a:off x="5806440" y="1508760"/>
-            <a:ext cx="2560320" cy="868680"/>
-          </a:xfrm>
-          <a:prstGeom prst="roundRect">
-            <a:avLst/>
-          </a:prstGeom>
-          <a:solidFill>
-            <a:srgbClr val="FFFFFF"/>
-          </a:solidFill>
-          <a:ln>
-            <a:solidFill>
-              <a:srgbClr val="E6DED4"/>
-            </a:solidFill>
-          </a:ln>
-        </p:spPr>
-        <p:style>
-          <a:lnRef idx="1">
-            <a:schemeClr val="accent1"/>
-          </a:lnRef>
-          <a:fillRef idx="3">
-            <a:schemeClr val="accent1"/>
-          </a:fillRef>
-          <a:effectRef idx="2">
-            <a:schemeClr val="accent1"/>
-          </a:effectRef>
-          <a:fontRef idx="minor">
-            <a:schemeClr val="lt1"/>
-          </a:fontRef>
-        </p:style>
-        <p:txBody>
-          <a:bodyPr rtlCol="0" anchor="ctr"/>
-          <a:lstStyle/>
-          <a:p>
-            <a:pPr algn="ctr"/>
-          </a:p>
-        </p:txBody>
-      </p:sp>
-      <p:sp>
-        <p:nvSpPr>
-          <p:cNvPr id="6" name="Rectangle 5"/>
-          <p:cNvSpPr/>
-          <p:nvPr/>
-        </p:nvSpPr>
-        <p:spPr>
-          <a:xfrm>
-            <a:off x="5806440" y="1508760"/>
-            <a:ext cx="64008" cy="868680"/>
-          </a:xfrm>
-          <a:prstGeom prst="rect">
-            <a:avLst/>
-          </a:prstGeom>
-          <a:solidFill>
-            <a:srgbClr val="0E8E92"/>
-          </a:solidFill>
-          <a:ln>
-            <a:noFill/>
-          </a:ln>
-        </p:spPr>
-        <p:style>
-          <a:lnRef idx="1">
-            <a:schemeClr val="accent1"/>
-          </a:lnRef>
-          <a:fillRef idx="3">
-            <a:schemeClr val="accent1"/>
-          </a:fillRef>
-          <a:effectRef idx="2">
-            <a:schemeClr val="accent1"/>
-          </a:effectRef>
-          <a:fontRef idx="minor">
-            <a:schemeClr val="lt1"/>
-          </a:fontRef>
-        </p:style>
-        <p:txBody>
-          <a:bodyPr rtlCol="0" anchor="ctr"/>
-          <a:lstStyle/>
-          <a:p>
-            <a:pPr algn="ctr"/>
-          </a:p>
-        </p:txBody>
-      </p:sp>
-      <p:sp>
-        <p:nvSpPr>
-          <p:cNvPr id="7" name="TextBox 6"/>
-          <p:cNvSpPr txBox="1"/>
-          <p:nvPr/>
-        </p:nvSpPr>
-        <p:spPr>
-          <a:xfrm>
-            <a:off x="5971031" y="1618488"/>
-            <a:ext cx="2286000" cy="256032"/>
-          </a:xfrm>
-          <a:prstGeom prst="rect">
-            <a:avLst/>
-          </a:prstGeom>
-          <a:noFill/>
-        </p:spPr>
-        <p:txBody>
-          <a:bodyPr wrap="square" lIns="36576" rIns="36576" tIns="36576" bIns="36576">
-            <a:spAutoFit/>
-          </a:bodyPr>
-          <a:lstStyle/>
-          <a:p>
-            <a:r>
-              <a:rPr sz="1300" b="1">
-                <a:solidFill>
-                  <a:srgbClr val="1B1B2C"/>
-                </a:solidFill>
-                <a:latin typeface="Segoe UI"/>
-              </a:rPr>
-              <a:t>Start small</a:t>
-            </a:r>
-          </a:p>
-        </p:txBody>
-      </p:sp>
-      <p:sp>
-        <p:nvSpPr>
-          <p:cNvPr id="8" name="TextBox 7"/>
-          <p:cNvSpPr txBox="1"/>
-          <p:nvPr/>
-        </p:nvSpPr>
-        <p:spPr>
-          <a:xfrm>
-            <a:off x="5971031" y="1947672"/>
-            <a:ext cx="2286000" cy="365759"/>
-          </a:xfrm>
-          <a:prstGeom prst="rect">
-            <a:avLst/>
-          </a:prstGeom>
-          <a:noFill/>
-        </p:spPr>
-        <p:txBody>
-          <a:bodyPr wrap="square" lIns="36576" rIns="36576" tIns="36576" bIns="36576">
-            <a:spAutoFit/>
-          </a:bodyPr>
-          <a:lstStyle/>
-          <a:p>
-            <a:r>
-              <a:rPr sz="1100" b="0">
-                <a:solidFill>
-                  <a:srgbClr val="5F667C"/>
-                </a:solidFill>
-                <a:latin typeface="Segoe UI"/>
-              </a:rPr>
-              <a:t>Use Copilot in chat or the app when that is enough</a:t>
-            </a:r>
-          </a:p>
-        </p:txBody>
-      </p:sp>
-      <p:sp>
-        <p:nvSpPr>
-          <p:cNvPr id="9" name="Rounded Rectangle 8"/>
-          <p:cNvSpPr/>
-          <p:nvPr/>
-        </p:nvSpPr>
-        <p:spPr>
-          <a:xfrm>
-            <a:off x="5806440" y="2606040"/>
-            <a:ext cx="2560320" cy="868680"/>
-          </a:xfrm>
-          <a:prstGeom prst="roundRect">
-            <a:avLst/>
-          </a:prstGeom>
-          <a:solidFill>
-            <a:srgbClr val="FFFFFF"/>
-          </a:solidFill>
-          <a:ln>
-            <a:solidFill>
-              <a:srgbClr val="E6DED4"/>
-            </a:solidFill>
-          </a:ln>
-        </p:spPr>
-        <p:style>
-          <a:lnRef idx="1">
-            <a:schemeClr val="accent1"/>
-          </a:lnRef>
-          <a:fillRef idx="3">
-            <a:schemeClr val="accent1"/>
-          </a:fillRef>
-          <a:effectRef idx="2">
-            <a:schemeClr val="accent1"/>
-          </a:effectRef>
-          <a:fontRef idx="minor">
-            <a:schemeClr val="lt1"/>
-          </a:fontRef>
-        </p:style>
-        <p:txBody>
-          <a:bodyPr rtlCol="0" anchor="ctr"/>
-          <a:lstStyle/>
-          <a:p>
-            <a:pPr algn="ctr"/>
-          </a:p>
-        </p:txBody>
-      </p:sp>
-      <p:sp>
-        <p:nvSpPr>
-          <p:cNvPr id="10" name="Rectangle 9"/>
-          <p:cNvSpPr/>
-          <p:nvPr/>
-        </p:nvSpPr>
-        <p:spPr>
-          <a:xfrm>
-            <a:off x="5806440" y="2606040"/>
-            <a:ext cx="64008" cy="868680"/>
+            <a:off x="502920" y="1115568"/>
+            <a:ext cx="1097280" cy="45720"/>
           </a:xfrm>
           <a:prstGeom prst="rect">
             <a:avLst/>
@@ -4142,14 +5447,14 @@
       </p:sp>
       <p:sp>
         <p:nvSpPr>
-          <p:cNvPr id="11" name="TextBox 10"/>
+          <p:cNvPr id="5" name="TextBox 4"/>
           <p:cNvSpPr txBox="1"/>
           <p:nvPr/>
         </p:nvSpPr>
         <p:spPr>
           <a:xfrm>
-            <a:off x="5971031" y="2715768"/>
-            <a:ext cx="2286000" cy="256032"/>
+            <a:off x="548640" y="1234440"/>
+            <a:ext cx="7955279" cy="411480"/>
           </a:xfrm>
           <a:prstGeom prst="rect">
             <a:avLst/>
@@ -4157,67 +5462,33 @@
           <a:noFill/>
         </p:spPr>
         <p:txBody>
-          <a:bodyPr wrap="square" lIns="36576" rIns="36576" tIns="36576" bIns="36576">
+          <a:bodyPr wrap="square" lIns="27432" rIns="27432" tIns="18288" bIns="18288">
             <a:spAutoFit/>
           </a:bodyPr>
           <a:lstStyle/>
           <a:p>
             <a:r>
-              <a:rPr sz="1300" b="1">
-                <a:solidFill>
-                  <a:srgbClr val="1B1B2C"/>
+              <a:rPr sz="1300" b="0">
+                <a:solidFill>
+                  <a:srgbClr val="5A6078"/>
                 </a:solidFill>
                 <a:latin typeface="Segoe UI"/>
               </a:rPr>
-              <a:t>Scale up</a:t>
-            </a:r>
-          </a:p>
-        </p:txBody>
-      </p:sp>
-      <p:sp>
-        <p:nvSpPr>
-          <p:cNvPr id="12" name="TextBox 11"/>
-          <p:cNvSpPr txBox="1"/>
-          <p:nvPr/>
-        </p:nvSpPr>
-        <p:spPr>
-          <a:xfrm>
-            <a:off x="5971031" y="3044952"/>
-            <a:ext cx="2286000" cy="365759"/>
-          </a:xfrm>
-          <a:prstGeom prst="rect">
-            <a:avLst/>
-          </a:prstGeom>
-          <a:noFill/>
-        </p:spPr>
-        <p:txBody>
-          <a:bodyPr wrap="square" lIns="36576" rIns="36576" tIns="36576" bIns="36576">
-            <a:spAutoFit/>
-          </a:bodyPr>
-          <a:lstStyle/>
-          <a:p>
-            <a:r>
-              <a:rPr sz="1100" b="0">
-                <a:solidFill>
-                  <a:srgbClr val="5F667C"/>
-                </a:solidFill>
-                <a:latin typeface="Segoe UI"/>
-              </a:rPr>
-              <a:t>Bring in ready agents or Cowork as the job grows</a:t>
-            </a:r>
-          </a:p>
-        </p:txBody>
-      </p:sp>
-      <p:sp>
-        <p:nvSpPr>
-          <p:cNvPr id="13" name="Rounded Rectangle 12"/>
+              <a:t>Pick by how the work shows up: a question to answer, or a job to get done end-to-end.</a:t>
+            </a:r>
+          </a:p>
+        </p:txBody>
+      </p:sp>
+      <p:sp>
+        <p:nvSpPr>
+          <p:cNvPr id="6" name="Rounded Rectangle 5"/>
           <p:cNvSpPr/>
           <p:nvPr/>
         </p:nvSpPr>
         <p:spPr>
           <a:xfrm>
-            <a:off x="5806440" y="3703320"/>
-            <a:ext cx="2560320" cy="868680"/>
+            <a:off x="548640" y="1783080"/>
+            <a:ext cx="3886200" cy="2606040"/>
           </a:xfrm>
           <a:prstGeom prst="roundRect">
             <a:avLst/>
@@ -4227,7 +5498,7 @@
           </a:solidFill>
           <a:ln>
             <a:solidFill>
-              <a:srgbClr val="E6DED4"/>
+              <a:srgbClr val="F6F7FB"/>
             </a:solidFill>
           </a:ln>
         </p:spPr>
@@ -4255,14 +5526,173 @@
       </p:sp>
       <p:sp>
         <p:nvSpPr>
-          <p:cNvPr id="14" name="Rectangle 13"/>
+          <p:cNvPr id="7" name="Rectangle 6"/>
           <p:cNvSpPr/>
           <p:nvPr/>
         </p:nvSpPr>
         <p:spPr>
           <a:xfrm>
-            <a:off x="5806440" y="3703320"/>
-            <a:ext cx="64008" cy="868680"/>
+            <a:off x="548640" y="1783080"/>
+            <a:ext cx="3886200" cy="64008"/>
+          </a:xfrm>
+          <a:prstGeom prst="rect">
+            <a:avLst/>
+          </a:prstGeom>
+          <a:solidFill>
+            <a:srgbClr val="1A6FD6"/>
+          </a:solidFill>
+          <a:ln>
+            <a:noFill/>
+          </a:ln>
+        </p:spPr>
+        <p:style>
+          <a:lnRef idx="1">
+            <a:schemeClr val="accent1"/>
+          </a:lnRef>
+          <a:fillRef idx="3">
+            <a:schemeClr val="accent1"/>
+          </a:fillRef>
+          <a:effectRef idx="2">
+            <a:schemeClr val="accent1"/>
+          </a:effectRef>
+          <a:fontRef idx="minor">
+            <a:schemeClr val="lt1"/>
+          </a:fontRef>
+        </p:style>
+        <p:txBody>
+          <a:bodyPr rtlCol="0" anchor="ctr"/>
+          <a:lstStyle/>
+          <a:p>
+            <a:pPr algn="ctr"/>
+          </a:p>
+        </p:txBody>
+      </p:sp>
+      <p:sp>
+        <p:nvSpPr>
+          <p:cNvPr id="8" name="TextBox 7"/>
+          <p:cNvSpPr txBox="1"/>
+          <p:nvPr/>
+        </p:nvSpPr>
+        <p:spPr>
+          <a:xfrm>
+            <a:off x="777240" y="2029968"/>
+            <a:ext cx="3429000" cy="2057400"/>
+          </a:xfrm>
+          <a:prstGeom prst="rect">
+            <a:avLst/>
+          </a:prstGeom>
+          <a:noFill/>
+        </p:spPr>
+        <p:txBody>
+          <a:bodyPr wrap="none" lIns="73152" rIns="73152" tIns="36576">
+            <a:spAutoFit/>
+          </a:bodyPr>
+          <a:lstStyle/>
+          <a:p>
+            <a:pPr>
+              <a:spcAft>
+                <a:spcPts val="500"/>
+              </a:spcAft>
+              <a:defRPr sz="1300">
+                <a:solidFill>
+                  <a:srgbClr val="1B1B2C"/>
+                </a:solidFill>
+                <a:latin typeface="Segoe UI"/>
+              </a:defRPr>
+            </a:pPr>
+            <a:r>
+              <a:t>• Microsoft 365 Copilot</a:t>
+            </a:r>
+          </a:p>
+          <a:p>
+            <a:pPr>
+              <a:spcAft>
+                <a:spcPts val="500"/>
+              </a:spcAft>
+              <a:defRPr sz="1300">
+                <a:solidFill>
+                  <a:srgbClr val="1B1B2C"/>
+                </a:solidFill>
+                <a:latin typeface="Segoe UI"/>
+              </a:defRPr>
+            </a:pPr>
+            <a:r>
+              <a:t>• Copilot Cowork</a:t>
+            </a:r>
+          </a:p>
+          <a:p>
+            <a:pPr>
+              <a:spcAft>
+                <a:spcPts val="500"/>
+              </a:spcAft>
+              <a:defRPr sz="1300">
+                <a:solidFill>
+                  <a:srgbClr val="1B1B2C"/>
+                </a:solidFill>
+                <a:latin typeface="Segoe UI"/>
+              </a:defRPr>
+            </a:pPr>
+            <a:r>
+              <a:t>• Pick by how the work shows up: a question to answer, or a job to get done end-to-end.</a:t>
+            </a:r>
+          </a:p>
+        </p:txBody>
+      </p:sp>
+      <p:sp>
+        <p:nvSpPr>
+          <p:cNvPr id="9" name="Rounded Rectangle 8"/>
+          <p:cNvSpPr/>
+          <p:nvPr/>
+        </p:nvSpPr>
+        <p:spPr>
+          <a:xfrm>
+            <a:off x="4709160" y="1783080"/>
+            <a:ext cx="3886200" cy="2606040"/>
+          </a:xfrm>
+          <a:prstGeom prst="roundRect">
+            <a:avLst/>
+          </a:prstGeom>
+          <a:solidFill>
+            <a:srgbClr val="FFFFFF"/>
+          </a:solidFill>
+          <a:ln>
+            <a:solidFill>
+              <a:srgbClr val="F6F7FB"/>
+            </a:solidFill>
+          </a:ln>
+        </p:spPr>
+        <p:style>
+          <a:lnRef idx="1">
+            <a:schemeClr val="accent1"/>
+          </a:lnRef>
+          <a:fillRef idx="3">
+            <a:schemeClr val="accent1"/>
+          </a:fillRef>
+          <a:effectRef idx="2">
+            <a:schemeClr val="accent1"/>
+          </a:effectRef>
+          <a:fontRef idx="minor">
+            <a:schemeClr val="lt1"/>
+          </a:fontRef>
+        </p:style>
+        <p:txBody>
+          <a:bodyPr rtlCol="0" anchor="ctr"/>
+          <a:lstStyle/>
+          <a:p>
+            <a:pPr algn="ctr"/>
+          </a:p>
+        </p:txBody>
+      </p:sp>
+      <p:sp>
+        <p:nvSpPr>
+          <p:cNvPr id="10" name="Rectangle 9"/>
+          <p:cNvSpPr/>
+          <p:nvPr/>
+        </p:nvSpPr>
+        <p:spPr>
+          <a:xfrm>
+            <a:off x="4709160" y="1783080"/>
+            <a:ext cx="3886200" cy="64008"/>
           </a:xfrm>
           <a:prstGeom prst="rect">
             <a:avLst/>
@@ -4298,14 +5728,14 @@
       </p:sp>
       <p:sp>
         <p:nvSpPr>
-          <p:cNvPr id="15" name="TextBox 14"/>
+          <p:cNvPr id="11" name="TextBox 10"/>
           <p:cNvSpPr txBox="1"/>
           <p:nvPr/>
         </p:nvSpPr>
         <p:spPr>
           <a:xfrm>
-            <a:off x="5971031" y="3813048"/>
-            <a:ext cx="2286000" cy="256032"/>
+            <a:off x="4983480" y="2057400"/>
+            <a:ext cx="3108960" cy="274320"/>
           </a:xfrm>
           <a:prstGeom prst="rect">
             <a:avLst/>
@@ -4313,33 +5743,33 @@
           <a:noFill/>
         </p:spPr>
         <p:txBody>
-          <a:bodyPr wrap="square" lIns="36576" rIns="36576" tIns="36576" bIns="36576">
+          <a:bodyPr wrap="square" lIns="27432" rIns="27432" tIns="18288" bIns="18288">
             <a:spAutoFit/>
           </a:bodyPr>
           <a:lstStyle/>
           <a:p>
             <a:r>
-              <a:rPr sz="1300" b="1">
+              <a:rPr sz="1500" b="1">
                 <a:solidFill>
                   <a:srgbClr val="1B1B2C"/>
                 </a:solidFill>
                 <a:latin typeface="Segoe UI"/>
               </a:rPr>
-              <a:t>Stay in control</a:t>
-            </a:r>
-          </a:p>
-        </p:txBody>
-      </p:sp>
-      <p:sp>
-        <p:nvSpPr>
-          <p:cNvPr id="16" name="TextBox 15"/>
+              <a:t>Key takeaway</a:t>
+            </a:r>
+          </a:p>
+        </p:txBody>
+      </p:sp>
+      <p:sp>
+        <p:nvSpPr>
+          <p:cNvPr id="12" name="TextBox 11"/>
           <p:cNvSpPr txBox="1"/>
           <p:nvPr/>
         </p:nvSpPr>
         <p:spPr>
           <a:xfrm>
-            <a:off x="5971031" y="4142231"/>
-            <a:ext cx="2286000" cy="365759"/>
+            <a:off x="4983480" y="2514600"/>
+            <a:ext cx="3017520" cy="731520"/>
           </a:xfrm>
           <a:prstGeom prst="rect">
             <a:avLst/>
@@ -4347,19 +5777,19 @@
           <a:noFill/>
         </p:spPr>
         <p:txBody>
-          <a:bodyPr wrap="square" lIns="36576" rIns="36576" tIns="36576" bIns="36576">
+          <a:bodyPr wrap="square" lIns="27432" rIns="27432" tIns="18288" bIns="18288">
             <a:spAutoFit/>
           </a:bodyPr>
           <a:lstStyle/>
           <a:p>
             <a:r>
-              <a:rPr sz="1100" b="0">
-                <a:solidFill>
-                  <a:srgbClr val="5F667C"/>
+              <a:rPr sz="1400" b="0">
+                <a:solidFill>
+                  <a:srgbClr val="5A6078"/>
                 </a:solidFill>
                 <a:latin typeface="Segoe UI"/>
               </a:rPr>
-              <a:t>Keep approvals clear when actions are involved</a:t>
+              <a:t>Pick the simplest Copilot surface that can finish the job with the right level of control.</a:t>
             </a:r>
           </a:p>
         </p:txBody>
@@ -4378,7 +5808,7 @@
     <p:bg>
       <p:bgPr>
         <a:solidFill>
-          <a:srgbClr val="FBF7F2"/>
+          <a:srgbClr val="FFFAF5"/>
         </a:solidFill>
         <a:effectLst/>
       </p:bgPr>
@@ -4398,8 +5828,8 @@
         </p:nvSpPr>
         <p:spPr>
           <a:xfrm>
-            <a:off x="502920" y="320040"/>
-            <a:ext cx="1828800" cy="274320"/>
+            <a:off x="502920" y="228600"/>
+            <a:ext cx="6400800" cy="228600"/>
           </a:xfrm>
           <a:prstGeom prst="rect">
             <a:avLst/>
@@ -4407,19 +5837,19 @@
           <a:noFill/>
         </p:spPr>
         <p:txBody>
-          <a:bodyPr wrap="square" lIns="36576" rIns="36576" tIns="36576" bIns="36576">
+          <a:bodyPr wrap="square" lIns="27432" rIns="27432" tIns="18288" bIns="18288">
             <a:spAutoFit/>
           </a:bodyPr>
           <a:lstStyle/>
           <a:p>
             <a:r>
-              <a:rPr sz="1200" b="1">
-                <a:solidFill>
-                  <a:srgbClr val="0E8E92"/>
+              <a:rPr sz="900" b="1">
+                <a:solidFill>
+                  <a:srgbClr val="5A6078"/>
                 </a:solidFill>
                 <a:latin typeface="Segoe UI"/>
               </a:rPr>
-              <a:t>Section 02</a:t>
+              <a:t>SECTION 02</a:t>
             </a:r>
           </a:p>
         </p:txBody>
@@ -4432,8 +5862,8 @@
         </p:nvSpPr>
         <p:spPr>
           <a:xfrm>
-            <a:off x="502920" y="658368"/>
-            <a:ext cx="7863840" cy="594360"/>
+            <a:off x="502920" y="438912"/>
+            <a:ext cx="7955279" cy="658368"/>
           </a:xfrm>
           <a:prstGeom prst="rect">
             <a:avLst/>
@@ -4441,321 +5871,33 @@
           <a:noFill/>
         </p:spPr>
         <p:txBody>
-          <a:bodyPr wrap="square" lIns="36576" rIns="36576" tIns="36576" bIns="36576">
+          <a:bodyPr wrap="square" lIns="27432" rIns="27432" tIns="18288" bIns="18288">
             <a:spAutoFit/>
           </a:bodyPr>
           <a:lstStyle/>
           <a:p>
             <a:r>
-              <a:rPr sz="2700" b="1">
+              <a:rPr sz="2200" b="1">
                 <a:solidFill>
                   <a:srgbClr val="1B1B2C"/>
                 </a:solidFill>
                 <a:latin typeface="Segoe UI"/>
               </a:rPr>
-              <a:t>02. Pick by the job</a:t>
-            </a:r>
-          </a:p>
-        </p:txBody>
-      </p:sp>
-      <p:sp>
-        <p:nvSpPr>
-          <p:cNvPr id="4" name="TextBox 3"/>
-          <p:cNvSpPr txBox="1"/>
-          <p:nvPr/>
-        </p:nvSpPr>
-        <p:spPr>
-          <a:xfrm>
-            <a:off x="621792" y="1417320"/>
-            <a:ext cx="5120640" cy="3200400"/>
-          </a:xfrm>
-          <a:prstGeom prst="rect">
-            <a:avLst/>
-          </a:prstGeom>
-          <a:noFill/>
-        </p:spPr>
-        <p:txBody>
-          <a:bodyPr wrap="square" lIns="45720" rIns="45720">
-            <a:spAutoFit/>
-          </a:bodyPr>
-          <a:lstStyle/>
-          <a:p>
-            <a:pPr>
-              <a:spcAft>
-                <a:spcPts val="600"/>
-              </a:spcAft>
-            </a:pPr>
-            <a:r>
-              <a:rPr sz="1500">
-                <a:solidFill>
-                  <a:srgbClr val="1B1B2C"/>
-                </a:solidFill>
-                <a:latin typeface="Segoe UI"/>
-              </a:rPr>
-              <a:t>• Use chat for quick questions, brainstorms, and short replies</a:t>
-            </a:r>
-          </a:p>
-          <a:p>
-            <a:pPr>
-              <a:spcAft>
-                <a:spcPts val="600"/>
-              </a:spcAft>
-            </a:pPr>
-            <a:r>
-              <a:rPr sz="1500">
-                <a:solidFill>
-                  <a:srgbClr val="1B1B2C"/>
-                </a:solidFill>
-                <a:latin typeface="Segoe UI"/>
-              </a:rPr>
-              <a:t>• Use in-app Copilot when the file or thread is already open</a:t>
-            </a:r>
-          </a:p>
-          <a:p>
-            <a:pPr>
-              <a:spcAft>
-                <a:spcPts val="600"/>
-              </a:spcAft>
-            </a:pPr>
-            <a:r>
-              <a:rPr sz="1500">
-                <a:solidFill>
-                  <a:srgbClr val="1B1B2C"/>
-                </a:solidFill>
-                <a:latin typeface="Segoe UI"/>
-              </a:rPr>
-              <a:t>• Use Researcher or Analyst for deeper work with citations</a:t>
-            </a:r>
-          </a:p>
-          <a:p>
-            <a:pPr>
-              <a:spcAft>
-                <a:spcPts val="600"/>
-              </a:spcAft>
-            </a:pPr>
-            <a:r>
-              <a:rPr sz="1500">
-                <a:solidFill>
-                  <a:srgbClr val="1B1B2C"/>
-                </a:solidFill>
-                <a:latin typeface="Segoe UI"/>
-              </a:rPr>
-              <a:t>• Use Cowork when you need send, schedule, create, and post actions</a:t>
-            </a:r>
-          </a:p>
-        </p:txBody>
-      </p:sp>
-      <p:sp>
-        <p:nvSpPr>
-          <p:cNvPr id="5" name="Rounded Rectangle 4"/>
+              <a:t>Pick by the job to be done</a:t>
+            </a:r>
+          </a:p>
+        </p:txBody>
+      </p:sp>
+      <p:sp>
+        <p:nvSpPr>
+          <p:cNvPr id="4" name="Rectangle 3"/>
           <p:cNvSpPr/>
           <p:nvPr/>
         </p:nvSpPr>
         <p:spPr>
           <a:xfrm>
-            <a:off x="5806440" y="1508760"/>
-            <a:ext cx="2560320" cy="868680"/>
-          </a:xfrm>
-          <a:prstGeom prst="roundRect">
-            <a:avLst/>
-          </a:prstGeom>
-          <a:solidFill>
-            <a:srgbClr val="FFFFFF"/>
-          </a:solidFill>
-          <a:ln>
-            <a:solidFill>
-              <a:srgbClr val="E6DED4"/>
-            </a:solidFill>
-          </a:ln>
-        </p:spPr>
-        <p:style>
-          <a:lnRef idx="1">
-            <a:schemeClr val="accent1"/>
-          </a:lnRef>
-          <a:fillRef idx="3">
-            <a:schemeClr val="accent1"/>
-          </a:fillRef>
-          <a:effectRef idx="2">
-            <a:schemeClr val="accent1"/>
-          </a:effectRef>
-          <a:fontRef idx="minor">
-            <a:schemeClr val="lt1"/>
-          </a:fontRef>
-        </p:style>
-        <p:txBody>
-          <a:bodyPr rtlCol="0" anchor="ctr"/>
-          <a:lstStyle/>
-          <a:p>
-            <a:pPr algn="ctr"/>
-          </a:p>
-        </p:txBody>
-      </p:sp>
-      <p:sp>
-        <p:nvSpPr>
-          <p:cNvPr id="6" name="Rectangle 5"/>
-          <p:cNvSpPr/>
-          <p:nvPr/>
-        </p:nvSpPr>
-        <p:spPr>
-          <a:xfrm>
-            <a:off x="5806440" y="1508760"/>
-            <a:ext cx="64008" cy="868680"/>
-          </a:xfrm>
-          <a:prstGeom prst="rect">
-            <a:avLst/>
-          </a:prstGeom>
-          <a:solidFill>
-            <a:srgbClr val="0E8E92"/>
-          </a:solidFill>
-          <a:ln>
-            <a:noFill/>
-          </a:ln>
-        </p:spPr>
-        <p:style>
-          <a:lnRef idx="1">
-            <a:schemeClr val="accent1"/>
-          </a:lnRef>
-          <a:fillRef idx="3">
-            <a:schemeClr val="accent1"/>
-          </a:fillRef>
-          <a:effectRef idx="2">
-            <a:schemeClr val="accent1"/>
-          </a:effectRef>
-          <a:fontRef idx="minor">
-            <a:schemeClr val="lt1"/>
-          </a:fontRef>
-        </p:style>
-        <p:txBody>
-          <a:bodyPr rtlCol="0" anchor="ctr"/>
-          <a:lstStyle/>
-          <a:p>
-            <a:pPr algn="ctr"/>
-          </a:p>
-        </p:txBody>
-      </p:sp>
-      <p:sp>
-        <p:nvSpPr>
-          <p:cNvPr id="7" name="TextBox 6"/>
-          <p:cNvSpPr txBox="1"/>
-          <p:nvPr/>
-        </p:nvSpPr>
-        <p:spPr>
-          <a:xfrm>
-            <a:off x="5971031" y="1618488"/>
-            <a:ext cx="2286000" cy="256032"/>
-          </a:xfrm>
-          <a:prstGeom prst="rect">
-            <a:avLst/>
-          </a:prstGeom>
-          <a:noFill/>
-        </p:spPr>
-        <p:txBody>
-          <a:bodyPr wrap="square" lIns="36576" rIns="36576" tIns="36576" bIns="36576">
-            <a:spAutoFit/>
-          </a:bodyPr>
-          <a:lstStyle/>
-          <a:p>
-            <a:r>
-              <a:rPr sz="1300" b="1">
-                <a:solidFill>
-                  <a:srgbClr val="1B1B2C"/>
-                </a:solidFill>
-                <a:latin typeface="Segoe UI"/>
-              </a:rPr>
-              <a:t>Start small</a:t>
-            </a:r>
-          </a:p>
-        </p:txBody>
-      </p:sp>
-      <p:sp>
-        <p:nvSpPr>
-          <p:cNvPr id="8" name="TextBox 7"/>
-          <p:cNvSpPr txBox="1"/>
-          <p:nvPr/>
-        </p:nvSpPr>
-        <p:spPr>
-          <a:xfrm>
-            <a:off x="5971031" y="1947672"/>
-            <a:ext cx="2286000" cy="365759"/>
-          </a:xfrm>
-          <a:prstGeom prst="rect">
-            <a:avLst/>
-          </a:prstGeom>
-          <a:noFill/>
-        </p:spPr>
-        <p:txBody>
-          <a:bodyPr wrap="square" lIns="36576" rIns="36576" tIns="36576" bIns="36576">
-            <a:spAutoFit/>
-          </a:bodyPr>
-          <a:lstStyle/>
-          <a:p>
-            <a:r>
-              <a:rPr sz="1100" b="0">
-                <a:solidFill>
-                  <a:srgbClr val="5F667C"/>
-                </a:solidFill>
-                <a:latin typeface="Segoe UI"/>
-              </a:rPr>
-              <a:t>Use Copilot in chat or the app when that is enough</a:t>
-            </a:r>
-          </a:p>
-        </p:txBody>
-      </p:sp>
-      <p:sp>
-        <p:nvSpPr>
-          <p:cNvPr id="9" name="Rounded Rectangle 8"/>
-          <p:cNvSpPr/>
-          <p:nvPr/>
-        </p:nvSpPr>
-        <p:spPr>
-          <a:xfrm>
-            <a:off x="5806440" y="2606040"/>
-            <a:ext cx="2560320" cy="868680"/>
-          </a:xfrm>
-          <a:prstGeom prst="roundRect">
-            <a:avLst/>
-          </a:prstGeom>
-          <a:solidFill>
-            <a:srgbClr val="FFFFFF"/>
-          </a:solidFill>
-          <a:ln>
-            <a:solidFill>
-              <a:srgbClr val="E6DED4"/>
-            </a:solidFill>
-          </a:ln>
-        </p:spPr>
-        <p:style>
-          <a:lnRef idx="1">
-            <a:schemeClr val="accent1"/>
-          </a:lnRef>
-          <a:fillRef idx="3">
-            <a:schemeClr val="accent1"/>
-          </a:fillRef>
-          <a:effectRef idx="2">
-            <a:schemeClr val="accent1"/>
-          </a:effectRef>
-          <a:fontRef idx="minor">
-            <a:schemeClr val="lt1"/>
-          </a:fontRef>
-        </p:style>
-        <p:txBody>
-          <a:bodyPr rtlCol="0" anchor="ctr"/>
-          <a:lstStyle/>
-          <a:p>
-            <a:pPr algn="ctr"/>
-          </a:p>
-        </p:txBody>
-      </p:sp>
-      <p:sp>
-        <p:nvSpPr>
-          <p:cNvPr id="10" name="Rectangle 9"/>
-          <p:cNvSpPr/>
-          <p:nvPr/>
-        </p:nvSpPr>
-        <p:spPr>
-          <a:xfrm>
-            <a:off x="5806440" y="2606040"/>
-            <a:ext cx="64008" cy="868680"/>
+            <a:off x="502920" y="1115568"/>
+            <a:ext cx="1097280" cy="45720"/>
           </a:xfrm>
           <a:prstGeom prst="rect">
             <a:avLst/>
@@ -4791,14 +5933,14 @@
       </p:sp>
       <p:sp>
         <p:nvSpPr>
-          <p:cNvPr id="11" name="TextBox 10"/>
+          <p:cNvPr id="5" name="TextBox 4"/>
           <p:cNvSpPr txBox="1"/>
           <p:nvPr/>
         </p:nvSpPr>
         <p:spPr>
           <a:xfrm>
-            <a:off x="5971031" y="2715768"/>
-            <a:ext cx="2286000" cy="256032"/>
+            <a:off x="548640" y="1234440"/>
+            <a:ext cx="7955279" cy="411480"/>
           </a:xfrm>
           <a:prstGeom prst="rect">
             <a:avLst/>
@@ -4806,67 +5948,33 @@
           <a:noFill/>
         </p:spPr>
         <p:txBody>
-          <a:bodyPr wrap="square" lIns="36576" rIns="36576" tIns="36576" bIns="36576">
+          <a:bodyPr wrap="square" lIns="27432" rIns="27432" tIns="18288" bIns="18288">
             <a:spAutoFit/>
           </a:bodyPr>
           <a:lstStyle/>
           <a:p>
             <a:r>
-              <a:rPr sz="1300" b="1">
-                <a:solidFill>
-                  <a:srgbClr val="1B1B2C"/>
+              <a:rPr sz="1300" b="0">
+                <a:solidFill>
+                  <a:srgbClr val="5A6078"/>
                 </a:solidFill>
                 <a:latin typeface="Segoe UI"/>
               </a:rPr>
-              <a:t>Scale up</a:t>
-            </a:r>
-          </a:p>
-        </p:txBody>
-      </p:sp>
-      <p:sp>
-        <p:nvSpPr>
-          <p:cNvPr id="12" name="TextBox 11"/>
-          <p:cNvSpPr txBox="1"/>
-          <p:nvPr/>
-        </p:nvSpPr>
-        <p:spPr>
-          <a:xfrm>
-            <a:off x="5971031" y="3044952"/>
-            <a:ext cx="2286000" cy="365759"/>
-          </a:xfrm>
-          <a:prstGeom prst="rect">
-            <a:avLst/>
-          </a:prstGeom>
-          <a:noFill/>
-        </p:spPr>
-        <p:txBody>
-          <a:bodyPr wrap="square" lIns="36576" rIns="36576" tIns="36576" bIns="36576">
-            <a:spAutoFit/>
-          </a:bodyPr>
-          <a:lstStyle/>
-          <a:p>
-            <a:r>
-              <a:rPr sz="1100" b="0">
-                <a:solidFill>
-                  <a:srgbClr val="5F667C"/>
-                </a:solidFill>
-                <a:latin typeface="Segoe UI"/>
-              </a:rPr>
-              <a:t>Bring in ready agents or Cowork as the job grows</a:t>
-            </a:r>
-          </a:p>
-        </p:txBody>
-      </p:sp>
-      <p:sp>
-        <p:nvSpPr>
-          <p:cNvPr id="13" name="Rounded Rectangle 12"/>
+              <a:t>One recommendation per task, with a note when something else also works.</a:t>
+            </a:r>
+          </a:p>
+        </p:txBody>
+      </p:sp>
+      <p:sp>
+        <p:nvSpPr>
+          <p:cNvPr id="6" name="Rounded Rectangle 5"/>
           <p:cNvSpPr/>
           <p:nvPr/>
         </p:nvSpPr>
         <p:spPr>
           <a:xfrm>
-            <a:off x="5806440" y="3703320"/>
-            <a:ext cx="2560320" cy="868680"/>
+            <a:off x="548640" y="1783080"/>
+            <a:ext cx="3886200" cy="2606040"/>
           </a:xfrm>
           <a:prstGeom prst="roundRect">
             <a:avLst/>
@@ -4876,7 +5984,7 @@
           </a:solidFill>
           <a:ln>
             <a:solidFill>
-              <a:srgbClr val="E6DED4"/>
+              <a:srgbClr val="F6F7FB"/>
             </a:solidFill>
           </a:ln>
         </p:spPr>
@@ -4904,14 +6012,189 @@
       </p:sp>
       <p:sp>
         <p:nvSpPr>
-          <p:cNvPr id="14" name="Rectangle 13"/>
+          <p:cNvPr id="7" name="Rectangle 6"/>
           <p:cNvSpPr/>
           <p:nvPr/>
         </p:nvSpPr>
         <p:spPr>
           <a:xfrm>
-            <a:off x="5806440" y="3703320"/>
-            <a:ext cx="64008" cy="868680"/>
+            <a:off x="548640" y="1783080"/>
+            <a:ext cx="3886200" cy="64008"/>
+          </a:xfrm>
+          <a:prstGeom prst="rect">
+            <a:avLst/>
+          </a:prstGeom>
+          <a:solidFill>
+            <a:srgbClr val="1A6FD6"/>
+          </a:solidFill>
+          <a:ln>
+            <a:noFill/>
+          </a:ln>
+        </p:spPr>
+        <p:style>
+          <a:lnRef idx="1">
+            <a:schemeClr val="accent1"/>
+          </a:lnRef>
+          <a:fillRef idx="3">
+            <a:schemeClr val="accent1"/>
+          </a:fillRef>
+          <a:effectRef idx="2">
+            <a:schemeClr val="accent1"/>
+          </a:effectRef>
+          <a:fontRef idx="minor">
+            <a:schemeClr val="lt1"/>
+          </a:fontRef>
+        </p:style>
+        <p:txBody>
+          <a:bodyPr rtlCol="0" anchor="ctr"/>
+          <a:lstStyle/>
+          <a:p>
+            <a:pPr algn="ctr"/>
+          </a:p>
+        </p:txBody>
+      </p:sp>
+      <p:sp>
+        <p:nvSpPr>
+          <p:cNvPr id="8" name="TextBox 7"/>
+          <p:cNvSpPr txBox="1"/>
+          <p:nvPr/>
+        </p:nvSpPr>
+        <p:spPr>
+          <a:xfrm>
+            <a:off x="777240" y="2029968"/>
+            <a:ext cx="3429000" cy="2057400"/>
+          </a:xfrm>
+          <a:prstGeom prst="rect">
+            <a:avLst/>
+          </a:prstGeom>
+          <a:noFill/>
+        </p:spPr>
+        <p:txBody>
+          <a:bodyPr wrap="none" lIns="73152" rIns="73152" tIns="36576">
+            <a:spAutoFit/>
+          </a:bodyPr>
+          <a:lstStyle/>
+          <a:p>
+            <a:pPr>
+              <a:spcAft>
+                <a:spcPts val="500"/>
+              </a:spcAft>
+              <a:defRPr sz="1300">
+                <a:solidFill>
+                  <a:srgbClr val="1B1B2C"/>
+                </a:solidFill>
+                <a:latin typeface="Segoe UI"/>
+              </a:defRPr>
+            </a:pPr>
+            <a:r>
+              <a:t>• Quick question, brainstorm, or short reply</a:t>
+            </a:r>
+          </a:p>
+          <a:p>
+            <a:pPr>
+              <a:spcAft>
+                <a:spcPts val="500"/>
+              </a:spcAft>
+              <a:defRPr sz="1300">
+                <a:solidFill>
+                  <a:srgbClr val="1B1B2C"/>
+                </a:solidFill>
+                <a:latin typeface="Segoe UI"/>
+              </a:defRPr>
+            </a:pPr>
+            <a:r>
+              <a:t>• Draft or reply in Outlook, summarise a Teams meeting, edit a document</a:t>
+            </a:r>
+          </a:p>
+          <a:p>
+            <a:pPr>
+              <a:spcAft>
+                <a:spcPts val="500"/>
+              </a:spcAft>
+              <a:defRPr sz="1300">
+                <a:solidFill>
+                  <a:srgbClr val="1B1B2C"/>
+                </a:solidFill>
+                <a:latin typeface="Segoe UI"/>
+              </a:defRPr>
+            </a:pPr>
+            <a:r>
+              <a:t>• Deep, multi-source research with citations</a:t>
+            </a:r>
+          </a:p>
+          <a:p>
+            <a:pPr>
+              <a:spcAft>
+                <a:spcPts val="500"/>
+              </a:spcAft>
+              <a:defRPr sz="1300">
+                <a:solidFill>
+                  <a:srgbClr val="1B1B2C"/>
+                </a:solidFill>
+                <a:latin typeface="Segoe UI"/>
+              </a:defRPr>
+            </a:pPr>
+            <a:r>
+              <a:t>• Take real action across M365 (send, schedule, create, post)</a:t>
+            </a:r>
+          </a:p>
+        </p:txBody>
+      </p:sp>
+      <p:sp>
+        <p:nvSpPr>
+          <p:cNvPr id="9" name="Rounded Rectangle 8"/>
+          <p:cNvSpPr/>
+          <p:nvPr/>
+        </p:nvSpPr>
+        <p:spPr>
+          <a:xfrm>
+            <a:off x="4709160" y="1783080"/>
+            <a:ext cx="3886200" cy="2606040"/>
+          </a:xfrm>
+          <a:prstGeom prst="roundRect">
+            <a:avLst/>
+          </a:prstGeom>
+          <a:solidFill>
+            <a:srgbClr val="FFFFFF"/>
+          </a:solidFill>
+          <a:ln>
+            <a:solidFill>
+              <a:srgbClr val="F6F7FB"/>
+            </a:solidFill>
+          </a:ln>
+        </p:spPr>
+        <p:style>
+          <a:lnRef idx="1">
+            <a:schemeClr val="accent1"/>
+          </a:lnRef>
+          <a:fillRef idx="3">
+            <a:schemeClr val="accent1"/>
+          </a:fillRef>
+          <a:effectRef idx="2">
+            <a:schemeClr val="accent1"/>
+          </a:effectRef>
+          <a:fontRef idx="minor">
+            <a:schemeClr val="lt1"/>
+          </a:fontRef>
+        </p:style>
+        <p:txBody>
+          <a:bodyPr rtlCol="0" anchor="ctr"/>
+          <a:lstStyle/>
+          <a:p>
+            <a:pPr algn="ctr"/>
+          </a:p>
+        </p:txBody>
+      </p:sp>
+      <p:sp>
+        <p:nvSpPr>
+          <p:cNvPr id="10" name="Rectangle 9"/>
+          <p:cNvSpPr/>
+          <p:nvPr/>
+        </p:nvSpPr>
+        <p:spPr>
+          <a:xfrm>
+            <a:off x="4709160" y="1783080"/>
+            <a:ext cx="3886200" cy="64008"/>
           </a:xfrm>
           <a:prstGeom prst="rect">
             <a:avLst/>
@@ -4947,14 +6230,14 @@
       </p:sp>
       <p:sp>
         <p:nvSpPr>
-          <p:cNvPr id="15" name="TextBox 14"/>
+          <p:cNvPr id="11" name="TextBox 10"/>
           <p:cNvSpPr txBox="1"/>
           <p:nvPr/>
         </p:nvSpPr>
         <p:spPr>
           <a:xfrm>
-            <a:off x="5971031" y="3813048"/>
-            <a:ext cx="2286000" cy="256032"/>
+            <a:off x="4937760" y="2029968"/>
+            <a:ext cx="3429000" cy="2057400"/>
           </a:xfrm>
           <a:prstGeom prst="rect">
             <a:avLst/>
@@ -4962,53 +6245,56 @@
           <a:noFill/>
         </p:spPr>
         <p:txBody>
-          <a:bodyPr wrap="square" lIns="36576" rIns="36576" tIns="36576" bIns="36576">
+          <a:bodyPr wrap="none" lIns="73152" rIns="73152" tIns="36576">
             <a:spAutoFit/>
           </a:bodyPr>
           <a:lstStyle/>
           <a:p>
-            <a:r>
-              <a:rPr sz="1300" b="1">
+            <a:pPr>
+              <a:spcAft>
+                <a:spcPts val="500"/>
+              </a:spcAft>
+              <a:defRPr sz="1300">
                 <a:solidFill>
                   <a:srgbClr val="1B1B2C"/>
                 </a:solidFill>
                 <a:latin typeface="Segoe UI"/>
-              </a:rPr>
-              <a:t>Stay in control</a:t>
-            </a:r>
-          </a:p>
-        </p:txBody>
-      </p:sp>
-      <p:sp>
-        <p:nvSpPr>
-          <p:cNvPr id="16" name="TextBox 15"/>
-          <p:cNvSpPr txBox="1"/>
-          <p:nvPr/>
-        </p:nvSpPr>
-        <p:spPr>
-          <a:xfrm>
-            <a:off x="5971031" y="4142231"/>
-            <a:ext cx="2286000" cy="365759"/>
-          </a:xfrm>
-          <a:prstGeom prst="rect">
-            <a:avLst/>
-          </a:prstGeom>
-          <a:noFill/>
-        </p:spPr>
-        <p:txBody>
-          <a:bodyPr wrap="square" lIns="36576" rIns="36576" tIns="36576" bIns="36576">
-            <a:spAutoFit/>
-          </a:bodyPr>
-          <a:lstStyle/>
-          <a:p>
-            <a:r>
-              <a:rPr sz="1100" b="0">
-                <a:solidFill>
-                  <a:srgbClr val="5F667C"/>
-                </a:solidFill>
-                <a:latin typeface="Segoe UI"/>
-              </a:rPr>
-              <a:t>Keep approvals clear when actions are involved</a:t>
+              </a:defRPr>
+            </a:pPr>
+            <a:r>
+              <a:t>• One prompt, multiple deliverables (brief, model, deck)</a:t>
+            </a:r>
+          </a:p>
+          <a:p>
+            <a:pPr>
+              <a:spcAft>
+                <a:spcPts val="500"/>
+              </a:spcAft>
+              <a:defRPr sz="1300">
+                <a:solidFill>
+                  <a:srgbClr val="1B1B2C"/>
+                </a:solidFill>
+                <a:latin typeface="Segoe UI"/>
+              </a:defRPr>
+            </a:pPr>
+            <a:r>
+              <a:t>• A small Q&amp;A bot for yourself or a small team</a:t>
+            </a:r>
+          </a:p>
+          <a:p>
+            <a:pPr>
+              <a:spcAft>
+                <a:spcPts val="500"/>
+              </a:spcAft>
+              <a:defRPr sz="1300">
+                <a:solidFill>
+                  <a:srgbClr val="1B1B2C"/>
+                </a:solidFill>
+                <a:latin typeface="Segoe UI"/>
+              </a:defRPr>
+            </a:pPr>
+            <a:r>
+              <a:t>• Run a prompt on a recurring schedule</a:t>
             </a:r>
           </a:p>
         </p:txBody>
@@ -5027,7 +6313,7 @@
     <p:bg>
       <p:bgPr>
         <a:solidFill>
-          <a:srgbClr val="FBF7F2"/>
+          <a:srgbClr val="FFFAF5"/>
         </a:solidFill>
         <a:effectLst/>
       </p:bgPr>
@@ -5047,8 +6333,8 @@
         </p:nvSpPr>
         <p:spPr>
           <a:xfrm>
-            <a:off x="502920" y="320040"/>
-            <a:ext cx="1828800" cy="274320"/>
+            <a:off x="502920" y="228600"/>
+            <a:ext cx="6400800" cy="228600"/>
           </a:xfrm>
           <a:prstGeom prst="rect">
             <a:avLst/>
@@ -5056,19 +6342,19 @@
           <a:noFill/>
         </p:spPr>
         <p:txBody>
-          <a:bodyPr wrap="square" lIns="36576" rIns="36576" tIns="36576" bIns="36576">
+          <a:bodyPr wrap="square" lIns="27432" rIns="27432" tIns="18288" bIns="18288">
             <a:spAutoFit/>
           </a:bodyPr>
           <a:lstStyle/>
           <a:p>
             <a:r>
-              <a:rPr sz="1200" b="1">
-                <a:solidFill>
-                  <a:srgbClr val="0E8E92"/>
+              <a:rPr sz="900" b="1">
+                <a:solidFill>
+                  <a:srgbClr val="5A6078"/>
                 </a:solidFill>
                 <a:latin typeface="Segoe UI"/>
               </a:rPr>
-              <a:t>Section 03</a:t>
+              <a:t>SECTION 03</a:t>
             </a:r>
           </a:p>
         </p:txBody>
@@ -5081,8 +6367,8 @@
         </p:nvSpPr>
         <p:spPr>
           <a:xfrm>
-            <a:off x="502920" y="658368"/>
-            <a:ext cx="7863840" cy="594360"/>
+            <a:off x="502920" y="438912"/>
+            <a:ext cx="7955279" cy="658368"/>
           </a:xfrm>
           <a:prstGeom prst="rect">
             <a:avLst/>
@@ -5090,321 +6376,33 @@
           <a:noFill/>
         </p:spPr>
         <p:txBody>
-          <a:bodyPr wrap="square" lIns="36576" rIns="36576" tIns="36576" bIns="36576">
+          <a:bodyPr wrap="square" lIns="27432" rIns="27432" tIns="18288" bIns="18288">
             <a:spAutoFit/>
           </a:bodyPr>
           <a:lstStyle/>
           <a:p>
             <a:r>
-              <a:rPr sz="2700" b="1">
+              <a:rPr sz="2200" b="1">
                 <a:solidFill>
                   <a:srgbClr val="1B1B2C"/>
                 </a:solidFill>
                 <a:latin typeface="Segoe UI"/>
               </a:rPr>
-              <a:t>03. Same app, different power</a:t>
-            </a:r>
-          </a:p>
-        </p:txBody>
-      </p:sp>
-      <p:sp>
-        <p:nvSpPr>
-          <p:cNvPr id="4" name="TextBox 3"/>
-          <p:cNvSpPr txBox="1"/>
-          <p:nvPr/>
-        </p:nvSpPr>
-        <p:spPr>
-          <a:xfrm>
-            <a:off x="621792" y="1417320"/>
-            <a:ext cx="5120640" cy="3200400"/>
-          </a:xfrm>
-          <a:prstGeom prst="rect">
-            <a:avLst/>
-          </a:prstGeom>
-          <a:noFill/>
-        </p:spPr>
-        <p:txBody>
-          <a:bodyPr wrap="square" lIns="45720" rIns="45720">
-            <a:spAutoFit/>
-          </a:bodyPr>
-          <a:lstStyle/>
-          <a:p>
-            <a:pPr>
-              <a:spcAft>
-                <a:spcPts val="600"/>
-              </a:spcAft>
-            </a:pPr>
-            <a:r>
-              <a:rPr sz="1500">
-                <a:solidFill>
-                  <a:srgbClr val="1B1B2C"/>
-                </a:solidFill>
-                <a:latin typeface="Segoe UI"/>
-              </a:rPr>
-              <a:t>• Excel and Word can use in-app help or deeper ready agents</a:t>
-            </a:r>
-          </a:p>
-          <a:p>
-            <a:pPr>
-              <a:spcAft>
-                <a:spcPts val="600"/>
-              </a:spcAft>
-            </a:pPr>
-            <a:r>
-              <a:rPr sz="1500">
-                <a:solidFill>
-                  <a:srgbClr val="1B1B2C"/>
-                </a:solidFill>
-                <a:latin typeface="Segoe UI"/>
-              </a:rPr>
-              <a:t>• Outlook and Teams can use in-app summaries or Cowork actions</a:t>
-            </a:r>
-          </a:p>
-          <a:p>
-            <a:pPr>
-              <a:spcAft>
-                <a:spcPts val="600"/>
-              </a:spcAft>
-            </a:pPr>
-            <a:r>
-              <a:rPr sz="1500">
-                <a:solidFill>
-                  <a:srgbClr val="1B1B2C"/>
-                </a:solidFill>
-                <a:latin typeface="Segoe UI"/>
-              </a:rPr>
-              <a:t>• PowerPoint can be polished in the app or built by Cowork from a brief</a:t>
-            </a:r>
-          </a:p>
-          <a:p>
-            <a:pPr>
-              <a:spcAft>
-                <a:spcPts val="600"/>
-              </a:spcAft>
-            </a:pPr>
-            <a:r>
-              <a:rPr sz="1500">
-                <a:solidFill>
-                  <a:srgbClr val="1B1B2C"/>
-                </a:solidFill>
-                <a:latin typeface="Segoe UI"/>
-              </a:rPr>
-              <a:t>• Pick by how much heavy lifting you need</a:t>
-            </a:r>
-          </a:p>
-        </p:txBody>
-      </p:sp>
-      <p:sp>
-        <p:nvSpPr>
-          <p:cNvPr id="5" name="Rounded Rectangle 4"/>
+              <a:t>Same app, different power</a:t>
+            </a:r>
+          </a:p>
+        </p:txBody>
+      </p:sp>
+      <p:sp>
+        <p:nvSpPr>
+          <p:cNvPr id="4" name="Rectangle 3"/>
           <p:cNvSpPr/>
           <p:nvPr/>
         </p:nvSpPr>
         <p:spPr>
           <a:xfrm>
-            <a:off x="5806440" y="1508760"/>
-            <a:ext cx="2560320" cy="868680"/>
-          </a:xfrm>
-          <a:prstGeom prst="roundRect">
-            <a:avLst/>
-          </a:prstGeom>
-          <a:solidFill>
-            <a:srgbClr val="FFFFFF"/>
-          </a:solidFill>
-          <a:ln>
-            <a:solidFill>
-              <a:srgbClr val="E6DED4"/>
-            </a:solidFill>
-          </a:ln>
-        </p:spPr>
-        <p:style>
-          <a:lnRef idx="1">
-            <a:schemeClr val="accent1"/>
-          </a:lnRef>
-          <a:fillRef idx="3">
-            <a:schemeClr val="accent1"/>
-          </a:fillRef>
-          <a:effectRef idx="2">
-            <a:schemeClr val="accent1"/>
-          </a:effectRef>
-          <a:fontRef idx="minor">
-            <a:schemeClr val="lt1"/>
-          </a:fontRef>
-        </p:style>
-        <p:txBody>
-          <a:bodyPr rtlCol="0" anchor="ctr"/>
-          <a:lstStyle/>
-          <a:p>
-            <a:pPr algn="ctr"/>
-          </a:p>
-        </p:txBody>
-      </p:sp>
-      <p:sp>
-        <p:nvSpPr>
-          <p:cNvPr id="6" name="Rectangle 5"/>
-          <p:cNvSpPr/>
-          <p:nvPr/>
-        </p:nvSpPr>
-        <p:spPr>
-          <a:xfrm>
-            <a:off x="5806440" y="1508760"/>
-            <a:ext cx="64008" cy="868680"/>
-          </a:xfrm>
-          <a:prstGeom prst="rect">
-            <a:avLst/>
-          </a:prstGeom>
-          <a:solidFill>
-            <a:srgbClr val="0E8E92"/>
-          </a:solidFill>
-          <a:ln>
-            <a:noFill/>
-          </a:ln>
-        </p:spPr>
-        <p:style>
-          <a:lnRef idx="1">
-            <a:schemeClr val="accent1"/>
-          </a:lnRef>
-          <a:fillRef idx="3">
-            <a:schemeClr val="accent1"/>
-          </a:fillRef>
-          <a:effectRef idx="2">
-            <a:schemeClr val="accent1"/>
-          </a:effectRef>
-          <a:fontRef idx="minor">
-            <a:schemeClr val="lt1"/>
-          </a:fontRef>
-        </p:style>
-        <p:txBody>
-          <a:bodyPr rtlCol="0" anchor="ctr"/>
-          <a:lstStyle/>
-          <a:p>
-            <a:pPr algn="ctr"/>
-          </a:p>
-        </p:txBody>
-      </p:sp>
-      <p:sp>
-        <p:nvSpPr>
-          <p:cNvPr id="7" name="TextBox 6"/>
-          <p:cNvSpPr txBox="1"/>
-          <p:nvPr/>
-        </p:nvSpPr>
-        <p:spPr>
-          <a:xfrm>
-            <a:off x="5971031" y="1618488"/>
-            <a:ext cx="2286000" cy="256032"/>
-          </a:xfrm>
-          <a:prstGeom prst="rect">
-            <a:avLst/>
-          </a:prstGeom>
-          <a:noFill/>
-        </p:spPr>
-        <p:txBody>
-          <a:bodyPr wrap="square" lIns="36576" rIns="36576" tIns="36576" bIns="36576">
-            <a:spAutoFit/>
-          </a:bodyPr>
-          <a:lstStyle/>
-          <a:p>
-            <a:r>
-              <a:rPr sz="1300" b="1">
-                <a:solidFill>
-                  <a:srgbClr val="1B1B2C"/>
-                </a:solidFill>
-                <a:latin typeface="Segoe UI"/>
-              </a:rPr>
-              <a:t>Start small</a:t>
-            </a:r>
-          </a:p>
-        </p:txBody>
-      </p:sp>
-      <p:sp>
-        <p:nvSpPr>
-          <p:cNvPr id="8" name="TextBox 7"/>
-          <p:cNvSpPr txBox="1"/>
-          <p:nvPr/>
-        </p:nvSpPr>
-        <p:spPr>
-          <a:xfrm>
-            <a:off x="5971031" y="1947672"/>
-            <a:ext cx="2286000" cy="365759"/>
-          </a:xfrm>
-          <a:prstGeom prst="rect">
-            <a:avLst/>
-          </a:prstGeom>
-          <a:noFill/>
-        </p:spPr>
-        <p:txBody>
-          <a:bodyPr wrap="square" lIns="36576" rIns="36576" tIns="36576" bIns="36576">
-            <a:spAutoFit/>
-          </a:bodyPr>
-          <a:lstStyle/>
-          <a:p>
-            <a:r>
-              <a:rPr sz="1100" b="0">
-                <a:solidFill>
-                  <a:srgbClr val="5F667C"/>
-                </a:solidFill>
-                <a:latin typeface="Segoe UI"/>
-              </a:rPr>
-              <a:t>Use Copilot in chat or the app when that is enough</a:t>
-            </a:r>
-          </a:p>
-        </p:txBody>
-      </p:sp>
-      <p:sp>
-        <p:nvSpPr>
-          <p:cNvPr id="9" name="Rounded Rectangle 8"/>
-          <p:cNvSpPr/>
-          <p:nvPr/>
-        </p:nvSpPr>
-        <p:spPr>
-          <a:xfrm>
-            <a:off x="5806440" y="2606040"/>
-            <a:ext cx="2560320" cy="868680"/>
-          </a:xfrm>
-          <a:prstGeom prst="roundRect">
-            <a:avLst/>
-          </a:prstGeom>
-          <a:solidFill>
-            <a:srgbClr val="FFFFFF"/>
-          </a:solidFill>
-          <a:ln>
-            <a:solidFill>
-              <a:srgbClr val="E6DED4"/>
-            </a:solidFill>
-          </a:ln>
-        </p:spPr>
-        <p:style>
-          <a:lnRef idx="1">
-            <a:schemeClr val="accent1"/>
-          </a:lnRef>
-          <a:fillRef idx="3">
-            <a:schemeClr val="accent1"/>
-          </a:fillRef>
-          <a:effectRef idx="2">
-            <a:schemeClr val="accent1"/>
-          </a:effectRef>
-          <a:fontRef idx="minor">
-            <a:schemeClr val="lt1"/>
-          </a:fontRef>
-        </p:style>
-        <p:txBody>
-          <a:bodyPr rtlCol="0" anchor="ctr"/>
-          <a:lstStyle/>
-          <a:p>
-            <a:pPr algn="ctr"/>
-          </a:p>
-        </p:txBody>
-      </p:sp>
-      <p:sp>
-        <p:nvSpPr>
-          <p:cNvPr id="10" name="Rectangle 9"/>
-          <p:cNvSpPr/>
-          <p:nvPr/>
-        </p:nvSpPr>
-        <p:spPr>
-          <a:xfrm>
-            <a:off x="5806440" y="2606040"/>
-            <a:ext cx="64008" cy="868680"/>
+            <a:off x="502920" y="1115568"/>
+            <a:ext cx="1097280" cy="45720"/>
           </a:xfrm>
           <a:prstGeom prst="rect">
             <a:avLst/>
@@ -5440,14 +6438,14 @@
       </p:sp>
       <p:sp>
         <p:nvSpPr>
-          <p:cNvPr id="11" name="TextBox 10"/>
+          <p:cNvPr id="5" name="TextBox 4"/>
           <p:cNvSpPr txBox="1"/>
           <p:nvPr/>
         </p:nvSpPr>
         <p:spPr>
           <a:xfrm>
-            <a:off x="5971031" y="2715768"/>
-            <a:ext cx="2286000" cy="256032"/>
+            <a:off x="548640" y="1234440"/>
+            <a:ext cx="7955279" cy="411480"/>
           </a:xfrm>
           <a:prstGeom prst="rect">
             <a:avLst/>
@@ -5455,67 +6453,33 @@
           <a:noFill/>
         </p:spPr>
         <p:txBody>
-          <a:bodyPr wrap="square" lIns="36576" rIns="36576" tIns="36576" bIns="36576">
+          <a:bodyPr wrap="square" lIns="27432" rIns="27432" tIns="18288" bIns="18288">
             <a:spAutoFit/>
           </a:bodyPr>
           <a:lstStyle/>
           <a:p>
             <a:r>
-              <a:rPr sz="1300" b="1">
-                <a:solidFill>
-                  <a:srgbClr val="1B1B2C"/>
+              <a:rPr sz="1300" b="0">
+                <a:solidFill>
+                  <a:srgbClr val="5A6078"/>
                 </a:solidFill>
                 <a:latin typeface="Segoe UI"/>
               </a:rPr>
-              <a:t>Scale up</a:t>
-            </a:r>
-          </a:p>
-        </p:txBody>
-      </p:sp>
-      <p:sp>
-        <p:nvSpPr>
-          <p:cNvPr id="12" name="TextBox 11"/>
-          <p:cNvSpPr txBox="1"/>
-          <p:nvPr/>
-        </p:nvSpPr>
-        <p:spPr>
-          <a:xfrm>
-            <a:off x="5971031" y="3044952"/>
-            <a:ext cx="2286000" cy="365759"/>
-          </a:xfrm>
-          <a:prstGeom prst="rect">
-            <a:avLst/>
-          </a:prstGeom>
-          <a:noFill/>
-        </p:spPr>
-        <p:txBody>
-          <a:bodyPr wrap="square" lIns="36576" rIns="36576" tIns="36576" bIns="36576">
-            <a:spAutoFit/>
-          </a:bodyPr>
-          <a:lstStyle/>
-          <a:p>
-            <a:r>
-              <a:rPr sz="1100" b="0">
-                <a:solidFill>
-                  <a:srgbClr val="5F667C"/>
-                </a:solidFill>
-                <a:latin typeface="Segoe UI"/>
-              </a:rPr>
-              <a:t>Bring in ready agents or Cowork as the job grows</a:t>
-            </a:r>
-          </a:p>
-        </p:txBody>
-      </p:sp>
-      <p:sp>
-        <p:nvSpPr>
-          <p:cNvPr id="13" name="Rounded Rectangle 12"/>
+              <a:t>When the work involves an M365 app, you have more than one Copilot option. Some live inside the app, others act on its files and signals from their own surface. Pick by how much heavy lifting you need.</a:t>
+            </a:r>
+          </a:p>
+        </p:txBody>
+      </p:sp>
+      <p:sp>
+        <p:nvSpPr>
+          <p:cNvPr id="6" name="Rounded Rectangle 5"/>
           <p:cNvSpPr/>
           <p:nvPr/>
         </p:nvSpPr>
         <p:spPr>
           <a:xfrm>
-            <a:off x="5806440" y="3703320"/>
-            <a:ext cx="2560320" cy="868680"/>
+            <a:off x="548640" y="1783080"/>
+            <a:ext cx="3886200" cy="2606040"/>
           </a:xfrm>
           <a:prstGeom prst="roundRect">
             <a:avLst/>
@@ -5525,7 +6489,7 @@
           </a:solidFill>
           <a:ln>
             <a:solidFill>
-              <a:srgbClr val="E6DED4"/>
+              <a:srgbClr val="F6F7FB"/>
             </a:solidFill>
           </a:ln>
         </p:spPr>
@@ -5553,14 +6517,141 @@
       </p:sp>
       <p:sp>
         <p:nvSpPr>
-          <p:cNvPr id="14" name="Rectangle 13"/>
+          <p:cNvPr id="7" name="Rectangle 6"/>
           <p:cNvSpPr/>
           <p:nvPr/>
         </p:nvSpPr>
         <p:spPr>
           <a:xfrm>
-            <a:off x="5806440" y="3703320"/>
-            <a:ext cx="64008" cy="868680"/>
+            <a:off x="548640" y="1783080"/>
+            <a:ext cx="3886200" cy="64008"/>
+          </a:xfrm>
+          <a:prstGeom prst="rect">
+            <a:avLst/>
+          </a:prstGeom>
+          <a:solidFill>
+            <a:srgbClr val="1A6FD6"/>
+          </a:solidFill>
+          <a:ln>
+            <a:noFill/>
+          </a:ln>
+        </p:spPr>
+        <p:style>
+          <a:lnRef idx="1">
+            <a:schemeClr val="accent1"/>
+          </a:lnRef>
+          <a:fillRef idx="3">
+            <a:schemeClr val="accent1"/>
+          </a:fillRef>
+          <a:effectRef idx="2">
+            <a:schemeClr val="accent1"/>
+          </a:effectRef>
+          <a:fontRef idx="minor">
+            <a:schemeClr val="lt1"/>
+          </a:fontRef>
+        </p:style>
+        <p:txBody>
+          <a:bodyPr rtlCol="0" anchor="ctr"/>
+          <a:lstStyle/>
+          <a:p>
+            <a:pPr algn="ctr"/>
+          </a:p>
+        </p:txBody>
+      </p:sp>
+      <p:sp>
+        <p:nvSpPr>
+          <p:cNvPr id="8" name="TextBox 7"/>
+          <p:cNvSpPr txBox="1"/>
+          <p:nvPr/>
+        </p:nvSpPr>
+        <p:spPr>
+          <a:xfrm>
+            <a:off x="777240" y="2029968"/>
+            <a:ext cx="3429000" cy="2057400"/>
+          </a:xfrm>
+          <a:prstGeom prst="rect">
+            <a:avLst/>
+          </a:prstGeom>
+          <a:noFill/>
+        </p:spPr>
+        <p:txBody>
+          <a:bodyPr wrap="none" lIns="73152" rIns="73152" tIns="36576">
+            <a:spAutoFit/>
+          </a:bodyPr>
+          <a:lstStyle/>
+          <a:p>
+            <a:pPr>
+              <a:spcAft>
+                <a:spcPts val="500"/>
+              </a:spcAft>
+              <a:defRPr sz="1300">
+                <a:solidFill>
+                  <a:srgbClr val="1B1B2C"/>
+                </a:solidFill>
+                <a:latin typeface="Segoe UI"/>
+              </a:defRPr>
+            </a:pPr>
+            <a:r>
+              <a:t>• Use this page section as the decision checkpoint for the workflow.</a:t>
+            </a:r>
+          </a:p>
+        </p:txBody>
+      </p:sp>
+      <p:sp>
+        <p:nvSpPr>
+          <p:cNvPr id="9" name="Rounded Rectangle 8"/>
+          <p:cNvSpPr/>
+          <p:nvPr/>
+        </p:nvSpPr>
+        <p:spPr>
+          <a:xfrm>
+            <a:off x="4709160" y="1783080"/>
+            <a:ext cx="3886200" cy="2606040"/>
+          </a:xfrm>
+          <a:prstGeom prst="roundRect">
+            <a:avLst/>
+          </a:prstGeom>
+          <a:solidFill>
+            <a:srgbClr val="FFFFFF"/>
+          </a:solidFill>
+          <a:ln>
+            <a:solidFill>
+              <a:srgbClr val="F6F7FB"/>
+            </a:solidFill>
+          </a:ln>
+        </p:spPr>
+        <p:style>
+          <a:lnRef idx="1">
+            <a:schemeClr val="accent1"/>
+          </a:lnRef>
+          <a:fillRef idx="3">
+            <a:schemeClr val="accent1"/>
+          </a:fillRef>
+          <a:effectRef idx="2">
+            <a:schemeClr val="accent1"/>
+          </a:effectRef>
+          <a:fontRef idx="minor">
+            <a:schemeClr val="lt1"/>
+          </a:fontRef>
+        </p:style>
+        <p:txBody>
+          <a:bodyPr rtlCol="0" anchor="ctr"/>
+          <a:lstStyle/>
+          <a:p>
+            <a:pPr algn="ctr"/>
+          </a:p>
+        </p:txBody>
+      </p:sp>
+      <p:sp>
+        <p:nvSpPr>
+          <p:cNvPr id="10" name="Rectangle 9"/>
+          <p:cNvSpPr/>
+          <p:nvPr/>
+        </p:nvSpPr>
+        <p:spPr>
+          <a:xfrm>
+            <a:off x="4709160" y="1783080"/>
+            <a:ext cx="3886200" cy="64008"/>
           </a:xfrm>
           <a:prstGeom prst="rect">
             <a:avLst/>
@@ -5596,14 +6687,14 @@
       </p:sp>
       <p:sp>
         <p:nvSpPr>
-          <p:cNvPr id="15" name="TextBox 14"/>
+          <p:cNvPr id="11" name="TextBox 10"/>
           <p:cNvSpPr txBox="1"/>
           <p:nvPr/>
         </p:nvSpPr>
         <p:spPr>
           <a:xfrm>
-            <a:off x="5971031" y="3813048"/>
-            <a:ext cx="2286000" cy="256032"/>
+            <a:off x="4983480" y="2057400"/>
+            <a:ext cx="3108960" cy="274320"/>
           </a:xfrm>
           <a:prstGeom prst="rect">
             <a:avLst/>
@@ -5611,33 +6702,33 @@
           <a:noFill/>
         </p:spPr>
         <p:txBody>
-          <a:bodyPr wrap="square" lIns="36576" rIns="36576" tIns="36576" bIns="36576">
+          <a:bodyPr wrap="square" lIns="27432" rIns="27432" tIns="18288" bIns="18288">
             <a:spAutoFit/>
           </a:bodyPr>
           <a:lstStyle/>
           <a:p>
             <a:r>
-              <a:rPr sz="1300" b="1">
+              <a:rPr sz="1500" b="1">
                 <a:solidFill>
                   <a:srgbClr val="1B1B2C"/>
                 </a:solidFill>
                 <a:latin typeface="Segoe UI"/>
               </a:rPr>
-              <a:t>Stay in control</a:t>
-            </a:r>
-          </a:p>
-        </p:txBody>
-      </p:sp>
-      <p:sp>
-        <p:nvSpPr>
-          <p:cNvPr id="16" name="TextBox 15"/>
+              <a:t>Key takeaway</a:t>
+            </a:r>
+          </a:p>
+        </p:txBody>
+      </p:sp>
+      <p:sp>
+        <p:nvSpPr>
+          <p:cNvPr id="12" name="TextBox 11"/>
           <p:cNvSpPr txBox="1"/>
           <p:nvPr/>
         </p:nvSpPr>
         <p:spPr>
           <a:xfrm>
-            <a:off x="5971031" y="4142231"/>
-            <a:ext cx="2286000" cy="365759"/>
+            <a:off x="4983480" y="2514600"/>
+            <a:ext cx="3017520" cy="731520"/>
           </a:xfrm>
           <a:prstGeom prst="rect">
             <a:avLst/>
@@ -5645,19 +6736,19 @@
           <a:noFill/>
         </p:spPr>
         <p:txBody>
-          <a:bodyPr wrap="square" lIns="36576" rIns="36576" tIns="36576" bIns="36576">
+          <a:bodyPr wrap="square" lIns="27432" rIns="27432" tIns="18288" bIns="18288">
             <a:spAutoFit/>
           </a:bodyPr>
           <a:lstStyle/>
           <a:p>
             <a:r>
-              <a:rPr sz="1100" b="0">
-                <a:solidFill>
-                  <a:srgbClr val="5F667C"/>
+              <a:rPr sz="1400" b="0">
+                <a:solidFill>
+                  <a:srgbClr val="5A6078"/>
                 </a:solidFill>
                 <a:latin typeface="Segoe UI"/>
               </a:rPr>
-              <a:t>Keep approvals clear when actions are involved</a:t>
+              <a:t>Pick the simplest Copilot surface that can finish the job with the right level of control.</a:t>
             </a:r>
           </a:p>
         </p:txBody>
@@ -5676,7 +6767,7 @@
     <p:bg>
       <p:bgPr>
         <a:solidFill>
-          <a:srgbClr val="FBF7F2"/>
+          <a:srgbClr val="FFFAF5"/>
         </a:solidFill>
         <a:effectLst/>
       </p:bgPr>
@@ -5696,8 +6787,8 @@
         </p:nvSpPr>
         <p:spPr>
           <a:xfrm>
-            <a:off x="502920" y="320040"/>
-            <a:ext cx="1828800" cy="274320"/>
+            <a:off x="502920" y="228600"/>
+            <a:ext cx="6400800" cy="228600"/>
           </a:xfrm>
           <a:prstGeom prst="rect">
             <a:avLst/>
@@ -5705,19 +6796,19 @@
           <a:noFill/>
         </p:spPr>
         <p:txBody>
-          <a:bodyPr wrap="square" lIns="36576" rIns="36576" tIns="36576" bIns="36576">
+          <a:bodyPr wrap="square" lIns="27432" rIns="27432" tIns="18288" bIns="18288">
             <a:spAutoFit/>
           </a:bodyPr>
           <a:lstStyle/>
           <a:p>
             <a:r>
-              <a:rPr sz="1200" b="1">
-                <a:solidFill>
-                  <a:srgbClr val="0E8E92"/>
+              <a:rPr sz="900" b="1">
+                <a:solidFill>
+                  <a:srgbClr val="5A6078"/>
                 </a:solidFill>
                 <a:latin typeface="Segoe UI"/>
               </a:rPr>
-              <a:t>Section 04</a:t>
+              <a:t>SECTION 04</a:t>
             </a:r>
           </a:p>
         </p:txBody>
@@ -5730,8 +6821,8 @@
         </p:nvSpPr>
         <p:spPr>
           <a:xfrm>
-            <a:off x="502920" y="658368"/>
-            <a:ext cx="7863840" cy="594360"/>
+            <a:off x="502920" y="438912"/>
+            <a:ext cx="7955279" cy="658368"/>
           </a:xfrm>
           <a:prstGeom prst="rect">
             <a:avLst/>
@@ -5739,321 +6830,33 @@
           <a:noFill/>
         </p:spPr>
         <p:txBody>
-          <a:bodyPr wrap="square" lIns="36576" rIns="36576" tIns="36576" bIns="36576">
+          <a:bodyPr wrap="square" lIns="27432" rIns="27432" tIns="18288" bIns="18288">
             <a:spAutoFit/>
           </a:bodyPr>
           <a:lstStyle/>
           <a:p>
             <a:r>
-              <a:rPr sz="2700" b="1">
+              <a:rPr sz="2200" b="1">
                 <a:solidFill>
                   <a:srgbClr val="1B1B2C"/>
                 </a:solidFill>
                 <a:latin typeface="Segoe UI"/>
               </a:rPr>
-              <a:t>04. Ask Cowork well</a:t>
-            </a:r>
-          </a:p>
-        </p:txBody>
-      </p:sp>
-      <p:sp>
-        <p:nvSpPr>
-          <p:cNvPr id="4" name="TextBox 3"/>
-          <p:cNvSpPr txBox="1"/>
-          <p:nvPr/>
-        </p:nvSpPr>
-        <p:spPr>
-          <a:xfrm>
-            <a:off x="621792" y="1417320"/>
-            <a:ext cx="5120640" cy="3200400"/>
-          </a:xfrm>
-          <a:prstGeom prst="rect">
-            <a:avLst/>
-          </a:prstGeom>
-          <a:noFill/>
-        </p:spPr>
-        <p:txBody>
-          <a:bodyPr wrap="square" lIns="45720" rIns="45720">
-            <a:spAutoFit/>
-          </a:bodyPr>
-          <a:lstStyle/>
-          <a:p>
-            <a:pPr>
-              <a:spcAft>
-                <a:spcPts val="600"/>
-              </a:spcAft>
-            </a:pPr>
-            <a:r>
-              <a:rPr sz="1500">
-                <a:solidFill>
-                  <a:srgbClr val="1B1B2C"/>
-                </a:solidFill>
-                <a:latin typeface="Segoe UI"/>
-              </a:rPr>
-              <a:t>• Give Cowork the outcome, inputs, and definition of done</a:t>
-            </a:r>
-          </a:p>
-          <a:p>
-            <a:pPr>
-              <a:spcAft>
-                <a:spcPts val="600"/>
-              </a:spcAft>
-            </a:pPr>
-            <a:r>
-              <a:rPr sz="1500">
-                <a:solidFill>
-                  <a:srgbClr val="1B1B2C"/>
-                </a:solidFill>
-                <a:latin typeface="Segoe UI"/>
-              </a:rPr>
-              <a:t>• Add constraints like audience, template, or length</a:t>
-            </a:r>
-          </a:p>
-          <a:p>
-            <a:pPr>
-              <a:spcAft>
-                <a:spcPts val="600"/>
-              </a:spcAft>
-            </a:pPr>
-            <a:r>
-              <a:rPr sz="1500">
-                <a:solidFill>
-                  <a:srgbClr val="1B1B2C"/>
-                </a:solidFill>
-                <a:latin typeface="Segoe UI"/>
-              </a:rPr>
-              <a:t>• Be clear about approval scope</a:t>
-            </a:r>
-          </a:p>
-          <a:p>
-            <a:pPr>
-              <a:spcAft>
-                <a:spcPts val="600"/>
-              </a:spcAft>
-            </a:pPr>
-            <a:r>
-              <a:rPr sz="1500">
-                <a:solidFill>
-                  <a:srgbClr val="1B1B2C"/>
-                </a:solidFill>
-                <a:latin typeface="Segoe UI"/>
-              </a:rPr>
-              <a:t>• A precise prompt reduces guessing</a:t>
-            </a:r>
-          </a:p>
-        </p:txBody>
-      </p:sp>
-      <p:sp>
-        <p:nvSpPr>
-          <p:cNvPr id="5" name="Rounded Rectangle 4"/>
+              <a:t>How to ask Cowork well</a:t>
+            </a:r>
+          </a:p>
+        </p:txBody>
+      </p:sp>
+      <p:sp>
+        <p:nvSpPr>
+          <p:cNvPr id="4" name="Rectangle 3"/>
           <p:cNvSpPr/>
           <p:nvPr/>
         </p:nvSpPr>
         <p:spPr>
           <a:xfrm>
-            <a:off x="5806440" y="1508760"/>
-            <a:ext cx="2560320" cy="868680"/>
-          </a:xfrm>
-          <a:prstGeom prst="roundRect">
-            <a:avLst/>
-          </a:prstGeom>
-          <a:solidFill>
-            <a:srgbClr val="FFFFFF"/>
-          </a:solidFill>
-          <a:ln>
-            <a:solidFill>
-              <a:srgbClr val="E6DED4"/>
-            </a:solidFill>
-          </a:ln>
-        </p:spPr>
-        <p:style>
-          <a:lnRef idx="1">
-            <a:schemeClr val="accent1"/>
-          </a:lnRef>
-          <a:fillRef idx="3">
-            <a:schemeClr val="accent1"/>
-          </a:fillRef>
-          <a:effectRef idx="2">
-            <a:schemeClr val="accent1"/>
-          </a:effectRef>
-          <a:fontRef idx="minor">
-            <a:schemeClr val="lt1"/>
-          </a:fontRef>
-        </p:style>
-        <p:txBody>
-          <a:bodyPr rtlCol="0" anchor="ctr"/>
-          <a:lstStyle/>
-          <a:p>
-            <a:pPr algn="ctr"/>
-          </a:p>
-        </p:txBody>
-      </p:sp>
-      <p:sp>
-        <p:nvSpPr>
-          <p:cNvPr id="6" name="Rectangle 5"/>
-          <p:cNvSpPr/>
-          <p:nvPr/>
-        </p:nvSpPr>
-        <p:spPr>
-          <a:xfrm>
-            <a:off x="5806440" y="1508760"/>
-            <a:ext cx="64008" cy="868680"/>
-          </a:xfrm>
-          <a:prstGeom prst="rect">
-            <a:avLst/>
-          </a:prstGeom>
-          <a:solidFill>
-            <a:srgbClr val="0E8E92"/>
-          </a:solidFill>
-          <a:ln>
-            <a:noFill/>
-          </a:ln>
-        </p:spPr>
-        <p:style>
-          <a:lnRef idx="1">
-            <a:schemeClr val="accent1"/>
-          </a:lnRef>
-          <a:fillRef idx="3">
-            <a:schemeClr val="accent1"/>
-          </a:fillRef>
-          <a:effectRef idx="2">
-            <a:schemeClr val="accent1"/>
-          </a:effectRef>
-          <a:fontRef idx="minor">
-            <a:schemeClr val="lt1"/>
-          </a:fontRef>
-        </p:style>
-        <p:txBody>
-          <a:bodyPr rtlCol="0" anchor="ctr"/>
-          <a:lstStyle/>
-          <a:p>
-            <a:pPr algn="ctr"/>
-          </a:p>
-        </p:txBody>
-      </p:sp>
-      <p:sp>
-        <p:nvSpPr>
-          <p:cNvPr id="7" name="TextBox 6"/>
-          <p:cNvSpPr txBox="1"/>
-          <p:nvPr/>
-        </p:nvSpPr>
-        <p:spPr>
-          <a:xfrm>
-            <a:off x="5971031" y="1618488"/>
-            <a:ext cx="2286000" cy="256032"/>
-          </a:xfrm>
-          <a:prstGeom prst="rect">
-            <a:avLst/>
-          </a:prstGeom>
-          <a:noFill/>
-        </p:spPr>
-        <p:txBody>
-          <a:bodyPr wrap="square" lIns="36576" rIns="36576" tIns="36576" bIns="36576">
-            <a:spAutoFit/>
-          </a:bodyPr>
-          <a:lstStyle/>
-          <a:p>
-            <a:r>
-              <a:rPr sz="1300" b="1">
-                <a:solidFill>
-                  <a:srgbClr val="1B1B2C"/>
-                </a:solidFill>
-                <a:latin typeface="Segoe UI"/>
-              </a:rPr>
-              <a:t>Start small</a:t>
-            </a:r>
-          </a:p>
-        </p:txBody>
-      </p:sp>
-      <p:sp>
-        <p:nvSpPr>
-          <p:cNvPr id="8" name="TextBox 7"/>
-          <p:cNvSpPr txBox="1"/>
-          <p:nvPr/>
-        </p:nvSpPr>
-        <p:spPr>
-          <a:xfrm>
-            <a:off x="5971031" y="1947672"/>
-            <a:ext cx="2286000" cy="365759"/>
-          </a:xfrm>
-          <a:prstGeom prst="rect">
-            <a:avLst/>
-          </a:prstGeom>
-          <a:noFill/>
-        </p:spPr>
-        <p:txBody>
-          <a:bodyPr wrap="square" lIns="36576" rIns="36576" tIns="36576" bIns="36576">
-            <a:spAutoFit/>
-          </a:bodyPr>
-          <a:lstStyle/>
-          <a:p>
-            <a:r>
-              <a:rPr sz="1100" b="0">
-                <a:solidFill>
-                  <a:srgbClr val="5F667C"/>
-                </a:solidFill>
-                <a:latin typeface="Segoe UI"/>
-              </a:rPr>
-              <a:t>Use Copilot in chat or the app when that is enough</a:t>
-            </a:r>
-          </a:p>
-        </p:txBody>
-      </p:sp>
-      <p:sp>
-        <p:nvSpPr>
-          <p:cNvPr id="9" name="Rounded Rectangle 8"/>
-          <p:cNvSpPr/>
-          <p:nvPr/>
-        </p:nvSpPr>
-        <p:spPr>
-          <a:xfrm>
-            <a:off x="5806440" y="2606040"/>
-            <a:ext cx="2560320" cy="868680"/>
-          </a:xfrm>
-          <a:prstGeom prst="roundRect">
-            <a:avLst/>
-          </a:prstGeom>
-          <a:solidFill>
-            <a:srgbClr val="FFFFFF"/>
-          </a:solidFill>
-          <a:ln>
-            <a:solidFill>
-              <a:srgbClr val="E6DED4"/>
-            </a:solidFill>
-          </a:ln>
-        </p:spPr>
-        <p:style>
-          <a:lnRef idx="1">
-            <a:schemeClr val="accent1"/>
-          </a:lnRef>
-          <a:fillRef idx="3">
-            <a:schemeClr val="accent1"/>
-          </a:fillRef>
-          <a:effectRef idx="2">
-            <a:schemeClr val="accent1"/>
-          </a:effectRef>
-          <a:fontRef idx="minor">
-            <a:schemeClr val="lt1"/>
-          </a:fontRef>
-        </p:style>
-        <p:txBody>
-          <a:bodyPr rtlCol="0" anchor="ctr"/>
-          <a:lstStyle/>
-          <a:p>
-            <a:pPr algn="ctr"/>
-          </a:p>
-        </p:txBody>
-      </p:sp>
-      <p:sp>
-        <p:nvSpPr>
-          <p:cNvPr id="10" name="Rectangle 9"/>
-          <p:cNvSpPr/>
-          <p:nvPr/>
-        </p:nvSpPr>
-        <p:spPr>
-          <a:xfrm>
-            <a:off x="5806440" y="2606040"/>
-            <a:ext cx="64008" cy="868680"/>
+            <a:off x="502920" y="1115568"/>
+            <a:ext cx="1097280" cy="45720"/>
           </a:xfrm>
           <a:prstGeom prst="rect">
             <a:avLst/>
@@ -6089,14 +6892,14 @@
       </p:sp>
       <p:sp>
         <p:nvSpPr>
-          <p:cNvPr id="11" name="TextBox 10"/>
+          <p:cNvPr id="5" name="TextBox 4"/>
           <p:cNvSpPr txBox="1"/>
           <p:nvPr/>
         </p:nvSpPr>
         <p:spPr>
           <a:xfrm>
-            <a:off x="5971031" y="2715768"/>
-            <a:ext cx="2286000" cy="256032"/>
+            <a:off x="548640" y="1234440"/>
+            <a:ext cx="7955279" cy="411480"/>
           </a:xfrm>
           <a:prstGeom prst="rect">
             <a:avLst/>
@@ -6104,67 +6907,33 @@
           <a:noFill/>
         </p:spPr>
         <p:txBody>
-          <a:bodyPr wrap="square" lIns="36576" rIns="36576" tIns="36576" bIns="36576">
+          <a:bodyPr wrap="square" lIns="27432" rIns="27432" tIns="18288" bIns="18288">
             <a:spAutoFit/>
           </a:bodyPr>
           <a:lstStyle/>
           <a:p>
             <a:r>
-              <a:rPr sz="1300" b="1">
-                <a:solidFill>
-                  <a:srgbClr val="1B1B2C"/>
+              <a:rPr sz="1300" b="0">
+                <a:solidFill>
+                  <a:srgbClr val="5A6078"/>
                 </a:solidFill>
                 <a:latin typeface="Segoe UI"/>
               </a:rPr>
-              <a:t>Scale up</a:t>
-            </a:r>
-          </a:p>
-        </p:txBody>
-      </p:sp>
-      <p:sp>
-        <p:nvSpPr>
-          <p:cNvPr id="12" name="TextBox 11"/>
-          <p:cNvSpPr txBox="1"/>
-          <p:nvPr/>
-        </p:nvSpPr>
-        <p:spPr>
-          <a:xfrm>
-            <a:off x="5971031" y="3044952"/>
-            <a:ext cx="2286000" cy="365759"/>
-          </a:xfrm>
-          <a:prstGeom prst="rect">
-            <a:avLst/>
-          </a:prstGeom>
-          <a:noFill/>
-        </p:spPr>
-        <p:txBody>
-          <a:bodyPr wrap="square" lIns="36576" rIns="36576" tIns="36576" bIns="36576">
-            <a:spAutoFit/>
-          </a:bodyPr>
-          <a:lstStyle/>
-          <a:p>
-            <a:r>
-              <a:rPr sz="1100" b="0">
-                <a:solidFill>
-                  <a:srgbClr val="5F667C"/>
-                </a:solidFill>
-                <a:latin typeface="Segoe UI"/>
-              </a:rPr>
-              <a:t>Bring in ready agents or Cowork as the job grows</a:t>
-            </a:r>
-          </a:p>
-        </p:txBody>
-      </p:sp>
-      <p:sp>
-        <p:nvSpPr>
-          <p:cNvPr id="13" name="Rounded Rectangle 12"/>
+              <a:t>A vague prompt forces Cowork to guess. Five small parts make the difference.</a:t>
+            </a:r>
+          </a:p>
+        </p:txBody>
+      </p:sp>
+      <p:sp>
+        <p:nvSpPr>
+          <p:cNvPr id="6" name="Rounded Rectangle 5"/>
           <p:cNvSpPr/>
           <p:nvPr/>
         </p:nvSpPr>
         <p:spPr>
           <a:xfrm>
-            <a:off x="5806440" y="3703320"/>
-            <a:ext cx="2560320" cy="868680"/>
+            <a:off x="548640" y="1783080"/>
+            <a:ext cx="3886200" cy="2606040"/>
           </a:xfrm>
           <a:prstGeom prst="roundRect">
             <a:avLst/>
@@ -6174,7 +6943,7 @@
           </a:solidFill>
           <a:ln>
             <a:solidFill>
-              <a:srgbClr val="E6DED4"/>
+              <a:srgbClr val="F6F7FB"/>
             </a:solidFill>
           </a:ln>
         </p:spPr>
@@ -6202,14 +6971,157 @@
       </p:sp>
       <p:sp>
         <p:nvSpPr>
-          <p:cNvPr id="14" name="Rectangle 13"/>
+          <p:cNvPr id="7" name="Rectangle 6"/>
           <p:cNvSpPr/>
           <p:nvPr/>
         </p:nvSpPr>
         <p:spPr>
           <a:xfrm>
-            <a:off x="5806440" y="3703320"/>
-            <a:ext cx="64008" cy="868680"/>
+            <a:off x="548640" y="1783080"/>
+            <a:ext cx="3886200" cy="64008"/>
+          </a:xfrm>
+          <a:prstGeom prst="rect">
+            <a:avLst/>
+          </a:prstGeom>
+          <a:solidFill>
+            <a:srgbClr val="1A6FD6"/>
+          </a:solidFill>
+          <a:ln>
+            <a:noFill/>
+          </a:ln>
+        </p:spPr>
+        <p:style>
+          <a:lnRef idx="1">
+            <a:schemeClr val="accent1"/>
+          </a:lnRef>
+          <a:fillRef idx="3">
+            <a:schemeClr val="accent1"/>
+          </a:fillRef>
+          <a:effectRef idx="2">
+            <a:schemeClr val="accent1"/>
+          </a:effectRef>
+          <a:fontRef idx="minor">
+            <a:schemeClr val="lt1"/>
+          </a:fontRef>
+        </p:style>
+        <p:txBody>
+          <a:bodyPr rtlCol="0" anchor="ctr"/>
+          <a:lstStyle/>
+          <a:p>
+            <a:pPr algn="ctr"/>
+          </a:p>
+        </p:txBody>
+      </p:sp>
+      <p:sp>
+        <p:nvSpPr>
+          <p:cNvPr id="8" name="TextBox 7"/>
+          <p:cNvSpPr txBox="1"/>
+          <p:nvPr/>
+        </p:nvSpPr>
+        <p:spPr>
+          <a:xfrm>
+            <a:off x="777240" y="2029968"/>
+            <a:ext cx="3429000" cy="2057400"/>
+          </a:xfrm>
+          <a:prstGeom prst="rect">
+            <a:avLst/>
+          </a:prstGeom>
+          <a:noFill/>
+        </p:spPr>
+        <p:txBody>
+          <a:bodyPr wrap="none" lIns="73152" rIns="73152" tIns="36576">
+            <a:spAutoFit/>
+          </a:bodyPr>
+          <a:lstStyle/>
+          <a:p>
+            <a:pPr>
+              <a:spcAft>
+                <a:spcPts val="500"/>
+              </a:spcAft>
+              <a:defRPr sz="1300">
+                <a:solidFill>
+                  <a:srgbClr val="1B1B2C"/>
+                </a:solidFill>
+                <a:latin typeface="Segoe UI"/>
+              </a:defRPr>
+            </a:pPr>
+            <a:r>
+              <a:t>• A vague prompt forces Cowork to guess. Five small parts make the difference.</a:t>
+            </a:r>
+          </a:p>
+          <a:p>
+            <a:pPr>
+              <a:spcAft>
+                <a:spcPts val="500"/>
+              </a:spcAft>
+              <a:defRPr sz="1300">
+                <a:solidFill>
+                  <a:srgbClr val="1B1B2C"/>
+                </a:solidFill>
+                <a:latin typeface="Segoe UI"/>
+              </a:defRPr>
+            </a:pPr>
+            <a:r>
+              <a:t>• "Help me prep for my offsite next week."</a:t>
+            </a:r>
+          </a:p>
+        </p:txBody>
+      </p:sp>
+      <p:sp>
+        <p:nvSpPr>
+          <p:cNvPr id="9" name="Rounded Rectangle 8"/>
+          <p:cNvSpPr/>
+          <p:nvPr/>
+        </p:nvSpPr>
+        <p:spPr>
+          <a:xfrm>
+            <a:off x="4709160" y="1783080"/>
+            <a:ext cx="3886200" cy="2606040"/>
+          </a:xfrm>
+          <a:prstGeom prst="roundRect">
+            <a:avLst/>
+          </a:prstGeom>
+          <a:solidFill>
+            <a:srgbClr val="FFFFFF"/>
+          </a:solidFill>
+          <a:ln>
+            <a:solidFill>
+              <a:srgbClr val="F6F7FB"/>
+            </a:solidFill>
+          </a:ln>
+        </p:spPr>
+        <p:style>
+          <a:lnRef idx="1">
+            <a:schemeClr val="accent1"/>
+          </a:lnRef>
+          <a:fillRef idx="3">
+            <a:schemeClr val="accent1"/>
+          </a:fillRef>
+          <a:effectRef idx="2">
+            <a:schemeClr val="accent1"/>
+          </a:effectRef>
+          <a:fontRef idx="minor">
+            <a:schemeClr val="lt1"/>
+          </a:fontRef>
+        </p:style>
+        <p:txBody>
+          <a:bodyPr rtlCol="0" anchor="ctr"/>
+          <a:lstStyle/>
+          <a:p>
+            <a:pPr algn="ctr"/>
+          </a:p>
+        </p:txBody>
+      </p:sp>
+      <p:sp>
+        <p:nvSpPr>
+          <p:cNvPr id="10" name="Rectangle 9"/>
+          <p:cNvSpPr/>
+          <p:nvPr/>
+        </p:nvSpPr>
+        <p:spPr>
+          <a:xfrm>
+            <a:off x="4709160" y="1783080"/>
+            <a:ext cx="3886200" cy="64008"/>
           </a:xfrm>
           <a:prstGeom prst="rect">
             <a:avLst/>
@@ -6245,14 +7157,14 @@
       </p:sp>
       <p:sp>
         <p:nvSpPr>
-          <p:cNvPr id="15" name="TextBox 14"/>
+          <p:cNvPr id="11" name="TextBox 10"/>
           <p:cNvSpPr txBox="1"/>
           <p:nvPr/>
         </p:nvSpPr>
         <p:spPr>
           <a:xfrm>
-            <a:off x="5971031" y="3813048"/>
-            <a:ext cx="2286000" cy="256032"/>
+            <a:off x="4983480" y="2057400"/>
+            <a:ext cx="3108960" cy="274320"/>
           </a:xfrm>
           <a:prstGeom prst="rect">
             <a:avLst/>
@@ -6260,33 +7172,33 @@
           <a:noFill/>
         </p:spPr>
         <p:txBody>
-          <a:bodyPr wrap="square" lIns="36576" rIns="36576" tIns="36576" bIns="36576">
+          <a:bodyPr wrap="square" lIns="27432" rIns="27432" tIns="18288" bIns="18288">
             <a:spAutoFit/>
           </a:bodyPr>
           <a:lstStyle/>
           <a:p>
             <a:r>
-              <a:rPr sz="1300" b="1">
+              <a:rPr sz="1500" b="1">
                 <a:solidFill>
                   <a:srgbClr val="1B1B2C"/>
                 </a:solidFill>
                 <a:latin typeface="Segoe UI"/>
               </a:rPr>
-              <a:t>Stay in control</a:t>
-            </a:r>
-          </a:p>
-        </p:txBody>
-      </p:sp>
-      <p:sp>
-        <p:nvSpPr>
-          <p:cNvPr id="16" name="TextBox 15"/>
+              <a:t>Key takeaway</a:t>
+            </a:r>
+          </a:p>
+        </p:txBody>
+      </p:sp>
+      <p:sp>
+        <p:nvSpPr>
+          <p:cNvPr id="12" name="TextBox 11"/>
           <p:cNvSpPr txBox="1"/>
           <p:nvPr/>
         </p:nvSpPr>
         <p:spPr>
           <a:xfrm>
-            <a:off x="5971031" y="4142231"/>
-            <a:ext cx="2286000" cy="365759"/>
+            <a:off x="4983480" y="2514600"/>
+            <a:ext cx="3017520" cy="731520"/>
           </a:xfrm>
           <a:prstGeom prst="rect">
             <a:avLst/>
@@ -6294,19 +7206,19 @@
           <a:noFill/>
         </p:spPr>
         <p:txBody>
-          <a:bodyPr wrap="square" lIns="36576" rIns="36576" tIns="36576" bIns="36576">
+          <a:bodyPr wrap="square" lIns="27432" rIns="27432" tIns="18288" bIns="18288">
             <a:spAutoFit/>
           </a:bodyPr>
           <a:lstStyle/>
           <a:p>
             <a:r>
-              <a:rPr sz="1100" b="0">
-                <a:solidFill>
-                  <a:srgbClr val="5F667C"/>
+              <a:rPr sz="1400" b="0">
+                <a:solidFill>
+                  <a:srgbClr val="5A6078"/>
                 </a:solidFill>
                 <a:latin typeface="Segoe UI"/>
               </a:rPr>
-              <a:t>Keep approvals clear when actions are involved</a:t>
+              <a:t>Pick the simplest Copilot surface that can finish the job with the right level of control.</a:t>
             </a:r>
           </a:p>
         </p:txBody>
@@ -6325,7 +7237,7 @@
     <p:bg>
       <p:bgPr>
         <a:solidFill>
-          <a:srgbClr val="FBF7F2"/>
+          <a:srgbClr val="FFFAF5"/>
         </a:solidFill>
         <a:effectLst/>
       </p:bgPr>
@@ -6345,8 +7257,8 @@
         </p:nvSpPr>
         <p:spPr>
           <a:xfrm>
-            <a:off x="502920" y="320040"/>
-            <a:ext cx="1828800" cy="274320"/>
+            <a:off x="502920" y="228600"/>
+            <a:ext cx="6400800" cy="228600"/>
           </a:xfrm>
           <a:prstGeom prst="rect">
             <a:avLst/>
@@ -6354,19 +7266,19 @@
           <a:noFill/>
         </p:spPr>
         <p:txBody>
-          <a:bodyPr wrap="square" lIns="36576" rIns="36576" tIns="36576" bIns="36576">
+          <a:bodyPr wrap="square" lIns="27432" rIns="27432" tIns="18288" bIns="18288">
             <a:spAutoFit/>
           </a:bodyPr>
           <a:lstStyle/>
           <a:p>
             <a:r>
-              <a:rPr sz="1200" b="1">
-                <a:solidFill>
-                  <a:srgbClr val="0E8E92"/>
+              <a:rPr sz="900" b="1">
+                <a:solidFill>
+                  <a:srgbClr val="5A6078"/>
                 </a:solidFill>
                 <a:latin typeface="Segoe UI"/>
               </a:rPr>
-              <a:t>Section 05</a:t>
+              <a:t>SECTION 05</a:t>
             </a:r>
           </a:p>
         </p:txBody>
@@ -6379,8 +7291,8 @@
         </p:nvSpPr>
         <p:spPr>
           <a:xfrm>
-            <a:off x="502920" y="658368"/>
-            <a:ext cx="7863840" cy="594360"/>
+            <a:off x="502920" y="438912"/>
+            <a:ext cx="7955279" cy="658368"/>
           </a:xfrm>
           <a:prstGeom prst="rect">
             <a:avLst/>
@@ -6388,321 +7300,33 @@
           <a:noFill/>
         </p:spPr>
         <p:txBody>
-          <a:bodyPr wrap="square" lIns="36576" rIns="36576" tIns="36576" bIns="36576">
+          <a:bodyPr wrap="square" lIns="27432" rIns="27432" tIns="18288" bIns="18288">
             <a:spAutoFit/>
           </a:bodyPr>
           <a:lstStyle/>
           <a:p>
             <a:r>
-              <a:rPr sz="2700" b="1">
+              <a:rPr sz="2200" b="1">
                 <a:solidFill>
                   <a:srgbClr val="1B1B2C"/>
                 </a:solidFill>
                 <a:latin typeface="Segoe UI"/>
               </a:rPr>
-              <a:t>05. Scenarios by department</a:t>
-            </a:r>
-          </a:p>
-        </p:txBody>
-      </p:sp>
-      <p:sp>
-        <p:nvSpPr>
-          <p:cNvPr id="4" name="TextBox 3"/>
-          <p:cNvSpPr txBox="1"/>
-          <p:nvPr/>
-        </p:nvSpPr>
-        <p:spPr>
-          <a:xfrm>
-            <a:off x="621792" y="1417320"/>
-            <a:ext cx="5120640" cy="3200400"/>
-          </a:xfrm>
-          <a:prstGeom prst="rect">
-            <a:avLst/>
-          </a:prstGeom>
-          <a:noFill/>
-        </p:spPr>
-        <p:txBody>
-          <a:bodyPr wrap="square" lIns="45720" rIns="45720">
-            <a:spAutoFit/>
-          </a:bodyPr>
-          <a:lstStyle/>
-          <a:p>
-            <a:pPr>
-              <a:spcAft>
-                <a:spcPts val="600"/>
-              </a:spcAft>
-            </a:pPr>
-            <a:r>
-              <a:rPr sz="1500">
-                <a:solidFill>
-                  <a:srgbClr val="1B1B2C"/>
-                </a:solidFill>
-                <a:latin typeface="Segoe UI"/>
-              </a:rPr>
-              <a:t>• Sales and finance often start in open files</a:t>
-            </a:r>
-          </a:p>
-          <a:p>
-            <a:pPr>
-              <a:spcAft>
-                <a:spcPts val="600"/>
-              </a:spcAft>
-            </a:pPr>
-            <a:r>
-              <a:rPr sz="1500">
-                <a:solidFill>
-                  <a:srgbClr val="1B1B2C"/>
-                </a:solidFill>
-                <a:latin typeface="Segoe UI"/>
-              </a:rPr>
-              <a:t>• Marketing and procurement often benefit from Cowork deliverables</a:t>
-            </a:r>
-          </a:p>
-          <a:p>
-            <a:pPr>
-              <a:spcAft>
-                <a:spcPts val="600"/>
-              </a:spcAft>
-            </a:pPr>
-            <a:r>
-              <a:rPr sz="1500">
-                <a:solidFill>
-                  <a:srgbClr val="1B1B2C"/>
-                </a:solidFill>
-                <a:latin typeface="Segoe UI"/>
-              </a:rPr>
-              <a:t>• Legal uses in-app Copilot for redlines and Researcher for context</a:t>
-            </a:r>
-          </a:p>
-          <a:p>
-            <a:pPr>
-              <a:spcAft>
-                <a:spcPts val="600"/>
-              </a:spcAft>
-            </a:pPr>
-            <a:r>
-              <a:rPr sz="1500">
-                <a:solidFill>
-                  <a:srgbClr val="1B1B2C"/>
-                </a:solidFill>
-                <a:latin typeface="Segoe UI"/>
-              </a:rPr>
-              <a:t>• The tools can work together across a flow</a:t>
-            </a:r>
-          </a:p>
-        </p:txBody>
-      </p:sp>
-      <p:sp>
-        <p:nvSpPr>
-          <p:cNvPr id="5" name="Rounded Rectangle 4"/>
+              <a:t>How these tools play together in real work</a:t>
+            </a:r>
+          </a:p>
+        </p:txBody>
+      </p:sp>
+      <p:sp>
+        <p:nvSpPr>
+          <p:cNvPr id="4" name="Rectangle 3"/>
           <p:cNvSpPr/>
           <p:nvPr/>
         </p:nvSpPr>
         <p:spPr>
           <a:xfrm>
-            <a:off x="5806440" y="1508760"/>
-            <a:ext cx="2560320" cy="868680"/>
-          </a:xfrm>
-          <a:prstGeom prst="roundRect">
-            <a:avLst/>
-          </a:prstGeom>
-          <a:solidFill>
-            <a:srgbClr val="FFFFFF"/>
-          </a:solidFill>
-          <a:ln>
-            <a:solidFill>
-              <a:srgbClr val="E6DED4"/>
-            </a:solidFill>
-          </a:ln>
-        </p:spPr>
-        <p:style>
-          <a:lnRef idx="1">
-            <a:schemeClr val="accent1"/>
-          </a:lnRef>
-          <a:fillRef idx="3">
-            <a:schemeClr val="accent1"/>
-          </a:fillRef>
-          <a:effectRef idx="2">
-            <a:schemeClr val="accent1"/>
-          </a:effectRef>
-          <a:fontRef idx="minor">
-            <a:schemeClr val="lt1"/>
-          </a:fontRef>
-        </p:style>
-        <p:txBody>
-          <a:bodyPr rtlCol="0" anchor="ctr"/>
-          <a:lstStyle/>
-          <a:p>
-            <a:pPr algn="ctr"/>
-          </a:p>
-        </p:txBody>
-      </p:sp>
-      <p:sp>
-        <p:nvSpPr>
-          <p:cNvPr id="6" name="Rectangle 5"/>
-          <p:cNvSpPr/>
-          <p:nvPr/>
-        </p:nvSpPr>
-        <p:spPr>
-          <a:xfrm>
-            <a:off x="5806440" y="1508760"/>
-            <a:ext cx="64008" cy="868680"/>
-          </a:xfrm>
-          <a:prstGeom prst="rect">
-            <a:avLst/>
-          </a:prstGeom>
-          <a:solidFill>
-            <a:srgbClr val="0E8E92"/>
-          </a:solidFill>
-          <a:ln>
-            <a:noFill/>
-          </a:ln>
-        </p:spPr>
-        <p:style>
-          <a:lnRef idx="1">
-            <a:schemeClr val="accent1"/>
-          </a:lnRef>
-          <a:fillRef idx="3">
-            <a:schemeClr val="accent1"/>
-          </a:fillRef>
-          <a:effectRef idx="2">
-            <a:schemeClr val="accent1"/>
-          </a:effectRef>
-          <a:fontRef idx="minor">
-            <a:schemeClr val="lt1"/>
-          </a:fontRef>
-        </p:style>
-        <p:txBody>
-          <a:bodyPr rtlCol="0" anchor="ctr"/>
-          <a:lstStyle/>
-          <a:p>
-            <a:pPr algn="ctr"/>
-          </a:p>
-        </p:txBody>
-      </p:sp>
-      <p:sp>
-        <p:nvSpPr>
-          <p:cNvPr id="7" name="TextBox 6"/>
-          <p:cNvSpPr txBox="1"/>
-          <p:nvPr/>
-        </p:nvSpPr>
-        <p:spPr>
-          <a:xfrm>
-            <a:off x="5971031" y="1618488"/>
-            <a:ext cx="2286000" cy="256032"/>
-          </a:xfrm>
-          <a:prstGeom prst="rect">
-            <a:avLst/>
-          </a:prstGeom>
-          <a:noFill/>
-        </p:spPr>
-        <p:txBody>
-          <a:bodyPr wrap="square" lIns="36576" rIns="36576" tIns="36576" bIns="36576">
-            <a:spAutoFit/>
-          </a:bodyPr>
-          <a:lstStyle/>
-          <a:p>
-            <a:r>
-              <a:rPr sz="1300" b="1">
-                <a:solidFill>
-                  <a:srgbClr val="1B1B2C"/>
-                </a:solidFill>
-                <a:latin typeface="Segoe UI"/>
-              </a:rPr>
-              <a:t>Start small</a:t>
-            </a:r>
-          </a:p>
-        </p:txBody>
-      </p:sp>
-      <p:sp>
-        <p:nvSpPr>
-          <p:cNvPr id="8" name="TextBox 7"/>
-          <p:cNvSpPr txBox="1"/>
-          <p:nvPr/>
-        </p:nvSpPr>
-        <p:spPr>
-          <a:xfrm>
-            <a:off x="5971031" y="1947672"/>
-            <a:ext cx="2286000" cy="365759"/>
-          </a:xfrm>
-          <a:prstGeom prst="rect">
-            <a:avLst/>
-          </a:prstGeom>
-          <a:noFill/>
-        </p:spPr>
-        <p:txBody>
-          <a:bodyPr wrap="square" lIns="36576" rIns="36576" tIns="36576" bIns="36576">
-            <a:spAutoFit/>
-          </a:bodyPr>
-          <a:lstStyle/>
-          <a:p>
-            <a:r>
-              <a:rPr sz="1100" b="0">
-                <a:solidFill>
-                  <a:srgbClr val="5F667C"/>
-                </a:solidFill>
-                <a:latin typeface="Segoe UI"/>
-              </a:rPr>
-              <a:t>Use Copilot in chat or the app when that is enough</a:t>
-            </a:r>
-          </a:p>
-        </p:txBody>
-      </p:sp>
-      <p:sp>
-        <p:nvSpPr>
-          <p:cNvPr id="9" name="Rounded Rectangle 8"/>
-          <p:cNvSpPr/>
-          <p:nvPr/>
-        </p:nvSpPr>
-        <p:spPr>
-          <a:xfrm>
-            <a:off x="5806440" y="2606040"/>
-            <a:ext cx="2560320" cy="868680"/>
-          </a:xfrm>
-          <a:prstGeom prst="roundRect">
-            <a:avLst/>
-          </a:prstGeom>
-          <a:solidFill>
-            <a:srgbClr val="FFFFFF"/>
-          </a:solidFill>
-          <a:ln>
-            <a:solidFill>
-              <a:srgbClr val="E6DED4"/>
-            </a:solidFill>
-          </a:ln>
-        </p:spPr>
-        <p:style>
-          <a:lnRef idx="1">
-            <a:schemeClr val="accent1"/>
-          </a:lnRef>
-          <a:fillRef idx="3">
-            <a:schemeClr val="accent1"/>
-          </a:fillRef>
-          <a:effectRef idx="2">
-            <a:schemeClr val="accent1"/>
-          </a:effectRef>
-          <a:fontRef idx="minor">
-            <a:schemeClr val="lt1"/>
-          </a:fontRef>
-        </p:style>
-        <p:txBody>
-          <a:bodyPr rtlCol="0" anchor="ctr"/>
-          <a:lstStyle/>
-          <a:p>
-            <a:pPr algn="ctr"/>
-          </a:p>
-        </p:txBody>
-      </p:sp>
-      <p:sp>
-        <p:nvSpPr>
-          <p:cNvPr id="10" name="Rectangle 9"/>
-          <p:cNvSpPr/>
-          <p:nvPr/>
-        </p:nvSpPr>
-        <p:spPr>
-          <a:xfrm>
-            <a:off x="5806440" y="2606040"/>
-            <a:ext cx="64008" cy="868680"/>
+            <a:off x="502920" y="1115568"/>
+            <a:ext cx="1097280" cy="45720"/>
           </a:xfrm>
           <a:prstGeom prst="rect">
             <a:avLst/>
@@ -6738,14 +7362,14 @@
       </p:sp>
       <p:sp>
         <p:nvSpPr>
-          <p:cNvPr id="11" name="TextBox 10"/>
+          <p:cNvPr id="5" name="TextBox 4"/>
           <p:cNvSpPr txBox="1"/>
           <p:nvPr/>
         </p:nvSpPr>
         <p:spPr>
           <a:xfrm>
-            <a:off x="5971031" y="2715768"/>
-            <a:ext cx="2286000" cy="256032"/>
+            <a:off x="548640" y="1234440"/>
+            <a:ext cx="7955279" cy="411480"/>
           </a:xfrm>
           <a:prstGeom prst="rect">
             <a:avLst/>
@@ -6753,67 +7377,33 @@
           <a:noFill/>
         </p:spPr>
         <p:txBody>
-          <a:bodyPr wrap="square" lIns="36576" rIns="36576" tIns="36576" bIns="36576">
+          <a:bodyPr wrap="square" lIns="27432" rIns="27432" tIns="18288" bIns="18288">
             <a:spAutoFit/>
           </a:bodyPr>
           <a:lstStyle/>
           <a:p>
             <a:r>
-              <a:rPr sz="1300" b="1">
-                <a:solidFill>
-                  <a:srgbClr val="1B1B2C"/>
+              <a:rPr sz="1300" b="0">
+                <a:solidFill>
+                  <a:srgbClr val="5A6078"/>
                 </a:solidFill>
                 <a:latin typeface="Segoe UI"/>
               </a:rPr>
-              <a:t>Scale up</a:t>
-            </a:r>
-          </a:p>
-        </p:txBody>
-      </p:sp>
-      <p:sp>
-        <p:nvSpPr>
-          <p:cNvPr id="12" name="TextBox 11"/>
-          <p:cNvSpPr txBox="1"/>
-          <p:nvPr/>
-        </p:nvSpPr>
-        <p:spPr>
-          <a:xfrm>
-            <a:off x="5971031" y="3044952"/>
-            <a:ext cx="2286000" cy="365759"/>
-          </a:xfrm>
-          <a:prstGeom prst="rect">
-            <a:avLst/>
-          </a:prstGeom>
-          <a:noFill/>
-        </p:spPr>
-        <p:txBody>
-          <a:bodyPr wrap="square" lIns="36576" rIns="36576" tIns="36576" bIns="36576">
-            <a:spAutoFit/>
-          </a:bodyPr>
-          <a:lstStyle/>
-          <a:p>
-            <a:r>
-              <a:rPr sz="1100" b="0">
-                <a:solidFill>
-                  <a:srgbClr val="5F667C"/>
-                </a:solidFill>
-                <a:latin typeface="Segoe UI"/>
-              </a:rPr>
-              <a:t>Bring in ready agents or Cowork as the job grows</a:t>
-            </a:r>
-          </a:p>
-        </p:txBody>
-      </p:sp>
-      <p:sp>
-        <p:nvSpPr>
-          <p:cNvPr id="13" name="Rounded Rectangle 12"/>
+              <a:t>A picture of the right tool for typical jobs in each function.</a:t>
+            </a:r>
+          </a:p>
+        </p:txBody>
+      </p:sp>
+      <p:sp>
+        <p:nvSpPr>
+          <p:cNvPr id="6" name="Rounded Rectangle 5"/>
           <p:cNvSpPr/>
           <p:nvPr/>
         </p:nvSpPr>
         <p:spPr>
           <a:xfrm>
-            <a:off x="5806440" y="3703320"/>
-            <a:ext cx="2560320" cy="868680"/>
+            <a:off x="548640" y="1783080"/>
+            <a:ext cx="3886200" cy="2606040"/>
           </a:xfrm>
           <a:prstGeom prst="roundRect">
             <a:avLst/>
@@ -6823,7 +7413,7 @@
           </a:solidFill>
           <a:ln>
             <a:solidFill>
-              <a:srgbClr val="E6DED4"/>
+              <a:srgbClr val="F6F7FB"/>
             </a:solidFill>
           </a:ln>
         </p:spPr>
@@ -6851,14 +7441,189 @@
       </p:sp>
       <p:sp>
         <p:nvSpPr>
-          <p:cNvPr id="14" name="Rectangle 13"/>
+          <p:cNvPr id="7" name="Rectangle 6"/>
           <p:cNvSpPr/>
           <p:nvPr/>
         </p:nvSpPr>
         <p:spPr>
           <a:xfrm>
-            <a:off x="5806440" y="3703320"/>
-            <a:ext cx="64008" cy="868680"/>
+            <a:off x="548640" y="1783080"/>
+            <a:ext cx="3886200" cy="64008"/>
+          </a:xfrm>
+          <a:prstGeom prst="rect">
+            <a:avLst/>
+          </a:prstGeom>
+          <a:solidFill>
+            <a:srgbClr val="1A6FD6"/>
+          </a:solidFill>
+          <a:ln>
+            <a:noFill/>
+          </a:ln>
+        </p:spPr>
+        <p:style>
+          <a:lnRef idx="1">
+            <a:schemeClr val="accent1"/>
+          </a:lnRef>
+          <a:fillRef idx="3">
+            <a:schemeClr val="accent1"/>
+          </a:fillRef>
+          <a:effectRef idx="2">
+            <a:schemeClr val="accent1"/>
+          </a:effectRef>
+          <a:fontRef idx="minor">
+            <a:schemeClr val="lt1"/>
+          </a:fontRef>
+        </p:style>
+        <p:txBody>
+          <a:bodyPr rtlCol="0" anchor="ctr"/>
+          <a:lstStyle/>
+          <a:p>
+            <a:pPr algn="ctr"/>
+          </a:p>
+        </p:txBody>
+      </p:sp>
+      <p:sp>
+        <p:nvSpPr>
+          <p:cNvPr id="8" name="TextBox 7"/>
+          <p:cNvSpPr txBox="1"/>
+          <p:nvPr/>
+        </p:nvSpPr>
+        <p:spPr>
+          <a:xfrm>
+            <a:off x="777240" y="2029968"/>
+            <a:ext cx="3429000" cy="2057400"/>
+          </a:xfrm>
+          <a:prstGeom prst="rect">
+            <a:avLst/>
+          </a:prstGeom>
+          <a:noFill/>
+        </p:spPr>
+        <p:txBody>
+          <a:bodyPr wrap="none" lIns="73152" rIns="73152" tIns="36576">
+            <a:spAutoFit/>
+          </a:bodyPr>
+          <a:lstStyle/>
+          <a:p>
+            <a:pPr>
+              <a:spcAft>
+                <a:spcPts val="500"/>
+              </a:spcAft>
+              <a:defRPr sz="1300">
+                <a:solidFill>
+                  <a:srgbClr val="1B1B2C"/>
+                </a:solidFill>
+                <a:latin typeface="Segoe UI"/>
+              </a:defRPr>
+            </a:pPr>
+            <a:r>
+              <a:t>• Monday pipeline review</a:t>
+            </a:r>
+          </a:p>
+          <a:p>
+            <a:pPr>
+              <a:spcAft>
+                <a:spcPts val="500"/>
+              </a:spcAft>
+              <a:defRPr sz="1300">
+                <a:solidFill>
+                  <a:srgbClr val="1B1B2C"/>
+                </a:solidFill>
+                <a:latin typeface="Segoe UI"/>
+              </a:defRPr>
+            </a:pPr>
+            <a:r>
+              <a:t>• Campaign launch pack</a:t>
+            </a:r>
+          </a:p>
+          <a:p>
+            <a:pPr>
+              <a:spcAft>
+                <a:spcPts val="500"/>
+              </a:spcAft>
+              <a:defRPr sz="1300">
+                <a:solidFill>
+                  <a:srgbClr val="1B1B2C"/>
+                </a:solidFill>
+                <a:latin typeface="Segoe UI"/>
+              </a:defRPr>
+            </a:pPr>
+            <a:r>
+              <a:t>• Month-end variance pack</a:t>
+            </a:r>
+          </a:p>
+          <a:p>
+            <a:pPr>
+              <a:spcAft>
+                <a:spcPts val="500"/>
+              </a:spcAft>
+              <a:defRPr sz="1300">
+                <a:solidFill>
+                  <a:srgbClr val="1B1B2C"/>
+                </a:solidFill>
+                <a:latin typeface="Segoe UI"/>
+              </a:defRPr>
+            </a:pPr>
+            <a:r>
+              <a:t>• Contract redline against your playbook</a:t>
+            </a:r>
+          </a:p>
+        </p:txBody>
+      </p:sp>
+      <p:sp>
+        <p:nvSpPr>
+          <p:cNvPr id="9" name="Rounded Rectangle 8"/>
+          <p:cNvSpPr/>
+          <p:nvPr/>
+        </p:nvSpPr>
+        <p:spPr>
+          <a:xfrm>
+            <a:off x="4709160" y="1783080"/>
+            <a:ext cx="3886200" cy="2606040"/>
+          </a:xfrm>
+          <a:prstGeom prst="roundRect">
+            <a:avLst/>
+          </a:prstGeom>
+          <a:solidFill>
+            <a:srgbClr val="FFFFFF"/>
+          </a:solidFill>
+          <a:ln>
+            <a:solidFill>
+              <a:srgbClr val="F6F7FB"/>
+            </a:solidFill>
+          </a:ln>
+        </p:spPr>
+        <p:style>
+          <a:lnRef idx="1">
+            <a:schemeClr val="accent1"/>
+          </a:lnRef>
+          <a:fillRef idx="3">
+            <a:schemeClr val="accent1"/>
+          </a:fillRef>
+          <a:effectRef idx="2">
+            <a:schemeClr val="accent1"/>
+          </a:effectRef>
+          <a:fontRef idx="minor">
+            <a:schemeClr val="lt1"/>
+          </a:fontRef>
+        </p:style>
+        <p:txBody>
+          <a:bodyPr rtlCol="0" anchor="ctr"/>
+          <a:lstStyle/>
+          <a:p>
+            <a:pPr algn="ctr"/>
+          </a:p>
+        </p:txBody>
+      </p:sp>
+      <p:sp>
+        <p:nvSpPr>
+          <p:cNvPr id="10" name="Rectangle 9"/>
+          <p:cNvSpPr/>
+          <p:nvPr/>
+        </p:nvSpPr>
+        <p:spPr>
+          <a:xfrm>
+            <a:off x="4709160" y="1783080"/>
+            <a:ext cx="3886200" cy="64008"/>
           </a:xfrm>
           <a:prstGeom prst="rect">
             <a:avLst/>
@@ -6894,14 +7659,14 @@
       </p:sp>
       <p:sp>
         <p:nvSpPr>
-          <p:cNvPr id="15" name="TextBox 14"/>
+          <p:cNvPr id="11" name="TextBox 10"/>
           <p:cNvSpPr txBox="1"/>
           <p:nvPr/>
         </p:nvSpPr>
         <p:spPr>
           <a:xfrm>
-            <a:off x="5971031" y="3813048"/>
-            <a:ext cx="2286000" cy="256032"/>
+            <a:off x="4937760" y="2029968"/>
+            <a:ext cx="3429000" cy="2057400"/>
           </a:xfrm>
           <a:prstGeom prst="rect">
             <a:avLst/>
@@ -6909,53 +7674,24 @@
           <a:noFill/>
         </p:spPr>
         <p:txBody>
-          <a:bodyPr wrap="square" lIns="36576" rIns="36576" tIns="36576" bIns="36576">
+          <a:bodyPr wrap="none" lIns="73152" rIns="73152" tIns="36576">
             <a:spAutoFit/>
           </a:bodyPr>
           <a:lstStyle/>
           <a:p>
-            <a:r>
-              <a:rPr sz="1300" b="1">
+            <a:pPr>
+              <a:spcAft>
+                <a:spcPts val="500"/>
+              </a:spcAft>
+              <a:defRPr sz="1300">
                 <a:solidFill>
                   <a:srgbClr val="1B1B2C"/>
                 </a:solidFill>
                 <a:latin typeface="Segoe UI"/>
-              </a:rPr>
-              <a:t>Stay in control</a:t>
-            </a:r>
-          </a:p>
-        </p:txBody>
-      </p:sp>
-      <p:sp>
-        <p:nvSpPr>
-          <p:cNvPr id="16" name="TextBox 15"/>
-          <p:cNvSpPr txBox="1"/>
-          <p:nvPr/>
-        </p:nvSpPr>
-        <p:spPr>
-          <a:xfrm>
-            <a:off x="5971031" y="4142231"/>
-            <a:ext cx="2286000" cy="365759"/>
-          </a:xfrm>
-          <a:prstGeom prst="rect">
-            <a:avLst/>
-          </a:prstGeom>
-          <a:noFill/>
-        </p:spPr>
-        <p:txBody>
-          <a:bodyPr wrap="square" lIns="36576" rIns="36576" tIns="36576" bIns="36576">
-            <a:spAutoFit/>
-          </a:bodyPr>
-          <a:lstStyle/>
-          <a:p>
-            <a:r>
-              <a:rPr sz="1100" b="0">
-                <a:solidFill>
-                  <a:srgbClr val="5F667C"/>
-                </a:solidFill>
-                <a:latin typeface="Segoe UI"/>
-              </a:rPr>
-              <a:t>Keep approvals clear when actions are involved</a:t>
+              </a:defRPr>
+            </a:pPr>
+            <a:r>
+              <a:t>• RFP shortlist and evaluation</a:t>
             </a:r>
           </a:p>
         </p:txBody>
@@ -6974,7 +7710,7 @@
     <p:bg>
       <p:bgPr>
         <a:solidFill>
-          <a:srgbClr val="FBF7F2"/>
+          <a:srgbClr val="FFFAF5"/>
         </a:solidFill>
         <a:effectLst/>
       </p:bgPr>
@@ -6994,8 +7730,8 @@
         </p:nvSpPr>
         <p:spPr>
           <a:xfrm>
-            <a:off x="502920" y="320040"/>
-            <a:ext cx="1828800" cy="274320"/>
+            <a:off x="502920" y="228600"/>
+            <a:ext cx="6400800" cy="228600"/>
           </a:xfrm>
           <a:prstGeom prst="rect">
             <a:avLst/>
@@ -7003,19 +7739,19 @@
           <a:noFill/>
         </p:spPr>
         <p:txBody>
-          <a:bodyPr wrap="square" lIns="36576" rIns="36576" tIns="36576" bIns="36576">
+          <a:bodyPr wrap="square" lIns="27432" rIns="27432" tIns="18288" bIns="18288">
             <a:spAutoFit/>
           </a:bodyPr>
           <a:lstStyle/>
           <a:p>
             <a:r>
-              <a:rPr sz="1200" b="1">
-                <a:solidFill>
-                  <a:srgbClr val="0E8E92"/>
+              <a:rPr sz="900" b="1">
+                <a:solidFill>
+                  <a:srgbClr val="5A6078"/>
                 </a:solidFill>
                 <a:latin typeface="Segoe UI"/>
               </a:rPr>
-              <a:t>Section 06</a:t>
+              <a:t>SECTION 06</a:t>
             </a:r>
           </a:p>
         </p:txBody>
@@ -7028,8 +7764,8 @@
         </p:nvSpPr>
         <p:spPr>
           <a:xfrm>
-            <a:off x="502920" y="658368"/>
-            <a:ext cx="7863840" cy="594360"/>
+            <a:off x="502920" y="438912"/>
+            <a:ext cx="7955279" cy="658368"/>
           </a:xfrm>
           <a:prstGeom prst="rect">
             <a:avLst/>
@@ -7037,33 +7773,76 @@
           <a:noFill/>
         </p:spPr>
         <p:txBody>
-          <a:bodyPr wrap="square" lIns="36576" rIns="36576" tIns="36576" bIns="36576">
+          <a:bodyPr wrap="square" lIns="27432" rIns="27432" tIns="18288" bIns="18288">
             <a:spAutoFit/>
           </a:bodyPr>
           <a:lstStyle/>
           <a:p>
             <a:r>
-              <a:rPr sz="2700" b="1">
+              <a:rPr sz="2200" b="1">
                 <a:solidFill>
                   <a:srgbClr val="1B1B2C"/>
                 </a:solidFill>
                 <a:latin typeface="Segoe UI"/>
               </a:rPr>
-              <a:t>06. Before Cowork builds it</a:t>
-            </a:r>
-          </a:p>
-        </p:txBody>
-      </p:sp>
-      <p:sp>
-        <p:nvSpPr>
-          <p:cNvPr id="4" name="TextBox 3"/>
+              <a:t>Check this order first</a:t>
+            </a:r>
+          </a:p>
+        </p:txBody>
+      </p:sp>
+      <p:sp>
+        <p:nvSpPr>
+          <p:cNvPr id="4" name="Rectangle 3"/>
+          <p:cNvSpPr/>
+          <p:nvPr/>
+        </p:nvSpPr>
+        <p:spPr>
+          <a:xfrm>
+            <a:off x="502920" y="1115568"/>
+            <a:ext cx="1097280" cy="45720"/>
+          </a:xfrm>
+          <a:prstGeom prst="rect">
+            <a:avLst/>
+          </a:prstGeom>
+          <a:solidFill>
+            <a:srgbClr val="1A6FD6"/>
+          </a:solidFill>
+          <a:ln>
+            <a:noFill/>
+          </a:ln>
+        </p:spPr>
+        <p:style>
+          <a:lnRef idx="1">
+            <a:schemeClr val="accent1"/>
+          </a:lnRef>
+          <a:fillRef idx="3">
+            <a:schemeClr val="accent1"/>
+          </a:fillRef>
+          <a:effectRef idx="2">
+            <a:schemeClr val="accent1"/>
+          </a:effectRef>
+          <a:fontRef idx="minor">
+            <a:schemeClr val="lt1"/>
+          </a:fontRef>
+        </p:style>
+        <p:txBody>
+          <a:bodyPr rtlCol="0" anchor="ctr"/>
+          <a:lstStyle/>
+          <a:p>
+            <a:pPr algn="ctr"/>
+          </a:p>
+        </p:txBody>
+      </p:sp>
+      <p:sp>
+        <p:nvSpPr>
+          <p:cNvPr id="5" name="TextBox 4"/>
           <p:cNvSpPr txBox="1"/>
           <p:nvPr/>
         </p:nvSpPr>
         <p:spPr>
           <a:xfrm>
-            <a:off x="621792" y="1417320"/>
-            <a:ext cx="5120640" cy="3200400"/>
+            <a:off x="548640" y="1234440"/>
+            <a:ext cx="7955279" cy="411480"/>
           </a:xfrm>
           <a:prstGeom prst="rect">
             <a:avLst/>
@@ -7071,86 +7850,33 @@
           <a:noFill/>
         </p:spPr>
         <p:txBody>
-          <a:bodyPr wrap="square" lIns="45720" rIns="45720">
+          <a:bodyPr wrap="square" lIns="27432" rIns="27432" tIns="18288" bIns="18288">
             <a:spAutoFit/>
           </a:bodyPr>
           <a:lstStyle/>
           <a:p>
-            <a:pPr>
-              <a:spcAft>
-                <a:spcPts val="600"/>
-              </a:spcAft>
-            </a:pPr>
-            <a:r>
-              <a:rPr sz="1500">
-                <a:solidFill>
-                  <a:srgbClr val="1B1B2C"/>
+            <a:r>
+              <a:rPr sz="1300" b="0">
+                <a:solidFill>
+                  <a:srgbClr val="5A6078"/>
                 </a:solidFill>
                 <a:latin typeface="Segoe UI"/>
               </a:rPr>
-              <a:t>• Save or schedule a repeatable prompt when that is enough</a:t>
-            </a:r>
-          </a:p>
-          <a:p>
-            <a:pPr>
-              <a:spcAft>
-                <a:spcPts val="600"/>
-              </a:spcAft>
-            </a:pPr>
-            <a:r>
-              <a:rPr sz="1500">
-                <a:solidFill>
-                  <a:srgbClr val="1B1B2C"/>
-                </a:solidFill>
-                <a:latin typeface="Segoe UI"/>
-              </a:rPr>
-              <a:t>• Check ready agents before you start a larger workflow</a:t>
-            </a:r>
-          </a:p>
-          <a:p>
-            <a:pPr>
-              <a:spcAft>
-                <a:spcPts val="600"/>
-              </a:spcAft>
-            </a:pPr>
-            <a:r>
-              <a:rPr sz="1500">
-                <a:solidFill>
-                  <a:srgbClr val="1B1B2C"/>
-                </a:solidFill>
-                <a:latin typeface="Segoe UI"/>
-              </a:rPr>
-              <a:t>• Use Cowork when the task needs several deliverables</a:t>
-            </a:r>
-          </a:p>
-          <a:p>
-            <a:pPr>
-              <a:spcAft>
-                <a:spcPts val="600"/>
-              </a:spcAft>
-            </a:pPr>
-            <a:r>
-              <a:rPr sz="1500">
-                <a:solidFill>
-                  <a:srgbClr val="1B1B2C"/>
-                </a:solidFill>
-                <a:latin typeface="Segoe UI"/>
-              </a:rPr>
-              <a:t>• Keep approval points explicit</a:t>
-            </a:r>
-          </a:p>
-        </p:txBody>
-      </p:sp>
-      <p:sp>
-        <p:nvSpPr>
-          <p:cNvPr id="5" name="Rounded Rectangle 4"/>
+              <a:t>Lean on what is already there before you reach for a bigger tool.</a:t>
+            </a:r>
+          </a:p>
+        </p:txBody>
+      </p:sp>
+      <p:sp>
+        <p:nvSpPr>
+          <p:cNvPr id="6" name="Rounded Rectangle 5"/>
           <p:cNvSpPr/>
           <p:nvPr/>
         </p:nvSpPr>
         <p:spPr>
           <a:xfrm>
-            <a:off x="5806440" y="1508760"/>
-            <a:ext cx="2560320" cy="868680"/>
+            <a:off x="548640" y="1783080"/>
+            <a:ext cx="3886200" cy="2606040"/>
           </a:xfrm>
           <a:prstGeom prst="roundRect">
             <a:avLst/>
@@ -7160,7 +7886,7 @@
           </a:solidFill>
           <a:ln>
             <a:solidFill>
-              <a:srgbClr val="E6DED4"/>
+              <a:srgbClr val="F6F7FB"/>
             </a:solidFill>
           </a:ln>
         </p:spPr>
@@ -7188,14 +7914,627 @@
       </p:sp>
       <p:sp>
         <p:nvSpPr>
+          <p:cNvPr id="7" name="Rectangle 6"/>
+          <p:cNvSpPr/>
+          <p:nvPr/>
+        </p:nvSpPr>
+        <p:spPr>
+          <a:xfrm>
+            <a:off x="548640" y="1783080"/>
+            <a:ext cx="3886200" cy="64008"/>
+          </a:xfrm>
+          <a:prstGeom prst="rect">
+            <a:avLst/>
+          </a:prstGeom>
+          <a:solidFill>
+            <a:srgbClr val="1A6FD6"/>
+          </a:solidFill>
+          <a:ln>
+            <a:noFill/>
+          </a:ln>
+        </p:spPr>
+        <p:style>
+          <a:lnRef idx="1">
+            <a:schemeClr val="accent1"/>
+          </a:lnRef>
+          <a:fillRef idx="3">
+            <a:schemeClr val="accent1"/>
+          </a:fillRef>
+          <a:effectRef idx="2">
+            <a:schemeClr val="accent1"/>
+          </a:effectRef>
+          <a:fontRef idx="minor">
+            <a:schemeClr val="lt1"/>
+          </a:fontRef>
+        </p:style>
+        <p:txBody>
+          <a:bodyPr rtlCol="0" anchor="ctr"/>
+          <a:lstStyle/>
+          <a:p>
+            <a:pPr algn="ctr"/>
+          </a:p>
+        </p:txBody>
+      </p:sp>
+      <p:sp>
+        <p:nvSpPr>
+          <p:cNvPr id="8" name="TextBox 7"/>
+          <p:cNvSpPr txBox="1"/>
+          <p:nvPr/>
+        </p:nvSpPr>
+        <p:spPr>
+          <a:xfrm>
+            <a:off x="777240" y="2029968"/>
+            <a:ext cx="3429000" cy="2057400"/>
+          </a:xfrm>
+          <a:prstGeom prst="rect">
+            <a:avLst/>
+          </a:prstGeom>
+          <a:noFill/>
+        </p:spPr>
+        <p:txBody>
+          <a:bodyPr wrap="none" lIns="73152" rIns="73152" tIns="36576">
+            <a:spAutoFit/>
+          </a:bodyPr>
+          <a:lstStyle/>
+          <a:p>
+            <a:pPr>
+              <a:spcAft>
+                <a:spcPts val="500"/>
+              </a:spcAft>
+              <a:defRPr sz="1300">
+                <a:solidFill>
+                  <a:srgbClr val="1B1B2C"/>
+                </a:solidFill>
+                <a:latin typeface="Segoe UI"/>
+              </a:defRPr>
+            </a:pPr>
+            <a:r>
+              <a:t>• Can a saved prompt do it?</a:t>
+            </a:r>
+          </a:p>
+          <a:p>
+            <a:pPr>
+              <a:spcAft>
+                <a:spcPts val="500"/>
+              </a:spcAft>
+              <a:defRPr sz="1300">
+                <a:solidFill>
+                  <a:srgbClr val="1B1B2C"/>
+                </a:solidFill>
+                <a:latin typeface="Segoe UI"/>
+              </a:defRPr>
+            </a:pPr>
+            <a:r>
+              <a:t>• Is there a ready Microsoft agent?</a:t>
+            </a:r>
+          </a:p>
+          <a:p>
+            <a:pPr>
+              <a:spcAft>
+                <a:spcPts val="500"/>
+              </a:spcAft>
+              <a:defRPr sz="1300">
+                <a:solidFill>
+                  <a:srgbClr val="1B1B2C"/>
+                </a:solidFill>
+                <a:latin typeface="Segoe UI"/>
+              </a:defRPr>
+            </a:pPr>
+            <a:r>
+              <a:t>• Does Cowork cover the full job?</a:t>
+            </a:r>
+          </a:p>
+          <a:p>
+            <a:pPr>
+              <a:spcAft>
+                <a:spcPts val="500"/>
+              </a:spcAft>
+              <a:defRPr sz="1300">
+                <a:solidFill>
+                  <a:srgbClr val="1B1B2C"/>
+                </a:solidFill>
+                <a:latin typeface="Segoe UI"/>
+              </a:defRPr>
+            </a:pPr>
+            <a:r>
+              <a:t>• Simplest: Can a saved prompt do it?</a:t>
+            </a:r>
+          </a:p>
+        </p:txBody>
+      </p:sp>
+      <p:sp>
+        <p:nvSpPr>
+          <p:cNvPr id="9" name="Rounded Rectangle 8"/>
+          <p:cNvSpPr/>
+          <p:nvPr/>
+        </p:nvSpPr>
+        <p:spPr>
+          <a:xfrm>
+            <a:off x="4709160" y="1783080"/>
+            <a:ext cx="3886200" cy="2606040"/>
+          </a:xfrm>
+          <a:prstGeom prst="roundRect">
+            <a:avLst/>
+          </a:prstGeom>
+          <a:solidFill>
+            <a:srgbClr val="FFFFFF"/>
+          </a:solidFill>
+          <a:ln>
+            <a:solidFill>
+              <a:srgbClr val="F6F7FB"/>
+            </a:solidFill>
+          </a:ln>
+        </p:spPr>
+        <p:style>
+          <a:lnRef idx="1">
+            <a:schemeClr val="accent1"/>
+          </a:lnRef>
+          <a:fillRef idx="3">
+            <a:schemeClr val="accent1"/>
+          </a:fillRef>
+          <a:effectRef idx="2">
+            <a:schemeClr val="accent1"/>
+          </a:effectRef>
+          <a:fontRef idx="minor">
+            <a:schemeClr val="lt1"/>
+          </a:fontRef>
+        </p:style>
+        <p:txBody>
+          <a:bodyPr rtlCol="0" anchor="ctr"/>
+          <a:lstStyle/>
+          <a:p>
+            <a:pPr algn="ctr"/>
+          </a:p>
+        </p:txBody>
+      </p:sp>
+      <p:sp>
+        <p:nvSpPr>
+          <p:cNvPr id="10" name="Rectangle 9"/>
+          <p:cNvSpPr/>
+          <p:nvPr/>
+        </p:nvSpPr>
+        <p:spPr>
+          <a:xfrm>
+            <a:off x="4709160" y="1783080"/>
+            <a:ext cx="3886200" cy="64008"/>
+          </a:xfrm>
+          <a:prstGeom prst="rect">
+            <a:avLst/>
+          </a:prstGeom>
+          <a:solidFill>
+            <a:srgbClr val="3E8E22"/>
+          </a:solidFill>
+          <a:ln>
+            <a:noFill/>
+          </a:ln>
+        </p:spPr>
+        <p:style>
+          <a:lnRef idx="1">
+            <a:schemeClr val="accent1"/>
+          </a:lnRef>
+          <a:fillRef idx="3">
+            <a:schemeClr val="accent1"/>
+          </a:fillRef>
+          <a:effectRef idx="2">
+            <a:schemeClr val="accent1"/>
+          </a:effectRef>
+          <a:fontRef idx="minor">
+            <a:schemeClr val="lt1"/>
+          </a:fontRef>
+        </p:style>
+        <p:txBody>
+          <a:bodyPr rtlCol="0" anchor="ctr"/>
+          <a:lstStyle/>
+          <a:p>
+            <a:pPr algn="ctr"/>
+          </a:p>
+        </p:txBody>
+      </p:sp>
+      <p:sp>
+        <p:nvSpPr>
+          <p:cNvPr id="11" name="TextBox 10"/>
+          <p:cNvSpPr txBox="1"/>
+          <p:nvPr/>
+        </p:nvSpPr>
+        <p:spPr>
+          <a:xfrm>
+            <a:off x="4937760" y="2029968"/>
+            <a:ext cx="3429000" cy="2057400"/>
+          </a:xfrm>
+          <a:prstGeom prst="rect">
+            <a:avLst/>
+          </a:prstGeom>
+          <a:noFill/>
+        </p:spPr>
+        <p:txBody>
+          <a:bodyPr wrap="none" lIns="73152" rIns="73152" tIns="36576">
+            <a:spAutoFit/>
+          </a:bodyPr>
+          <a:lstStyle/>
+          <a:p>
+            <a:pPr>
+              <a:spcAft>
+                <a:spcPts val="500"/>
+              </a:spcAft>
+              <a:defRPr sz="1300">
+                <a:solidFill>
+                  <a:srgbClr val="1B1B2C"/>
+                </a:solidFill>
+                <a:latin typeface="Segoe UI"/>
+              </a:defRPr>
+            </a:pPr>
+            <a:r>
+              <a:t>• Reuse: Is there a ready Microsoft agent?</a:t>
+            </a:r>
+          </a:p>
+          <a:p>
+            <a:pPr>
+              <a:spcAft>
+                <a:spcPts val="500"/>
+              </a:spcAft>
+              <a:defRPr sz="1300">
+                <a:solidFill>
+                  <a:srgbClr val="1B1B2C"/>
+                </a:solidFill>
+                <a:latin typeface="Segoe UI"/>
+              </a:defRPr>
+            </a:pPr>
+            <a:r>
+              <a:t>• Scale on demand: Does Cowork cover the full job?</a:t>
+            </a:r>
+          </a:p>
+        </p:txBody>
+      </p:sp>
+    </p:spTree>
+  </p:cSld>
+  <p:clrMapOvr>
+    <a:masterClrMapping/>
+  </p:clrMapOvr>
+</p:sld>
+</file>
+
+<file path=ppt/slides/slide8.xml><?xml version="1.0" encoding="utf-8"?>
+<p:sld xmlns:a="http://schemas.openxmlformats.org/drawingml/2006/main" xmlns:p="http://schemas.openxmlformats.org/presentationml/2006/main" xmlns:r="http://schemas.openxmlformats.org/officeDocument/2006/relationships">
+  <p:cSld>
+    <p:bg>
+      <p:bgPr>
+        <a:solidFill>
+          <a:srgbClr val="FFFAF5"/>
+        </a:solidFill>
+        <a:effectLst/>
+      </p:bgPr>
+    </p:bg>
+    <p:spTree>
+      <p:nvGrpSpPr>
+        <p:cNvPr id="1" name=""/>
+        <p:cNvGrpSpPr/>
+        <p:nvPr/>
+      </p:nvGrpSpPr>
+      <p:grpSpPr/>
+      <p:sp>
+        <p:nvSpPr>
+          <p:cNvPr id="2" name="TextBox 1"/>
+          <p:cNvSpPr txBox="1"/>
+          <p:nvPr/>
+        </p:nvSpPr>
+        <p:spPr>
+          <a:xfrm>
+            <a:off x="502920" y="228600"/>
+            <a:ext cx="6400800" cy="228600"/>
+          </a:xfrm>
+          <a:prstGeom prst="rect">
+            <a:avLst/>
+          </a:prstGeom>
+          <a:noFill/>
+        </p:spPr>
+        <p:txBody>
+          <a:bodyPr wrap="square" lIns="27432" rIns="27432" tIns="18288" bIns="18288">
+            <a:spAutoFit/>
+          </a:bodyPr>
+          <a:lstStyle/>
+          <a:p>
+            <a:r>
+              <a:rPr sz="900" b="1">
+                <a:solidFill>
+                  <a:srgbClr val="5A6078"/>
+                </a:solidFill>
+                <a:latin typeface="Segoe UI"/>
+              </a:rPr>
+              <a:t>COPILOT COWORK</a:t>
+            </a:r>
+          </a:p>
+        </p:txBody>
+      </p:sp>
+      <p:sp>
+        <p:nvSpPr>
+          <p:cNvPr id="3" name="TextBox 2"/>
+          <p:cNvSpPr txBox="1"/>
+          <p:nvPr/>
+        </p:nvSpPr>
+        <p:spPr>
+          <a:xfrm>
+            <a:off x="502920" y="438912"/>
+            <a:ext cx="7955279" cy="658368"/>
+          </a:xfrm>
+          <a:prstGeom prst="rect">
+            <a:avLst/>
+          </a:prstGeom>
+          <a:noFill/>
+        </p:spPr>
+        <p:txBody>
+          <a:bodyPr wrap="square" lIns="27432" rIns="27432" tIns="18288" bIns="18288">
+            <a:spAutoFit/>
+          </a:bodyPr>
+          <a:lstStyle/>
+          <a:p>
+            <a:r>
+              <a:rPr sz="2200" b="1">
+                <a:solidFill>
+                  <a:srgbClr val="1B1B2C"/>
+                </a:solidFill>
+                <a:latin typeface="Segoe UI"/>
+              </a:rPr>
+              <a:t>Cowork tasks: light, medium, heavy</a:t>
+            </a:r>
+          </a:p>
+        </p:txBody>
+      </p:sp>
+      <p:sp>
+        <p:nvSpPr>
+          <p:cNvPr id="4" name="Rectangle 3"/>
+          <p:cNvSpPr/>
+          <p:nvPr/>
+        </p:nvSpPr>
+        <p:spPr>
+          <a:xfrm>
+            <a:off x="502920" y="1115568"/>
+            <a:ext cx="1097280" cy="45720"/>
+          </a:xfrm>
+          <a:prstGeom prst="rect">
+            <a:avLst/>
+          </a:prstGeom>
+          <a:solidFill>
+            <a:srgbClr val="1A6FD6"/>
+          </a:solidFill>
+          <a:ln>
+            <a:noFill/>
+          </a:ln>
+        </p:spPr>
+        <p:style>
+          <a:lnRef idx="1">
+            <a:schemeClr val="accent1"/>
+          </a:lnRef>
+          <a:fillRef idx="3">
+            <a:schemeClr val="accent1"/>
+          </a:fillRef>
+          <a:effectRef idx="2">
+            <a:schemeClr val="accent1"/>
+          </a:effectRef>
+          <a:fontRef idx="minor">
+            <a:schemeClr val="lt1"/>
+          </a:fontRef>
+        </p:style>
+        <p:txBody>
+          <a:bodyPr rtlCol="0" anchor="ctr"/>
+          <a:lstStyle/>
+          <a:p>
+            <a:pPr algn="ctr"/>
+          </a:p>
+        </p:txBody>
+      </p:sp>
+      <p:sp>
+        <p:nvSpPr>
+          <p:cNvPr id="5" name="Rounded Rectangle 4"/>
+          <p:cNvSpPr/>
+          <p:nvPr/>
+        </p:nvSpPr>
+        <p:spPr>
+          <a:xfrm>
+            <a:off x="594360" y="1508760"/>
+            <a:ext cx="2514600" cy="2331720"/>
+          </a:xfrm>
+          <a:prstGeom prst="roundRect">
+            <a:avLst/>
+          </a:prstGeom>
+          <a:solidFill>
+            <a:srgbClr val="FFFFFF"/>
+          </a:solidFill>
+          <a:ln>
+            <a:solidFill>
+              <a:srgbClr val="F6F7FB"/>
+            </a:solidFill>
+          </a:ln>
+        </p:spPr>
+        <p:style>
+          <a:lnRef idx="1">
+            <a:schemeClr val="accent1"/>
+          </a:lnRef>
+          <a:fillRef idx="3">
+            <a:schemeClr val="accent1"/>
+          </a:fillRef>
+          <a:effectRef idx="2">
+            <a:schemeClr val="accent1"/>
+          </a:effectRef>
+          <a:fontRef idx="minor">
+            <a:schemeClr val="lt1"/>
+          </a:fontRef>
+        </p:style>
+        <p:txBody>
+          <a:bodyPr rtlCol="0" anchor="ctr"/>
+          <a:lstStyle/>
+          <a:p>
+            <a:pPr algn="ctr"/>
+          </a:p>
+        </p:txBody>
+      </p:sp>
+      <p:sp>
+        <p:nvSpPr>
           <p:cNvPr id="6" name="Rectangle 5"/>
           <p:cNvSpPr/>
           <p:nvPr/>
         </p:nvSpPr>
         <p:spPr>
           <a:xfrm>
-            <a:off x="5806440" y="1508760"/>
-            <a:ext cx="64008" cy="868680"/>
+            <a:off x="594360" y="1508760"/>
+            <a:ext cx="2514600" cy="64008"/>
+          </a:xfrm>
+          <a:prstGeom prst="rect">
+            <a:avLst/>
+          </a:prstGeom>
+          <a:solidFill>
+            <a:srgbClr val="3E8E22"/>
+          </a:solidFill>
+          <a:ln>
+            <a:noFill/>
+          </a:ln>
+        </p:spPr>
+        <p:style>
+          <a:lnRef idx="1">
+            <a:schemeClr val="accent1"/>
+          </a:lnRef>
+          <a:fillRef idx="3">
+            <a:schemeClr val="accent1"/>
+          </a:fillRef>
+          <a:effectRef idx="2">
+            <a:schemeClr val="accent1"/>
+          </a:effectRef>
+          <a:fontRef idx="minor">
+            <a:schemeClr val="lt1"/>
+          </a:fontRef>
+        </p:style>
+        <p:txBody>
+          <a:bodyPr rtlCol="0" anchor="ctr"/>
+          <a:lstStyle/>
+          <a:p>
+            <a:pPr algn="ctr"/>
+          </a:p>
+        </p:txBody>
+      </p:sp>
+      <p:sp>
+        <p:nvSpPr>
+          <p:cNvPr id="7" name="TextBox 6"/>
+          <p:cNvSpPr txBox="1"/>
+          <p:nvPr/>
+        </p:nvSpPr>
+        <p:spPr>
+          <a:xfrm>
+            <a:off x="822960" y="1783080"/>
+            <a:ext cx="2011680" cy="347472"/>
+          </a:xfrm>
+          <a:prstGeom prst="rect">
+            <a:avLst/>
+          </a:prstGeom>
+          <a:noFill/>
+        </p:spPr>
+        <p:txBody>
+          <a:bodyPr wrap="square" lIns="27432" rIns="27432" tIns="18288" bIns="18288">
+            <a:spAutoFit/>
+          </a:bodyPr>
+          <a:lstStyle/>
+          <a:p>
+            <a:pPr algn="ctr"/>
+            <a:r>
+              <a:rPr sz="2200" b="1">
+                <a:solidFill>
+                  <a:srgbClr val="3E8E22"/>
+                </a:solidFill>
+                <a:latin typeface="Segoe UI"/>
+              </a:rPr>
+              <a:t>Light</a:t>
+            </a:r>
+          </a:p>
+        </p:txBody>
+      </p:sp>
+      <p:sp>
+        <p:nvSpPr>
+          <p:cNvPr id="8" name="TextBox 7"/>
+          <p:cNvSpPr txBox="1"/>
+          <p:nvPr/>
+        </p:nvSpPr>
+        <p:spPr>
+          <a:xfrm>
+            <a:off x="868680" y="2331720"/>
+            <a:ext cx="1965960" cy="822960"/>
+          </a:xfrm>
+          <a:prstGeom prst="rect">
+            <a:avLst/>
+          </a:prstGeom>
+          <a:noFill/>
+        </p:spPr>
+        <p:txBody>
+          <a:bodyPr wrap="square" lIns="27432" rIns="27432" tIns="18288" bIns="18288">
+            <a:spAutoFit/>
+          </a:bodyPr>
+          <a:lstStyle/>
+          <a:p>
+            <a:pPr algn="ctr"/>
+            <a:r>
+              <a:rPr sz="1400" b="0">
+                <a:solidFill>
+                  <a:srgbClr val="5A6078"/>
+                </a:solidFill>
+                <a:latin typeface="Segoe UI"/>
+              </a:rPr>
+              <a:t>Quick everyday handoffs, minutes to finish, a source or two.</a:t>
+            </a:r>
+          </a:p>
+        </p:txBody>
+      </p:sp>
+      <p:sp>
+        <p:nvSpPr>
+          <p:cNvPr id="9" name="Rounded Rectangle 8"/>
+          <p:cNvSpPr/>
+          <p:nvPr/>
+        </p:nvSpPr>
+        <p:spPr>
+          <a:xfrm>
+            <a:off x="3429000" y="1508760"/>
+            <a:ext cx="2514600" cy="2331720"/>
+          </a:xfrm>
+          <a:prstGeom prst="roundRect">
+            <a:avLst/>
+          </a:prstGeom>
+          <a:solidFill>
+            <a:srgbClr val="FFFFFF"/>
+          </a:solidFill>
+          <a:ln>
+            <a:solidFill>
+              <a:srgbClr val="F6F7FB"/>
+            </a:solidFill>
+          </a:ln>
+        </p:spPr>
+        <p:style>
+          <a:lnRef idx="1">
+            <a:schemeClr val="accent1"/>
+          </a:lnRef>
+          <a:fillRef idx="3">
+            <a:schemeClr val="accent1"/>
+          </a:fillRef>
+          <a:effectRef idx="2">
+            <a:schemeClr val="accent1"/>
+          </a:effectRef>
+          <a:fontRef idx="minor">
+            <a:schemeClr val="lt1"/>
+          </a:fontRef>
+        </p:style>
+        <p:txBody>
+          <a:bodyPr rtlCol="0" anchor="ctr"/>
+          <a:lstStyle/>
+          <a:p>
+            <a:pPr algn="ctr"/>
+          </a:p>
+        </p:txBody>
+      </p:sp>
+      <p:sp>
+        <p:nvSpPr>
+          <p:cNvPr id="10" name="Rectangle 9"/>
+          <p:cNvSpPr/>
+          <p:nvPr/>
+        </p:nvSpPr>
+        <p:spPr>
+          <a:xfrm>
+            <a:off x="3429000" y="1508760"/>
+            <a:ext cx="2514600" cy="64008"/>
           </a:xfrm>
           <a:prstGeom prst="rect">
             <a:avLst/>
@@ -7231,14 +8570,14 @@
       </p:sp>
       <p:sp>
         <p:nvSpPr>
-          <p:cNvPr id="7" name="TextBox 6"/>
+          <p:cNvPr id="11" name="TextBox 10"/>
           <p:cNvSpPr txBox="1"/>
           <p:nvPr/>
         </p:nvSpPr>
         <p:spPr>
           <a:xfrm>
-            <a:off x="5971031" y="1618488"/>
-            <a:ext cx="2286000" cy="256032"/>
+            <a:off x="3657600" y="1783080"/>
+            <a:ext cx="2011680" cy="347472"/>
           </a:xfrm>
           <a:prstGeom prst="rect">
             <a:avLst/>
@@ -7246,33 +8585,34 @@
           <a:noFill/>
         </p:spPr>
         <p:txBody>
-          <a:bodyPr wrap="square" lIns="36576" rIns="36576" tIns="36576" bIns="36576">
+          <a:bodyPr wrap="square" lIns="27432" rIns="27432" tIns="18288" bIns="18288">
             <a:spAutoFit/>
           </a:bodyPr>
           <a:lstStyle/>
           <a:p>
-            <a:r>
-              <a:rPr sz="1300" b="1">
-                <a:solidFill>
-                  <a:srgbClr val="1B1B2C"/>
+            <a:pPr algn="ctr"/>
+            <a:r>
+              <a:rPr sz="2200" b="1">
+                <a:solidFill>
+                  <a:srgbClr val="0E8E92"/>
                 </a:solidFill>
                 <a:latin typeface="Segoe UI"/>
               </a:rPr>
-              <a:t>Start small</a:t>
-            </a:r>
-          </a:p>
-        </p:txBody>
-      </p:sp>
-      <p:sp>
-        <p:nvSpPr>
-          <p:cNvPr id="8" name="TextBox 7"/>
+              <a:t>Medium</a:t>
+            </a:r>
+          </a:p>
+        </p:txBody>
+      </p:sp>
+      <p:sp>
+        <p:nvSpPr>
+          <p:cNvPr id="12" name="TextBox 11"/>
           <p:cNvSpPr txBox="1"/>
           <p:nvPr/>
         </p:nvSpPr>
         <p:spPr>
           <a:xfrm>
-            <a:off x="5971031" y="1947672"/>
-            <a:ext cx="2286000" cy="365759"/>
+            <a:off x="3703320" y="2331720"/>
+            <a:ext cx="1965960" cy="822960"/>
           </a:xfrm>
           <a:prstGeom prst="rect">
             <a:avLst/>
@@ -7280,33 +8620,34 @@
           <a:noFill/>
         </p:spPr>
         <p:txBody>
-          <a:bodyPr wrap="square" lIns="36576" rIns="36576" tIns="36576" bIns="36576">
+          <a:bodyPr wrap="square" lIns="27432" rIns="27432" tIns="18288" bIns="18288">
             <a:spAutoFit/>
           </a:bodyPr>
           <a:lstStyle/>
           <a:p>
-            <a:r>
-              <a:rPr sz="1100" b="0">
-                <a:solidFill>
-                  <a:srgbClr val="5F667C"/>
+            <a:pPr algn="ctr"/>
+            <a:r>
+              <a:rPr sz="1400" b="0">
+                <a:solidFill>
+                  <a:srgbClr val="5A6078"/>
                 </a:solidFill>
                 <a:latin typeface="Segoe UI"/>
               </a:rPr>
-              <a:t>Use Copilot in chat or the app when that is enough</a:t>
-            </a:r>
-          </a:p>
-        </p:txBody>
-      </p:sp>
-      <p:sp>
-        <p:nvSpPr>
-          <p:cNvPr id="9" name="Rounded Rectangle 8"/>
+              <a:t>Recurring multi-step work that reasons across several sources.</a:t>
+            </a:r>
+          </a:p>
+        </p:txBody>
+      </p:sp>
+      <p:sp>
+        <p:nvSpPr>
+          <p:cNvPr id="13" name="Rounded Rectangle 12"/>
           <p:cNvSpPr/>
           <p:nvPr/>
         </p:nvSpPr>
         <p:spPr>
           <a:xfrm>
-            <a:off x="5806440" y="2606040"/>
-            <a:ext cx="2560320" cy="868680"/>
+            <a:off x="6263640" y="1508760"/>
+            <a:ext cx="2514600" cy="2331720"/>
           </a:xfrm>
           <a:prstGeom prst="roundRect">
             <a:avLst/>
@@ -7316,7 +8657,7 @@
           </a:solidFill>
           <a:ln>
             <a:solidFill>
-              <a:srgbClr val="E6DED4"/>
+              <a:srgbClr val="F6F7FB"/>
             </a:solidFill>
           </a:ln>
         </p:spPr>
@@ -7344,14 +8685,256 @@
       </p:sp>
       <p:sp>
         <p:nvSpPr>
-          <p:cNvPr id="10" name="Rectangle 9"/>
+          <p:cNvPr id="14" name="Rectangle 13"/>
           <p:cNvSpPr/>
           <p:nvPr/>
         </p:nvSpPr>
         <p:spPr>
           <a:xfrm>
-            <a:off x="5806440" y="2606040"/>
-            <a:ext cx="64008" cy="868680"/>
+            <a:off x="6263640" y="1508760"/>
+            <a:ext cx="2514600" cy="64008"/>
+          </a:xfrm>
+          <a:prstGeom prst="rect">
+            <a:avLst/>
+          </a:prstGeom>
+          <a:solidFill>
+            <a:srgbClr val="C73E78"/>
+          </a:solidFill>
+          <a:ln>
+            <a:noFill/>
+          </a:ln>
+        </p:spPr>
+        <p:style>
+          <a:lnRef idx="1">
+            <a:schemeClr val="accent1"/>
+          </a:lnRef>
+          <a:fillRef idx="3">
+            <a:schemeClr val="accent1"/>
+          </a:fillRef>
+          <a:effectRef idx="2">
+            <a:schemeClr val="accent1"/>
+          </a:effectRef>
+          <a:fontRef idx="minor">
+            <a:schemeClr val="lt1"/>
+          </a:fontRef>
+        </p:style>
+        <p:txBody>
+          <a:bodyPr rtlCol="0" anchor="ctr"/>
+          <a:lstStyle/>
+          <a:p>
+            <a:pPr algn="ctr"/>
+          </a:p>
+        </p:txBody>
+      </p:sp>
+      <p:sp>
+        <p:nvSpPr>
+          <p:cNvPr id="15" name="TextBox 14"/>
+          <p:cNvSpPr txBox="1"/>
+          <p:nvPr/>
+        </p:nvSpPr>
+        <p:spPr>
+          <a:xfrm>
+            <a:off x="6492240" y="1783080"/>
+            <a:ext cx="2011680" cy="347472"/>
+          </a:xfrm>
+          <a:prstGeom prst="rect">
+            <a:avLst/>
+          </a:prstGeom>
+          <a:noFill/>
+        </p:spPr>
+        <p:txBody>
+          <a:bodyPr wrap="square" lIns="27432" rIns="27432" tIns="18288" bIns="18288">
+            <a:spAutoFit/>
+          </a:bodyPr>
+          <a:lstStyle/>
+          <a:p>
+            <a:pPr algn="ctr"/>
+            <a:r>
+              <a:rPr sz="2200" b="1">
+                <a:solidFill>
+                  <a:srgbClr val="C73E78"/>
+                </a:solidFill>
+                <a:latin typeface="Segoe UI"/>
+              </a:rPr>
+              <a:t>Heavy</a:t>
+            </a:r>
+          </a:p>
+        </p:txBody>
+      </p:sp>
+      <p:sp>
+        <p:nvSpPr>
+          <p:cNvPr id="16" name="TextBox 15"/>
+          <p:cNvSpPr txBox="1"/>
+          <p:nvPr/>
+        </p:nvSpPr>
+        <p:spPr>
+          <a:xfrm>
+            <a:off x="6537960" y="2331720"/>
+            <a:ext cx="1965960" cy="822960"/>
+          </a:xfrm>
+          <a:prstGeom prst="rect">
+            <a:avLst/>
+          </a:prstGeom>
+          <a:noFill/>
+        </p:spPr>
+        <p:txBody>
+          <a:bodyPr wrap="square" lIns="27432" rIns="27432" tIns="18288" bIns="18288">
+            <a:spAutoFit/>
+          </a:bodyPr>
+          <a:lstStyle/>
+          <a:p>
+            <a:pPr algn="ctr"/>
+            <a:r>
+              <a:rPr sz="1400" b="0">
+                <a:solidFill>
+                  <a:srgbClr val="5A6078"/>
+                </a:solidFill>
+                <a:latin typeface="Segoe UI"/>
+              </a:rPr>
+              <a:t>Large multi-part jobs that produce a full set of artifacts.</a:t>
+            </a:r>
+          </a:p>
+        </p:txBody>
+      </p:sp>
+      <p:sp>
+        <p:nvSpPr>
+          <p:cNvPr id="17" name="TextBox 16"/>
+          <p:cNvSpPr txBox="1"/>
+          <p:nvPr/>
+        </p:nvSpPr>
+        <p:spPr>
+          <a:xfrm>
+            <a:off x="731520" y="4251960"/>
+            <a:ext cx="7680960" cy="320040"/>
+          </a:xfrm>
+          <a:prstGeom prst="rect">
+            <a:avLst/>
+          </a:prstGeom>
+          <a:noFill/>
+        </p:spPr>
+        <p:txBody>
+          <a:bodyPr wrap="square" lIns="27432" rIns="27432" tIns="18288" bIns="18288">
+            <a:spAutoFit/>
+          </a:bodyPr>
+          <a:lstStyle/>
+          <a:p>
+            <a:pPr algn="ctr"/>
+            <a:r>
+              <a:rPr sz="1200" b="0">
+                <a:solidFill>
+                  <a:srgbClr val="5A6078"/>
+                </a:solidFill>
+                <a:latin typeface="Segoe UI"/>
+              </a:rPr>
+              <a:t>Classification follows the source task packs: Lightweight, Everyday workflows, and Hard Problems.</a:t>
+            </a:r>
+          </a:p>
+        </p:txBody>
+      </p:sp>
+    </p:spTree>
+  </p:cSld>
+  <p:clrMapOvr>
+    <a:masterClrMapping/>
+  </p:clrMapOvr>
+</p:sld>
+</file>
+
+<file path=ppt/slides/slide9.xml><?xml version="1.0" encoding="utf-8"?>
+<p:sld xmlns:a="http://schemas.openxmlformats.org/drawingml/2006/main" xmlns:p="http://schemas.openxmlformats.org/presentationml/2006/main" xmlns:r="http://schemas.openxmlformats.org/officeDocument/2006/relationships">
+  <p:cSld>
+    <p:bg>
+      <p:bgPr>
+        <a:solidFill>
+          <a:srgbClr val="FFFAF5"/>
+        </a:solidFill>
+        <a:effectLst/>
+      </p:bgPr>
+    </p:bg>
+    <p:spTree>
+      <p:nvGrpSpPr>
+        <p:cNvPr id="1" name=""/>
+        <p:cNvGrpSpPr/>
+        <p:nvPr/>
+      </p:nvGrpSpPr>
+      <p:grpSpPr/>
+      <p:sp>
+        <p:nvSpPr>
+          <p:cNvPr id="2" name="TextBox 1"/>
+          <p:cNvSpPr txBox="1"/>
+          <p:nvPr/>
+        </p:nvSpPr>
+        <p:spPr>
+          <a:xfrm>
+            <a:off x="502920" y="228600"/>
+            <a:ext cx="6400800" cy="228600"/>
+          </a:xfrm>
+          <a:prstGeom prst="rect">
+            <a:avLst/>
+          </a:prstGeom>
+          <a:noFill/>
+        </p:spPr>
+        <p:txBody>
+          <a:bodyPr wrap="square" lIns="27432" rIns="27432" tIns="18288" bIns="18288">
+            <a:spAutoFit/>
+          </a:bodyPr>
+          <a:lstStyle/>
+          <a:p>
+            <a:r>
+              <a:rPr sz="900" b="1">
+                <a:solidFill>
+                  <a:srgbClr val="5A6078"/>
+                </a:solidFill>
+                <a:latin typeface="Segoe UI"/>
+              </a:rPr>
+              <a:t>GROUPED BY AUDIENCE</a:t>
+            </a:r>
+          </a:p>
+        </p:txBody>
+      </p:sp>
+      <p:sp>
+        <p:nvSpPr>
+          <p:cNvPr id="3" name="TextBox 2"/>
+          <p:cNvSpPr txBox="1"/>
+          <p:nvPr/>
+        </p:nvSpPr>
+        <p:spPr>
+          <a:xfrm>
+            <a:off x="502920" y="438912"/>
+            <a:ext cx="7955279" cy="658368"/>
+          </a:xfrm>
+          <a:prstGeom prst="rect">
+            <a:avLst/>
+          </a:prstGeom>
+          <a:noFill/>
+        </p:spPr>
+        <p:txBody>
+          <a:bodyPr wrap="square" lIns="27432" rIns="27432" tIns="18288" bIns="18288">
+            <a:spAutoFit/>
+          </a:bodyPr>
+          <a:lstStyle/>
+          <a:p>
+            <a:r>
+              <a:rPr sz="2200" b="1">
+                <a:solidFill>
+                  <a:srgbClr val="1B1B2C"/>
+                </a:solidFill>
+                <a:latin typeface="Segoe UI"/>
+              </a:rPr>
+              <a:t>Cowork tasks: light</a:t>
+            </a:r>
+          </a:p>
+        </p:txBody>
+      </p:sp>
+      <p:sp>
+        <p:nvSpPr>
+          <p:cNvPr id="4" name="Rectangle 3"/>
+          <p:cNvSpPr/>
+          <p:nvPr/>
+        </p:nvSpPr>
+        <p:spPr>
+          <a:xfrm>
+            <a:off x="502920" y="1115568"/>
+            <a:ext cx="1097280" cy="45720"/>
           </a:xfrm>
           <a:prstGeom prst="rect">
             <a:avLst/>
@@ -7387,82 +8970,14 @@
       </p:sp>
       <p:sp>
         <p:nvSpPr>
-          <p:cNvPr id="11" name="TextBox 10"/>
-          <p:cNvSpPr txBox="1"/>
-          <p:nvPr/>
-        </p:nvSpPr>
-        <p:spPr>
-          <a:xfrm>
-            <a:off x="5971031" y="2715768"/>
-            <a:ext cx="2286000" cy="256032"/>
-          </a:xfrm>
-          <a:prstGeom prst="rect">
-            <a:avLst/>
-          </a:prstGeom>
-          <a:noFill/>
-        </p:spPr>
-        <p:txBody>
-          <a:bodyPr wrap="square" lIns="36576" rIns="36576" tIns="36576" bIns="36576">
-            <a:spAutoFit/>
-          </a:bodyPr>
-          <a:lstStyle/>
-          <a:p>
-            <a:r>
-              <a:rPr sz="1300" b="1">
-                <a:solidFill>
-                  <a:srgbClr val="1B1B2C"/>
-                </a:solidFill>
-                <a:latin typeface="Segoe UI"/>
-              </a:rPr>
-              <a:t>Scale up</a:t>
-            </a:r>
-          </a:p>
-        </p:txBody>
-      </p:sp>
-      <p:sp>
-        <p:nvSpPr>
-          <p:cNvPr id="12" name="TextBox 11"/>
-          <p:cNvSpPr txBox="1"/>
-          <p:nvPr/>
-        </p:nvSpPr>
-        <p:spPr>
-          <a:xfrm>
-            <a:off x="5971031" y="3044952"/>
-            <a:ext cx="2286000" cy="365759"/>
-          </a:xfrm>
-          <a:prstGeom prst="rect">
-            <a:avLst/>
-          </a:prstGeom>
-          <a:noFill/>
-        </p:spPr>
-        <p:txBody>
-          <a:bodyPr wrap="square" lIns="36576" rIns="36576" tIns="36576" bIns="36576">
-            <a:spAutoFit/>
-          </a:bodyPr>
-          <a:lstStyle/>
-          <a:p>
-            <a:r>
-              <a:rPr sz="1100" b="0">
-                <a:solidFill>
-                  <a:srgbClr val="5F667C"/>
-                </a:solidFill>
-                <a:latin typeface="Segoe UI"/>
-              </a:rPr>
-              <a:t>Bring in ready agents or Cowork as the job grows</a:t>
-            </a:r>
-          </a:p>
-        </p:txBody>
-      </p:sp>
-      <p:sp>
-        <p:nvSpPr>
-          <p:cNvPr id="13" name="Rounded Rectangle 12"/>
+          <p:cNvPr id="5" name="Rounded Rectangle 4"/>
           <p:cNvSpPr/>
           <p:nvPr/>
         </p:nvSpPr>
         <p:spPr>
           <a:xfrm>
-            <a:off x="5806440" y="3703320"/>
-            <a:ext cx="2560320" cy="868680"/>
+            <a:off x="548640" y="1261872"/>
+            <a:ext cx="2636520" cy="3456432"/>
           </a:xfrm>
           <a:prstGeom prst="roundRect">
             <a:avLst/>
@@ -7472,7 +8987,7 @@
           </a:solidFill>
           <a:ln>
             <a:solidFill>
-              <a:srgbClr val="E6DED4"/>
+              <a:srgbClr val="F6F7FB"/>
             </a:solidFill>
           </a:ln>
         </p:spPr>
@@ -7500,14 +9015,14 @@
       </p:sp>
       <p:sp>
         <p:nvSpPr>
-          <p:cNvPr id="14" name="Rectangle 13"/>
+          <p:cNvPr id="6" name="Rectangle 5"/>
           <p:cNvSpPr/>
           <p:nvPr/>
         </p:nvSpPr>
         <p:spPr>
           <a:xfrm>
-            <a:off x="5806440" y="3703320"/>
-            <a:ext cx="64008" cy="868680"/>
+            <a:off x="548640" y="1261872"/>
+            <a:ext cx="2636520" cy="64008"/>
           </a:xfrm>
           <a:prstGeom prst="rect">
             <a:avLst/>
@@ -7543,14 +9058,14 @@
       </p:sp>
       <p:sp>
         <p:nvSpPr>
-          <p:cNvPr id="15" name="TextBox 14"/>
+          <p:cNvPr id="7" name="TextBox 6"/>
           <p:cNvSpPr txBox="1"/>
           <p:nvPr/>
         </p:nvSpPr>
         <p:spPr>
           <a:xfrm>
-            <a:off x="5971031" y="3813048"/>
-            <a:ext cx="2286000" cy="256032"/>
+            <a:off x="685800" y="1463040"/>
+            <a:ext cx="2362200" cy="274320"/>
           </a:xfrm>
           <a:prstGeom prst="rect">
             <a:avLst/>
@@ -7558,7 +9073,7 @@
           <a:noFill/>
         </p:spPr>
         <p:txBody>
-          <a:bodyPr wrap="square" lIns="36576" rIns="36576" tIns="36576" bIns="36576">
+          <a:bodyPr wrap="square" lIns="27432" rIns="27432" tIns="18288" bIns="18288">
             <a:spAutoFit/>
           </a:bodyPr>
           <a:lstStyle/>
@@ -7566,12 +9081,304 @@
             <a:r>
               <a:rPr sz="1300" b="1">
                 <a:solidFill>
+                  <a:srgbClr val="3E8E22"/>
+                </a:solidFill>
+                <a:latin typeface="Segoe UI"/>
+              </a:rPr>
+              <a:t>All teams</a:t>
+            </a:r>
+          </a:p>
+        </p:txBody>
+      </p:sp>
+      <p:sp>
+        <p:nvSpPr>
+          <p:cNvPr id="8" name="TextBox 7"/>
+          <p:cNvSpPr txBox="1"/>
+          <p:nvPr/>
+        </p:nvSpPr>
+        <p:spPr>
+          <a:xfrm>
+            <a:off x="713232" y="1828800"/>
+            <a:ext cx="2307336" cy="228600"/>
+          </a:xfrm>
+          <a:prstGeom prst="rect">
+            <a:avLst/>
+          </a:prstGeom>
+          <a:noFill/>
+        </p:spPr>
+        <p:txBody>
+          <a:bodyPr wrap="square" lIns="27432" rIns="27432" tIns="18288" bIns="18288">
+            <a:spAutoFit/>
+          </a:bodyPr>
+          <a:lstStyle/>
+          <a:p>
+            <a:r>
+              <a:rPr sz="1000" b="1">
+                <a:solidFill>
                   <a:srgbClr val="1B1B2C"/>
                 </a:solidFill>
                 <a:latin typeface="Segoe UI"/>
               </a:rPr>
-              <a:t>Stay in control</a:t>
-            </a:r>
+              <a:t>Rebalance your week and protect focus time</a:t>
+            </a:r>
+          </a:p>
+        </p:txBody>
+      </p:sp>
+      <p:sp>
+        <p:nvSpPr>
+          <p:cNvPr id="9" name="TextBox 8"/>
+          <p:cNvSpPr txBox="1"/>
+          <p:nvPr/>
+        </p:nvSpPr>
+        <p:spPr>
+          <a:xfrm>
+            <a:off x="713232" y="2048256"/>
+            <a:ext cx="2307336" cy="301752"/>
+          </a:xfrm>
+          <a:prstGeom prst="rect">
+            <a:avLst/>
+          </a:prstGeom>
+          <a:noFill/>
+        </p:spPr>
+        <p:txBody>
+          <a:bodyPr wrap="square" lIns="27432" rIns="27432" tIns="18288" bIns="18288">
+            <a:spAutoFit/>
+          </a:bodyPr>
+          <a:lstStyle/>
+          <a:p>
+            <a:r>
+              <a:rPr sz="900" b="0">
+                <a:solidFill>
+                  <a:srgbClr val="5A6078"/>
+                </a:solidFill>
+                <a:latin typeface="Segoe UI"/>
+              </a:rPr>
+              <a:t>Rebalance the week, resolve conflicts, and protect focus blocks.</a:t>
+            </a:r>
+          </a:p>
+        </p:txBody>
+      </p:sp>
+      <p:sp>
+        <p:nvSpPr>
+          <p:cNvPr id="10" name="TextBox 9"/>
+          <p:cNvSpPr txBox="1"/>
+          <p:nvPr/>
+        </p:nvSpPr>
+        <p:spPr>
+          <a:xfrm>
+            <a:off x="713232" y="2487168"/>
+            <a:ext cx="2307336" cy="228600"/>
+          </a:xfrm>
+          <a:prstGeom prst="rect">
+            <a:avLst/>
+          </a:prstGeom>
+          <a:noFill/>
+        </p:spPr>
+        <p:txBody>
+          <a:bodyPr wrap="square" lIns="27432" rIns="27432" tIns="18288" bIns="18288">
+            <a:spAutoFit/>
+          </a:bodyPr>
+          <a:lstStyle/>
+          <a:p>
+            <a:r>
+              <a:rPr sz="1000" b="1">
+                <a:solidFill>
+                  <a:srgbClr val="1B1B2C"/>
+                </a:solidFill>
+                <a:latin typeface="Segoe UI"/>
+              </a:rPr>
+              <a:t>Wrap up projects and organize all related work</a:t>
+            </a:r>
+          </a:p>
+        </p:txBody>
+      </p:sp>
+      <p:sp>
+        <p:nvSpPr>
+          <p:cNvPr id="11" name="TextBox 10"/>
+          <p:cNvSpPr txBox="1"/>
+          <p:nvPr/>
+        </p:nvSpPr>
+        <p:spPr>
+          <a:xfrm>
+            <a:off x="713232" y="2706624"/>
+            <a:ext cx="2307336" cy="301752"/>
+          </a:xfrm>
+          <a:prstGeom prst="rect">
+            <a:avLst/>
+          </a:prstGeom>
+          <a:noFill/>
+        </p:spPr>
+        <p:txBody>
+          <a:bodyPr wrap="square" lIns="27432" rIns="27432" tIns="18288" bIns="18288">
+            <a:spAutoFit/>
+          </a:bodyPr>
+          <a:lstStyle/>
+          <a:p>
+            <a:r>
+              <a:rPr sz="900" b="0">
+                <a:solidFill>
+                  <a:srgbClr val="5A6078"/>
+                </a:solidFill>
+                <a:latin typeface="Segoe UI"/>
+              </a:rPr>
+              <a:t>Close the project with a clean, shareable OneDrive archive.</a:t>
+            </a:r>
+          </a:p>
+        </p:txBody>
+      </p:sp>
+      <p:sp>
+        <p:nvSpPr>
+          <p:cNvPr id="12" name="TextBox 11"/>
+          <p:cNvSpPr txBox="1"/>
+          <p:nvPr/>
+        </p:nvSpPr>
+        <p:spPr>
+          <a:xfrm>
+            <a:off x="713232" y="3145535"/>
+            <a:ext cx="2307336" cy="228600"/>
+          </a:xfrm>
+          <a:prstGeom prst="rect">
+            <a:avLst/>
+          </a:prstGeom>
+          <a:noFill/>
+        </p:spPr>
+        <p:txBody>
+          <a:bodyPr wrap="square" lIns="27432" rIns="27432" tIns="18288" bIns="18288">
+            <a:spAutoFit/>
+          </a:bodyPr>
+          <a:lstStyle/>
+          <a:p>
+            <a:r>
+              <a:rPr sz="1000" b="1">
+                <a:solidFill>
+                  <a:srgbClr val="1B1B2C"/>
+                </a:solidFill>
+                <a:latin typeface="Segoe UI"/>
+              </a:rPr>
+              <a:t>Catch up on messages and send replies automatically</a:t>
+            </a:r>
+          </a:p>
+        </p:txBody>
+      </p:sp>
+      <p:sp>
+        <p:nvSpPr>
+          <p:cNvPr id="13" name="TextBox 12"/>
+          <p:cNvSpPr txBox="1"/>
+          <p:nvPr/>
+        </p:nvSpPr>
+        <p:spPr>
+          <a:xfrm>
+            <a:off x="713232" y="3364991"/>
+            <a:ext cx="2307336" cy="301752"/>
+          </a:xfrm>
+          <a:prstGeom prst="rect">
+            <a:avLst/>
+          </a:prstGeom>
+          <a:noFill/>
+        </p:spPr>
+        <p:txBody>
+          <a:bodyPr wrap="square" lIns="27432" rIns="27432" tIns="18288" bIns="18288">
+            <a:spAutoFit/>
+          </a:bodyPr>
+          <a:lstStyle/>
+          <a:p>
+            <a:r>
+              <a:rPr sz="900" b="0">
+                <a:solidFill>
+                  <a:srgbClr val="5A6078"/>
+                </a:solidFill>
+                <a:latin typeface="Segoe UI"/>
+              </a:rPr>
+              <a:t>Handle routine replies and draft higher-stakes responses for review.</a:t>
+            </a:r>
+          </a:p>
+        </p:txBody>
+      </p:sp>
+      <p:sp>
+        <p:nvSpPr>
+          <p:cNvPr id="14" name="Rounded Rectangle 13"/>
+          <p:cNvSpPr/>
+          <p:nvPr/>
+        </p:nvSpPr>
+        <p:spPr>
+          <a:xfrm>
+            <a:off x="3340608" y="1261872"/>
+            <a:ext cx="2636520" cy="3456432"/>
+          </a:xfrm>
+          <a:prstGeom prst="roundRect">
+            <a:avLst/>
+          </a:prstGeom>
+          <a:solidFill>
+            <a:srgbClr val="FFFFFF"/>
+          </a:solidFill>
+          <a:ln>
+            <a:solidFill>
+              <a:srgbClr val="F6F7FB"/>
+            </a:solidFill>
+          </a:ln>
+        </p:spPr>
+        <p:style>
+          <a:lnRef idx="1">
+            <a:schemeClr val="accent1"/>
+          </a:lnRef>
+          <a:fillRef idx="3">
+            <a:schemeClr val="accent1"/>
+          </a:fillRef>
+          <a:effectRef idx="2">
+            <a:schemeClr val="accent1"/>
+          </a:effectRef>
+          <a:fontRef idx="minor">
+            <a:schemeClr val="lt1"/>
+          </a:fontRef>
+        </p:style>
+        <p:txBody>
+          <a:bodyPr rtlCol="0" anchor="ctr"/>
+          <a:lstStyle/>
+          <a:p>
+            <a:pPr algn="ctr"/>
+          </a:p>
+        </p:txBody>
+      </p:sp>
+      <p:sp>
+        <p:nvSpPr>
+          <p:cNvPr id="15" name="Rectangle 14"/>
+          <p:cNvSpPr/>
+          <p:nvPr/>
+        </p:nvSpPr>
+        <p:spPr>
+          <a:xfrm>
+            <a:off x="3340608" y="1261872"/>
+            <a:ext cx="2636520" cy="64008"/>
+          </a:xfrm>
+          <a:prstGeom prst="rect">
+            <a:avLst/>
+          </a:prstGeom>
+          <a:solidFill>
+            <a:srgbClr val="3E8E22"/>
+          </a:solidFill>
+          <a:ln>
+            <a:noFill/>
+          </a:ln>
+        </p:spPr>
+        <p:style>
+          <a:lnRef idx="1">
+            <a:schemeClr val="accent1"/>
+          </a:lnRef>
+          <a:fillRef idx="3">
+            <a:schemeClr val="accent1"/>
+          </a:fillRef>
+          <a:effectRef idx="2">
+            <a:schemeClr val="accent1"/>
+          </a:effectRef>
+          <a:fontRef idx="minor">
+            <a:schemeClr val="lt1"/>
+          </a:fontRef>
+        </p:style>
+        <p:txBody>
+          <a:bodyPr rtlCol="0" anchor="ctr"/>
+          <a:lstStyle/>
+          <a:p>
+            <a:pPr algn="ctr"/>
           </a:p>
         </p:txBody>
       </p:sp>
@@ -7583,8 +9390,8 @@
         </p:nvSpPr>
         <p:spPr>
           <a:xfrm>
-            <a:off x="5971031" y="4142231"/>
-            <a:ext cx="2286000" cy="365759"/>
+            <a:off x="3477768" y="1463040"/>
+            <a:ext cx="2362200" cy="274320"/>
           </a:xfrm>
           <a:prstGeom prst="rect">
             <a:avLst/>
@@ -7592,19 +9399,345 @@
           <a:noFill/>
         </p:spPr>
         <p:txBody>
-          <a:bodyPr wrap="square" lIns="36576" rIns="36576" tIns="36576" bIns="36576">
+          <a:bodyPr wrap="square" lIns="27432" rIns="27432" tIns="18288" bIns="18288">
             <a:spAutoFit/>
           </a:bodyPr>
           <a:lstStyle/>
           <a:p>
             <a:r>
-              <a:rPr sz="1100" b="0">
-                <a:solidFill>
-                  <a:srgbClr val="5F667C"/>
+              <a:rPr sz="1300" b="1">
+                <a:solidFill>
+                  <a:srgbClr val="3E8E22"/>
                 </a:solidFill>
                 <a:latin typeface="Segoe UI"/>
               </a:rPr>
-              <a:t>Keep approvals clear when actions are involved</a:t>
+              <a:t>Sales</a:t>
+            </a:r>
+          </a:p>
+        </p:txBody>
+      </p:sp>
+      <p:sp>
+        <p:nvSpPr>
+          <p:cNvPr id="17" name="TextBox 16"/>
+          <p:cNvSpPr txBox="1"/>
+          <p:nvPr/>
+        </p:nvSpPr>
+        <p:spPr>
+          <a:xfrm>
+            <a:off x="3505200" y="1828800"/>
+            <a:ext cx="2307336" cy="228600"/>
+          </a:xfrm>
+          <a:prstGeom prst="rect">
+            <a:avLst/>
+          </a:prstGeom>
+          <a:noFill/>
+        </p:spPr>
+        <p:txBody>
+          <a:bodyPr wrap="square" lIns="27432" rIns="27432" tIns="18288" bIns="18288">
+            <a:spAutoFit/>
+          </a:bodyPr>
+          <a:lstStyle/>
+          <a:p>
+            <a:r>
+              <a:rPr sz="1000" b="1">
+                <a:solidFill>
+                  <a:srgbClr val="1B1B2C"/>
+                </a:solidFill>
+                <a:latin typeface="Segoe UI"/>
+              </a:rPr>
+              <a:t>Pricing screenshot to customer presentation</a:t>
+            </a:r>
+          </a:p>
+        </p:txBody>
+      </p:sp>
+      <p:sp>
+        <p:nvSpPr>
+          <p:cNvPr id="18" name="TextBox 17"/>
+          <p:cNvSpPr txBox="1"/>
+          <p:nvPr/>
+        </p:nvSpPr>
+        <p:spPr>
+          <a:xfrm>
+            <a:off x="3505200" y="2048256"/>
+            <a:ext cx="2307336" cy="301752"/>
+          </a:xfrm>
+          <a:prstGeom prst="rect">
+            <a:avLst/>
+          </a:prstGeom>
+          <a:noFill/>
+        </p:spPr>
+        <p:txBody>
+          <a:bodyPr wrap="square" lIns="27432" rIns="27432" tIns="18288" bIns="18288">
+            <a:spAutoFit/>
+          </a:bodyPr>
+          <a:lstStyle/>
+          <a:p>
+            <a:r>
+              <a:rPr sz="900" b="0">
+                <a:solidFill>
+                  <a:srgbClr val="5A6078"/>
+                </a:solidFill>
+                <a:latin typeface="Segoe UI"/>
+              </a:rPr>
+              <a:t>Turn approved pricing into a customer-ready deck and draft email.</a:t>
+            </a:r>
+          </a:p>
+        </p:txBody>
+      </p:sp>
+      <p:sp>
+        <p:nvSpPr>
+          <p:cNvPr id="19" name="TextBox 18"/>
+          <p:cNvSpPr txBox="1"/>
+          <p:nvPr/>
+        </p:nvSpPr>
+        <p:spPr>
+          <a:xfrm>
+            <a:off x="3505200" y="2487168"/>
+            <a:ext cx="2307336" cy="228600"/>
+          </a:xfrm>
+          <a:prstGeom prst="rect">
+            <a:avLst/>
+          </a:prstGeom>
+          <a:noFill/>
+        </p:spPr>
+        <p:txBody>
+          <a:bodyPr wrap="square" lIns="27432" rIns="27432" tIns="18288" bIns="18288">
+            <a:spAutoFit/>
+          </a:bodyPr>
+          <a:lstStyle/>
+          <a:p>
+            <a:r>
+              <a:rPr sz="1000" b="1">
+                <a:solidFill>
+                  <a:srgbClr val="1B1B2C"/>
+                </a:solidFill>
+                <a:latin typeface="Segoe UI"/>
+              </a:rPr>
+              <a:t>Weekly external customer email review</a:t>
+            </a:r>
+          </a:p>
+        </p:txBody>
+      </p:sp>
+      <p:sp>
+        <p:nvSpPr>
+          <p:cNvPr id="20" name="TextBox 19"/>
+          <p:cNvSpPr txBox="1"/>
+          <p:nvPr/>
+        </p:nvSpPr>
+        <p:spPr>
+          <a:xfrm>
+            <a:off x="3505200" y="2706624"/>
+            <a:ext cx="2307336" cy="301752"/>
+          </a:xfrm>
+          <a:prstGeom prst="rect">
+            <a:avLst/>
+          </a:prstGeom>
+          <a:noFill/>
+        </p:spPr>
+        <p:txBody>
+          <a:bodyPr wrap="square" lIns="27432" rIns="27432" tIns="18288" bIns="18288">
+            <a:spAutoFit/>
+          </a:bodyPr>
+          <a:lstStyle/>
+          <a:p>
+            <a:r>
+              <a:rPr sz="900" b="0">
+                <a:solidFill>
+                  <a:srgbClr val="5A6078"/>
+                </a:solidFill>
+                <a:latin typeface="Segoe UI"/>
+              </a:rPr>
+              <a:t>Surface action items, draft replies, and send a Teams reminder.</a:t>
+            </a:r>
+          </a:p>
+        </p:txBody>
+      </p:sp>
+      <p:sp>
+        <p:nvSpPr>
+          <p:cNvPr id="21" name="Rounded Rectangle 20"/>
+          <p:cNvSpPr/>
+          <p:nvPr/>
+        </p:nvSpPr>
+        <p:spPr>
+          <a:xfrm>
+            <a:off x="6132576" y="1261872"/>
+            <a:ext cx="2636520" cy="3456432"/>
+          </a:xfrm>
+          <a:prstGeom prst="roundRect">
+            <a:avLst/>
+          </a:prstGeom>
+          <a:solidFill>
+            <a:srgbClr val="FFFFFF"/>
+          </a:solidFill>
+          <a:ln>
+            <a:solidFill>
+              <a:srgbClr val="F6F7FB"/>
+            </a:solidFill>
+          </a:ln>
+        </p:spPr>
+        <p:style>
+          <a:lnRef idx="1">
+            <a:schemeClr val="accent1"/>
+          </a:lnRef>
+          <a:fillRef idx="3">
+            <a:schemeClr val="accent1"/>
+          </a:fillRef>
+          <a:effectRef idx="2">
+            <a:schemeClr val="accent1"/>
+          </a:effectRef>
+          <a:fontRef idx="minor">
+            <a:schemeClr val="lt1"/>
+          </a:fontRef>
+        </p:style>
+        <p:txBody>
+          <a:bodyPr rtlCol="0" anchor="ctr"/>
+          <a:lstStyle/>
+          <a:p>
+            <a:pPr algn="ctr"/>
+          </a:p>
+        </p:txBody>
+      </p:sp>
+      <p:sp>
+        <p:nvSpPr>
+          <p:cNvPr id="22" name="Rectangle 21"/>
+          <p:cNvSpPr/>
+          <p:nvPr/>
+        </p:nvSpPr>
+        <p:spPr>
+          <a:xfrm>
+            <a:off x="6132576" y="1261872"/>
+            <a:ext cx="2636520" cy="64008"/>
+          </a:xfrm>
+          <a:prstGeom prst="rect">
+            <a:avLst/>
+          </a:prstGeom>
+          <a:solidFill>
+            <a:srgbClr val="3E8E22"/>
+          </a:solidFill>
+          <a:ln>
+            <a:noFill/>
+          </a:ln>
+        </p:spPr>
+        <p:style>
+          <a:lnRef idx="1">
+            <a:schemeClr val="accent1"/>
+          </a:lnRef>
+          <a:fillRef idx="3">
+            <a:schemeClr val="accent1"/>
+          </a:fillRef>
+          <a:effectRef idx="2">
+            <a:schemeClr val="accent1"/>
+          </a:effectRef>
+          <a:fontRef idx="minor">
+            <a:schemeClr val="lt1"/>
+          </a:fontRef>
+        </p:style>
+        <p:txBody>
+          <a:bodyPr rtlCol="0" anchor="ctr"/>
+          <a:lstStyle/>
+          <a:p>
+            <a:pPr algn="ctr"/>
+          </a:p>
+        </p:txBody>
+      </p:sp>
+      <p:sp>
+        <p:nvSpPr>
+          <p:cNvPr id="23" name="TextBox 22"/>
+          <p:cNvSpPr txBox="1"/>
+          <p:nvPr/>
+        </p:nvSpPr>
+        <p:spPr>
+          <a:xfrm>
+            <a:off x="6269736" y="1463040"/>
+            <a:ext cx="2362200" cy="274320"/>
+          </a:xfrm>
+          <a:prstGeom prst="rect">
+            <a:avLst/>
+          </a:prstGeom>
+          <a:noFill/>
+        </p:spPr>
+        <p:txBody>
+          <a:bodyPr wrap="square" lIns="27432" rIns="27432" tIns="18288" bIns="18288">
+            <a:spAutoFit/>
+          </a:bodyPr>
+          <a:lstStyle/>
+          <a:p>
+            <a:r>
+              <a:rPr sz="1300" b="1">
+                <a:solidFill>
+                  <a:srgbClr val="3E8E22"/>
+                </a:solidFill>
+                <a:latin typeface="Segoe UI"/>
+              </a:rPr>
+              <a:t>Marketing</a:t>
+            </a:r>
+          </a:p>
+        </p:txBody>
+      </p:sp>
+      <p:sp>
+        <p:nvSpPr>
+          <p:cNvPr id="24" name="TextBox 23"/>
+          <p:cNvSpPr txBox="1"/>
+          <p:nvPr/>
+        </p:nvSpPr>
+        <p:spPr>
+          <a:xfrm>
+            <a:off x="6297168" y="1828800"/>
+            <a:ext cx="2307336" cy="228600"/>
+          </a:xfrm>
+          <a:prstGeom prst="rect">
+            <a:avLst/>
+          </a:prstGeom>
+          <a:noFill/>
+        </p:spPr>
+        <p:txBody>
+          <a:bodyPr wrap="square" lIns="27432" rIns="27432" tIns="18288" bIns="18288">
+            <a:spAutoFit/>
+          </a:bodyPr>
+          <a:lstStyle/>
+          <a:p>
+            <a:r>
+              <a:rPr sz="1000" b="1">
+                <a:solidFill>
+                  <a:srgbClr val="1B1B2C"/>
+                </a:solidFill>
+                <a:latin typeface="Segoe UI"/>
+              </a:rPr>
+              <a:t>Research and insights alignment recap</a:t>
+            </a:r>
+          </a:p>
+        </p:txBody>
+      </p:sp>
+      <p:sp>
+        <p:nvSpPr>
+          <p:cNvPr id="25" name="TextBox 24"/>
+          <p:cNvSpPr txBox="1"/>
+          <p:nvPr/>
+        </p:nvSpPr>
+        <p:spPr>
+          <a:xfrm>
+            <a:off x="6297168" y="2048256"/>
+            <a:ext cx="2307336" cy="301752"/>
+          </a:xfrm>
+          <a:prstGeom prst="rect">
+            <a:avLst/>
+          </a:prstGeom>
+          <a:noFill/>
+        </p:spPr>
+        <p:txBody>
+          <a:bodyPr wrap="square" lIns="27432" rIns="27432" tIns="18288" bIns="18288">
+            <a:spAutoFit/>
+          </a:bodyPr>
+          <a:lstStyle/>
+          <a:p>
+            <a:r>
+              <a:rPr sz="900" b="0">
+                <a:solidFill>
+                  <a:srgbClr val="5A6078"/>
+                </a:solidFill>
+                <a:latin typeface="Segoe UI"/>
+              </a:rPr>
+              <a:t>Post decisions, open issues, and named next steps to Teams.</a:t>
             </a:r>
           </a:p>
         </p:txBody>

--- a/slides/business-lite.pptx
+++ b/slides/business-lite.pptx
@@ -17,6 +17,7 @@
     <p:sldId id="265" r:id="rId16"/>
     <p:sldId id="266" r:id="rId17"/>
     <p:sldId id="267" r:id="rId18"/>
+    <p:sldId id="268" r:id="rId19"/>
   </p:sldIdLst>
   <p:sldSz cx="9144000" cy="5143500" type="screen4x3"/>
   <p:notesSz cx="6858000" cy="9144000"/>
@@ -5029,6 +5030,299 @@
 </file>
 
 <file path=ppt/slides/slide12.xml><?xml version="1.0" encoding="utf-8"?>
+<p:sld xmlns:a="http://schemas.openxmlformats.org/drawingml/2006/main" xmlns:p="http://schemas.openxmlformats.org/presentationml/2006/main" xmlns:r="http://schemas.openxmlformats.org/officeDocument/2006/relationships">
+  <p:cSld>
+    <p:bg>
+      <p:bgPr>
+        <a:solidFill>
+          <a:srgbClr val="FFFAF5"/>
+        </a:solidFill>
+        <a:effectLst/>
+      </p:bgPr>
+    </p:bg>
+    <p:spTree>
+      <p:nvGrpSpPr>
+        <p:cNvPr id="1" name=""/>
+        <p:cNvGrpSpPr/>
+        <p:nvPr/>
+      </p:nvGrpSpPr>
+      <p:grpSpPr/>
+      <p:sp>
+        <p:nvSpPr>
+          <p:cNvPr id="2" name="TextBox 1"/>
+          <p:cNvSpPr txBox="1"/>
+          <p:nvPr/>
+        </p:nvSpPr>
+        <p:spPr>
+          <a:xfrm>
+            <a:off x="502920" y="228600"/>
+            <a:ext cx="6400800" cy="228600"/>
+          </a:xfrm>
+          <a:prstGeom prst="rect">
+            <a:avLst/>
+          </a:prstGeom>
+          <a:noFill/>
+        </p:spPr>
+        <p:txBody>
+          <a:bodyPr wrap="square" lIns="27432" rIns="27432" tIns="18288" bIns="18288">
+            <a:spAutoFit/>
+          </a:bodyPr>
+          <a:lstStyle/>
+          <a:p>
+            <a:r>
+              <a:rPr sz="900" b="1">
+                <a:solidFill>
+                  <a:srgbClr val="5A6078"/>
+                </a:solidFill>
+                <a:latin typeface="Segoe UI"/>
+              </a:rPr>
+              <a:t>COPILOT COWORK</a:t>
+            </a:r>
+          </a:p>
+        </p:txBody>
+      </p:sp>
+      <p:sp>
+        <p:nvSpPr>
+          <p:cNvPr id="3" name="TextBox 2"/>
+          <p:cNvSpPr txBox="1"/>
+          <p:nvPr/>
+        </p:nvSpPr>
+        <p:spPr>
+          <a:xfrm>
+            <a:off x="502920" y="438912"/>
+            <a:ext cx="7955279" cy="658368"/>
+          </a:xfrm>
+          <a:prstGeom prst="rect">
+            <a:avLst/>
+          </a:prstGeom>
+          <a:noFill/>
+        </p:spPr>
+        <p:txBody>
+          <a:bodyPr wrap="square" lIns="27432" rIns="27432" tIns="18288" bIns="18288">
+            <a:spAutoFit/>
+          </a:bodyPr>
+          <a:lstStyle/>
+          <a:p>
+            <a:r>
+              <a:rPr sz="2200" b="1">
+                <a:solidFill>
+                  <a:srgbClr val="1B1B2C"/>
+                </a:solidFill>
+                <a:latin typeface="Segoe UI"/>
+              </a:rPr>
+              <a:t>Add-on tip: schedule Cowork prompts</a:t>
+            </a:r>
+          </a:p>
+        </p:txBody>
+      </p:sp>
+      <p:sp>
+        <p:nvSpPr>
+          <p:cNvPr id="4" name="Rectangle 3"/>
+          <p:cNvSpPr/>
+          <p:nvPr/>
+        </p:nvSpPr>
+        <p:spPr>
+          <a:xfrm>
+            <a:off x="502920" y="1115568"/>
+            <a:ext cx="1097280" cy="45720"/>
+          </a:xfrm>
+          <a:prstGeom prst="rect">
+            <a:avLst/>
+          </a:prstGeom>
+          <a:solidFill>
+            <a:srgbClr val="1A6FD6"/>
+          </a:solidFill>
+          <a:ln>
+            <a:noFill/>
+          </a:ln>
+        </p:spPr>
+        <p:style>
+          <a:lnRef idx="1">
+            <a:schemeClr val="accent1"/>
+          </a:lnRef>
+          <a:fillRef idx="3">
+            <a:schemeClr val="accent1"/>
+          </a:fillRef>
+          <a:effectRef idx="2">
+            <a:schemeClr val="accent1"/>
+          </a:effectRef>
+          <a:fontRef idx="minor">
+            <a:schemeClr val="lt1"/>
+          </a:fontRef>
+        </p:style>
+        <p:txBody>
+          <a:bodyPr rtlCol="0" anchor="ctr"/>
+          <a:lstStyle/>
+          <a:p>
+            <a:pPr algn="ctr"/>
+          </a:p>
+        </p:txBody>
+      </p:sp>
+      <p:sp>
+        <p:nvSpPr>
+          <p:cNvPr id="5" name="Rounded Rectangle 4"/>
+          <p:cNvSpPr/>
+          <p:nvPr/>
+        </p:nvSpPr>
+        <p:spPr>
+          <a:xfrm>
+            <a:off x="914400" y="1600200"/>
+            <a:ext cx="7315200" cy="2240280"/>
+          </a:xfrm>
+          <a:prstGeom prst="roundRect">
+            <a:avLst/>
+          </a:prstGeom>
+          <a:solidFill>
+            <a:srgbClr val="FFFFFF"/>
+          </a:solidFill>
+          <a:ln>
+            <a:solidFill>
+              <a:srgbClr val="F6F7FB"/>
+            </a:solidFill>
+          </a:ln>
+        </p:spPr>
+        <p:style>
+          <a:lnRef idx="1">
+            <a:schemeClr val="accent1"/>
+          </a:lnRef>
+          <a:fillRef idx="3">
+            <a:schemeClr val="accent1"/>
+          </a:fillRef>
+          <a:effectRef idx="2">
+            <a:schemeClr val="accent1"/>
+          </a:effectRef>
+          <a:fontRef idx="minor">
+            <a:schemeClr val="lt1"/>
+          </a:fontRef>
+        </p:style>
+        <p:txBody>
+          <a:bodyPr rtlCol="0" anchor="ctr"/>
+          <a:lstStyle/>
+          <a:p>
+            <a:pPr algn="ctr"/>
+          </a:p>
+        </p:txBody>
+      </p:sp>
+      <p:sp>
+        <p:nvSpPr>
+          <p:cNvPr id="6" name="Rectangle 5"/>
+          <p:cNvSpPr/>
+          <p:nvPr/>
+        </p:nvSpPr>
+        <p:spPr>
+          <a:xfrm>
+            <a:off x="914400" y="1600200"/>
+            <a:ext cx="7315200" cy="64008"/>
+          </a:xfrm>
+          <a:prstGeom prst="rect">
+            <a:avLst/>
+          </a:prstGeom>
+          <a:solidFill>
+            <a:srgbClr val="3E8E22"/>
+          </a:solidFill>
+          <a:ln>
+            <a:noFill/>
+          </a:ln>
+        </p:spPr>
+        <p:style>
+          <a:lnRef idx="1">
+            <a:schemeClr val="accent1"/>
+          </a:lnRef>
+          <a:fillRef idx="3">
+            <a:schemeClr val="accent1"/>
+          </a:fillRef>
+          <a:effectRef idx="2">
+            <a:schemeClr val="accent1"/>
+          </a:effectRef>
+          <a:fontRef idx="minor">
+            <a:schemeClr val="lt1"/>
+          </a:fontRef>
+        </p:style>
+        <p:txBody>
+          <a:bodyPr rtlCol="0" anchor="ctr"/>
+          <a:lstStyle/>
+          <a:p>
+            <a:pPr algn="ctr"/>
+          </a:p>
+        </p:txBody>
+      </p:sp>
+      <p:sp>
+        <p:nvSpPr>
+          <p:cNvPr id="7" name="TextBox 6"/>
+          <p:cNvSpPr txBox="1"/>
+          <p:nvPr/>
+        </p:nvSpPr>
+        <p:spPr>
+          <a:xfrm>
+            <a:off x="1234440" y="1901952"/>
+            <a:ext cx="1097280" cy="411480"/>
+          </a:xfrm>
+          <a:prstGeom prst="rect">
+            <a:avLst/>
+          </a:prstGeom>
+          <a:noFill/>
+        </p:spPr>
+        <p:txBody>
+          <a:bodyPr wrap="square" lIns="27432" rIns="27432" tIns="18288" bIns="18288">
+            <a:spAutoFit/>
+          </a:bodyPr>
+          <a:lstStyle/>
+          <a:p>
+            <a:r>
+              <a:rPr sz="2200" b="1">
+                <a:solidFill>
+                  <a:srgbClr val="3E8E22"/>
+                </a:solidFill>
+                <a:latin typeface="Segoe UI"/>
+              </a:rPr>
+              <a:t>Tip</a:t>
+            </a:r>
+          </a:p>
+        </p:txBody>
+      </p:sp>
+      <p:sp>
+        <p:nvSpPr>
+          <p:cNvPr id="8" name="TextBox 7"/>
+          <p:cNvSpPr txBox="1"/>
+          <p:nvPr/>
+        </p:nvSpPr>
+        <p:spPr>
+          <a:xfrm>
+            <a:off x="1234440" y="2514600"/>
+            <a:ext cx="6583680" cy="868680"/>
+          </a:xfrm>
+          <a:prstGeom prst="rect">
+            <a:avLst/>
+          </a:prstGeom>
+          <a:noFill/>
+        </p:spPr>
+        <p:txBody>
+          <a:bodyPr wrap="square" lIns="27432" rIns="27432" tIns="18288" bIns="18288">
+            <a:spAutoFit/>
+          </a:bodyPr>
+          <a:lstStyle/>
+          <a:p>
+            <a:r>
+              <a:rPr sz="1700" b="0">
+                <a:solidFill>
+                  <a:srgbClr val="1B1B2C"/>
+                </a:solidFill>
+                <a:latin typeface="Segoe UI"/>
+              </a:rPr>
+              <a:t>Any of these Cowork tasks can be scheduled to run automatically. In Microsoft 365 Copilot, hover a saved prompt and pick "Schedule this prompt", then choose a daily or weekly cadence (requires a Microsoft 365 Copilot licence).</a:t>
+            </a:r>
+          </a:p>
+        </p:txBody>
+      </p:sp>
+    </p:spTree>
+  </p:cSld>
+  <p:clrMapOvr>
+    <a:masterClrMapping/>
+  </p:clrMapOvr>
+</p:sld>
+</file>
+
+<file path=ppt/slides/slide13.xml><?xml version="1.0" encoding="utf-8"?>
 <p:sld xmlns:a="http://schemas.openxmlformats.org/drawingml/2006/main" xmlns:p="http://schemas.openxmlformats.org/presentationml/2006/main" xmlns:r="http://schemas.openxmlformats.org/officeDocument/2006/relationships">
   <p:cSld>
     <p:bg>

--- a/slides/business-lite.pptx
+++ b/slides/business-lite.pptx
@@ -18,6 +18,18 @@
     <p:sldId id="266" r:id="rId17"/>
     <p:sldId id="267" r:id="rId18"/>
     <p:sldId id="268" r:id="rId19"/>
+    <p:sldId id="269" r:id="rId20"/>
+    <p:sldId id="270" r:id="rId21"/>
+    <p:sldId id="271" r:id="rId22"/>
+    <p:sldId id="272" r:id="rId23"/>
+    <p:sldId id="273" r:id="rId24"/>
+    <p:sldId id="274" r:id="rId25"/>
+    <p:sldId id="275" r:id="rId26"/>
+    <p:sldId id="276" r:id="rId27"/>
+    <p:sldId id="277" r:id="rId28"/>
+    <p:sldId id="278" r:id="rId29"/>
+    <p:sldId id="279" r:id="rId30"/>
+    <p:sldId id="280" r:id="rId31"/>
   </p:sldIdLst>
   <p:sldSz cx="9144000" cy="5143500" type="screen4x3"/>
   <p:notesSz cx="6858000" cy="9144000"/>
@@ -5076,7 +5088,7 @@
                 </a:solidFill>
                 <a:latin typeface="Segoe UI"/>
               </a:rPr>
-              <a:t>COPILOT COWORK</a:t>
+              <a:t>COWORK LIGHT TASK</a:t>
             </a:r>
           </a:p>
         </p:txBody>
@@ -5110,7 +5122,7 @@
                 </a:solidFill>
                 <a:latin typeface="Segoe UI"/>
               </a:rPr>
-              <a:t>Add-on tip: schedule Cowork prompts</a:t>
+              <a:t>Rebalance your week and protect focus time</a:t>
             </a:r>
           </a:p>
         </p:txBody>
@@ -5166,8 +5178,8 @@
         </p:nvSpPr>
         <p:spPr>
           <a:xfrm>
-            <a:off x="914400" y="1600200"/>
-            <a:ext cx="7315200" cy="2240280"/>
+            <a:off x="640080" y="1417320"/>
+            <a:ext cx="7863840" cy="2697480"/>
           </a:xfrm>
           <a:prstGeom prst="roundRect">
             <a:avLst/>
@@ -5211,8 +5223,8 @@
         </p:nvSpPr>
         <p:spPr>
           <a:xfrm>
-            <a:off x="914400" y="1600200"/>
-            <a:ext cx="7315200" cy="64008"/>
+            <a:off x="640080" y="1417320"/>
+            <a:ext cx="7863840" cy="64008"/>
           </a:xfrm>
           <a:prstGeom prst="rect">
             <a:avLst/>
@@ -5254,28 +5266,29 @@
         </p:nvSpPr>
         <p:spPr>
           <a:xfrm>
-            <a:off x="1234440" y="1901952"/>
-            <a:ext cx="1097280" cy="411480"/>
-          </a:xfrm>
-          <a:prstGeom prst="rect">
-            <a:avLst/>
-          </a:prstGeom>
-          <a:noFill/>
-        </p:spPr>
-        <p:txBody>
-          <a:bodyPr wrap="square" lIns="27432" rIns="27432" tIns="18288" bIns="18288">
-            <a:spAutoFit/>
-          </a:bodyPr>
-          <a:lstStyle/>
-          <a:p>
-            <a:r>
-              <a:rPr sz="2200" b="1">
+            <a:off x="914400" y="1700784"/>
+            <a:ext cx="1325880" cy="384048"/>
+          </a:xfrm>
+          <a:prstGeom prst="rect">
+            <a:avLst/>
+          </a:prstGeom>
+          <a:noFill/>
+        </p:spPr>
+        <p:txBody>
+          <a:bodyPr wrap="square" lIns="27432" rIns="27432" tIns="18288" bIns="18288">
+            <a:spAutoFit/>
+          </a:bodyPr>
+          <a:lstStyle/>
+          <a:p>
+            <a:pPr algn="ctr"/>
+            <a:r>
+              <a:rPr sz="2000" b="1">
                 <a:solidFill>
                   <a:srgbClr val="3E8E22"/>
                 </a:solidFill>
                 <a:latin typeface="Segoe UI"/>
               </a:rPr>
-              <a:t>Tip</a:t>
+              <a:t>Light</a:t>
             </a:r>
           </a:p>
         </p:txBody>
@@ -5288,28 +5301,164 @@
         </p:nvSpPr>
         <p:spPr>
           <a:xfrm>
-            <a:off x="1234440" y="2514600"/>
-            <a:ext cx="6583680" cy="868680"/>
-          </a:xfrm>
-          <a:prstGeom prst="rect">
-            <a:avLst/>
-          </a:prstGeom>
-          <a:noFill/>
-        </p:spPr>
-        <p:txBody>
-          <a:bodyPr wrap="square" lIns="27432" rIns="27432" tIns="18288" bIns="18288">
-            <a:spAutoFit/>
-          </a:bodyPr>
-          <a:lstStyle/>
-          <a:p>
-            <a:r>
-              <a:rPr sz="1700" b="0">
+            <a:off x="2423160" y="1627632"/>
+            <a:ext cx="5577840" cy="658368"/>
+          </a:xfrm>
+          <a:prstGeom prst="rect">
+            <a:avLst/>
+          </a:prstGeom>
+          <a:noFill/>
+        </p:spPr>
+        <p:txBody>
+          <a:bodyPr wrap="square" lIns="27432" rIns="27432" tIns="18288" bIns="18288">
+            <a:spAutoFit/>
+          </a:bodyPr>
+          <a:lstStyle/>
+          <a:p>
+            <a:r>
+              <a:rPr sz="1300" b="0">
+                <a:solidFill>
+                  <a:srgbClr val="5A6078"/>
+                </a:solidFill>
+                <a:latin typeface="Segoe UI"/>
+              </a:rPr>
+              <a:t>Quick, single-purpose handoff. Cowork pulls from one or two sources and returns a ready-to-use artifact in minutes.</a:t>
+            </a:r>
+          </a:p>
+        </p:txBody>
+      </p:sp>
+      <p:sp>
+        <p:nvSpPr>
+          <p:cNvPr id="9" name="TextBox 8"/>
+          <p:cNvSpPr txBox="1"/>
+          <p:nvPr/>
+        </p:nvSpPr>
+        <p:spPr>
+          <a:xfrm>
+            <a:off x="914400" y="2560320"/>
+            <a:ext cx="1005840" cy="237744"/>
+          </a:xfrm>
+          <a:prstGeom prst="rect">
+            <a:avLst/>
+          </a:prstGeom>
+          <a:noFill/>
+        </p:spPr>
+        <p:txBody>
+          <a:bodyPr wrap="square" lIns="27432" rIns="27432" tIns="18288" bIns="18288">
+            <a:spAutoFit/>
+          </a:bodyPr>
+          <a:lstStyle/>
+          <a:p>
+            <a:r>
+              <a:rPr sz="1300" b="1">
                 <a:solidFill>
                   <a:srgbClr val="1B1B2C"/>
                 </a:solidFill>
                 <a:latin typeface="Segoe UI"/>
               </a:rPr>
-              <a:t>Any of these Cowork tasks can be scheduled to run automatically. In Microsoft 365 Copilot, hover a saved prompt and pick "Schedule this prompt", then choose a daily or weekly cadence (requires a Microsoft 365 Copilot licence).</a:t>
+              <a:t>Goal</a:t>
+            </a:r>
+          </a:p>
+        </p:txBody>
+      </p:sp>
+      <p:sp>
+        <p:nvSpPr>
+          <p:cNvPr id="10" name="TextBox 9"/>
+          <p:cNvSpPr txBox="1"/>
+          <p:nvPr/>
+        </p:nvSpPr>
+        <p:spPr>
+          <a:xfrm>
+            <a:off x="1874519" y="2542032"/>
+            <a:ext cx="6263640" cy="384048"/>
+          </a:xfrm>
+          <a:prstGeom prst="rect">
+            <a:avLst/>
+          </a:prstGeom>
+          <a:noFill/>
+        </p:spPr>
+        <p:txBody>
+          <a:bodyPr wrap="square" lIns="27432" rIns="27432" tIns="18288" bIns="18288">
+            <a:spAutoFit/>
+          </a:bodyPr>
+          <a:lstStyle/>
+          <a:p>
+            <a:r>
+              <a:rPr sz="1200" b="0">
+                <a:solidFill>
+                  <a:srgbClr val="1B1B2C"/>
+                </a:solidFill>
+                <a:latin typeface="Segoe UI"/>
+              </a:rPr>
+              <a:t>Take control of a fragmented calendar before it takes control of your week.</a:t>
+            </a:r>
+          </a:p>
+        </p:txBody>
+      </p:sp>
+      <p:sp>
+        <p:nvSpPr>
+          <p:cNvPr id="11" name="TextBox 10"/>
+          <p:cNvSpPr txBox="1"/>
+          <p:nvPr/>
+        </p:nvSpPr>
+        <p:spPr>
+          <a:xfrm>
+            <a:off x="914400" y="3218688"/>
+            <a:ext cx="1234440" cy="237744"/>
+          </a:xfrm>
+          <a:prstGeom prst="rect">
+            <a:avLst/>
+          </a:prstGeom>
+          <a:noFill/>
+        </p:spPr>
+        <p:txBody>
+          <a:bodyPr wrap="square" lIns="27432" rIns="27432" tIns="18288" bIns="18288">
+            <a:spAutoFit/>
+          </a:bodyPr>
+          <a:lstStyle/>
+          <a:p>
+            <a:r>
+              <a:rPr sz="1300" b="1">
+                <a:solidFill>
+                  <a:srgbClr val="1B1B2C"/>
+                </a:solidFill>
+                <a:latin typeface="Segoe UI"/>
+              </a:rPr>
+              <a:t>Outcome</a:t>
+            </a:r>
+          </a:p>
+        </p:txBody>
+      </p:sp>
+      <p:sp>
+        <p:nvSpPr>
+          <p:cNvPr id="12" name="TextBox 11"/>
+          <p:cNvSpPr txBox="1"/>
+          <p:nvPr/>
+        </p:nvSpPr>
+        <p:spPr>
+          <a:xfrm>
+            <a:off x="1874519" y="3182112"/>
+            <a:ext cx="6263640" cy="438912"/>
+          </a:xfrm>
+          <a:prstGeom prst="rect">
+            <a:avLst/>
+          </a:prstGeom>
+          <a:noFill/>
+        </p:spPr>
+        <p:txBody>
+          <a:bodyPr wrap="square" lIns="27432" rIns="27432" tIns="18288" bIns="18288">
+            <a:spAutoFit/>
+          </a:bodyPr>
+          <a:lstStyle/>
+          <a:p>
+            <a:r>
+              <a:rPr sz="1200" b="0">
+                <a:solidFill>
+                  <a:srgbClr val="1B1B2C"/>
+                </a:solidFill>
+                <a:latin typeface="Segoe UI"/>
+              </a:rPr>
+              <a:t>A rebalanced schedule that protects focus time, prioritizes high-impact meetings, and resolves conflicts, without manually negotiating your own availability.</a:t>
             </a:r>
           </a:p>
         </p:txBody>
@@ -5369,7 +5518,7 @@
                 </a:solidFill>
                 <a:latin typeface="Segoe UI"/>
               </a:rPr>
-              <a:t>MICROSOFT SOURCES</a:t>
+              <a:t>REBALANCE YOUR WEEK AND PROTECT FOCUS TIME</a:t>
             </a:r>
           </a:p>
         </p:txBody>
@@ -5403,7 +5552,7 @@
                 </a:solidFill>
                 <a:latin typeface="Segoe UI"/>
               </a:rPr>
-              <a:t>References</a:t>
+              <a:t>Goal, outcome, prompt, flow</a:t>
             </a:r>
           </a:p>
         </p:txBody>
@@ -5453,14 +5602,292 @@
       </p:sp>
       <p:sp>
         <p:nvSpPr>
-          <p:cNvPr id="5" name="TextBox 4"/>
-          <p:cNvSpPr txBox="1"/>
-          <p:nvPr/>
-        </p:nvSpPr>
-        <p:spPr>
-          <a:xfrm>
-            <a:off x="731520" y="1325880"/>
-            <a:ext cx="7680960" cy="3108960"/>
+          <p:cNvPr id="5" name="Rounded Rectangle 4"/>
+          <p:cNvSpPr/>
+          <p:nvPr/>
+        </p:nvSpPr>
+        <p:spPr>
+          <a:xfrm>
+            <a:off x="502920" y="1298448"/>
+            <a:ext cx="3886200" cy="3273552"/>
+          </a:xfrm>
+          <a:prstGeom prst="roundRect">
+            <a:avLst/>
+          </a:prstGeom>
+          <a:solidFill>
+            <a:srgbClr val="FFFFFF"/>
+          </a:solidFill>
+          <a:ln>
+            <a:solidFill>
+              <a:srgbClr val="F6F7FB"/>
+            </a:solidFill>
+          </a:ln>
+        </p:spPr>
+        <p:style>
+          <a:lnRef idx="1">
+            <a:schemeClr val="accent1"/>
+          </a:lnRef>
+          <a:fillRef idx="3">
+            <a:schemeClr val="accent1"/>
+          </a:fillRef>
+          <a:effectRef idx="2">
+            <a:schemeClr val="accent1"/>
+          </a:effectRef>
+          <a:fontRef idx="minor">
+            <a:schemeClr val="lt1"/>
+          </a:fontRef>
+        </p:style>
+        <p:txBody>
+          <a:bodyPr rtlCol="0" anchor="ctr"/>
+          <a:lstStyle/>
+          <a:p>
+            <a:pPr algn="ctr"/>
+          </a:p>
+        </p:txBody>
+      </p:sp>
+      <p:sp>
+        <p:nvSpPr>
+          <p:cNvPr id="6" name="Rectangle 5"/>
+          <p:cNvSpPr/>
+          <p:nvPr/>
+        </p:nvSpPr>
+        <p:spPr>
+          <a:xfrm>
+            <a:off x="502920" y="1298448"/>
+            <a:ext cx="3886200" cy="64008"/>
+          </a:xfrm>
+          <a:prstGeom prst="rect">
+            <a:avLst/>
+          </a:prstGeom>
+          <a:solidFill>
+            <a:srgbClr val="3E8E22"/>
+          </a:solidFill>
+          <a:ln>
+            <a:noFill/>
+          </a:ln>
+        </p:spPr>
+        <p:style>
+          <a:lnRef idx="1">
+            <a:schemeClr val="accent1"/>
+          </a:lnRef>
+          <a:fillRef idx="3">
+            <a:schemeClr val="accent1"/>
+          </a:fillRef>
+          <a:effectRef idx="2">
+            <a:schemeClr val="accent1"/>
+          </a:effectRef>
+          <a:fontRef idx="minor">
+            <a:schemeClr val="lt1"/>
+          </a:fontRef>
+        </p:style>
+        <p:txBody>
+          <a:bodyPr rtlCol="0" anchor="ctr"/>
+          <a:lstStyle/>
+          <a:p>
+            <a:pPr algn="ctr"/>
+          </a:p>
+        </p:txBody>
+      </p:sp>
+      <p:sp>
+        <p:nvSpPr>
+          <p:cNvPr id="7" name="TextBox 6"/>
+          <p:cNvSpPr txBox="1"/>
+          <p:nvPr/>
+        </p:nvSpPr>
+        <p:spPr>
+          <a:xfrm>
+            <a:off x="749808" y="1554480"/>
+            <a:ext cx="3383280" cy="256032"/>
+          </a:xfrm>
+          <a:prstGeom prst="rect">
+            <a:avLst/>
+          </a:prstGeom>
+          <a:noFill/>
+        </p:spPr>
+        <p:txBody>
+          <a:bodyPr wrap="square" lIns="27432" rIns="27432" tIns="18288" bIns="18288">
+            <a:spAutoFit/>
+          </a:bodyPr>
+          <a:lstStyle/>
+          <a:p>
+            <a:r>
+              <a:rPr sz="1300" b="1">
+                <a:solidFill>
+                  <a:srgbClr val="1B1B2C"/>
+                </a:solidFill>
+                <a:latin typeface="Segoe UI"/>
+              </a:rPr>
+              <a:t>Prompt to give Cowork</a:t>
+            </a:r>
+          </a:p>
+        </p:txBody>
+      </p:sp>
+      <p:sp>
+        <p:nvSpPr>
+          <p:cNvPr id="8" name="TextBox 7"/>
+          <p:cNvSpPr txBox="1"/>
+          <p:nvPr/>
+        </p:nvSpPr>
+        <p:spPr>
+          <a:xfrm>
+            <a:off x="749808" y="1883664"/>
+            <a:ext cx="3383280" cy="2240280"/>
+          </a:xfrm>
+          <a:prstGeom prst="rect">
+            <a:avLst/>
+          </a:prstGeom>
+          <a:noFill/>
+        </p:spPr>
+        <p:txBody>
+          <a:bodyPr wrap="square" lIns="27432" rIns="27432" tIns="18288" bIns="18288">
+            <a:spAutoFit/>
+          </a:bodyPr>
+          <a:lstStyle/>
+          <a:p>
+            <a:r>
+              <a:rPr sz="900" b="0">
+                <a:solidFill>
+                  <a:srgbClr val="5A6078"/>
+                </a:solidFill>
+                <a:latin typeface="Segoe UI"/>
+              </a:rPr>
+              <a:t>Help me organize my week. Review my Outlook calendar. First, show me a summary: Total meetings and hours spent, where I have focus time (2+ hours), and days with the most meetings. Before taking changes, ask clarifying questions: my manager and management chain, note if they are on a meeting, how many attendees, what I'm trying to accomplish this week, how to prioritize conflicts, personal commitments, and which meetings to...</a:t>
+            </a:r>
+          </a:p>
+        </p:txBody>
+      </p:sp>
+      <p:sp>
+        <p:nvSpPr>
+          <p:cNvPr id="9" name="Rounded Rectangle 8"/>
+          <p:cNvSpPr/>
+          <p:nvPr/>
+        </p:nvSpPr>
+        <p:spPr>
+          <a:xfrm>
+            <a:off x="4663440" y="1298448"/>
+            <a:ext cx="3977639" cy="3273552"/>
+          </a:xfrm>
+          <a:prstGeom prst="roundRect">
+            <a:avLst/>
+          </a:prstGeom>
+          <a:solidFill>
+            <a:srgbClr val="FFFFFF"/>
+          </a:solidFill>
+          <a:ln>
+            <a:solidFill>
+              <a:srgbClr val="F6F7FB"/>
+            </a:solidFill>
+          </a:ln>
+        </p:spPr>
+        <p:style>
+          <a:lnRef idx="1">
+            <a:schemeClr val="accent1"/>
+          </a:lnRef>
+          <a:fillRef idx="3">
+            <a:schemeClr val="accent1"/>
+          </a:fillRef>
+          <a:effectRef idx="2">
+            <a:schemeClr val="accent1"/>
+          </a:effectRef>
+          <a:fontRef idx="minor">
+            <a:schemeClr val="lt1"/>
+          </a:fontRef>
+        </p:style>
+        <p:txBody>
+          <a:bodyPr rtlCol="0" anchor="ctr"/>
+          <a:lstStyle/>
+          <a:p>
+            <a:pPr algn="ctr"/>
+          </a:p>
+        </p:txBody>
+      </p:sp>
+      <p:sp>
+        <p:nvSpPr>
+          <p:cNvPr id="10" name="Rectangle 9"/>
+          <p:cNvSpPr/>
+          <p:nvPr/>
+        </p:nvSpPr>
+        <p:spPr>
+          <a:xfrm>
+            <a:off x="4663440" y="1298448"/>
+            <a:ext cx="3977639" cy="64008"/>
+          </a:xfrm>
+          <a:prstGeom prst="rect">
+            <a:avLst/>
+          </a:prstGeom>
+          <a:solidFill>
+            <a:srgbClr val="3E8E22"/>
+          </a:solidFill>
+          <a:ln>
+            <a:noFill/>
+          </a:ln>
+        </p:spPr>
+        <p:style>
+          <a:lnRef idx="1">
+            <a:schemeClr val="accent1"/>
+          </a:lnRef>
+          <a:fillRef idx="3">
+            <a:schemeClr val="accent1"/>
+          </a:fillRef>
+          <a:effectRef idx="2">
+            <a:schemeClr val="accent1"/>
+          </a:effectRef>
+          <a:fontRef idx="minor">
+            <a:schemeClr val="lt1"/>
+          </a:fontRef>
+        </p:style>
+        <p:txBody>
+          <a:bodyPr rtlCol="0" anchor="ctr"/>
+          <a:lstStyle/>
+          <a:p>
+            <a:pPr algn="ctr"/>
+          </a:p>
+        </p:txBody>
+      </p:sp>
+      <p:sp>
+        <p:nvSpPr>
+          <p:cNvPr id="11" name="TextBox 10"/>
+          <p:cNvSpPr txBox="1"/>
+          <p:nvPr/>
+        </p:nvSpPr>
+        <p:spPr>
+          <a:xfrm>
+            <a:off x="4910328" y="1554480"/>
+            <a:ext cx="3383280" cy="256032"/>
+          </a:xfrm>
+          <a:prstGeom prst="rect">
+            <a:avLst/>
+          </a:prstGeom>
+          <a:noFill/>
+        </p:spPr>
+        <p:txBody>
+          <a:bodyPr wrap="square" lIns="27432" rIns="27432" tIns="18288" bIns="18288">
+            <a:spAutoFit/>
+          </a:bodyPr>
+          <a:lstStyle/>
+          <a:p>
+            <a:r>
+              <a:rPr sz="1300" b="1">
+                <a:solidFill>
+                  <a:srgbClr val="1B1B2C"/>
+                </a:solidFill>
+                <a:latin typeface="Segoe UI"/>
+              </a:rPr>
+              <a:t>Execution flow</a:t>
+            </a:r>
+          </a:p>
+        </p:txBody>
+      </p:sp>
+      <p:sp>
+        <p:nvSpPr>
+          <p:cNvPr id="12" name="TextBox 11"/>
+          <p:cNvSpPr txBox="1"/>
+          <p:nvPr/>
+        </p:nvSpPr>
+        <p:spPr>
+          <a:xfrm>
+            <a:off x="4892040" y="1874519"/>
+            <a:ext cx="3429000" cy="2148840"/>
           </a:xfrm>
           <a:prstGeom prst="rect">
             <a:avLst/>
@@ -5477,7 +5904,7 @@
               <a:spcAft>
                 <a:spcPts val="500"/>
               </a:spcAft>
-              <a:defRPr sz="1200">
+              <a:defRPr sz="1000">
                 <a:solidFill>
                   <a:srgbClr val="1B1B2C"/>
                 </a:solidFill>
@@ -5485,7 +5912,7 @@
               </a:defRPr>
             </a:pPr>
             <a:r>
-              <a:t>• LEARN Decide which Copilot is right for you</a:t>
+              <a:t>• Calendar -&gt; Summarize meeting load + focus time</a:t>
             </a:r>
           </a:p>
           <a:p>
@@ -5493,7 +5920,7 @@
               <a:spcAft>
                 <a:spcPts val="500"/>
               </a:spcAft>
-              <a:defRPr sz="1200">
+              <a:defRPr sz="1000">
                 <a:solidFill>
                   <a:srgbClr val="1B1B2C"/>
                 </a:solidFill>
@@ -5501,7 +5928,7 @@
               </a:defRPr>
             </a:pPr>
             <a:r>
-              <a:t>• LEARN Copilot Cowork overview</a:t>
+              <a:t>• Clarify -&gt; Weekly goals + constraints</a:t>
             </a:r>
           </a:p>
           <a:p>
@@ -5509,7 +5936,7 @@
               <a:spcAft>
                 <a:spcPts val="500"/>
               </a:spcAft>
-              <a:defRPr sz="1200">
+              <a:defRPr sz="1000">
                 <a:solidFill>
                   <a:srgbClr val="1B1B2C"/>
                 </a:solidFill>
@@ -5517,7 +5944,7 @@
               </a:defRPr>
             </a:pPr>
             <a:r>
-              <a:t>• LEARN Copilot Cowork common questions</a:t>
+              <a:t>• Evaluate -&gt; Meeting impact + conflicts</a:t>
             </a:r>
           </a:p>
           <a:p>
@@ -5525,7 +5952,7 @@
               <a:spcAft>
                 <a:spcPts val="500"/>
               </a:spcAft>
-              <a:defRPr sz="1200">
+              <a:defRPr sz="1000">
                 <a:solidFill>
                   <a:srgbClr val="1B1B2C"/>
                 </a:solidFill>
@@ -5533,7 +5960,7 @@
               </a:defRPr>
             </a:pPr>
             <a:r>
-              <a:t>• LEARN Researcher agent in Microsoft 365 Copilot</a:t>
+              <a:t>• Propose -&gt; Accept / decline / reschedule</a:t>
             </a:r>
           </a:p>
           <a:p>
@@ -5541,7 +5968,7 @@
               <a:spcAft>
                 <a:spcPts val="500"/>
               </a:spcAft>
-              <a:defRPr sz="1200">
+              <a:defRPr sz="1000">
                 <a:solidFill>
                   <a:srgbClr val="1B1B2C"/>
                 </a:solidFill>
@@ -5549,15 +5976,917 @@
               </a:defRPr>
             </a:pPr>
             <a:r>
-              <a:t>• LEARN Agents for Microsoft 365 Copilot Chat</a:t>
-            </a:r>
-          </a:p>
+              <a:t>• Recommend -&gt; Add focus blocks</a:t>
+            </a:r>
+          </a:p>
+        </p:txBody>
+      </p:sp>
+      <p:sp>
+        <p:nvSpPr>
+          <p:cNvPr id="13" name="TextBox 12"/>
+          <p:cNvSpPr txBox="1"/>
+          <p:nvPr/>
+        </p:nvSpPr>
+        <p:spPr>
+          <a:xfrm>
+            <a:off x="4910328" y="4133087"/>
+            <a:ext cx="3337560" cy="310896"/>
+          </a:xfrm>
+          <a:prstGeom prst="rect">
+            <a:avLst/>
+          </a:prstGeom>
+          <a:noFill/>
+        </p:spPr>
+        <p:txBody>
+          <a:bodyPr wrap="square" lIns="27432" rIns="27432" tIns="18288" bIns="18288">
+            <a:spAutoFit/>
+          </a:bodyPr>
+          <a:lstStyle/>
+          <a:p>
+            <a:r>
+              <a:rPr sz="1000" b="0">
+                <a:solidFill>
+                  <a:srgbClr val="5A6078"/>
+                </a:solidFill>
+                <a:latin typeface="Segoe UI"/>
+              </a:rPr>
+              <a:t>A rebalanced schedule that protects focus time, prioritizes high-impact meetings, and resolves conflicts, without manually negotiating...</a:t>
+            </a:r>
+          </a:p>
+        </p:txBody>
+      </p:sp>
+    </p:spTree>
+  </p:cSld>
+  <p:clrMapOvr>
+    <a:masterClrMapping/>
+  </p:clrMapOvr>
+</p:sld>
+</file>
+
+<file path=ppt/slides/slide14.xml><?xml version="1.0" encoding="utf-8"?>
+<p:sld xmlns:a="http://schemas.openxmlformats.org/drawingml/2006/main" xmlns:p="http://schemas.openxmlformats.org/presentationml/2006/main" xmlns:r="http://schemas.openxmlformats.org/officeDocument/2006/relationships">
+  <p:cSld>
+    <p:bg>
+      <p:bgPr>
+        <a:solidFill>
+          <a:srgbClr val="FFFAF5"/>
+        </a:solidFill>
+        <a:effectLst/>
+      </p:bgPr>
+    </p:bg>
+    <p:spTree>
+      <p:nvGrpSpPr>
+        <p:cNvPr id="1" name=""/>
+        <p:cNvGrpSpPr/>
+        <p:nvPr/>
+      </p:nvGrpSpPr>
+      <p:grpSpPr/>
+      <p:sp>
+        <p:nvSpPr>
+          <p:cNvPr id="2" name="TextBox 1"/>
+          <p:cNvSpPr txBox="1"/>
+          <p:nvPr/>
+        </p:nvSpPr>
+        <p:spPr>
+          <a:xfrm>
+            <a:off x="502920" y="228600"/>
+            <a:ext cx="6400800" cy="228600"/>
+          </a:xfrm>
+          <a:prstGeom prst="rect">
+            <a:avLst/>
+          </a:prstGeom>
+          <a:noFill/>
+        </p:spPr>
+        <p:txBody>
+          <a:bodyPr wrap="square" lIns="27432" rIns="27432" tIns="18288" bIns="18288">
+            <a:spAutoFit/>
+          </a:bodyPr>
+          <a:lstStyle/>
+          <a:p>
+            <a:r>
+              <a:rPr sz="900" b="1">
+                <a:solidFill>
+                  <a:srgbClr val="5A6078"/>
+                </a:solidFill>
+                <a:latin typeface="Segoe UI"/>
+              </a:rPr>
+              <a:t>COWORK LIGHT TASK</a:t>
+            </a:r>
+          </a:p>
+        </p:txBody>
+      </p:sp>
+      <p:sp>
+        <p:nvSpPr>
+          <p:cNvPr id="3" name="TextBox 2"/>
+          <p:cNvSpPr txBox="1"/>
+          <p:nvPr/>
+        </p:nvSpPr>
+        <p:spPr>
+          <a:xfrm>
+            <a:off x="502920" y="438912"/>
+            <a:ext cx="7955279" cy="658368"/>
+          </a:xfrm>
+          <a:prstGeom prst="rect">
+            <a:avLst/>
+          </a:prstGeom>
+          <a:noFill/>
+        </p:spPr>
+        <p:txBody>
+          <a:bodyPr wrap="square" lIns="27432" rIns="27432" tIns="18288" bIns="18288">
+            <a:spAutoFit/>
+          </a:bodyPr>
+          <a:lstStyle/>
+          <a:p>
+            <a:r>
+              <a:rPr sz="2200" b="1">
+                <a:solidFill>
+                  <a:srgbClr val="1B1B2C"/>
+                </a:solidFill>
+                <a:latin typeface="Segoe UI"/>
+              </a:rPr>
+              <a:t>Wrap up projects and organize all related work</a:t>
+            </a:r>
+          </a:p>
+        </p:txBody>
+      </p:sp>
+      <p:sp>
+        <p:nvSpPr>
+          <p:cNvPr id="4" name="Rectangle 3"/>
+          <p:cNvSpPr/>
+          <p:nvPr/>
+        </p:nvSpPr>
+        <p:spPr>
+          <a:xfrm>
+            <a:off x="502920" y="1115568"/>
+            <a:ext cx="1097280" cy="45720"/>
+          </a:xfrm>
+          <a:prstGeom prst="rect">
+            <a:avLst/>
+          </a:prstGeom>
+          <a:solidFill>
+            <a:srgbClr val="1A6FD6"/>
+          </a:solidFill>
+          <a:ln>
+            <a:noFill/>
+          </a:ln>
+        </p:spPr>
+        <p:style>
+          <a:lnRef idx="1">
+            <a:schemeClr val="accent1"/>
+          </a:lnRef>
+          <a:fillRef idx="3">
+            <a:schemeClr val="accent1"/>
+          </a:fillRef>
+          <a:effectRef idx="2">
+            <a:schemeClr val="accent1"/>
+          </a:effectRef>
+          <a:fontRef idx="minor">
+            <a:schemeClr val="lt1"/>
+          </a:fontRef>
+        </p:style>
+        <p:txBody>
+          <a:bodyPr rtlCol="0" anchor="ctr"/>
+          <a:lstStyle/>
+          <a:p>
+            <a:pPr algn="ctr"/>
+          </a:p>
+        </p:txBody>
+      </p:sp>
+      <p:sp>
+        <p:nvSpPr>
+          <p:cNvPr id="5" name="Rounded Rectangle 4"/>
+          <p:cNvSpPr/>
+          <p:nvPr/>
+        </p:nvSpPr>
+        <p:spPr>
+          <a:xfrm>
+            <a:off x="640080" y="1417320"/>
+            <a:ext cx="7863840" cy="2697480"/>
+          </a:xfrm>
+          <a:prstGeom prst="roundRect">
+            <a:avLst/>
+          </a:prstGeom>
+          <a:solidFill>
+            <a:srgbClr val="FFFFFF"/>
+          </a:solidFill>
+          <a:ln>
+            <a:solidFill>
+              <a:srgbClr val="F6F7FB"/>
+            </a:solidFill>
+          </a:ln>
+        </p:spPr>
+        <p:style>
+          <a:lnRef idx="1">
+            <a:schemeClr val="accent1"/>
+          </a:lnRef>
+          <a:fillRef idx="3">
+            <a:schemeClr val="accent1"/>
+          </a:fillRef>
+          <a:effectRef idx="2">
+            <a:schemeClr val="accent1"/>
+          </a:effectRef>
+          <a:fontRef idx="minor">
+            <a:schemeClr val="lt1"/>
+          </a:fontRef>
+        </p:style>
+        <p:txBody>
+          <a:bodyPr rtlCol="0" anchor="ctr"/>
+          <a:lstStyle/>
+          <a:p>
+            <a:pPr algn="ctr"/>
+          </a:p>
+        </p:txBody>
+      </p:sp>
+      <p:sp>
+        <p:nvSpPr>
+          <p:cNvPr id="6" name="Rectangle 5"/>
+          <p:cNvSpPr/>
+          <p:nvPr/>
+        </p:nvSpPr>
+        <p:spPr>
+          <a:xfrm>
+            <a:off x="640080" y="1417320"/>
+            <a:ext cx="7863840" cy="64008"/>
+          </a:xfrm>
+          <a:prstGeom prst="rect">
+            <a:avLst/>
+          </a:prstGeom>
+          <a:solidFill>
+            <a:srgbClr val="3E8E22"/>
+          </a:solidFill>
+          <a:ln>
+            <a:noFill/>
+          </a:ln>
+        </p:spPr>
+        <p:style>
+          <a:lnRef idx="1">
+            <a:schemeClr val="accent1"/>
+          </a:lnRef>
+          <a:fillRef idx="3">
+            <a:schemeClr val="accent1"/>
+          </a:fillRef>
+          <a:effectRef idx="2">
+            <a:schemeClr val="accent1"/>
+          </a:effectRef>
+          <a:fontRef idx="minor">
+            <a:schemeClr val="lt1"/>
+          </a:fontRef>
+        </p:style>
+        <p:txBody>
+          <a:bodyPr rtlCol="0" anchor="ctr"/>
+          <a:lstStyle/>
+          <a:p>
+            <a:pPr algn="ctr"/>
+          </a:p>
+        </p:txBody>
+      </p:sp>
+      <p:sp>
+        <p:nvSpPr>
+          <p:cNvPr id="7" name="TextBox 6"/>
+          <p:cNvSpPr txBox="1"/>
+          <p:nvPr/>
+        </p:nvSpPr>
+        <p:spPr>
+          <a:xfrm>
+            <a:off x="914400" y="1700784"/>
+            <a:ext cx="1325880" cy="384048"/>
+          </a:xfrm>
+          <a:prstGeom prst="rect">
+            <a:avLst/>
+          </a:prstGeom>
+          <a:noFill/>
+        </p:spPr>
+        <p:txBody>
+          <a:bodyPr wrap="square" lIns="27432" rIns="27432" tIns="18288" bIns="18288">
+            <a:spAutoFit/>
+          </a:bodyPr>
+          <a:lstStyle/>
+          <a:p>
+            <a:pPr algn="ctr"/>
+            <a:r>
+              <a:rPr sz="2000" b="1">
+                <a:solidFill>
+                  <a:srgbClr val="3E8E22"/>
+                </a:solidFill>
+                <a:latin typeface="Segoe UI"/>
+              </a:rPr>
+              <a:t>Light</a:t>
+            </a:r>
+          </a:p>
+        </p:txBody>
+      </p:sp>
+      <p:sp>
+        <p:nvSpPr>
+          <p:cNvPr id="8" name="TextBox 7"/>
+          <p:cNvSpPr txBox="1"/>
+          <p:nvPr/>
+        </p:nvSpPr>
+        <p:spPr>
+          <a:xfrm>
+            <a:off x="2423160" y="1627632"/>
+            <a:ext cx="5577840" cy="658368"/>
+          </a:xfrm>
+          <a:prstGeom prst="rect">
+            <a:avLst/>
+          </a:prstGeom>
+          <a:noFill/>
+        </p:spPr>
+        <p:txBody>
+          <a:bodyPr wrap="square" lIns="27432" rIns="27432" tIns="18288" bIns="18288">
+            <a:spAutoFit/>
+          </a:bodyPr>
+          <a:lstStyle/>
+          <a:p>
+            <a:r>
+              <a:rPr sz="1300" b="0">
+                <a:solidFill>
+                  <a:srgbClr val="5A6078"/>
+                </a:solidFill>
+                <a:latin typeface="Segoe UI"/>
+              </a:rPr>
+              <a:t>Quick, single-purpose handoff. Cowork pulls from one or two sources and returns a ready-to-use artifact in minutes.</a:t>
+            </a:r>
+          </a:p>
+        </p:txBody>
+      </p:sp>
+      <p:sp>
+        <p:nvSpPr>
+          <p:cNvPr id="9" name="TextBox 8"/>
+          <p:cNvSpPr txBox="1"/>
+          <p:nvPr/>
+        </p:nvSpPr>
+        <p:spPr>
+          <a:xfrm>
+            <a:off x="914400" y="2560320"/>
+            <a:ext cx="1005840" cy="237744"/>
+          </a:xfrm>
+          <a:prstGeom prst="rect">
+            <a:avLst/>
+          </a:prstGeom>
+          <a:noFill/>
+        </p:spPr>
+        <p:txBody>
+          <a:bodyPr wrap="square" lIns="27432" rIns="27432" tIns="18288" bIns="18288">
+            <a:spAutoFit/>
+          </a:bodyPr>
+          <a:lstStyle/>
+          <a:p>
+            <a:r>
+              <a:rPr sz="1300" b="1">
+                <a:solidFill>
+                  <a:srgbClr val="1B1B2C"/>
+                </a:solidFill>
+                <a:latin typeface="Segoe UI"/>
+              </a:rPr>
+              <a:t>Goal</a:t>
+            </a:r>
+          </a:p>
+        </p:txBody>
+      </p:sp>
+      <p:sp>
+        <p:nvSpPr>
+          <p:cNvPr id="10" name="TextBox 9"/>
+          <p:cNvSpPr txBox="1"/>
+          <p:nvPr/>
+        </p:nvSpPr>
+        <p:spPr>
+          <a:xfrm>
+            <a:off x="1874519" y="2542032"/>
+            <a:ext cx="6263640" cy="384048"/>
+          </a:xfrm>
+          <a:prstGeom prst="rect">
+            <a:avLst/>
+          </a:prstGeom>
+          <a:noFill/>
+        </p:spPr>
+        <p:txBody>
+          <a:bodyPr wrap="square" lIns="27432" rIns="27432" tIns="18288" bIns="18288">
+            <a:spAutoFit/>
+          </a:bodyPr>
+          <a:lstStyle/>
+          <a:p>
+            <a:r>
+              <a:rPr sz="1200" b="0">
+                <a:solidFill>
+                  <a:srgbClr val="1B1B2C"/>
+                </a:solidFill>
+                <a:latin typeface="Segoe UI"/>
+              </a:rPr>
+              <a:t>Close out a project with a clean, shareable archive, not a scattered trail of files.</a:t>
+            </a:r>
+          </a:p>
+        </p:txBody>
+      </p:sp>
+      <p:sp>
+        <p:nvSpPr>
+          <p:cNvPr id="11" name="TextBox 10"/>
+          <p:cNvSpPr txBox="1"/>
+          <p:nvPr/>
+        </p:nvSpPr>
+        <p:spPr>
+          <a:xfrm>
+            <a:off x="914400" y="3218688"/>
+            <a:ext cx="1234440" cy="237744"/>
+          </a:xfrm>
+          <a:prstGeom prst="rect">
+            <a:avLst/>
+          </a:prstGeom>
+          <a:noFill/>
+        </p:spPr>
+        <p:txBody>
+          <a:bodyPr wrap="square" lIns="27432" rIns="27432" tIns="18288" bIns="18288">
+            <a:spAutoFit/>
+          </a:bodyPr>
+          <a:lstStyle/>
+          <a:p>
+            <a:r>
+              <a:rPr sz="1300" b="1">
+                <a:solidFill>
+                  <a:srgbClr val="1B1B2C"/>
+                </a:solidFill>
+                <a:latin typeface="Segoe UI"/>
+              </a:rPr>
+              <a:t>Outcome</a:t>
+            </a:r>
+          </a:p>
+        </p:txBody>
+      </p:sp>
+      <p:sp>
+        <p:nvSpPr>
+          <p:cNvPr id="12" name="TextBox 11"/>
+          <p:cNvSpPr txBox="1"/>
+          <p:nvPr/>
+        </p:nvSpPr>
+        <p:spPr>
+          <a:xfrm>
+            <a:off x="1874519" y="3182112"/>
+            <a:ext cx="6263640" cy="438912"/>
+          </a:xfrm>
+          <a:prstGeom prst="rect">
+            <a:avLst/>
+          </a:prstGeom>
+          <a:noFill/>
+        </p:spPr>
+        <p:txBody>
+          <a:bodyPr wrap="square" lIns="27432" rIns="27432" tIns="18288" bIns="18288">
+            <a:spAutoFit/>
+          </a:bodyPr>
+          <a:lstStyle/>
+          <a:p>
+            <a:r>
+              <a:rPr sz="1200" b="0">
+                <a:solidFill>
+                  <a:srgbClr val="1B1B2C"/>
+                </a:solidFill>
+                <a:latin typeface="Segoe UI"/>
+              </a:rPr>
+              <a:t>A single OneDrive folder with the project's deliverables and references, shared with the team so the work stays findable and easy to reference.</a:t>
+            </a:r>
+          </a:p>
+        </p:txBody>
+      </p:sp>
+    </p:spTree>
+  </p:cSld>
+  <p:clrMapOvr>
+    <a:masterClrMapping/>
+  </p:clrMapOvr>
+</p:sld>
+</file>
+
+<file path=ppt/slides/slide15.xml><?xml version="1.0" encoding="utf-8"?>
+<p:sld xmlns:a="http://schemas.openxmlformats.org/drawingml/2006/main" xmlns:p="http://schemas.openxmlformats.org/presentationml/2006/main" xmlns:r="http://schemas.openxmlformats.org/officeDocument/2006/relationships">
+  <p:cSld>
+    <p:bg>
+      <p:bgPr>
+        <a:solidFill>
+          <a:srgbClr val="FFFAF5"/>
+        </a:solidFill>
+        <a:effectLst/>
+      </p:bgPr>
+    </p:bg>
+    <p:spTree>
+      <p:nvGrpSpPr>
+        <p:cNvPr id="1" name=""/>
+        <p:cNvGrpSpPr/>
+        <p:nvPr/>
+      </p:nvGrpSpPr>
+      <p:grpSpPr/>
+      <p:sp>
+        <p:nvSpPr>
+          <p:cNvPr id="2" name="TextBox 1"/>
+          <p:cNvSpPr txBox="1"/>
+          <p:nvPr/>
+        </p:nvSpPr>
+        <p:spPr>
+          <a:xfrm>
+            <a:off x="502920" y="228600"/>
+            <a:ext cx="6400800" cy="228600"/>
+          </a:xfrm>
+          <a:prstGeom prst="rect">
+            <a:avLst/>
+          </a:prstGeom>
+          <a:noFill/>
+        </p:spPr>
+        <p:txBody>
+          <a:bodyPr wrap="square" lIns="27432" rIns="27432" tIns="18288" bIns="18288">
+            <a:spAutoFit/>
+          </a:bodyPr>
+          <a:lstStyle/>
+          <a:p>
+            <a:r>
+              <a:rPr sz="900" b="1">
+                <a:solidFill>
+                  <a:srgbClr val="5A6078"/>
+                </a:solidFill>
+                <a:latin typeface="Segoe UI"/>
+              </a:rPr>
+              <a:t>WRAP UP PROJECTS AND ORGANIZE ALL RELATED WORK</a:t>
+            </a:r>
+          </a:p>
+        </p:txBody>
+      </p:sp>
+      <p:sp>
+        <p:nvSpPr>
+          <p:cNvPr id="3" name="TextBox 2"/>
+          <p:cNvSpPr txBox="1"/>
+          <p:nvPr/>
+        </p:nvSpPr>
+        <p:spPr>
+          <a:xfrm>
+            <a:off x="502920" y="438912"/>
+            <a:ext cx="7955279" cy="658368"/>
+          </a:xfrm>
+          <a:prstGeom prst="rect">
+            <a:avLst/>
+          </a:prstGeom>
+          <a:noFill/>
+        </p:spPr>
+        <p:txBody>
+          <a:bodyPr wrap="square" lIns="27432" rIns="27432" tIns="18288" bIns="18288">
+            <a:spAutoFit/>
+          </a:bodyPr>
+          <a:lstStyle/>
+          <a:p>
+            <a:r>
+              <a:rPr sz="2200" b="1">
+                <a:solidFill>
+                  <a:srgbClr val="1B1B2C"/>
+                </a:solidFill>
+                <a:latin typeface="Segoe UI"/>
+              </a:rPr>
+              <a:t>Goal, outcome, prompt, flow</a:t>
+            </a:r>
+          </a:p>
+        </p:txBody>
+      </p:sp>
+      <p:sp>
+        <p:nvSpPr>
+          <p:cNvPr id="4" name="Rectangle 3"/>
+          <p:cNvSpPr/>
+          <p:nvPr/>
+        </p:nvSpPr>
+        <p:spPr>
+          <a:xfrm>
+            <a:off x="502920" y="1115568"/>
+            <a:ext cx="1097280" cy="45720"/>
+          </a:xfrm>
+          <a:prstGeom prst="rect">
+            <a:avLst/>
+          </a:prstGeom>
+          <a:solidFill>
+            <a:srgbClr val="1A6FD6"/>
+          </a:solidFill>
+          <a:ln>
+            <a:noFill/>
+          </a:ln>
+        </p:spPr>
+        <p:style>
+          <a:lnRef idx="1">
+            <a:schemeClr val="accent1"/>
+          </a:lnRef>
+          <a:fillRef idx="3">
+            <a:schemeClr val="accent1"/>
+          </a:fillRef>
+          <a:effectRef idx="2">
+            <a:schemeClr val="accent1"/>
+          </a:effectRef>
+          <a:fontRef idx="minor">
+            <a:schemeClr val="lt1"/>
+          </a:fontRef>
+        </p:style>
+        <p:txBody>
+          <a:bodyPr rtlCol="0" anchor="ctr"/>
+          <a:lstStyle/>
+          <a:p>
+            <a:pPr algn="ctr"/>
+          </a:p>
+        </p:txBody>
+      </p:sp>
+      <p:sp>
+        <p:nvSpPr>
+          <p:cNvPr id="5" name="Rounded Rectangle 4"/>
+          <p:cNvSpPr/>
+          <p:nvPr/>
+        </p:nvSpPr>
+        <p:spPr>
+          <a:xfrm>
+            <a:off x="502920" y="1298448"/>
+            <a:ext cx="3886200" cy="3273552"/>
+          </a:xfrm>
+          <a:prstGeom prst="roundRect">
+            <a:avLst/>
+          </a:prstGeom>
+          <a:solidFill>
+            <a:srgbClr val="FFFFFF"/>
+          </a:solidFill>
+          <a:ln>
+            <a:solidFill>
+              <a:srgbClr val="F6F7FB"/>
+            </a:solidFill>
+          </a:ln>
+        </p:spPr>
+        <p:style>
+          <a:lnRef idx="1">
+            <a:schemeClr val="accent1"/>
+          </a:lnRef>
+          <a:fillRef idx="3">
+            <a:schemeClr val="accent1"/>
+          </a:fillRef>
+          <a:effectRef idx="2">
+            <a:schemeClr val="accent1"/>
+          </a:effectRef>
+          <a:fontRef idx="minor">
+            <a:schemeClr val="lt1"/>
+          </a:fontRef>
+        </p:style>
+        <p:txBody>
+          <a:bodyPr rtlCol="0" anchor="ctr"/>
+          <a:lstStyle/>
+          <a:p>
+            <a:pPr algn="ctr"/>
+          </a:p>
+        </p:txBody>
+      </p:sp>
+      <p:sp>
+        <p:nvSpPr>
+          <p:cNvPr id="6" name="Rectangle 5"/>
+          <p:cNvSpPr/>
+          <p:nvPr/>
+        </p:nvSpPr>
+        <p:spPr>
+          <a:xfrm>
+            <a:off x="502920" y="1298448"/>
+            <a:ext cx="3886200" cy="64008"/>
+          </a:xfrm>
+          <a:prstGeom prst="rect">
+            <a:avLst/>
+          </a:prstGeom>
+          <a:solidFill>
+            <a:srgbClr val="3E8E22"/>
+          </a:solidFill>
+          <a:ln>
+            <a:noFill/>
+          </a:ln>
+        </p:spPr>
+        <p:style>
+          <a:lnRef idx="1">
+            <a:schemeClr val="accent1"/>
+          </a:lnRef>
+          <a:fillRef idx="3">
+            <a:schemeClr val="accent1"/>
+          </a:fillRef>
+          <a:effectRef idx="2">
+            <a:schemeClr val="accent1"/>
+          </a:effectRef>
+          <a:fontRef idx="minor">
+            <a:schemeClr val="lt1"/>
+          </a:fontRef>
+        </p:style>
+        <p:txBody>
+          <a:bodyPr rtlCol="0" anchor="ctr"/>
+          <a:lstStyle/>
+          <a:p>
+            <a:pPr algn="ctr"/>
+          </a:p>
+        </p:txBody>
+      </p:sp>
+      <p:sp>
+        <p:nvSpPr>
+          <p:cNvPr id="7" name="TextBox 6"/>
+          <p:cNvSpPr txBox="1"/>
+          <p:nvPr/>
+        </p:nvSpPr>
+        <p:spPr>
+          <a:xfrm>
+            <a:off x="749808" y="1554480"/>
+            <a:ext cx="3383280" cy="256032"/>
+          </a:xfrm>
+          <a:prstGeom prst="rect">
+            <a:avLst/>
+          </a:prstGeom>
+          <a:noFill/>
+        </p:spPr>
+        <p:txBody>
+          <a:bodyPr wrap="square" lIns="27432" rIns="27432" tIns="18288" bIns="18288">
+            <a:spAutoFit/>
+          </a:bodyPr>
+          <a:lstStyle/>
+          <a:p>
+            <a:r>
+              <a:rPr sz="1300" b="1">
+                <a:solidFill>
+                  <a:srgbClr val="1B1B2C"/>
+                </a:solidFill>
+                <a:latin typeface="Segoe UI"/>
+              </a:rPr>
+              <a:t>Prompt to give Cowork</a:t>
+            </a:r>
+          </a:p>
+        </p:txBody>
+      </p:sp>
+      <p:sp>
+        <p:nvSpPr>
+          <p:cNvPr id="8" name="TextBox 7"/>
+          <p:cNvSpPr txBox="1"/>
+          <p:nvPr/>
+        </p:nvSpPr>
+        <p:spPr>
+          <a:xfrm>
+            <a:off x="749808" y="1883664"/>
+            <a:ext cx="3383280" cy="2240280"/>
+          </a:xfrm>
+          <a:prstGeom prst="rect">
+            <a:avLst/>
+          </a:prstGeom>
+          <a:noFill/>
+        </p:spPr>
+        <p:txBody>
+          <a:bodyPr wrap="square" lIns="27432" rIns="27432" tIns="18288" bIns="18288">
+            <a:spAutoFit/>
+          </a:bodyPr>
+          <a:lstStyle/>
+          <a:p>
+            <a:r>
+              <a:rPr sz="900" b="0">
+                <a:solidFill>
+                  <a:srgbClr val="5A6078"/>
+                </a:solidFill>
+                <a:latin typeface="Segoe UI"/>
+              </a:rPr>
+              <a:t>I just wrapped up the [Project Name] project. Find all files in my OneDrive related to this project, docs, decks, spreadsheets. Create a new folder called "[Project Name], Archive" and move everything into it. Share the archive folder with the [Project Name] team so they have a clean reference. Then build a lightweight HTML recap page for the archive, project outcomes, key contributors, links to the headline deliverables,...</a:t>
+            </a:r>
+          </a:p>
+        </p:txBody>
+      </p:sp>
+      <p:sp>
+        <p:nvSpPr>
+          <p:cNvPr id="9" name="Rounded Rectangle 8"/>
+          <p:cNvSpPr/>
+          <p:nvPr/>
+        </p:nvSpPr>
+        <p:spPr>
+          <a:xfrm>
+            <a:off x="4663440" y="1298448"/>
+            <a:ext cx="3977639" cy="3273552"/>
+          </a:xfrm>
+          <a:prstGeom prst="roundRect">
+            <a:avLst/>
+          </a:prstGeom>
+          <a:solidFill>
+            <a:srgbClr val="FFFFFF"/>
+          </a:solidFill>
+          <a:ln>
+            <a:solidFill>
+              <a:srgbClr val="F6F7FB"/>
+            </a:solidFill>
+          </a:ln>
+        </p:spPr>
+        <p:style>
+          <a:lnRef idx="1">
+            <a:schemeClr val="accent1"/>
+          </a:lnRef>
+          <a:fillRef idx="3">
+            <a:schemeClr val="accent1"/>
+          </a:fillRef>
+          <a:effectRef idx="2">
+            <a:schemeClr val="accent1"/>
+          </a:effectRef>
+          <a:fontRef idx="minor">
+            <a:schemeClr val="lt1"/>
+          </a:fontRef>
+        </p:style>
+        <p:txBody>
+          <a:bodyPr rtlCol="0" anchor="ctr"/>
+          <a:lstStyle/>
+          <a:p>
+            <a:pPr algn="ctr"/>
+          </a:p>
+        </p:txBody>
+      </p:sp>
+      <p:sp>
+        <p:nvSpPr>
+          <p:cNvPr id="10" name="Rectangle 9"/>
+          <p:cNvSpPr/>
+          <p:nvPr/>
+        </p:nvSpPr>
+        <p:spPr>
+          <a:xfrm>
+            <a:off x="4663440" y="1298448"/>
+            <a:ext cx="3977639" cy="64008"/>
+          </a:xfrm>
+          <a:prstGeom prst="rect">
+            <a:avLst/>
+          </a:prstGeom>
+          <a:solidFill>
+            <a:srgbClr val="3E8E22"/>
+          </a:solidFill>
+          <a:ln>
+            <a:noFill/>
+          </a:ln>
+        </p:spPr>
+        <p:style>
+          <a:lnRef idx="1">
+            <a:schemeClr val="accent1"/>
+          </a:lnRef>
+          <a:fillRef idx="3">
+            <a:schemeClr val="accent1"/>
+          </a:fillRef>
+          <a:effectRef idx="2">
+            <a:schemeClr val="accent1"/>
+          </a:effectRef>
+          <a:fontRef idx="minor">
+            <a:schemeClr val="lt1"/>
+          </a:fontRef>
+        </p:style>
+        <p:txBody>
+          <a:bodyPr rtlCol="0" anchor="ctr"/>
+          <a:lstStyle/>
+          <a:p>
+            <a:pPr algn="ctr"/>
+          </a:p>
+        </p:txBody>
+      </p:sp>
+      <p:sp>
+        <p:nvSpPr>
+          <p:cNvPr id="11" name="TextBox 10"/>
+          <p:cNvSpPr txBox="1"/>
+          <p:nvPr/>
+        </p:nvSpPr>
+        <p:spPr>
+          <a:xfrm>
+            <a:off x="4910328" y="1554480"/>
+            <a:ext cx="3383280" cy="256032"/>
+          </a:xfrm>
+          <a:prstGeom prst="rect">
+            <a:avLst/>
+          </a:prstGeom>
+          <a:noFill/>
+        </p:spPr>
+        <p:txBody>
+          <a:bodyPr wrap="square" lIns="27432" rIns="27432" tIns="18288" bIns="18288">
+            <a:spAutoFit/>
+          </a:bodyPr>
+          <a:lstStyle/>
+          <a:p>
+            <a:r>
+              <a:rPr sz="1300" b="1">
+                <a:solidFill>
+                  <a:srgbClr val="1B1B2C"/>
+                </a:solidFill>
+                <a:latin typeface="Segoe UI"/>
+              </a:rPr>
+              <a:t>Execution flow</a:t>
+            </a:r>
+          </a:p>
+        </p:txBody>
+      </p:sp>
+      <p:sp>
+        <p:nvSpPr>
+          <p:cNvPr id="12" name="TextBox 11"/>
+          <p:cNvSpPr txBox="1"/>
+          <p:nvPr/>
+        </p:nvSpPr>
+        <p:spPr>
+          <a:xfrm>
+            <a:off x="4892040" y="1874519"/>
+            <a:ext cx="3429000" cy="2148840"/>
+          </a:xfrm>
+          <a:prstGeom prst="rect">
+            <a:avLst/>
+          </a:prstGeom>
+          <a:noFill/>
+        </p:spPr>
+        <p:txBody>
+          <a:bodyPr wrap="none" lIns="73152" rIns="73152" tIns="36576">
+            <a:spAutoFit/>
+          </a:bodyPr>
+          <a:lstStyle/>
           <a:p>
             <a:pPr>
               <a:spcAft>
                 <a:spcPts val="500"/>
               </a:spcAft>
-              <a:defRPr sz="1200">
+              <a:defRPr sz="1000">
                 <a:solidFill>
                   <a:srgbClr val="1B1B2C"/>
                 </a:solidFill>
@@ -5565,7 +6894,7 @@
               </a:defRPr>
             </a:pPr>
             <a:r>
-              <a:t>• SUPPORT Schedule your most used Copilot prompts</a:t>
+              <a:t>• OneDrive -&gt; Locate project files</a:t>
             </a:r>
           </a:p>
           <a:p>
@@ -5573,7 +6902,7 @@
               <a:spcAft>
                 <a:spcPts val="500"/>
               </a:spcAft>
-              <a:defRPr sz="1200">
+              <a:defRPr sz="1000">
                 <a:solidFill>
                   <a:srgbClr val="1B1B2C"/>
                 </a:solidFill>
@@ -5581,7 +6910,7 @@
               </a:defRPr>
             </a:pPr>
             <a:r>
-              <a:t>• ADOPT Cowork for the AI user (prompt structure)</a:t>
+              <a:t>• Classify -&gt; Docs / decks / spreadsheets</a:t>
             </a:r>
           </a:p>
           <a:p>
@@ -5589,7 +6918,7 @@
               <a:spcAft>
                 <a:spcPts val="500"/>
               </a:spcAft>
-              <a:defRPr sz="1200">
+              <a:defRPr sz="1000">
                 <a:solidFill>
                   <a:srgbClr val="1B1B2C"/>
                 </a:solidFill>
@@ -5597,7 +6926,2037 @@
               </a:defRPr>
             </a:pPr>
             <a:r>
-              <a:t>• ADOPT Microsoft Copilot Adoption hub</a:t>
+              <a:t>• Create -&gt; Archive folder</a:t>
+            </a:r>
+          </a:p>
+          <a:p>
+            <a:pPr>
+              <a:spcAft>
+                <a:spcPts val="500"/>
+              </a:spcAft>
+              <a:defRPr sz="1000">
+                <a:solidFill>
+                  <a:srgbClr val="1B1B2C"/>
+                </a:solidFill>
+                <a:latin typeface="Segoe UI"/>
+              </a:defRPr>
+            </a:pPr>
+            <a:r>
+              <a:t>• Move -&gt; Related artifacts</a:t>
+            </a:r>
+          </a:p>
+          <a:p>
+            <a:pPr>
+              <a:spcAft>
+                <a:spcPts val="500"/>
+              </a:spcAft>
+              <a:defRPr sz="1000">
+                <a:solidFill>
+                  <a:srgbClr val="1B1B2C"/>
+                </a:solidFill>
+                <a:latin typeface="Segoe UI"/>
+              </a:defRPr>
+            </a:pPr>
+            <a:r>
+              <a:t>• Share -&gt; Archive folder</a:t>
+            </a:r>
+          </a:p>
+        </p:txBody>
+      </p:sp>
+      <p:sp>
+        <p:nvSpPr>
+          <p:cNvPr id="13" name="TextBox 12"/>
+          <p:cNvSpPr txBox="1"/>
+          <p:nvPr/>
+        </p:nvSpPr>
+        <p:spPr>
+          <a:xfrm>
+            <a:off x="4910328" y="4133087"/>
+            <a:ext cx="3337560" cy="310896"/>
+          </a:xfrm>
+          <a:prstGeom prst="rect">
+            <a:avLst/>
+          </a:prstGeom>
+          <a:noFill/>
+        </p:spPr>
+        <p:txBody>
+          <a:bodyPr wrap="square" lIns="27432" rIns="27432" tIns="18288" bIns="18288">
+            <a:spAutoFit/>
+          </a:bodyPr>
+          <a:lstStyle/>
+          <a:p>
+            <a:r>
+              <a:rPr sz="1000" b="0">
+                <a:solidFill>
+                  <a:srgbClr val="5A6078"/>
+                </a:solidFill>
+                <a:latin typeface="Segoe UI"/>
+              </a:rPr>
+              <a:t>A single OneDrive folder with the project's deliverables and references, shared with the team so the work stays findable and easy to...</a:t>
+            </a:r>
+          </a:p>
+        </p:txBody>
+      </p:sp>
+    </p:spTree>
+  </p:cSld>
+  <p:clrMapOvr>
+    <a:masterClrMapping/>
+  </p:clrMapOvr>
+</p:sld>
+</file>
+
+<file path=ppt/slides/slide16.xml><?xml version="1.0" encoding="utf-8"?>
+<p:sld xmlns:a="http://schemas.openxmlformats.org/drawingml/2006/main" xmlns:p="http://schemas.openxmlformats.org/presentationml/2006/main" xmlns:r="http://schemas.openxmlformats.org/officeDocument/2006/relationships">
+  <p:cSld>
+    <p:bg>
+      <p:bgPr>
+        <a:solidFill>
+          <a:srgbClr val="FFFAF5"/>
+        </a:solidFill>
+        <a:effectLst/>
+      </p:bgPr>
+    </p:bg>
+    <p:spTree>
+      <p:nvGrpSpPr>
+        <p:cNvPr id="1" name=""/>
+        <p:cNvGrpSpPr/>
+        <p:nvPr/>
+      </p:nvGrpSpPr>
+      <p:grpSpPr/>
+      <p:sp>
+        <p:nvSpPr>
+          <p:cNvPr id="2" name="TextBox 1"/>
+          <p:cNvSpPr txBox="1"/>
+          <p:nvPr/>
+        </p:nvSpPr>
+        <p:spPr>
+          <a:xfrm>
+            <a:off x="502920" y="228600"/>
+            <a:ext cx="6400800" cy="228600"/>
+          </a:xfrm>
+          <a:prstGeom prst="rect">
+            <a:avLst/>
+          </a:prstGeom>
+          <a:noFill/>
+        </p:spPr>
+        <p:txBody>
+          <a:bodyPr wrap="square" lIns="27432" rIns="27432" tIns="18288" bIns="18288">
+            <a:spAutoFit/>
+          </a:bodyPr>
+          <a:lstStyle/>
+          <a:p>
+            <a:r>
+              <a:rPr sz="900" b="1">
+                <a:solidFill>
+                  <a:srgbClr val="5A6078"/>
+                </a:solidFill>
+                <a:latin typeface="Segoe UI"/>
+              </a:rPr>
+              <a:t>COWORK MEDIUM TASK</a:t>
+            </a:r>
+          </a:p>
+        </p:txBody>
+      </p:sp>
+      <p:sp>
+        <p:nvSpPr>
+          <p:cNvPr id="3" name="TextBox 2"/>
+          <p:cNvSpPr txBox="1"/>
+          <p:nvPr/>
+        </p:nvSpPr>
+        <p:spPr>
+          <a:xfrm>
+            <a:off x="502920" y="438912"/>
+            <a:ext cx="7955279" cy="658368"/>
+          </a:xfrm>
+          <a:prstGeom prst="rect">
+            <a:avLst/>
+          </a:prstGeom>
+          <a:noFill/>
+        </p:spPr>
+        <p:txBody>
+          <a:bodyPr wrap="square" lIns="27432" rIns="27432" tIns="18288" bIns="18288">
+            <a:spAutoFit/>
+          </a:bodyPr>
+          <a:lstStyle/>
+          <a:p>
+            <a:r>
+              <a:rPr sz="2200" b="1">
+                <a:solidFill>
+                  <a:srgbClr val="1B1B2C"/>
+                </a:solidFill>
+                <a:latin typeface="Segoe UI"/>
+              </a:rPr>
+              <a:t>Turn inbox noise into a curated intelligence brief</a:t>
+            </a:r>
+          </a:p>
+        </p:txBody>
+      </p:sp>
+      <p:sp>
+        <p:nvSpPr>
+          <p:cNvPr id="4" name="Rectangle 3"/>
+          <p:cNvSpPr/>
+          <p:nvPr/>
+        </p:nvSpPr>
+        <p:spPr>
+          <a:xfrm>
+            <a:off x="502920" y="1115568"/>
+            <a:ext cx="1097280" cy="45720"/>
+          </a:xfrm>
+          <a:prstGeom prst="rect">
+            <a:avLst/>
+          </a:prstGeom>
+          <a:solidFill>
+            <a:srgbClr val="1A6FD6"/>
+          </a:solidFill>
+          <a:ln>
+            <a:noFill/>
+          </a:ln>
+        </p:spPr>
+        <p:style>
+          <a:lnRef idx="1">
+            <a:schemeClr val="accent1"/>
+          </a:lnRef>
+          <a:fillRef idx="3">
+            <a:schemeClr val="accent1"/>
+          </a:fillRef>
+          <a:effectRef idx="2">
+            <a:schemeClr val="accent1"/>
+          </a:effectRef>
+          <a:fontRef idx="minor">
+            <a:schemeClr val="lt1"/>
+          </a:fontRef>
+        </p:style>
+        <p:txBody>
+          <a:bodyPr rtlCol="0" anchor="ctr"/>
+          <a:lstStyle/>
+          <a:p>
+            <a:pPr algn="ctr"/>
+          </a:p>
+        </p:txBody>
+      </p:sp>
+      <p:sp>
+        <p:nvSpPr>
+          <p:cNvPr id="5" name="Rounded Rectangle 4"/>
+          <p:cNvSpPr/>
+          <p:nvPr/>
+        </p:nvSpPr>
+        <p:spPr>
+          <a:xfrm>
+            <a:off x="640080" y="1417320"/>
+            <a:ext cx="7863840" cy="2697480"/>
+          </a:xfrm>
+          <a:prstGeom prst="roundRect">
+            <a:avLst/>
+          </a:prstGeom>
+          <a:solidFill>
+            <a:srgbClr val="FFFFFF"/>
+          </a:solidFill>
+          <a:ln>
+            <a:solidFill>
+              <a:srgbClr val="F6F7FB"/>
+            </a:solidFill>
+          </a:ln>
+        </p:spPr>
+        <p:style>
+          <a:lnRef idx="1">
+            <a:schemeClr val="accent1"/>
+          </a:lnRef>
+          <a:fillRef idx="3">
+            <a:schemeClr val="accent1"/>
+          </a:fillRef>
+          <a:effectRef idx="2">
+            <a:schemeClr val="accent1"/>
+          </a:effectRef>
+          <a:fontRef idx="minor">
+            <a:schemeClr val="lt1"/>
+          </a:fontRef>
+        </p:style>
+        <p:txBody>
+          <a:bodyPr rtlCol="0" anchor="ctr"/>
+          <a:lstStyle/>
+          <a:p>
+            <a:pPr algn="ctr"/>
+          </a:p>
+        </p:txBody>
+      </p:sp>
+      <p:sp>
+        <p:nvSpPr>
+          <p:cNvPr id="6" name="Rectangle 5"/>
+          <p:cNvSpPr/>
+          <p:nvPr/>
+        </p:nvSpPr>
+        <p:spPr>
+          <a:xfrm>
+            <a:off x="640080" y="1417320"/>
+            <a:ext cx="7863840" cy="64008"/>
+          </a:xfrm>
+          <a:prstGeom prst="rect">
+            <a:avLst/>
+          </a:prstGeom>
+          <a:solidFill>
+            <a:srgbClr val="0E8E92"/>
+          </a:solidFill>
+          <a:ln>
+            <a:noFill/>
+          </a:ln>
+        </p:spPr>
+        <p:style>
+          <a:lnRef idx="1">
+            <a:schemeClr val="accent1"/>
+          </a:lnRef>
+          <a:fillRef idx="3">
+            <a:schemeClr val="accent1"/>
+          </a:fillRef>
+          <a:effectRef idx="2">
+            <a:schemeClr val="accent1"/>
+          </a:effectRef>
+          <a:fontRef idx="minor">
+            <a:schemeClr val="lt1"/>
+          </a:fontRef>
+        </p:style>
+        <p:txBody>
+          <a:bodyPr rtlCol="0" anchor="ctr"/>
+          <a:lstStyle/>
+          <a:p>
+            <a:pPr algn="ctr"/>
+          </a:p>
+        </p:txBody>
+      </p:sp>
+      <p:sp>
+        <p:nvSpPr>
+          <p:cNvPr id="7" name="TextBox 6"/>
+          <p:cNvSpPr txBox="1"/>
+          <p:nvPr/>
+        </p:nvSpPr>
+        <p:spPr>
+          <a:xfrm>
+            <a:off x="914400" y="1700784"/>
+            <a:ext cx="1325880" cy="384048"/>
+          </a:xfrm>
+          <a:prstGeom prst="rect">
+            <a:avLst/>
+          </a:prstGeom>
+          <a:noFill/>
+        </p:spPr>
+        <p:txBody>
+          <a:bodyPr wrap="square" lIns="27432" rIns="27432" tIns="18288" bIns="18288">
+            <a:spAutoFit/>
+          </a:bodyPr>
+          <a:lstStyle/>
+          <a:p>
+            <a:pPr algn="ctr"/>
+            <a:r>
+              <a:rPr sz="2000" b="1">
+                <a:solidFill>
+                  <a:srgbClr val="0E8E92"/>
+                </a:solidFill>
+                <a:latin typeface="Segoe UI"/>
+              </a:rPr>
+              <a:t>Medium</a:t>
+            </a:r>
+          </a:p>
+        </p:txBody>
+      </p:sp>
+      <p:sp>
+        <p:nvSpPr>
+          <p:cNvPr id="8" name="TextBox 7"/>
+          <p:cNvSpPr txBox="1"/>
+          <p:nvPr/>
+        </p:nvSpPr>
+        <p:spPr>
+          <a:xfrm>
+            <a:off x="2423160" y="1627632"/>
+            <a:ext cx="5577840" cy="658368"/>
+          </a:xfrm>
+          <a:prstGeom prst="rect">
+            <a:avLst/>
+          </a:prstGeom>
+          <a:noFill/>
+        </p:spPr>
+        <p:txBody>
+          <a:bodyPr wrap="square" lIns="27432" rIns="27432" tIns="18288" bIns="18288">
+            <a:spAutoFit/>
+          </a:bodyPr>
+          <a:lstStyle/>
+          <a:p>
+            <a:r>
+              <a:rPr sz="1300" b="0">
+                <a:solidFill>
+                  <a:srgbClr val="5A6078"/>
+                </a:solidFill>
+                <a:latin typeface="Segoe UI"/>
+              </a:rPr>
+              <a:t>Recurring multi-step work. Cowork reasons across several sources and produces one or more finished deliverables you would normally build by hand.</a:t>
+            </a:r>
+          </a:p>
+        </p:txBody>
+      </p:sp>
+      <p:sp>
+        <p:nvSpPr>
+          <p:cNvPr id="9" name="TextBox 8"/>
+          <p:cNvSpPr txBox="1"/>
+          <p:nvPr/>
+        </p:nvSpPr>
+        <p:spPr>
+          <a:xfrm>
+            <a:off x="914400" y="2560320"/>
+            <a:ext cx="1005840" cy="237744"/>
+          </a:xfrm>
+          <a:prstGeom prst="rect">
+            <a:avLst/>
+          </a:prstGeom>
+          <a:noFill/>
+        </p:spPr>
+        <p:txBody>
+          <a:bodyPr wrap="square" lIns="27432" rIns="27432" tIns="18288" bIns="18288">
+            <a:spAutoFit/>
+          </a:bodyPr>
+          <a:lstStyle/>
+          <a:p>
+            <a:r>
+              <a:rPr sz="1300" b="1">
+                <a:solidFill>
+                  <a:srgbClr val="1B1B2C"/>
+                </a:solidFill>
+                <a:latin typeface="Segoe UI"/>
+              </a:rPr>
+              <a:t>Goal</a:t>
+            </a:r>
+          </a:p>
+        </p:txBody>
+      </p:sp>
+      <p:sp>
+        <p:nvSpPr>
+          <p:cNvPr id="10" name="TextBox 9"/>
+          <p:cNvSpPr txBox="1"/>
+          <p:nvPr/>
+        </p:nvSpPr>
+        <p:spPr>
+          <a:xfrm>
+            <a:off x="1874519" y="2542032"/>
+            <a:ext cx="6263640" cy="384048"/>
+          </a:xfrm>
+          <a:prstGeom prst="rect">
+            <a:avLst/>
+          </a:prstGeom>
+          <a:noFill/>
+        </p:spPr>
+        <p:txBody>
+          <a:bodyPr wrap="square" lIns="27432" rIns="27432" tIns="18288" bIns="18288">
+            <a:spAutoFit/>
+          </a:bodyPr>
+          <a:lstStyle/>
+          <a:p>
+            <a:r>
+              <a:rPr sz="1200" b="0">
+                <a:solidFill>
+                  <a:srgbClr val="1B1B2C"/>
+                </a:solidFill>
+                <a:latin typeface="Segoe UI"/>
+              </a:rPr>
+              <a:t>Cut through a week of newsletters to the stories that actually matter to your work.</a:t>
+            </a:r>
+          </a:p>
+        </p:txBody>
+      </p:sp>
+      <p:sp>
+        <p:nvSpPr>
+          <p:cNvPr id="11" name="TextBox 10"/>
+          <p:cNvSpPr txBox="1"/>
+          <p:nvPr/>
+        </p:nvSpPr>
+        <p:spPr>
+          <a:xfrm>
+            <a:off x="914400" y="3218688"/>
+            <a:ext cx="1234440" cy="237744"/>
+          </a:xfrm>
+          <a:prstGeom prst="rect">
+            <a:avLst/>
+          </a:prstGeom>
+          <a:noFill/>
+        </p:spPr>
+        <p:txBody>
+          <a:bodyPr wrap="square" lIns="27432" rIns="27432" tIns="18288" bIns="18288">
+            <a:spAutoFit/>
+          </a:bodyPr>
+          <a:lstStyle/>
+          <a:p>
+            <a:r>
+              <a:rPr sz="1300" b="1">
+                <a:solidFill>
+                  <a:srgbClr val="1B1B2C"/>
+                </a:solidFill>
+                <a:latin typeface="Segoe UI"/>
+              </a:rPr>
+              <a:t>Outcome</a:t>
+            </a:r>
+          </a:p>
+        </p:txBody>
+      </p:sp>
+      <p:sp>
+        <p:nvSpPr>
+          <p:cNvPr id="12" name="TextBox 11"/>
+          <p:cNvSpPr txBox="1"/>
+          <p:nvPr/>
+        </p:nvSpPr>
+        <p:spPr>
+          <a:xfrm>
+            <a:off x="1874519" y="3182112"/>
+            <a:ext cx="6263640" cy="438912"/>
+          </a:xfrm>
+          <a:prstGeom prst="rect">
+            <a:avLst/>
+          </a:prstGeom>
+          <a:noFill/>
+        </p:spPr>
+        <p:txBody>
+          <a:bodyPr wrap="square" lIns="27432" rIns="27432" tIns="18288" bIns="18288">
+            <a:spAutoFit/>
+          </a:bodyPr>
+          <a:lstStyle/>
+          <a:p>
+            <a:r>
+              <a:rPr sz="1200" b="0">
+                <a:solidFill>
+                  <a:srgbClr val="1B1B2C"/>
+                </a:solidFill>
+                <a:latin typeface="Segoe UI"/>
+              </a:rPr>
+              <a:t>A curated weekly brief that surfaces meaningful trends across the publications you follow, without the time spent reading them.</a:t>
+            </a:r>
+          </a:p>
+        </p:txBody>
+      </p:sp>
+    </p:spTree>
+  </p:cSld>
+  <p:clrMapOvr>
+    <a:masterClrMapping/>
+  </p:clrMapOvr>
+</p:sld>
+</file>
+
+<file path=ppt/slides/slide17.xml><?xml version="1.0" encoding="utf-8"?>
+<p:sld xmlns:a="http://schemas.openxmlformats.org/drawingml/2006/main" xmlns:p="http://schemas.openxmlformats.org/presentationml/2006/main" xmlns:r="http://schemas.openxmlformats.org/officeDocument/2006/relationships">
+  <p:cSld>
+    <p:bg>
+      <p:bgPr>
+        <a:solidFill>
+          <a:srgbClr val="FFFAF5"/>
+        </a:solidFill>
+        <a:effectLst/>
+      </p:bgPr>
+    </p:bg>
+    <p:spTree>
+      <p:nvGrpSpPr>
+        <p:cNvPr id="1" name=""/>
+        <p:cNvGrpSpPr/>
+        <p:nvPr/>
+      </p:nvGrpSpPr>
+      <p:grpSpPr/>
+      <p:sp>
+        <p:nvSpPr>
+          <p:cNvPr id="2" name="TextBox 1"/>
+          <p:cNvSpPr txBox="1"/>
+          <p:nvPr/>
+        </p:nvSpPr>
+        <p:spPr>
+          <a:xfrm>
+            <a:off x="502920" y="228600"/>
+            <a:ext cx="6400800" cy="228600"/>
+          </a:xfrm>
+          <a:prstGeom prst="rect">
+            <a:avLst/>
+          </a:prstGeom>
+          <a:noFill/>
+        </p:spPr>
+        <p:txBody>
+          <a:bodyPr wrap="square" lIns="27432" rIns="27432" tIns="18288" bIns="18288">
+            <a:spAutoFit/>
+          </a:bodyPr>
+          <a:lstStyle/>
+          <a:p>
+            <a:r>
+              <a:rPr sz="900" b="1">
+                <a:solidFill>
+                  <a:srgbClr val="5A6078"/>
+                </a:solidFill>
+                <a:latin typeface="Segoe UI"/>
+              </a:rPr>
+              <a:t>TURN INBOX NOISE INTO A CURATED INTELLIGENCE BRIEF</a:t>
+            </a:r>
+          </a:p>
+        </p:txBody>
+      </p:sp>
+      <p:sp>
+        <p:nvSpPr>
+          <p:cNvPr id="3" name="TextBox 2"/>
+          <p:cNvSpPr txBox="1"/>
+          <p:nvPr/>
+        </p:nvSpPr>
+        <p:spPr>
+          <a:xfrm>
+            <a:off x="502920" y="438912"/>
+            <a:ext cx="7955279" cy="658368"/>
+          </a:xfrm>
+          <a:prstGeom prst="rect">
+            <a:avLst/>
+          </a:prstGeom>
+          <a:noFill/>
+        </p:spPr>
+        <p:txBody>
+          <a:bodyPr wrap="square" lIns="27432" rIns="27432" tIns="18288" bIns="18288">
+            <a:spAutoFit/>
+          </a:bodyPr>
+          <a:lstStyle/>
+          <a:p>
+            <a:r>
+              <a:rPr sz="2200" b="1">
+                <a:solidFill>
+                  <a:srgbClr val="1B1B2C"/>
+                </a:solidFill>
+                <a:latin typeface="Segoe UI"/>
+              </a:rPr>
+              <a:t>Goal, outcome, prompt, flow</a:t>
+            </a:r>
+          </a:p>
+        </p:txBody>
+      </p:sp>
+      <p:sp>
+        <p:nvSpPr>
+          <p:cNvPr id="4" name="Rectangle 3"/>
+          <p:cNvSpPr/>
+          <p:nvPr/>
+        </p:nvSpPr>
+        <p:spPr>
+          <a:xfrm>
+            <a:off x="502920" y="1115568"/>
+            <a:ext cx="1097280" cy="45720"/>
+          </a:xfrm>
+          <a:prstGeom prst="rect">
+            <a:avLst/>
+          </a:prstGeom>
+          <a:solidFill>
+            <a:srgbClr val="1A6FD6"/>
+          </a:solidFill>
+          <a:ln>
+            <a:noFill/>
+          </a:ln>
+        </p:spPr>
+        <p:style>
+          <a:lnRef idx="1">
+            <a:schemeClr val="accent1"/>
+          </a:lnRef>
+          <a:fillRef idx="3">
+            <a:schemeClr val="accent1"/>
+          </a:fillRef>
+          <a:effectRef idx="2">
+            <a:schemeClr val="accent1"/>
+          </a:effectRef>
+          <a:fontRef idx="minor">
+            <a:schemeClr val="lt1"/>
+          </a:fontRef>
+        </p:style>
+        <p:txBody>
+          <a:bodyPr rtlCol="0" anchor="ctr"/>
+          <a:lstStyle/>
+          <a:p>
+            <a:pPr algn="ctr"/>
+          </a:p>
+        </p:txBody>
+      </p:sp>
+      <p:sp>
+        <p:nvSpPr>
+          <p:cNvPr id="5" name="Rounded Rectangle 4"/>
+          <p:cNvSpPr/>
+          <p:nvPr/>
+        </p:nvSpPr>
+        <p:spPr>
+          <a:xfrm>
+            <a:off x="502920" y="1298448"/>
+            <a:ext cx="3886200" cy="3273552"/>
+          </a:xfrm>
+          <a:prstGeom prst="roundRect">
+            <a:avLst/>
+          </a:prstGeom>
+          <a:solidFill>
+            <a:srgbClr val="FFFFFF"/>
+          </a:solidFill>
+          <a:ln>
+            <a:solidFill>
+              <a:srgbClr val="F6F7FB"/>
+            </a:solidFill>
+          </a:ln>
+        </p:spPr>
+        <p:style>
+          <a:lnRef idx="1">
+            <a:schemeClr val="accent1"/>
+          </a:lnRef>
+          <a:fillRef idx="3">
+            <a:schemeClr val="accent1"/>
+          </a:fillRef>
+          <a:effectRef idx="2">
+            <a:schemeClr val="accent1"/>
+          </a:effectRef>
+          <a:fontRef idx="minor">
+            <a:schemeClr val="lt1"/>
+          </a:fontRef>
+        </p:style>
+        <p:txBody>
+          <a:bodyPr rtlCol="0" anchor="ctr"/>
+          <a:lstStyle/>
+          <a:p>
+            <a:pPr algn="ctr"/>
+          </a:p>
+        </p:txBody>
+      </p:sp>
+      <p:sp>
+        <p:nvSpPr>
+          <p:cNvPr id="6" name="Rectangle 5"/>
+          <p:cNvSpPr/>
+          <p:nvPr/>
+        </p:nvSpPr>
+        <p:spPr>
+          <a:xfrm>
+            <a:off x="502920" y="1298448"/>
+            <a:ext cx="3886200" cy="64008"/>
+          </a:xfrm>
+          <a:prstGeom prst="rect">
+            <a:avLst/>
+          </a:prstGeom>
+          <a:solidFill>
+            <a:srgbClr val="0E8E92"/>
+          </a:solidFill>
+          <a:ln>
+            <a:noFill/>
+          </a:ln>
+        </p:spPr>
+        <p:style>
+          <a:lnRef idx="1">
+            <a:schemeClr val="accent1"/>
+          </a:lnRef>
+          <a:fillRef idx="3">
+            <a:schemeClr val="accent1"/>
+          </a:fillRef>
+          <a:effectRef idx="2">
+            <a:schemeClr val="accent1"/>
+          </a:effectRef>
+          <a:fontRef idx="minor">
+            <a:schemeClr val="lt1"/>
+          </a:fontRef>
+        </p:style>
+        <p:txBody>
+          <a:bodyPr rtlCol="0" anchor="ctr"/>
+          <a:lstStyle/>
+          <a:p>
+            <a:pPr algn="ctr"/>
+          </a:p>
+        </p:txBody>
+      </p:sp>
+      <p:sp>
+        <p:nvSpPr>
+          <p:cNvPr id="7" name="TextBox 6"/>
+          <p:cNvSpPr txBox="1"/>
+          <p:nvPr/>
+        </p:nvSpPr>
+        <p:spPr>
+          <a:xfrm>
+            <a:off x="749808" y="1554480"/>
+            <a:ext cx="3383280" cy="256032"/>
+          </a:xfrm>
+          <a:prstGeom prst="rect">
+            <a:avLst/>
+          </a:prstGeom>
+          <a:noFill/>
+        </p:spPr>
+        <p:txBody>
+          <a:bodyPr wrap="square" lIns="27432" rIns="27432" tIns="18288" bIns="18288">
+            <a:spAutoFit/>
+          </a:bodyPr>
+          <a:lstStyle/>
+          <a:p>
+            <a:r>
+              <a:rPr sz="1300" b="1">
+                <a:solidFill>
+                  <a:srgbClr val="1B1B2C"/>
+                </a:solidFill>
+                <a:latin typeface="Segoe UI"/>
+              </a:rPr>
+              <a:t>Prompt to give Cowork</a:t>
+            </a:r>
+          </a:p>
+        </p:txBody>
+      </p:sp>
+      <p:sp>
+        <p:nvSpPr>
+          <p:cNvPr id="8" name="TextBox 7"/>
+          <p:cNvSpPr txBox="1"/>
+          <p:nvPr/>
+        </p:nvSpPr>
+        <p:spPr>
+          <a:xfrm>
+            <a:off x="749808" y="1883664"/>
+            <a:ext cx="3383280" cy="2240280"/>
+          </a:xfrm>
+          <a:prstGeom prst="rect">
+            <a:avLst/>
+          </a:prstGeom>
+          <a:noFill/>
+        </p:spPr>
+        <p:txBody>
+          <a:bodyPr wrap="square" lIns="27432" rIns="27432" tIns="18288" bIns="18288">
+            <a:spAutoFit/>
+          </a:bodyPr>
+          <a:lstStyle/>
+          <a:p>
+            <a:r>
+              <a:rPr sz="900" b="0">
+                <a:solidFill>
+                  <a:srgbClr val="5A6078"/>
+                </a:solidFill>
+                <a:latin typeface="Segoe UI"/>
+              </a:rPr>
+              <a:t>Search my inbox for all newsletters, digests, and industry publications received in the past 7 days. Then write a polished, article-style weekly brief covering four sections: (1) [Company] internal newsletters, (2) AI &amp; tech news, (3) World affairs/news publications, and (4) [Your industry], weaving the key stories and themes from each into flowing narrative paragraphs, not bullet lists. Exclude personal or consumer...</a:t>
+            </a:r>
+          </a:p>
+        </p:txBody>
+      </p:sp>
+      <p:sp>
+        <p:nvSpPr>
+          <p:cNvPr id="9" name="Rounded Rectangle 8"/>
+          <p:cNvSpPr/>
+          <p:nvPr/>
+        </p:nvSpPr>
+        <p:spPr>
+          <a:xfrm>
+            <a:off x="4663440" y="1298448"/>
+            <a:ext cx="3977639" cy="3273552"/>
+          </a:xfrm>
+          <a:prstGeom prst="roundRect">
+            <a:avLst/>
+          </a:prstGeom>
+          <a:solidFill>
+            <a:srgbClr val="FFFFFF"/>
+          </a:solidFill>
+          <a:ln>
+            <a:solidFill>
+              <a:srgbClr val="F6F7FB"/>
+            </a:solidFill>
+          </a:ln>
+        </p:spPr>
+        <p:style>
+          <a:lnRef idx="1">
+            <a:schemeClr val="accent1"/>
+          </a:lnRef>
+          <a:fillRef idx="3">
+            <a:schemeClr val="accent1"/>
+          </a:fillRef>
+          <a:effectRef idx="2">
+            <a:schemeClr val="accent1"/>
+          </a:effectRef>
+          <a:fontRef idx="minor">
+            <a:schemeClr val="lt1"/>
+          </a:fontRef>
+        </p:style>
+        <p:txBody>
+          <a:bodyPr rtlCol="0" anchor="ctr"/>
+          <a:lstStyle/>
+          <a:p>
+            <a:pPr algn="ctr"/>
+          </a:p>
+        </p:txBody>
+      </p:sp>
+      <p:sp>
+        <p:nvSpPr>
+          <p:cNvPr id="10" name="Rectangle 9"/>
+          <p:cNvSpPr/>
+          <p:nvPr/>
+        </p:nvSpPr>
+        <p:spPr>
+          <a:xfrm>
+            <a:off x="4663440" y="1298448"/>
+            <a:ext cx="3977639" cy="64008"/>
+          </a:xfrm>
+          <a:prstGeom prst="rect">
+            <a:avLst/>
+          </a:prstGeom>
+          <a:solidFill>
+            <a:srgbClr val="0E8E92"/>
+          </a:solidFill>
+          <a:ln>
+            <a:noFill/>
+          </a:ln>
+        </p:spPr>
+        <p:style>
+          <a:lnRef idx="1">
+            <a:schemeClr val="accent1"/>
+          </a:lnRef>
+          <a:fillRef idx="3">
+            <a:schemeClr val="accent1"/>
+          </a:fillRef>
+          <a:effectRef idx="2">
+            <a:schemeClr val="accent1"/>
+          </a:effectRef>
+          <a:fontRef idx="minor">
+            <a:schemeClr val="lt1"/>
+          </a:fontRef>
+        </p:style>
+        <p:txBody>
+          <a:bodyPr rtlCol="0" anchor="ctr"/>
+          <a:lstStyle/>
+          <a:p>
+            <a:pPr algn="ctr"/>
+          </a:p>
+        </p:txBody>
+      </p:sp>
+      <p:sp>
+        <p:nvSpPr>
+          <p:cNvPr id="11" name="TextBox 10"/>
+          <p:cNvSpPr txBox="1"/>
+          <p:nvPr/>
+        </p:nvSpPr>
+        <p:spPr>
+          <a:xfrm>
+            <a:off x="4910328" y="1554480"/>
+            <a:ext cx="3383280" cy="256032"/>
+          </a:xfrm>
+          <a:prstGeom prst="rect">
+            <a:avLst/>
+          </a:prstGeom>
+          <a:noFill/>
+        </p:spPr>
+        <p:txBody>
+          <a:bodyPr wrap="square" lIns="27432" rIns="27432" tIns="18288" bIns="18288">
+            <a:spAutoFit/>
+          </a:bodyPr>
+          <a:lstStyle/>
+          <a:p>
+            <a:r>
+              <a:rPr sz="1300" b="1">
+                <a:solidFill>
+                  <a:srgbClr val="1B1B2C"/>
+                </a:solidFill>
+                <a:latin typeface="Segoe UI"/>
+              </a:rPr>
+              <a:t>Execution flow</a:t>
+            </a:r>
+          </a:p>
+        </p:txBody>
+      </p:sp>
+      <p:sp>
+        <p:nvSpPr>
+          <p:cNvPr id="12" name="TextBox 11"/>
+          <p:cNvSpPr txBox="1"/>
+          <p:nvPr/>
+        </p:nvSpPr>
+        <p:spPr>
+          <a:xfrm>
+            <a:off x="4892040" y="1874519"/>
+            <a:ext cx="3429000" cy="2148840"/>
+          </a:xfrm>
+          <a:prstGeom prst="rect">
+            <a:avLst/>
+          </a:prstGeom>
+          <a:noFill/>
+        </p:spPr>
+        <p:txBody>
+          <a:bodyPr wrap="none" lIns="73152" rIns="73152" tIns="36576">
+            <a:spAutoFit/>
+          </a:bodyPr>
+          <a:lstStyle/>
+          <a:p>
+            <a:pPr>
+              <a:spcAft>
+                <a:spcPts val="500"/>
+              </a:spcAft>
+              <a:defRPr sz="1000">
+                <a:solidFill>
+                  <a:srgbClr val="1B1B2C"/>
+                </a:solidFill>
+                <a:latin typeface="Segoe UI"/>
+              </a:defRPr>
+            </a:pPr>
+            <a:r>
+              <a:t>• Inbox -&gt; Identify newsletters + digests</a:t>
+            </a:r>
+          </a:p>
+          <a:p>
+            <a:pPr>
+              <a:spcAft>
+                <a:spcPts val="500"/>
+              </a:spcAft>
+              <a:defRPr sz="1000">
+                <a:solidFill>
+                  <a:srgbClr val="1B1B2C"/>
+                </a:solidFill>
+                <a:latin typeface="Segoe UI"/>
+              </a:defRPr>
+            </a:pPr>
+            <a:r>
+              <a:t>• Categorize -&gt; Internal / AI / news / industry</a:t>
+            </a:r>
+          </a:p>
+          <a:p>
+            <a:pPr>
+              <a:spcAft>
+                <a:spcPts val="500"/>
+              </a:spcAft>
+              <a:defRPr sz="1000">
+                <a:solidFill>
+                  <a:srgbClr val="1B1B2C"/>
+                </a:solidFill>
+                <a:latin typeface="Segoe UI"/>
+              </a:defRPr>
+            </a:pPr>
+            <a:r>
+              <a:t>• Filter -&gt; Exclude consumer content</a:t>
+            </a:r>
+          </a:p>
+          <a:p>
+            <a:pPr>
+              <a:spcAft>
+                <a:spcPts val="500"/>
+              </a:spcAft>
+              <a:defRPr sz="1000">
+                <a:solidFill>
+                  <a:srgbClr val="1B1B2C"/>
+                </a:solidFill>
+                <a:latin typeface="Segoe UI"/>
+              </a:defRPr>
+            </a:pPr>
+            <a:r>
+              <a:t>• Synthesize -&gt; Narrative brief</a:t>
+            </a:r>
+          </a:p>
+          <a:p>
+            <a:pPr>
+              <a:spcAft>
+                <a:spcPts val="500"/>
+              </a:spcAft>
+              <a:defRPr sz="1000">
+                <a:solidFill>
+                  <a:srgbClr val="1B1B2C"/>
+                </a:solidFill>
+                <a:latin typeface="Segoe UI"/>
+              </a:defRPr>
+            </a:pPr>
+            <a:r>
+              <a:t>• Compile -&gt; Inline article</a:t>
+            </a:r>
+          </a:p>
+        </p:txBody>
+      </p:sp>
+      <p:sp>
+        <p:nvSpPr>
+          <p:cNvPr id="13" name="TextBox 12"/>
+          <p:cNvSpPr txBox="1"/>
+          <p:nvPr/>
+        </p:nvSpPr>
+        <p:spPr>
+          <a:xfrm>
+            <a:off x="4910328" y="4133087"/>
+            <a:ext cx="3337560" cy="310896"/>
+          </a:xfrm>
+          <a:prstGeom prst="rect">
+            <a:avLst/>
+          </a:prstGeom>
+          <a:noFill/>
+        </p:spPr>
+        <p:txBody>
+          <a:bodyPr wrap="square" lIns="27432" rIns="27432" tIns="18288" bIns="18288">
+            <a:spAutoFit/>
+          </a:bodyPr>
+          <a:lstStyle/>
+          <a:p>
+            <a:r>
+              <a:rPr sz="1000" b="0">
+                <a:solidFill>
+                  <a:srgbClr val="5A6078"/>
+                </a:solidFill>
+                <a:latin typeface="Segoe UI"/>
+              </a:rPr>
+              <a:t>A curated weekly brief that surfaces meaningful trends across the publications you follow, without the time spent reading them.</a:t>
+            </a:r>
+          </a:p>
+        </p:txBody>
+      </p:sp>
+    </p:spTree>
+  </p:cSld>
+  <p:clrMapOvr>
+    <a:masterClrMapping/>
+  </p:clrMapOvr>
+</p:sld>
+</file>
+
+<file path=ppt/slides/slide18.xml><?xml version="1.0" encoding="utf-8"?>
+<p:sld xmlns:a="http://schemas.openxmlformats.org/drawingml/2006/main" xmlns:p="http://schemas.openxmlformats.org/presentationml/2006/main" xmlns:r="http://schemas.openxmlformats.org/officeDocument/2006/relationships">
+  <p:cSld>
+    <p:bg>
+      <p:bgPr>
+        <a:solidFill>
+          <a:srgbClr val="FFFAF5"/>
+        </a:solidFill>
+        <a:effectLst/>
+      </p:bgPr>
+    </p:bg>
+    <p:spTree>
+      <p:nvGrpSpPr>
+        <p:cNvPr id="1" name=""/>
+        <p:cNvGrpSpPr/>
+        <p:nvPr/>
+      </p:nvGrpSpPr>
+      <p:grpSpPr/>
+      <p:sp>
+        <p:nvSpPr>
+          <p:cNvPr id="2" name="TextBox 1"/>
+          <p:cNvSpPr txBox="1"/>
+          <p:nvPr/>
+        </p:nvSpPr>
+        <p:spPr>
+          <a:xfrm>
+            <a:off x="502920" y="228600"/>
+            <a:ext cx="6400800" cy="228600"/>
+          </a:xfrm>
+          <a:prstGeom prst="rect">
+            <a:avLst/>
+          </a:prstGeom>
+          <a:noFill/>
+        </p:spPr>
+        <p:txBody>
+          <a:bodyPr wrap="square" lIns="27432" rIns="27432" tIns="18288" bIns="18288">
+            <a:spAutoFit/>
+          </a:bodyPr>
+          <a:lstStyle/>
+          <a:p>
+            <a:r>
+              <a:rPr sz="900" b="1">
+                <a:solidFill>
+                  <a:srgbClr val="5A6078"/>
+                </a:solidFill>
+                <a:latin typeface="Segoe UI"/>
+              </a:rPr>
+              <a:t>COWORK MEDIUM TASK</a:t>
+            </a:r>
+          </a:p>
+        </p:txBody>
+      </p:sp>
+      <p:sp>
+        <p:nvSpPr>
+          <p:cNvPr id="3" name="TextBox 2"/>
+          <p:cNvSpPr txBox="1"/>
+          <p:nvPr/>
+        </p:nvSpPr>
+        <p:spPr>
+          <a:xfrm>
+            <a:off x="502920" y="438912"/>
+            <a:ext cx="7955279" cy="658368"/>
+          </a:xfrm>
+          <a:prstGeom prst="rect">
+            <a:avLst/>
+          </a:prstGeom>
+          <a:noFill/>
+        </p:spPr>
+        <p:txBody>
+          <a:bodyPr wrap="square" lIns="27432" rIns="27432" tIns="18288" bIns="18288">
+            <a:spAutoFit/>
+          </a:bodyPr>
+          <a:lstStyle/>
+          <a:p>
+            <a:r>
+              <a:rPr sz="2200" b="1">
+                <a:solidFill>
+                  <a:srgbClr val="1B1B2C"/>
+                </a:solidFill>
+                <a:latin typeface="Segoe UI"/>
+              </a:rPr>
+              <a:t>Partner and channel activation kit</a:t>
+            </a:r>
+          </a:p>
+        </p:txBody>
+      </p:sp>
+      <p:sp>
+        <p:nvSpPr>
+          <p:cNvPr id="4" name="Rectangle 3"/>
+          <p:cNvSpPr/>
+          <p:nvPr/>
+        </p:nvSpPr>
+        <p:spPr>
+          <a:xfrm>
+            <a:off x="502920" y="1115568"/>
+            <a:ext cx="1097280" cy="45720"/>
+          </a:xfrm>
+          <a:prstGeom prst="rect">
+            <a:avLst/>
+          </a:prstGeom>
+          <a:solidFill>
+            <a:srgbClr val="1A6FD6"/>
+          </a:solidFill>
+          <a:ln>
+            <a:noFill/>
+          </a:ln>
+        </p:spPr>
+        <p:style>
+          <a:lnRef idx="1">
+            <a:schemeClr val="accent1"/>
+          </a:lnRef>
+          <a:fillRef idx="3">
+            <a:schemeClr val="accent1"/>
+          </a:fillRef>
+          <a:effectRef idx="2">
+            <a:schemeClr val="accent1"/>
+          </a:effectRef>
+          <a:fontRef idx="minor">
+            <a:schemeClr val="lt1"/>
+          </a:fontRef>
+        </p:style>
+        <p:txBody>
+          <a:bodyPr rtlCol="0" anchor="ctr"/>
+          <a:lstStyle/>
+          <a:p>
+            <a:pPr algn="ctr"/>
+          </a:p>
+        </p:txBody>
+      </p:sp>
+      <p:sp>
+        <p:nvSpPr>
+          <p:cNvPr id="5" name="Rounded Rectangle 4"/>
+          <p:cNvSpPr/>
+          <p:nvPr/>
+        </p:nvSpPr>
+        <p:spPr>
+          <a:xfrm>
+            <a:off x="640080" y="1417320"/>
+            <a:ext cx="7863840" cy="2697480"/>
+          </a:xfrm>
+          <a:prstGeom prst="roundRect">
+            <a:avLst/>
+          </a:prstGeom>
+          <a:solidFill>
+            <a:srgbClr val="FFFFFF"/>
+          </a:solidFill>
+          <a:ln>
+            <a:solidFill>
+              <a:srgbClr val="F6F7FB"/>
+            </a:solidFill>
+          </a:ln>
+        </p:spPr>
+        <p:style>
+          <a:lnRef idx="1">
+            <a:schemeClr val="accent1"/>
+          </a:lnRef>
+          <a:fillRef idx="3">
+            <a:schemeClr val="accent1"/>
+          </a:fillRef>
+          <a:effectRef idx="2">
+            <a:schemeClr val="accent1"/>
+          </a:effectRef>
+          <a:fontRef idx="minor">
+            <a:schemeClr val="lt1"/>
+          </a:fontRef>
+        </p:style>
+        <p:txBody>
+          <a:bodyPr rtlCol="0" anchor="ctr"/>
+          <a:lstStyle/>
+          <a:p>
+            <a:pPr algn="ctr"/>
+          </a:p>
+        </p:txBody>
+      </p:sp>
+      <p:sp>
+        <p:nvSpPr>
+          <p:cNvPr id="6" name="Rectangle 5"/>
+          <p:cNvSpPr/>
+          <p:nvPr/>
+        </p:nvSpPr>
+        <p:spPr>
+          <a:xfrm>
+            <a:off x="640080" y="1417320"/>
+            <a:ext cx="7863840" cy="64008"/>
+          </a:xfrm>
+          <a:prstGeom prst="rect">
+            <a:avLst/>
+          </a:prstGeom>
+          <a:solidFill>
+            <a:srgbClr val="0E8E92"/>
+          </a:solidFill>
+          <a:ln>
+            <a:noFill/>
+          </a:ln>
+        </p:spPr>
+        <p:style>
+          <a:lnRef idx="1">
+            <a:schemeClr val="accent1"/>
+          </a:lnRef>
+          <a:fillRef idx="3">
+            <a:schemeClr val="accent1"/>
+          </a:fillRef>
+          <a:effectRef idx="2">
+            <a:schemeClr val="accent1"/>
+          </a:effectRef>
+          <a:fontRef idx="minor">
+            <a:schemeClr val="lt1"/>
+          </a:fontRef>
+        </p:style>
+        <p:txBody>
+          <a:bodyPr rtlCol="0" anchor="ctr"/>
+          <a:lstStyle/>
+          <a:p>
+            <a:pPr algn="ctr"/>
+          </a:p>
+        </p:txBody>
+      </p:sp>
+      <p:sp>
+        <p:nvSpPr>
+          <p:cNvPr id="7" name="TextBox 6"/>
+          <p:cNvSpPr txBox="1"/>
+          <p:nvPr/>
+        </p:nvSpPr>
+        <p:spPr>
+          <a:xfrm>
+            <a:off x="914400" y="1700784"/>
+            <a:ext cx="1325880" cy="384048"/>
+          </a:xfrm>
+          <a:prstGeom prst="rect">
+            <a:avLst/>
+          </a:prstGeom>
+          <a:noFill/>
+        </p:spPr>
+        <p:txBody>
+          <a:bodyPr wrap="square" lIns="27432" rIns="27432" tIns="18288" bIns="18288">
+            <a:spAutoFit/>
+          </a:bodyPr>
+          <a:lstStyle/>
+          <a:p>
+            <a:pPr algn="ctr"/>
+            <a:r>
+              <a:rPr sz="2000" b="1">
+                <a:solidFill>
+                  <a:srgbClr val="0E8E92"/>
+                </a:solidFill>
+                <a:latin typeface="Segoe UI"/>
+              </a:rPr>
+              <a:t>Medium</a:t>
+            </a:r>
+          </a:p>
+        </p:txBody>
+      </p:sp>
+      <p:sp>
+        <p:nvSpPr>
+          <p:cNvPr id="8" name="TextBox 7"/>
+          <p:cNvSpPr txBox="1"/>
+          <p:nvPr/>
+        </p:nvSpPr>
+        <p:spPr>
+          <a:xfrm>
+            <a:off x="2423160" y="1627632"/>
+            <a:ext cx="5577840" cy="658368"/>
+          </a:xfrm>
+          <a:prstGeom prst="rect">
+            <a:avLst/>
+          </a:prstGeom>
+          <a:noFill/>
+        </p:spPr>
+        <p:txBody>
+          <a:bodyPr wrap="square" lIns="27432" rIns="27432" tIns="18288" bIns="18288">
+            <a:spAutoFit/>
+          </a:bodyPr>
+          <a:lstStyle/>
+          <a:p>
+            <a:r>
+              <a:rPr sz="1300" b="0">
+                <a:solidFill>
+                  <a:srgbClr val="5A6078"/>
+                </a:solidFill>
+                <a:latin typeface="Segoe UI"/>
+              </a:rPr>
+              <a:t>Recurring multi-step work. Cowork reasons across several sources and produces one or more finished deliverables you would normally build by hand.</a:t>
+            </a:r>
+          </a:p>
+        </p:txBody>
+      </p:sp>
+      <p:sp>
+        <p:nvSpPr>
+          <p:cNvPr id="9" name="TextBox 8"/>
+          <p:cNvSpPr txBox="1"/>
+          <p:nvPr/>
+        </p:nvSpPr>
+        <p:spPr>
+          <a:xfrm>
+            <a:off x="914400" y="2560320"/>
+            <a:ext cx="1005840" cy="237744"/>
+          </a:xfrm>
+          <a:prstGeom prst="rect">
+            <a:avLst/>
+          </a:prstGeom>
+          <a:noFill/>
+        </p:spPr>
+        <p:txBody>
+          <a:bodyPr wrap="square" lIns="27432" rIns="27432" tIns="18288" bIns="18288">
+            <a:spAutoFit/>
+          </a:bodyPr>
+          <a:lstStyle/>
+          <a:p>
+            <a:r>
+              <a:rPr sz="1300" b="1">
+                <a:solidFill>
+                  <a:srgbClr val="1B1B2C"/>
+                </a:solidFill>
+                <a:latin typeface="Segoe UI"/>
+              </a:rPr>
+              <a:t>Goal</a:t>
+            </a:r>
+          </a:p>
+        </p:txBody>
+      </p:sp>
+      <p:sp>
+        <p:nvSpPr>
+          <p:cNvPr id="10" name="TextBox 9"/>
+          <p:cNvSpPr txBox="1"/>
+          <p:nvPr/>
+        </p:nvSpPr>
+        <p:spPr>
+          <a:xfrm>
+            <a:off x="1874519" y="2542032"/>
+            <a:ext cx="6263640" cy="384048"/>
+          </a:xfrm>
+          <a:prstGeom prst="rect">
+            <a:avLst/>
+          </a:prstGeom>
+          <a:noFill/>
+        </p:spPr>
+        <p:txBody>
+          <a:bodyPr wrap="square" lIns="27432" rIns="27432" tIns="18288" bIns="18288">
+            <a:spAutoFit/>
+          </a:bodyPr>
+          <a:lstStyle/>
+          <a:p>
+            <a:r>
+              <a:rPr sz="1200" b="0">
+                <a:solidFill>
+                  <a:srgbClr val="1B1B2C"/>
+                </a:solidFill>
+                <a:latin typeface="Segoe UI"/>
+              </a:rPr>
+              <a:t>Adapt the [Product/Campaign Name] launch materials for partners and channel teams and route them for review.</a:t>
+            </a:r>
+          </a:p>
+        </p:txBody>
+      </p:sp>
+      <p:sp>
+        <p:nvSpPr>
+          <p:cNvPr id="11" name="TextBox 10"/>
+          <p:cNvSpPr txBox="1"/>
+          <p:nvPr/>
+        </p:nvSpPr>
+        <p:spPr>
+          <a:xfrm>
+            <a:off x="914400" y="3218688"/>
+            <a:ext cx="1234440" cy="237744"/>
+          </a:xfrm>
+          <a:prstGeom prst="rect">
+            <a:avLst/>
+          </a:prstGeom>
+          <a:noFill/>
+        </p:spPr>
+        <p:txBody>
+          <a:bodyPr wrap="square" lIns="27432" rIns="27432" tIns="18288" bIns="18288">
+            <a:spAutoFit/>
+          </a:bodyPr>
+          <a:lstStyle/>
+          <a:p>
+            <a:r>
+              <a:rPr sz="1300" b="1">
+                <a:solidFill>
+                  <a:srgbClr val="1B1B2C"/>
+                </a:solidFill>
+                <a:latin typeface="Segoe UI"/>
+              </a:rPr>
+              <a:t>Outcome</a:t>
+            </a:r>
+          </a:p>
+        </p:txBody>
+      </p:sp>
+      <p:sp>
+        <p:nvSpPr>
+          <p:cNvPr id="12" name="TextBox 11"/>
+          <p:cNvSpPr txBox="1"/>
+          <p:nvPr/>
+        </p:nvSpPr>
+        <p:spPr>
+          <a:xfrm>
+            <a:off x="1874519" y="3182112"/>
+            <a:ext cx="6263640" cy="438912"/>
+          </a:xfrm>
+          <a:prstGeom prst="rect">
+            <a:avLst/>
+          </a:prstGeom>
+          <a:noFill/>
+        </p:spPr>
+        <p:txBody>
+          <a:bodyPr wrap="square" lIns="27432" rIns="27432" tIns="18288" bIns="18288">
+            <a:spAutoFit/>
+          </a:bodyPr>
+          <a:lstStyle/>
+          <a:p>
+            <a:r>
+              <a:rPr sz="1200" b="0">
+                <a:solidFill>
+                  <a:srgbClr val="1B1B2C"/>
+                </a:solidFill>
+                <a:latin typeface="Segoe UI"/>
+              </a:rPr>
+              <a:t>A partner-ready and channel-ready activation kit across Word and Excel, plus a routing plan so partner, field, and channel marketing can move fast.</a:t>
+            </a:r>
+          </a:p>
+        </p:txBody>
+      </p:sp>
+    </p:spTree>
+  </p:cSld>
+  <p:clrMapOvr>
+    <a:masterClrMapping/>
+  </p:clrMapOvr>
+</p:sld>
+</file>
+
+<file path=ppt/slides/slide19.xml><?xml version="1.0" encoding="utf-8"?>
+<p:sld xmlns:a="http://schemas.openxmlformats.org/drawingml/2006/main" xmlns:p="http://schemas.openxmlformats.org/presentationml/2006/main" xmlns:r="http://schemas.openxmlformats.org/officeDocument/2006/relationships">
+  <p:cSld>
+    <p:bg>
+      <p:bgPr>
+        <a:solidFill>
+          <a:srgbClr val="FFFAF5"/>
+        </a:solidFill>
+        <a:effectLst/>
+      </p:bgPr>
+    </p:bg>
+    <p:spTree>
+      <p:nvGrpSpPr>
+        <p:cNvPr id="1" name=""/>
+        <p:cNvGrpSpPr/>
+        <p:nvPr/>
+      </p:nvGrpSpPr>
+      <p:grpSpPr/>
+      <p:sp>
+        <p:nvSpPr>
+          <p:cNvPr id="2" name="TextBox 1"/>
+          <p:cNvSpPr txBox="1"/>
+          <p:nvPr/>
+        </p:nvSpPr>
+        <p:spPr>
+          <a:xfrm>
+            <a:off x="502920" y="228600"/>
+            <a:ext cx="6400800" cy="228600"/>
+          </a:xfrm>
+          <a:prstGeom prst="rect">
+            <a:avLst/>
+          </a:prstGeom>
+          <a:noFill/>
+        </p:spPr>
+        <p:txBody>
+          <a:bodyPr wrap="square" lIns="27432" rIns="27432" tIns="18288" bIns="18288">
+            <a:spAutoFit/>
+          </a:bodyPr>
+          <a:lstStyle/>
+          <a:p>
+            <a:r>
+              <a:rPr sz="900" b="1">
+                <a:solidFill>
+                  <a:srgbClr val="5A6078"/>
+                </a:solidFill>
+                <a:latin typeface="Segoe UI"/>
+              </a:rPr>
+              <a:t>PARTNER AND CHANNEL ACTIVATION KIT</a:t>
+            </a:r>
+          </a:p>
+        </p:txBody>
+      </p:sp>
+      <p:sp>
+        <p:nvSpPr>
+          <p:cNvPr id="3" name="TextBox 2"/>
+          <p:cNvSpPr txBox="1"/>
+          <p:nvPr/>
+        </p:nvSpPr>
+        <p:spPr>
+          <a:xfrm>
+            <a:off x="502920" y="438912"/>
+            <a:ext cx="7955279" cy="658368"/>
+          </a:xfrm>
+          <a:prstGeom prst="rect">
+            <a:avLst/>
+          </a:prstGeom>
+          <a:noFill/>
+        </p:spPr>
+        <p:txBody>
+          <a:bodyPr wrap="square" lIns="27432" rIns="27432" tIns="18288" bIns="18288">
+            <a:spAutoFit/>
+          </a:bodyPr>
+          <a:lstStyle/>
+          <a:p>
+            <a:r>
+              <a:rPr sz="2200" b="1">
+                <a:solidFill>
+                  <a:srgbClr val="1B1B2C"/>
+                </a:solidFill>
+                <a:latin typeface="Segoe UI"/>
+              </a:rPr>
+              <a:t>Goal, outcome, prompt, flow</a:t>
+            </a:r>
+          </a:p>
+        </p:txBody>
+      </p:sp>
+      <p:sp>
+        <p:nvSpPr>
+          <p:cNvPr id="4" name="Rectangle 3"/>
+          <p:cNvSpPr/>
+          <p:nvPr/>
+        </p:nvSpPr>
+        <p:spPr>
+          <a:xfrm>
+            <a:off x="502920" y="1115568"/>
+            <a:ext cx="1097280" cy="45720"/>
+          </a:xfrm>
+          <a:prstGeom prst="rect">
+            <a:avLst/>
+          </a:prstGeom>
+          <a:solidFill>
+            <a:srgbClr val="1A6FD6"/>
+          </a:solidFill>
+          <a:ln>
+            <a:noFill/>
+          </a:ln>
+        </p:spPr>
+        <p:style>
+          <a:lnRef idx="1">
+            <a:schemeClr val="accent1"/>
+          </a:lnRef>
+          <a:fillRef idx="3">
+            <a:schemeClr val="accent1"/>
+          </a:fillRef>
+          <a:effectRef idx="2">
+            <a:schemeClr val="accent1"/>
+          </a:effectRef>
+          <a:fontRef idx="minor">
+            <a:schemeClr val="lt1"/>
+          </a:fontRef>
+        </p:style>
+        <p:txBody>
+          <a:bodyPr rtlCol="0" anchor="ctr"/>
+          <a:lstStyle/>
+          <a:p>
+            <a:pPr algn="ctr"/>
+          </a:p>
+        </p:txBody>
+      </p:sp>
+      <p:sp>
+        <p:nvSpPr>
+          <p:cNvPr id="5" name="Rounded Rectangle 4"/>
+          <p:cNvSpPr/>
+          <p:nvPr/>
+        </p:nvSpPr>
+        <p:spPr>
+          <a:xfrm>
+            <a:off x="502920" y="1298448"/>
+            <a:ext cx="3886200" cy="3273552"/>
+          </a:xfrm>
+          <a:prstGeom prst="roundRect">
+            <a:avLst/>
+          </a:prstGeom>
+          <a:solidFill>
+            <a:srgbClr val="FFFFFF"/>
+          </a:solidFill>
+          <a:ln>
+            <a:solidFill>
+              <a:srgbClr val="F6F7FB"/>
+            </a:solidFill>
+          </a:ln>
+        </p:spPr>
+        <p:style>
+          <a:lnRef idx="1">
+            <a:schemeClr val="accent1"/>
+          </a:lnRef>
+          <a:fillRef idx="3">
+            <a:schemeClr val="accent1"/>
+          </a:fillRef>
+          <a:effectRef idx="2">
+            <a:schemeClr val="accent1"/>
+          </a:effectRef>
+          <a:fontRef idx="minor">
+            <a:schemeClr val="lt1"/>
+          </a:fontRef>
+        </p:style>
+        <p:txBody>
+          <a:bodyPr rtlCol="0" anchor="ctr"/>
+          <a:lstStyle/>
+          <a:p>
+            <a:pPr algn="ctr"/>
+          </a:p>
+        </p:txBody>
+      </p:sp>
+      <p:sp>
+        <p:nvSpPr>
+          <p:cNvPr id="6" name="Rectangle 5"/>
+          <p:cNvSpPr/>
+          <p:nvPr/>
+        </p:nvSpPr>
+        <p:spPr>
+          <a:xfrm>
+            <a:off x="502920" y="1298448"/>
+            <a:ext cx="3886200" cy="64008"/>
+          </a:xfrm>
+          <a:prstGeom prst="rect">
+            <a:avLst/>
+          </a:prstGeom>
+          <a:solidFill>
+            <a:srgbClr val="0E8E92"/>
+          </a:solidFill>
+          <a:ln>
+            <a:noFill/>
+          </a:ln>
+        </p:spPr>
+        <p:style>
+          <a:lnRef idx="1">
+            <a:schemeClr val="accent1"/>
+          </a:lnRef>
+          <a:fillRef idx="3">
+            <a:schemeClr val="accent1"/>
+          </a:fillRef>
+          <a:effectRef idx="2">
+            <a:schemeClr val="accent1"/>
+          </a:effectRef>
+          <a:fontRef idx="minor">
+            <a:schemeClr val="lt1"/>
+          </a:fontRef>
+        </p:style>
+        <p:txBody>
+          <a:bodyPr rtlCol="0" anchor="ctr"/>
+          <a:lstStyle/>
+          <a:p>
+            <a:pPr algn="ctr"/>
+          </a:p>
+        </p:txBody>
+      </p:sp>
+      <p:sp>
+        <p:nvSpPr>
+          <p:cNvPr id="7" name="TextBox 6"/>
+          <p:cNvSpPr txBox="1"/>
+          <p:nvPr/>
+        </p:nvSpPr>
+        <p:spPr>
+          <a:xfrm>
+            <a:off x="749808" y="1554480"/>
+            <a:ext cx="3383280" cy="256032"/>
+          </a:xfrm>
+          <a:prstGeom prst="rect">
+            <a:avLst/>
+          </a:prstGeom>
+          <a:noFill/>
+        </p:spPr>
+        <p:txBody>
+          <a:bodyPr wrap="square" lIns="27432" rIns="27432" tIns="18288" bIns="18288">
+            <a:spAutoFit/>
+          </a:bodyPr>
+          <a:lstStyle/>
+          <a:p>
+            <a:r>
+              <a:rPr sz="1300" b="1">
+                <a:solidFill>
+                  <a:srgbClr val="1B1B2C"/>
+                </a:solidFill>
+                <a:latin typeface="Segoe UI"/>
+              </a:rPr>
+              <a:t>Prompt to give Cowork</a:t>
+            </a:r>
+          </a:p>
+        </p:txBody>
+      </p:sp>
+      <p:sp>
+        <p:nvSpPr>
+          <p:cNvPr id="8" name="TextBox 7"/>
+          <p:cNvSpPr txBox="1"/>
+          <p:nvPr/>
+        </p:nvSpPr>
+        <p:spPr>
+          <a:xfrm>
+            <a:off x="749808" y="1883664"/>
+            <a:ext cx="3383280" cy="2240280"/>
+          </a:xfrm>
+          <a:prstGeom prst="rect">
+            <a:avLst/>
+          </a:prstGeom>
+          <a:noFill/>
+        </p:spPr>
+        <p:txBody>
+          <a:bodyPr wrap="square" lIns="27432" rIns="27432" tIns="18288" bIns="18288">
+            <a:spAutoFit/>
+          </a:bodyPr>
+          <a:lstStyle/>
+          <a:p>
+            <a:r>
+              <a:rPr sz="900" b="0">
+                <a:solidFill>
+                  <a:srgbClr val="5A6078"/>
+                </a:solidFill>
+                <a:latin typeface="Segoe UI"/>
+              </a:rPr>
+              <a:t>[Product/Campaign Name] is moving into partner and channel activation. I need the launch materials adapted so partner marketing and the channel teams can execute without translation. Source: Latest launch materials in [OneDrive Folder] Approved messaging in [Messaging Doc] Prior partner-facing communications for tone reference Create the following: Partner one-pager (Word) Co-marketing talking points (Word) Partner FAQ...</a:t>
+            </a:r>
+          </a:p>
+        </p:txBody>
+      </p:sp>
+      <p:sp>
+        <p:nvSpPr>
+          <p:cNvPr id="9" name="Rounded Rectangle 8"/>
+          <p:cNvSpPr/>
+          <p:nvPr/>
+        </p:nvSpPr>
+        <p:spPr>
+          <a:xfrm>
+            <a:off x="4663440" y="1298448"/>
+            <a:ext cx="3977639" cy="3273552"/>
+          </a:xfrm>
+          <a:prstGeom prst="roundRect">
+            <a:avLst/>
+          </a:prstGeom>
+          <a:solidFill>
+            <a:srgbClr val="FFFFFF"/>
+          </a:solidFill>
+          <a:ln>
+            <a:solidFill>
+              <a:srgbClr val="F6F7FB"/>
+            </a:solidFill>
+          </a:ln>
+        </p:spPr>
+        <p:style>
+          <a:lnRef idx="1">
+            <a:schemeClr val="accent1"/>
+          </a:lnRef>
+          <a:fillRef idx="3">
+            <a:schemeClr val="accent1"/>
+          </a:fillRef>
+          <a:effectRef idx="2">
+            <a:schemeClr val="accent1"/>
+          </a:effectRef>
+          <a:fontRef idx="minor">
+            <a:schemeClr val="lt1"/>
+          </a:fontRef>
+        </p:style>
+        <p:txBody>
+          <a:bodyPr rtlCol="0" anchor="ctr"/>
+          <a:lstStyle/>
+          <a:p>
+            <a:pPr algn="ctr"/>
+          </a:p>
+        </p:txBody>
+      </p:sp>
+      <p:sp>
+        <p:nvSpPr>
+          <p:cNvPr id="10" name="Rectangle 9"/>
+          <p:cNvSpPr/>
+          <p:nvPr/>
+        </p:nvSpPr>
+        <p:spPr>
+          <a:xfrm>
+            <a:off x="4663440" y="1298448"/>
+            <a:ext cx="3977639" cy="64008"/>
+          </a:xfrm>
+          <a:prstGeom prst="rect">
+            <a:avLst/>
+          </a:prstGeom>
+          <a:solidFill>
+            <a:srgbClr val="0E8E92"/>
+          </a:solidFill>
+          <a:ln>
+            <a:noFill/>
+          </a:ln>
+        </p:spPr>
+        <p:style>
+          <a:lnRef idx="1">
+            <a:schemeClr val="accent1"/>
+          </a:lnRef>
+          <a:fillRef idx="3">
+            <a:schemeClr val="accent1"/>
+          </a:fillRef>
+          <a:effectRef idx="2">
+            <a:schemeClr val="accent1"/>
+          </a:effectRef>
+          <a:fontRef idx="minor">
+            <a:schemeClr val="lt1"/>
+          </a:fontRef>
+        </p:style>
+        <p:txBody>
+          <a:bodyPr rtlCol="0" anchor="ctr"/>
+          <a:lstStyle/>
+          <a:p>
+            <a:pPr algn="ctr"/>
+          </a:p>
+        </p:txBody>
+      </p:sp>
+      <p:sp>
+        <p:nvSpPr>
+          <p:cNvPr id="11" name="TextBox 10"/>
+          <p:cNvSpPr txBox="1"/>
+          <p:nvPr/>
+        </p:nvSpPr>
+        <p:spPr>
+          <a:xfrm>
+            <a:off x="4910328" y="1554480"/>
+            <a:ext cx="3383280" cy="256032"/>
+          </a:xfrm>
+          <a:prstGeom prst="rect">
+            <a:avLst/>
+          </a:prstGeom>
+          <a:noFill/>
+        </p:spPr>
+        <p:txBody>
+          <a:bodyPr wrap="square" lIns="27432" rIns="27432" tIns="18288" bIns="18288">
+            <a:spAutoFit/>
+          </a:bodyPr>
+          <a:lstStyle/>
+          <a:p>
+            <a:r>
+              <a:rPr sz="1300" b="1">
+                <a:solidFill>
+                  <a:srgbClr val="1B1B2C"/>
+                </a:solidFill>
+                <a:latin typeface="Segoe UI"/>
+              </a:rPr>
+              <a:t>Execution flow</a:t>
+            </a:r>
+          </a:p>
+        </p:txBody>
+      </p:sp>
+      <p:sp>
+        <p:nvSpPr>
+          <p:cNvPr id="12" name="TextBox 11"/>
+          <p:cNvSpPr txBox="1"/>
+          <p:nvPr/>
+        </p:nvSpPr>
+        <p:spPr>
+          <a:xfrm>
+            <a:off x="4892040" y="1874519"/>
+            <a:ext cx="3429000" cy="2148840"/>
+          </a:xfrm>
+          <a:prstGeom prst="rect">
+            <a:avLst/>
+          </a:prstGeom>
+          <a:noFill/>
+        </p:spPr>
+        <p:txBody>
+          <a:bodyPr wrap="none" lIns="73152" rIns="73152" tIns="36576">
+            <a:spAutoFit/>
+          </a:bodyPr>
+          <a:lstStyle/>
+          <a:p>
+            <a:pPr>
+              <a:spcAft>
+                <a:spcPts val="500"/>
+              </a:spcAft>
+              <a:defRPr sz="1000">
+                <a:solidFill>
+                  <a:srgbClr val="1B1B2C"/>
+                </a:solidFill>
+                <a:latin typeface="Segoe UI"/>
+              </a:defRPr>
+            </a:pPr>
+            <a:r>
+              <a:t>• OneDrive [Folder] -&gt; Read the launch materials</a:t>
+            </a:r>
+          </a:p>
+          <a:p>
+            <a:pPr>
+              <a:spcAft>
+                <a:spcPts val="500"/>
+              </a:spcAft>
+              <a:defRPr sz="1000">
+                <a:solidFill>
+                  <a:srgbClr val="1B1B2C"/>
+                </a:solidFill>
+                <a:latin typeface="Segoe UI"/>
+              </a:defRPr>
+            </a:pPr>
+            <a:r>
+              <a:t>• Messaging Doc -&gt; Ground every adaptation in approved positioning</a:t>
+            </a:r>
+          </a:p>
+          <a:p>
+            <a:pPr>
+              <a:spcAft>
+                <a:spcPts val="500"/>
+              </a:spcAft>
+              <a:defRPr sz="1000">
+                <a:solidFill>
+                  <a:srgbClr val="1B1B2C"/>
+                </a:solidFill>
+                <a:latin typeface="Segoe UI"/>
+              </a:defRPr>
+            </a:pPr>
+            <a:r>
+              <a:t>• Adapt -&gt; One-pager · talking points · FAQ</a:t>
+            </a:r>
+          </a:p>
+          <a:p>
+            <a:pPr>
+              <a:spcAft>
+                <a:spcPts val="500"/>
+              </a:spcAft>
+              <a:defRPr sz="1000">
+                <a:solidFill>
+                  <a:srgbClr val="1B1B2C"/>
+                </a:solidFill>
+                <a:latin typeface="Segoe UI"/>
+              </a:defRPr>
+            </a:pPr>
+            <a:r>
+              <a:t>• Adapt -&gt; Email template · social pack</a:t>
+            </a:r>
+          </a:p>
+          <a:p>
+            <a:pPr>
+              <a:spcAft>
+                <a:spcPts val="500"/>
+              </a:spcAft>
+              <a:defRPr sz="1000">
+                <a:solidFill>
+                  <a:srgbClr val="1B1B2C"/>
+                </a:solidFill>
+                <a:latin typeface="Segoe UI"/>
+              </a:defRPr>
+            </a:pPr>
+            <a:r>
+              <a:t>• Org directory -&gt; Identify partner and channel owners</a:t>
+            </a:r>
+          </a:p>
+        </p:txBody>
+      </p:sp>
+      <p:sp>
+        <p:nvSpPr>
+          <p:cNvPr id="13" name="TextBox 12"/>
+          <p:cNvSpPr txBox="1"/>
+          <p:nvPr/>
+        </p:nvSpPr>
+        <p:spPr>
+          <a:xfrm>
+            <a:off x="4910328" y="4133087"/>
+            <a:ext cx="3337560" cy="310896"/>
+          </a:xfrm>
+          <a:prstGeom prst="rect">
+            <a:avLst/>
+          </a:prstGeom>
+          <a:noFill/>
+        </p:spPr>
+        <p:txBody>
+          <a:bodyPr wrap="square" lIns="27432" rIns="27432" tIns="18288" bIns="18288">
+            <a:spAutoFit/>
+          </a:bodyPr>
+          <a:lstStyle/>
+          <a:p>
+            <a:r>
+              <a:rPr sz="1000" b="0">
+                <a:solidFill>
+                  <a:srgbClr val="5A6078"/>
+                </a:solidFill>
+                <a:latin typeface="Segoe UI"/>
+              </a:rPr>
+              <a:t>A partner-ready and channel-ready activation kit across Word and Excel, plus a routing plan so partner, field, and channel marketing can...</a:t>
             </a:r>
           </a:p>
         </p:txBody>
@@ -6084,6 +9443,2551 @@
                 <a:latin typeface="Segoe UI"/>
               </a:rPr>
               <a:t>Pick the simplest Copilot surface that can finish the job with the right level of control.</a:t>
+            </a:r>
+          </a:p>
+        </p:txBody>
+      </p:sp>
+    </p:spTree>
+  </p:cSld>
+  <p:clrMapOvr>
+    <a:masterClrMapping/>
+  </p:clrMapOvr>
+</p:sld>
+</file>
+
+<file path=ppt/slides/slide20.xml><?xml version="1.0" encoding="utf-8"?>
+<p:sld xmlns:a="http://schemas.openxmlformats.org/drawingml/2006/main" xmlns:p="http://schemas.openxmlformats.org/presentationml/2006/main" xmlns:r="http://schemas.openxmlformats.org/officeDocument/2006/relationships">
+  <p:cSld>
+    <p:bg>
+      <p:bgPr>
+        <a:solidFill>
+          <a:srgbClr val="FFFAF5"/>
+        </a:solidFill>
+        <a:effectLst/>
+      </p:bgPr>
+    </p:bg>
+    <p:spTree>
+      <p:nvGrpSpPr>
+        <p:cNvPr id="1" name=""/>
+        <p:cNvGrpSpPr/>
+        <p:nvPr/>
+      </p:nvGrpSpPr>
+      <p:grpSpPr/>
+      <p:sp>
+        <p:nvSpPr>
+          <p:cNvPr id="2" name="TextBox 1"/>
+          <p:cNvSpPr txBox="1"/>
+          <p:nvPr/>
+        </p:nvSpPr>
+        <p:spPr>
+          <a:xfrm>
+            <a:off x="502920" y="228600"/>
+            <a:ext cx="6400800" cy="228600"/>
+          </a:xfrm>
+          <a:prstGeom prst="rect">
+            <a:avLst/>
+          </a:prstGeom>
+          <a:noFill/>
+        </p:spPr>
+        <p:txBody>
+          <a:bodyPr wrap="square" lIns="27432" rIns="27432" tIns="18288" bIns="18288">
+            <a:spAutoFit/>
+          </a:bodyPr>
+          <a:lstStyle/>
+          <a:p>
+            <a:r>
+              <a:rPr sz="900" b="1">
+                <a:solidFill>
+                  <a:srgbClr val="5A6078"/>
+                </a:solidFill>
+                <a:latin typeface="Segoe UI"/>
+              </a:rPr>
+              <a:t>COWORK HEAVY TASK</a:t>
+            </a:r>
+          </a:p>
+        </p:txBody>
+      </p:sp>
+      <p:sp>
+        <p:nvSpPr>
+          <p:cNvPr id="3" name="TextBox 2"/>
+          <p:cNvSpPr txBox="1"/>
+          <p:nvPr/>
+        </p:nvSpPr>
+        <p:spPr>
+          <a:xfrm>
+            <a:off x="502920" y="438912"/>
+            <a:ext cx="7955279" cy="658368"/>
+          </a:xfrm>
+          <a:prstGeom prst="rect">
+            <a:avLst/>
+          </a:prstGeom>
+          <a:noFill/>
+        </p:spPr>
+        <p:txBody>
+          <a:bodyPr wrap="square" lIns="27432" rIns="27432" tIns="18288" bIns="18288">
+            <a:spAutoFit/>
+          </a:bodyPr>
+          <a:lstStyle/>
+          <a:p>
+            <a:r>
+              <a:rPr sz="2200" b="1">
+                <a:solidFill>
+                  <a:srgbClr val="1B1B2C"/>
+                </a:solidFill>
+                <a:latin typeface="Segoe UI"/>
+              </a:rPr>
+              <a:t>Prepare a complete out-of-office handoff</a:t>
+            </a:r>
+          </a:p>
+        </p:txBody>
+      </p:sp>
+      <p:sp>
+        <p:nvSpPr>
+          <p:cNvPr id="4" name="Rectangle 3"/>
+          <p:cNvSpPr/>
+          <p:nvPr/>
+        </p:nvSpPr>
+        <p:spPr>
+          <a:xfrm>
+            <a:off x="502920" y="1115568"/>
+            <a:ext cx="1097280" cy="45720"/>
+          </a:xfrm>
+          <a:prstGeom prst="rect">
+            <a:avLst/>
+          </a:prstGeom>
+          <a:solidFill>
+            <a:srgbClr val="1A6FD6"/>
+          </a:solidFill>
+          <a:ln>
+            <a:noFill/>
+          </a:ln>
+        </p:spPr>
+        <p:style>
+          <a:lnRef idx="1">
+            <a:schemeClr val="accent1"/>
+          </a:lnRef>
+          <a:fillRef idx="3">
+            <a:schemeClr val="accent1"/>
+          </a:fillRef>
+          <a:effectRef idx="2">
+            <a:schemeClr val="accent1"/>
+          </a:effectRef>
+          <a:fontRef idx="minor">
+            <a:schemeClr val="lt1"/>
+          </a:fontRef>
+        </p:style>
+        <p:txBody>
+          <a:bodyPr rtlCol="0" anchor="ctr"/>
+          <a:lstStyle/>
+          <a:p>
+            <a:pPr algn="ctr"/>
+          </a:p>
+        </p:txBody>
+      </p:sp>
+      <p:sp>
+        <p:nvSpPr>
+          <p:cNvPr id="5" name="Rounded Rectangle 4"/>
+          <p:cNvSpPr/>
+          <p:nvPr/>
+        </p:nvSpPr>
+        <p:spPr>
+          <a:xfrm>
+            <a:off x="640080" y="1417320"/>
+            <a:ext cx="7863840" cy="2697480"/>
+          </a:xfrm>
+          <a:prstGeom prst="roundRect">
+            <a:avLst/>
+          </a:prstGeom>
+          <a:solidFill>
+            <a:srgbClr val="FFFFFF"/>
+          </a:solidFill>
+          <a:ln>
+            <a:solidFill>
+              <a:srgbClr val="F6F7FB"/>
+            </a:solidFill>
+          </a:ln>
+        </p:spPr>
+        <p:style>
+          <a:lnRef idx="1">
+            <a:schemeClr val="accent1"/>
+          </a:lnRef>
+          <a:fillRef idx="3">
+            <a:schemeClr val="accent1"/>
+          </a:fillRef>
+          <a:effectRef idx="2">
+            <a:schemeClr val="accent1"/>
+          </a:effectRef>
+          <a:fontRef idx="minor">
+            <a:schemeClr val="lt1"/>
+          </a:fontRef>
+        </p:style>
+        <p:txBody>
+          <a:bodyPr rtlCol="0" anchor="ctr"/>
+          <a:lstStyle/>
+          <a:p>
+            <a:pPr algn="ctr"/>
+          </a:p>
+        </p:txBody>
+      </p:sp>
+      <p:sp>
+        <p:nvSpPr>
+          <p:cNvPr id="6" name="Rectangle 5"/>
+          <p:cNvSpPr/>
+          <p:nvPr/>
+        </p:nvSpPr>
+        <p:spPr>
+          <a:xfrm>
+            <a:off x="640080" y="1417320"/>
+            <a:ext cx="7863840" cy="64008"/>
+          </a:xfrm>
+          <a:prstGeom prst="rect">
+            <a:avLst/>
+          </a:prstGeom>
+          <a:solidFill>
+            <a:srgbClr val="C73E78"/>
+          </a:solidFill>
+          <a:ln>
+            <a:noFill/>
+          </a:ln>
+        </p:spPr>
+        <p:style>
+          <a:lnRef idx="1">
+            <a:schemeClr val="accent1"/>
+          </a:lnRef>
+          <a:fillRef idx="3">
+            <a:schemeClr val="accent1"/>
+          </a:fillRef>
+          <a:effectRef idx="2">
+            <a:schemeClr val="accent1"/>
+          </a:effectRef>
+          <a:fontRef idx="minor">
+            <a:schemeClr val="lt1"/>
+          </a:fontRef>
+        </p:style>
+        <p:txBody>
+          <a:bodyPr rtlCol="0" anchor="ctr"/>
+          <a:lstStyle/>
+          <a:p>
+            <a:pPr algn="ctr"/>
+          </a:p>
+        </p:txBody>
+      </p:sp>
+      <p:sp>
+        <p:nvSpPr>
+          <p:cNvPr id="7" name="TextBox 6"/>
+          <p:cNvSpPr txBox="1"/>
+          <p:nvPr/>
+        </p:nvSpPr>
+        <p:spPr>
+          <a:xfrm>
+            <a:off x="914400" y="1700784"/>
+            <a:ext cx="1325880" cy="384048"/>
+          </a:xfrm>
+          <a:prstGeom prst="rect">
+            <a:avLst/>
+          </a:prstGeom>
+          <a:noFill/>
+        </p:spPr>
+        <p:txBody>
+          <a:bodyPr wrap="square" lIns="27432" rIns="27432" tIns="18288" bIns="18288">
+            <a:spAutoFit/>
+          </a:bodyPr>
+          <a:lstStyle/>
+          <a:p>
+            <a:pPr algn="ctr"/>
+            <a:r>
+              <a:rPr sz="2000" b="1">
+                <a:solidFill>
+                  <a:srgbClr val="C73E78"/>
+                </a:solidFill>
+                <a:latin typeface="Segoe UI"/>
+              </a:rPr>
+              <a:t>Heavy</a:t>
+            </a:r>
+          </a:p>
+        </p:txBody>
+      </p:sp>
+      <p:sp>
+        <p:nvSpPr>
+          <p:cNvPr id="8" name="TextBox 7"/>
+          <p:cNvSpPr txBox="1"/>
+          <p:nvPr/>
+        </p:nvSpPr>
+        <p:spPr>
+          <a:xfrm>
+            <a:off x="2423160" y="1627632"/>
+            <a:ext cx="5577840" cy="658368"/>
+          </a:xfrm>
+          <a:prstGeom prst="rect">
+            <a:avLst/>
+          </a:prstGeom>
+          <a:noFill/>
+        </p:spPr>
+        <p:txBody>
+          <a:bodyPr wrap="square" lIns="27432" rIns="27432" tIns="18288" bIns="18288">
+            <a:spAutoFit/>
+          </a:bodyPr>
+          <a:lstStyle/>
+          <a:p>
+            <a:r>
+              <a:rPr sz="1300" b="0">
+                <a:solidFill>
+                  <a:srgbClr val="5A6078"/>
+                </a:solidFill>
+                <a:latin typeface="Segoe UI"/>
+              </a:rPr>
+              <a:t>Multi-part work you would block out serious time for. Cowork pulls from across your tools, does the deep thinking, and delivers a full set of artifacts.</a:t>
+            </a:r>
+          </a:p>
+        </p:txBody>
+      </p:sp>
+      <p:sp>
+        <p:nvSpPr>
+          <p:cNvPr id="9" name="TextBox 8"/>
+          <p:cNvSpPr txBox="1"/>
+          <p:nvPr/>
+        </p:nvSpPr>
+        <p:spPr>
+          <a:xfrm>
+            <a:off x="914400" y="2560320"/>
+            <a:ext cx="1005840" cy="237744"/>
+          </a:xfrm>
+          <a:prstGeom prst="rect">
+            <a:avLst/>
+          </a:prstGeom>
+          <a:noFill/>
+        </p:spPr>
+        <p:txBody>
+          <a:bodyPr wrap="square" lIns="27432" rIns="27432" tIns="18288" bIns="18288">
+            <a:spAutoFit/>
+          </a:bodyPr>
+          <a:lstStyle/>
+          <a:p>
+            <a:r>
+              <a:rPr sz="1300" b="1">
+                <a:solidFill>
+                  <a:srgbClr val="1B1B2C"/>
+                </a:solidFill>
+                <a:latin typeface="Segoe UI"/>
+              </a:rPr>
+              <a:t>Goal</a:t>
+            </a:r>
+          </a:p>
+        </p:txBody>
+      </p:sp>
+      <p:sp>
+        <p:nvSpPr>
+          <p:cNvPr id="10" name="TextBox 9"/>
+          <p:cNvSpPr txBox="1"/>
+          <p:nvPr/>
+        </p:nvSpPr>
+        <p:spPr>
+          <a:xfrm>
+            <a:off x="1874519" y="2542032"/>
+            <a:ext cx="6263640" cy="384048"/>
+          </a:xfrm>
+          <a:prstGeom prst="rect">
+            <a:avLst/>
+          </a:prstGeom>
+          <a:noFill/>
+        </p:spPr>
+        <p:txBody>
+          <a:bodyPr wrap="square" lIns="27432" rIns="27432" tIns="18288" bIns="18288">
+            <a:spAutoFit/>
+          </a:bodyPr>
+          <a:lstStyle/>
+          <a:p>
+            <a:r>
+              <a:rPr sz="1200" b="0">
+                <a:solidFill>
+                  <a:srgbClr val="1B1B2C"/>
+                </a:solidFill>
+                <a:latin typeface="Segoe UI"/>
+              </a:rPr>
+              <a:t>Step away from your laptop knowing nothing in flight will stall while you are out.</a:t>
+            </a:r>
+          </a:p>
+        </p:txBody>
+      </p:sp>
+      <p:sp>
+        <p:nvSpPr>
+          <p:cNvPr id="11" name="TextBox 10"/>
+          <p:cNvSpPr txBox="1"/>
+          <p:nvPr/>
+        </p:nvSpPr>
+        <p:spPr>
+          <a:xfrm>
+            <a:off x="914400" y="3218688"/>
+            <a:ext cx="1234440" cy="237744"/>
+          </a:xfrm>
+          <a:prstGeom prst="rect">
+            <a:avLst/>
+          </a:prstGeom>
+          <a:noFill/>
+        </p:spPr>
+        <p:txBody>
+          <a:bodyPr wrap="square" lIns="27432" rIns="27432" tIns="18288" bIns="18288">
+            <a:spAutoFit/>
+          </a:bodyPr>
+          <a:lstStyle/>
+          <a:p>
+            <a:r>
+              <a:rPr sz="1300" b="1">
+                <a:solidFill>
+                  <a:srgbClr val="1B1B2C"/>
+                </a:solidFill>
+                <a:latin typeface="Segoe UI"/>
+              </a:rPr>
+              <a:t>Outcome</a:t>
+            </a:r>
+          </a:p>
+        </p:txBody>
+      </p:sp>
+      <p:sp>
+        <p:nvSpPr>
+          <p:cNvPr id="12" name="TextBox 11"/>
+          <p:cNvSpPr txBox="1"/>
+          <p:nvPr/>
+        </p:nvSpPr>
+        <p:spPr>
+          <a:xfrm>
+            <a:off x="1874519" y="3182112"/>
+            <a:ext cx="6263640" cy="438912"/>
+          </a:xfrm>
+          <a:prstGeom prst="rect">
+            <a:avLst/>
+          </a:prstGeom>
+          <a:noFill/>
+        </p:spPr>
+        <p:txBody>
+          <a:bodyPr wrap="square" lIns="27432" rIns="27432" tIns="18288" bIns="18288">
+            <a:spAutoFit/>
+          </a:bodyPr>
+          <a:lstStyle/>
+          <a:p>
+            <a:r>
+              <a:rPr sz="1200" b="0">
+                <a:solidFill>
+                  <a:srgbClr val="1B1B2C"/>
+                </a:solidFill>
+                <a:latin typeface="Segoe UI"/>
+              </a:rPr>
+              <a:t>A handover document built from your real work, projects, owners, deadlines, and supporting files, so coverage stays clear and execution keeps moving.</a:t>
+            </a:r>
+          </a:p>
+        </p:txBody>
+      </p:sp>
+    </p:spTree>
+  </p:cSld>
+  <p:clrMapOvr>
+    <a:masterClrMapping/>
+  </p:clrMapOvr>
+</p:sld>
+</file>
+
+<file path=ppt/slides/slide21.xml><?xml version="1.0" encoding="utf-8"?>
+<p:sld xmlns:a="http://schemas.openxmlformats.org/drawingml/2006/main" xmlns:p="http://schemas.openxmlformats.org/presentationml/2006/main" xmlns:r="http://schemas.openxmlformats.org/officeDocument/2006/relationships">
+  <p:cSld>
+    <p:bg>
+      <p:bgPr>
+        <a:solidFill>
+          <a:srgbClr val="FFFAF5"/>
+        </a:solidFill>
+        <a:effectLst/>
+      </p:bgPr>
+    </p:bg>
+    <p:spTree>
+      <p:nvGrpSpPr>
+        <p:cNvPr id="1" name=""/>
+        <p:cNvGrpSpPr/>
+        <p:nvPr/>
+      </p:nvGrpSpPr>
+      <p:grpSpPr/>
+      <p:sp>
+        <p:nvSpPr>
+          <p:cNvPr id="2" name="TextBox 1"/>
+          <p:cNvSpPr txBox="1"/>
+          <p:nvPr/>
+        </p:nvSpPr>
+        <p:spPr>
+          <a:xfrm>
+            <a:off x="502920" y="228600"/>
+            <a:ext cx="6400800" cy="228600"/>
+          </a:xfrm>
+          <a:prstGeom prst="rect">
+            <a:avLst/>
+          </a:prstGeom>
+          <a:noFill/>
+        </p:spPr>
+        <p:txBody>
+          <a:bodyPr wrap="square" lIns="27432" rIns="27432" tIns="18288" bIns="18288">
+            <a:spAutoFit/>
+          </a:bodyPr>
+          <a:lstStyle/>
+          <a:p>
+            <a:r>
+              <a:rPr sz="900" b="1">
+                <a:solidFill>
+                  <a:srgbClr val="5A6078"/>
+                </a:solidFill>
+                <a:latin typeface="Segoe UI"/>
+              </a:rPr>
+              <a:t>PREPARE A COMPLETE OUT-OF-OFFICE HANDOFF</a:t>
+            </a:r>
+          </a:p>
+        </p:txBody>
+      </p:sp>
+      <p:sp>
+        <p:nvSpPr>
+          <p:cNvPr id="3" name="TextBox 2"/>
+          <p:cNvSpPr txBox="1"/>
+          <p:nvPr/>
+        </p:nvSpPr>
+        <p:spPr>
+          <a:xfrm>
+            <a:off x="502920" y="438912"/>
+            <a:ext cx="7955279" cy="658368"/>
+          </a:xfrm>
+          <a:prstGeom prst="rect">
+            <a:avLst/>
+          </a:prstGeom>
+          <a:noFill/>
+        </p:spPr>
+        <p:txBody>
+          <a:bodyPr wrap="square" lIns="27432" rIns="27432" tIns="18288" bIns="18288">
+            <a:spAutoFit/>
+          </a:bodyPr>
+          <a:lstStyle/>
+          <a:p>
+            <a:r>
+              <a:rPr sz="2200" b="1">
+                <a:solidFill>
+                  <a:srgbClr val="1B1B2C"/>
+                </a:solidFill>
+                <a:latin typeface="Segoe UI"/>
+              </a:rPr>
+              <a:t>Goal, outcome, prompt, flow</a:t>
+            </a:r>
+          </a:p>
+        </p:txBody>
+      </p:sp>
+      <p:sp>
+        <p:nvSpPr>
+          <p:cNvPr id="4" name="Rectangle 3"/>
+          <p:cNvSpPr/>
+          <p:nvPr/>
+        </p:nvSpPr>
+        <p:spPr>
+          <a:xfrm>
+            <a:off x="502920" y="1115568"/>
+            <a:ext cx="1097280" cy="45720"/>
+          </a:xfrm>
+          <a:prstGeom prst="rect">
+            <a:avLst/>
+          </a:prstGeom>
+          <a:solidFill>
+            <a:srgbClr val="1A6FD6"/>
+          </a:solidFill>
+          <a:ln>
+            <a:noFill/>
+          </a:ln>
+        </p:spPr>
+        <p:style>
+          <a:lnRef idx="1">
+            <a:schemeClr val="accent1"/>
+          </a:lnRef>
+          <a:fillRef idx="3">
+            <a:schemeClr val="accent1"/>
+          </a:fillRef>
+          <a:effectRef idx="2">
+            <a:schemeClr val="accent1"/>
+          </a:effectRef>
+          <a:fontRef idx="minor">
+            <a:schemeClr val="lt1"/>
+          </a:fontRef>
+        </p:style>
+        <p:txBody>
+          <a:bodyPr rtlCol="0" anchor="ctr"/>
+          <a:lstStyle/>
+          <a:p>
+            <a:pPr algn="ctr"/>
+          </a:p>
+        </p:txBody>
+      </p:sp>
+      <p:sp>
+        <p:nvSpPr>
+          <p:cNvPr id="5" name="Rounded Rectangle 4"/>
+          <p:cNvSpPr/>
+          <p:nvPr/>
+        </p:nvSpPr>
+        <p:spPr>
+          <a:xfrm>
+            <a:off x="502920" y="1298448"/>
+            <a:ext cx="3886200" cy="3273552"/>
+          </a:xfrm>
+          <a:prstGeom prst="roundRect">
+            <a:avLst/>
+          </a:prstGeom>
+          <a:solidFill>
+            <a:srgbClr val="FFFFFF"/>
+          </a:solidFill>
+          <a:ln>
+            <a:solidFill>
+              <a:srgbClr val="F6F7FB"/>
+            </a:solidFill>
+          </a:ln>
+        </p:spPr>
+        <p:style>
+          <a:lnRef idx="1">
+            <a:schemeClr val="accent1"/>
+          </a:lnRef>
+          <a:fillRef idx="3">
+            <a:schemeClr val="accent1"/>
+          </a:fillRef>
+          <a:effectRef idx="2">
+            <a:schemeClr val="accent1"/>
+          </a:effectRef>
+          <a:fontRef idx="minor">
+            <a:schemeClr val="lt1"/>
+          </a:fontRef>
+        </p:style>
+        <p:txBody>
+          <a:bodyPr rtlCol="0" anchor="ctr"/>
+          <a:lstStyle/>
+          <a:p>
+            <a:pPr algn="ctr"/>
+          </a:p>
+        </p:txBody>
+      </p:sp>
+      <p:sp>
+        <p:nvSpPr>
+          <p:cNvPr id="6" name="Rectangle 5"/>
+          <p:cNvSpPr/>
+          <p:nvPr/>
+        </p:nvSpPr>
+        <p:spPr>
+          <a:xfrm>
+            <a:off x="502920" y="1298448"/>
+            <a:ext cx="3886200" cy="64008"/>
+          </a:xfrm>
+          <a:prstGeom prst="rect">
+            <a:avLst/>
+          </a:prstGeom>
+          <a:solidFill>
+            <a:srgbClr val="C73E78"/>
+          </a:solidFill>
+          <a:ln>
+            <a:noFill/>
+          </a:ln>
+        </p:spPr>
+        <p:style>
+          <a:lnRef idx="1">
+            <a:schemeClr val="accent1"/>
+          </a:lnRef>
+          <a:fillRef idx="3">
+            <a:schemeClr val="accent1"/>
+          </a:fillRef>
+          <a:effectRef idx="2">
+            <a:schemeClr val="accent1"/>
+          </a:effectRef>
+          <a:fontRef idx="minor">
+            <a:schemeClr val="lt1"/>
+          </a:fontRef>
+        </p:style>
+        <p:txBody>
+          <a:bodyPr rtlCol="0" anchor="ctr"/>
+          <a:lstStyle/>
+          <a:p>
+            <a:pPr algn="ctr"/>
+          </a:p>
+        </p:txBody>
+      </p:sp>
+      <p:sp>
+        <p:nvSpPr>
+          <p:cNvPr id="7" name="TextBox 6"/>
+          <p:cNvSpPr txBox="1"/>
+          <p:nvPr/>
+        </p:nvSpPr>
+        <p:spPr>
+          <a:xfrm>
+            <a:off x="749808" y="1554480"/>
+            <a:ext cx="3383280" cy="256032"/>
+          </a:xfrm>
+          <a:prstGeom prst="rect">
+            <a:avLst/>
+          </a:prstGeom>
+          <a:noFill/>
+        </p:spPr>
+        <p:txBody>
+          <a:bodyPr wrap="square" lIns="27432" rIns="27432" tIns="18288" bIns="18288">
+            <a:spAutoFit/>
+          </a:bodyPr>
+          <a:lstStyle/>
+          <a:p>
+            <a:r>
+              <a:rPr sz="1300" b="1">
+                <a:solidFill>
+                  <a:srgbClr val="1B1B2C"/>
+                </a:solidFill>
+                <a:latin typeface="Segoe UI"/>
+              </a:rPr>
+              <a:t>Prompt to give Cowork</a:t>
+            </a:r>
+          </a:p>
+        </p:txBody>
+      </p:sp>
+      <p:sp>
+        <p:nvSpPr>
+          <p:cNvPr id="8" name="TextBox 7"/>
+          <p:cNvSpPr txBox="1"/>
+          <p:nvPr/>
+        </p:nvSpPr>
+        <p:spPr>
+          <a:xfrm>
+            <a:off x="749808" y="1883664"/>
+            <a:ext cx="3383280" cy="2240280"/>
+          </a:xfrm>
+          <a:prstGeom prst="rect">
+            <a:avLst/>
+          </a:prstGeom>
+          <a:noFill/>
+        </p:spPr>
+        <p:txBody>
+          <a:bodyPr wrap="square" lIns="27432" rIns="27432" tIns="18288" bIns="18288">
+            <a:spAutoFit/>
+          </a:bodyPr>
+          <a:lstStyle/>
+          <a:p>
+            <a:r>
+              <a:rPr sz="900" b="0">
+                <a:solidFill>
+                  <a:srgbClr val="5A6078"/>
+                </a:solidFill>
+                <a:latin typeface="Segoe UI"/>
+              </a:rPr>
+              <a:t>I am about to go out of office for x week(s) beginning this coming [date]. Build an out-of-office tracker to cover off on all ongoing projects and tasks that will require things to move forward while I am gone. This should cover all team meetings from this week, all emails, and all Teams messages (both in meeting chats, individual chats, and group chats). Please also analyze my calendar for next week, and any projects that...</a:t>
+            </a:r>
+          </a:p>
+        </p:txBody>
+      </p:sp>
+      <p:sp>
+        <p:nvSpPr>
+          <p:cNvPr id="9" name="Rounded Rectangle 8"/>
+          <p:cNvSpPr/>
+          <p:nvPr/>
+        </p:nvSpPr>
+        <p:spPr>
+          <a:xfrm>
+            <a:off x="4663440" y="1298448"/>
+            <a:ext cx="3977639" cy="3273552"/>
+          </a:xfrm>
+          <a:prstGeom prst="roundRect">
+            <a:avLst/>
+          </a:prstGeom>
+          <a:solidFill>
+            <a:srgbClr val="FFFFFF"/>
+          </a:solidFill>
+          <a:ln>
+            <a:solidFill>
+              <a:srgbClr val="F6F7FB"/>
+            </a:solidFill>
+          </a:ln>
+        </p:spPr>
+        <p:style>
+          <a:lnRef idx="1">
+            <a:schemeClr val="accent1"/>
+          </a:lnRef>
+          <a:fillRef idx="3">
+            <a:schemeClr val="accent1"/>
+          </a:fillRef>
+          <a:effectRef idx="2">
+            <a:schemeClr val="accent1"/>
+          </a:effectRef>
+          <a:fontRef idx="minor">
+            <a:schemeClr val="lt1"/>
+          </a:fontRef>
+        </p:style>
+        <p:txBody>
+          <a:bodyPr rtlCol="0" anchor="ctr"/>
+          <a:lstStyle/>
+          <a:p>
+            <a:pPr algn="ctr"/>
+          </a:p>
+        </p:txBody>
+      </p:sp>
+      <p:sp>
+        <p:nvSpPr>
+          <p:cNvPr id="10" name="Rectangle 9"/>
+          <p:cNvSpPr/>
+          <p:nvPr/>
+        </p:nvSpPr>
+        <p:spPr>
+          <a:xfrm>
+            <a:off x="4663440" y="1298448"/>
+            <a:ext cx="3977639" cy="64008"/>
+          </a:xfrm>
+          <a:prstGeom prst="rect">
+            <a:avLst/>
+          </a:prstGeom>
+          <a:solidFill>
+            <a:srgbClr val="C73E78"/>
+          </a:solidFill>
+          <a:ln>
+            <a:noFill/>
+          </a:ln>
+        </p:spPr>
+        <p:style>
+          <a:lnRef idx="1">
+            <a:schemeClr val="accent1"/>
+          </a:lnRef>
+          <a:fillRef idx="3">
+            <a:schemeClr val="accent1"/>
+          </a:fillRef>
+          <a:effectRef idx="2">
+            <a:schemeClr val="accent1"/>
+          </a:effectRef>
+          <a:fontRef idx="minor">
+            <a:schemeClr val="lt1"/>
+          </a:fontRef>
+        </p:style>
+        <p:txBody>
+          <a:bodyPr rtlCol="0" anchor="ctr"/>
+          <a:lstStyle/>
+          <a:p>
+            <a:pPr algn="ctr"/>
+          </a:p>
+        </p:txBody>
+      </p:sp>
+      <p:sp>
+        <p:nvSpPr>
+          <p:cNvPr id="11" name="TextBox 10"/>
+          <p:cNvSpPr txBox="1"/>
+          <p:nvPr/>
+        </p:nvSpPr>
+        <p:spPr>
+          <a:xfrm>
+            <a:off x="4910328" y="1554480"/>
+            <a:ext cx="3383280" cy="256032"/>
+          </a:xfrm>
+          <a:prstGeom prst="rect">
+            <a:avLst/>
+          </a:prstGeom>
+          <a:noFill/>
+        </p:spPr>
+        <p:txBody>
+          <a:bodyPr wrap="square" lIns="27432" rIns="27432" tIns="18288" bIns="18288">
+            <a:spAutoFit/>
+          </a:bodyPr>
+          <a:lstStyle/>
+          <a:p>
+            <a:r>
+              <a:rPr sz="1300" b="1">
+                <a:solidFill>
+                  <a:srgbClr val="1B1B2C"/>
+                </a:solidFill>
+                <a:latin typeface="Segoe UI"/>
+              </a:rPr>
+              <a:t>Execution flow</a:t>
+            </a:r>
+          </a:p>
+        </p:txBody>
+      </p:sp>
+      <p:sp>
+        <p:nvSpPr>
+          <p:cNvPr id="12" name="TextBox 11"/>
+          <p:cNvSpPr txBox="1"/>
+          <p:nvPr/>
+        </p:nvSpPr>
+        <p:spPr>
+          <a:xfrm>
+            <a:off x="4892040" y="1874519"/>
+            <a:ext cx="3429000" cy="2148840"/>
+          </a:xfrm>
+          <a:prstGeom prst="rect">
+            <a:avLst/>
+          </a:prstGeom>
+          <a:noFill/>
+        </p:spPr>
+        <p:txBody>
+          <a:bodyPr wrap="none" lIns="73152" rIns="73152" tIns="36576">
+            <a:spAutoFit/>
+          </a:bodyPr>
+          <a:lstStyle/>
+          <a:p>
+            <a:pPr>
+              <a:spcAft>
+                <a:spcPts val="500"/>
+              </a:spcAft>
+              <a:defRPr sz="1000">
+                <a:solidFill>
+                  <a:srgbClr val="1B1B2C"/>
+                </a:solidFill>
+                <a:latin typeface="Segoe UI"/>
+              </a:defRPr>
+            </a:pPr>
+            <a:r>
+              <a:t>• Meetings (this week) -&gt; Identify active projects + stakeholders</a:t>
+            </a:r>
+          </a:p>
+          <a:p>
+            <a:pPr>
+              <a:spcAft>
+                <a:spcPts val="500"/>
+              </a:spcAft>
+              <a:defRPr sz="1000">
+                <a:solidFill>
+                  <a:srgbClr val="1B1B2C"/>
+                </a:solidFill>
+                <a:latin typeface="Segoe UI"/>
+              </a:defRPr>
+            </a:pPr>
+            <a:r>
+              <a:t>• Email threads -&gt; Extract open requests + dependencies</a:t>
+            </a:r>
+          </a:p>
+          <a:p>
+            <a:pPr>
+              <a:spcAft>
+                <a:spcPts val="500"/>
+              </a:spcAft>
+              <a:defRPr sz="1000">
+                <a:solidFill>
+                  <a:srgbClr val="1B1B2C"/>
+                </a:solidFill>
+                <a:latin typeface="Segoe UI"/>
+              </a:defRPr>
+            </a:pPr>
+            <a:r>
+              <a:t>• Teams chats -&gt; Capture in-flight tasks</a:t>
+            </a:r>
+          </a:p>
+          <a:p>
+            <a:pPr>
+              <a:spcAft>
+                <a:spcPts val="500"/>
+              </a:spcAft>
+              <a:defRPr sz="1000">
+                <a:solidFill>
+                  <a:srgbClr val="1B1B2C"/>
+                </a:solidFill>
+                <a:latin typeface="Segoe UI"/>
+              </a:defRPr>
+            </a:pPr>
+            <a:r>
+              <a:t>• Calendar (next week) -&gt; Detect upcoming deadlines</a:t>
+            </a:r>
+          </a:p>
+          <a:p>
+            <a:pPr>
+              <a:spcAft>
+                <a:spcPts val="500"/>
+              </a:spcAft>
+              <a:defRPr sz="1000">
+                <a:solidFill>
+                  <a:srgbClr val="1B1B2C"/>
+                </a:solidFill>
+                <a:latin typeface="Segoe UI"/>
+              </a:defRPr>
+            </a:pPr>
+            <a:r>
+              <a:t>• Org directory -&gt; Match internal team coverage</a:t>
+            </a:r>
+          </a:p>
+        </p:txBody>
+      </p:sp>
+      <p:sp>
+        <p:nvSpPr>
+          <p:cNvPr id="13" name="TextBox 12"/>
+          <p:cNvSpPr txBox="1"/>
+          <p:nvPr/>
+        </p:nvSpPr>
+        <p:spPr>
+          <a:xfrm>
+            <a:off x="4910328" y="4133087"/>
+            <a:ext cx="3337560" cy="310896"/>
+          </a:xfrm>
+          <a:prstGeom prst="rect">
+            <a:avLst/>
+          </a:prstGeom>
+          <a:noFill/>
+        </p:spPr>
+        <p:txBody>
+          <a:bodyPr wrap="square" lIns="27432" rIns="27432" tIns="18288" bIns="18288">
+            <a:spAutoFit/>
+          </a:bodyPr>
+          <a:lstStyle/>
+          <a:p>
+            <a:r>
+              <a:rPr sz="1000" b="0">
+                <a:solidFill>
+                  <a:srgbClr val="5A6078"/>
+                </a:solidFill>
+                <a:latin typeface="Segoe UI"/>
+              </a:rPr>
+              <a:t>A handover document built from your real work, projects, owners, deadlines, and supporting files, so coverage stays clear and execution...</a:t>
+            </a:r>
+          </a:p>
+        </p:txBody>
+      </p:sp>
+    </p:spTree>
+  </p:cSld>
+  <p:clrMapOvr>
+    <a:masterClrMapping/>
+  </p:clrMapOvr>
+</p:sld>
+</file>
+
+<file path=ppt/slides/slide22.xml><?xml version="1.0" encoding="utf-8"?>
+<p:sld xmlns:a="http://schemas.openxmlformats.org/drawingml/2006/main" xmlns:p="http://schemas.openxmlformats.org/presentationml/2006/main" xmlns:r="http://schemas.openxmlformats.org/officeDocument/2006/relationships">
+  <p:cSld>
+    <p:bg>
+      <p:bgPr>
+        <a:solidFill>
+          <a:srgbClr val="FFFAF5"/>
+        </a:solidFill>
+        <a:effectLst/>
+      </p:bgPr>
+    </p:bg>
+    <p:spTree>
+      <p:nvGrpSpPr>
+        <p:cNvPr id="1" name=""/>
+        <p:cNvGrpSpPr/>
+        <p:nvPr/>
+      </p:nvGrpSpPr>
+      <p:grpSpPr/>
+      <p:sp>
+        <p:nvSpPr>
+          <p:cNvPr id="2" name="TextBox 1"/>
+          <p:cNvSpPr txBox="1"/>
+          <p:nvPr/>
+        </p:nvSpPr>
+        <p:spPr>
+          <a:xfrm>
+            <a:off x="502920" y="228600"/>
+            <a:ext cx="6400800" cy="228600"/>
+          </a:xfrm>
+          <a:prstGeom prst="rect">
+            <a:avLst/>
+          </a:prstGeom>
+          <a:noFill/>
+        </p:spPr>
+        <p:txBody>
+          <a:bodyPr wrap="square" lIns="27432" rIns="27432" tIns="18288" bIns="18288">
+            <a:spAutoFit/>
+          </a:bodyPr>
+          <a:lstStyle/>
+          <a:p>
+            <a:r>
+              <a:rPr sz="900" b="1">
+                <a:solidFill>
+                  <a:srgbClr val="5A6078"/>
+                </a:solidFill>
+                <a:latin typeface="Segoe UI"/>
+              </a:rPr>
+              <a:t>COWORK HEAVY TASK</a:t>
+            </a:r>
+          </a:p>
+        </p:txBody>
+      </p:sp>
+      <p:sp>
+        <p:nvSpPr>
+          <p:cNvPr id="3" name="TextBox 2"/>
+          <p:cNvSpPr txBox="1"/>
+          <p:nvPr/>
+        </p:nvSpPr>
+        <p:spPr>
+          <a:xfrm>
+            <a:off x="502920" y="438912"/>
+            <a:ext cx="7955279" cy="658368"/>
+          </a:xfrm>
+          <a:prstGeom prst="rect">
+            <a:avLst/>
+          </a:prstGeom>
+          <a:noFill/>
+        </p:spPr>
+        <p:txBody>
+          <a:bodyPr wrap="square" lIns="27432" rIns="27432" tIns="18288" bIns="18288">
+            <a:spAutoFit/>
+          </a:bodyPr>
+          <a:lstStyle/>
+          <a:p>
+            <a:r>
+              <a:rPr sz="2200" b="1">
+                <a:solidFill>
+                  <a:srgbClr val="1B1B2C"/>
+                </a:solidFill>
+                <a:latin typeface="Segoe UI"/>
+              </a:rPr>
+              <a:t>Analyze and optimize your OneDrive at scale</a:t>
+            </a:r>
+          </a:p>
+        </p:txBody>
+      </p:sp>
+      <p:sp>
+        <p:nvSpPr>
+          <p:cNvPr id="4" name="Rectangle 3"/>
+          <p:cNvSpPr/>
+          <p:nvPr/>
+        </p:nvSpPr>
+        <p:spPr>
+          <a:xfrm>
+            <a:off x="502920" y="1115568"/>
+            <a:ext cx="1097280" cy="45720"/>
+          </a:xfrm>
+          <a:prstGeom prst="rect">
+            <a:avLst/>
+          </a:prstGeom>
+          <a:solidFill>
+            <a:srgbClr val="1A6FD6"/>
+          </a:solidFill>
+          <a:ln>
+            <a:noFill/>
+          </a:ln>
+        </p:spPr>
+        <p:style>
+          <a:lnRef idx="1">
+            <a:schemeClr val="accent1"/>
+          </a:lnRef>
+          <a:fillRef idx="3">
+            <a:schemeClr val="accent1"/>
+          </a:fillRef>
+          <a:effectRef idx="2">
+            <a:schemeClr val="accent1"/>
+          </a:effectRef>
+          <a:fontRef idx="minor">
+            <a:schemeClr val="lt1"/>
+          </a:fontRef>
+        </p:style>
+        <p:txBody>
+          <a:bodyPr rtlCol="0" anchor="ctr"/>
+          <a:lstStyle/>
+          <a:p>
+            <a:pPr algn="ctr"/>
+          </a:p>
+        </p:txBody>
+      </p:sp>
+      <p:sp>
+        <p:nvSpPr>
+          <p:cNvPr id="5" name="Rounded Rectangle 4"/>
+          <p:cNvSpPr/>
+          <p:nvPr/>
+        </p:nvSpPr>
+        <p:spPr>
+          <a:xfrm>
+            <a:off x="640080" y="1417320"/>
+            <a:ext cx="7863840" cy="2697480"/>
+          </a:xfrm>
+          <a:prstGeom prst="roundRect">
+            <a:avLst/>
+          </a:prstGeom>
+          <a:solidFill>
+            <a:srgbClr val="FFFFFF"/>
+          </a:solidFill>
+          <a:ln>
+            <a:solidFill>
+              <a:srgbClr val="F6F7FB"/>
+            </a:solidFill>
+          </a:ln>
+        </p:spPr>
+        <p:style>
+          <a:lnRef idx="1">
+            <a:schemeClr val="accent1"/>
+          </a:lnRef>
+          <a:fillRef idx="3">
+            <a:schemeClr val="accent1"/>
+          </a:fillRef>
+          <a:effectRef idx="2">
+            <a:schemeClr val="accent1"/>
+          </a:effectRef>
+          <a:fontRef idx="minor">
+            <a:schemeClr val="lt1"/>
+          </a:fontRef>
+        </p:style>
+        <p:txBody>
+          <a:bodyPr rtlCol="0" anchor="ctr"/>
+          <a:lstStyle/>
+          <a:p>
+            <a:pPr algn="ctr"/>
+          </a:p>
+        </p:txBody>
+      </p:sp>
+      <p:sp>
+        <p:nvSpPr>
+          <p:cNvPr id="6" name="Rectangle 5"/>
+          <p:cNvSpPr/>
+          <p:nvPr/>
+        </p:nvSpPr>
+        <p:spPr>
+          <a:xfrm>
+            <a:off x="640080" y="1417320"/>
+            <a:ext cx="7863840" cy="64008"/>
+          </a:xfrm>
+          <a:prstGeom prst="rect">
+            <a:avLst/>
+          </a:prstGeom>
+          <a:solidFill>
+            <a:srgbClr val="C73E78"/>
+          </a:solidFill>
+          <a:ln>
+            <a:noFill/>
+          </a:ln>
+        </p:spPr>
+        <p:style>
+          <a:lnRef idx="1">
+            <a:schemeClr val="accent1"/>
+          </a:lnRef>
+          <a:fillRef idx="3">
+            <a:schemeClr val="accent1"/>
+          </a:fillRef>
+          <a:effectRef idx="2">
+            <a:schemeClr val="accent1"/>
+          </a:effectRef>
+          <a:fontRef idx="minor">
+            <a:schemeClr val="lt1"/>
+          </a:fontRef>
+        </p:style>
+        <p:txBody>
+          <a:bodyPr rtlCol="0" anchor="ctr"/>
+          <a:lstStyle/>
+          <a:p>
+            <a:pPr algn="ctr"/>
+          </a:p>
+        </p:txBody>
+      </p:sp>
+      <p:sp>
+        <p:nvSpPr>
+          <p:cNvPr id="7" name="TextBox 6"/>
+          <p:cNvSpPr txBox="1"/>
+          <p:nvPr/>
+        </p:nvSpPr>
+        <p:spPr>
+          <a:xfrm>
+            <a:off x="914400" y="1700784"/>
+            <a:ext cx="1325880" cy="384048"/>
+          </a:xfrm>
+          <a:prstGeom prst="rect">
+            <a:avLst/>
+          </a:prstGeom>
+          <a:noFill/>
+        </p:spPr>
+        <p:txBody>
+          <a:bodyPr wrap="square" lIns="27432" rIns="27432" tIns="18288" bIns="18288">
+            <a:spAutoFit/>
+          </a:bodyPr>
+          <a:lstStyle/>
+          <a:p>
+            <a:pPr algn="ctr"/>
+            <a:r>
+              <a:rPr sz="2000" b="1">
+                <a:solidFill>
+                  <a:srgbClr val="C73E78"/>
+                </a:solidFill>
+                <a:latin typeface="Segoe UI"/>
+              </a:rPr>
+              <a:t>Heavy</a:t>
+            </a:r>
+          </a:p>
+        </p:txBody>
+      </p:sp>
+      <p:sp>
+        <p:nvSpPr>
+          <p:cNvPr id="8" name="TextBox 7"/>
+          <p:cNvSpPr txBox="1"/>
+          <p:nvPr/>
+        </p:nvSpPr>
+        <p:spPr>
+          <a:xfrm>
+            <a:off x="2423160" y="1627632"/>
+            <a:ext cx="5577840" cy="658368"/>
+          </a:xfrm>
+          <a:prstGeom prst="rect">
+            <a:avLst/>
+          </a:prstGeom>
+          <a:noFill/>
+        </p:spPr>
+        <p:txBody>
+          <a:bodyPr wrap="square" lIns="27432" rIns="27432" tIns="18288" bIns="18288">
+            <a:spAutoFit/>
+          </a:bodyPr>
+          <a:lstStyle/>
+          <a:p>
+            <a:r>
+              <a:rPr sz="1300" b="0">
+                <a:solidFill>
+                  <a:srgbClr val="5A6078"/>
+                </a:solidFill>
+                <a:latin typeface="Segoe UI"/>
+              </a:rPr>
+              <a:t>Multi-part work you would block out serious time for. Cowork pulls from across your tools, does the deep thinking, and delivers a full set of artifacts.</a:t>
+            </a:r>
+          </a:p>
+        </p:txBody>
+      </p:sp>
+      <p:sp>
+        <p:nvSpPr>
+          <p:cNvPr id="9" name="TextBox 8"/>
+          <p:cNvSpPr txBox="1"/>
+          <p:nvPr/>
+        </p:nvSpPr>
+        <p:spPr>
+          <a:xfrm>
+            <a:off x="914400" y="2560320"/>
+            <a:ext cx="1005840" cy="237744"/>
+          </a:xfrm>
+          <a:prstGeom prst="rect">
+            <a:avLst/>
+          </a:prstGeom>
+          <a:noFill/>
+        </p:spPr>
+        <p:txBody>
+          <a:bodyPr wrap="square" lIns="27432" rIns="27432" tIns="18288" bIns="18288">
+            <a:spAutoFit/>
+          </a:bodyPr>
+          <a:lstStyle/>
+          <a:p>
+            <a:r>
+              <a:rPr sz="1300" b="1">
+                <a:solidFill>
+                  <a:srgbClr val="1B1B2C"/>
+                </a:solidFill>
+                <a:latin typeface="Segoe UI"/>
+              </a:rPr>
+              <a:t>Goal</a:t>
+            </a:r>
+          </a:p>
+        </p:txBody>
+      </p:sp>
+      <p:sp>
+        <p:nvSpPr>
+          <p:cNvPr id="10" name="TextBox 9"/>
+          <p:cNvSpPr txBox="1"/>
+          <p:nvPr/>
+        </p:nvSpPr>
+        <p:spPr>
+          <a:xfrm>
+            <a:off x="1874519" y="2542032"/>
+            <a:ext cx="6263640" cy="384048"/>
+          </a:xfrm>
+          <a:prstGeom prst="rect">
+            <a:avLst/>
+          </a:prstGeom>
+          <a:noFill/>
+        </p:spPr>
+        <p:txBody>
+          <a:bodyPr wrap="square" lIns="27432" rIns="27432" tIns="18288" bIns="18288">
+            <a:spAutoFit/>
+          </a:bodyPr>
+          <a:lstStyle/>
+          <a:p>
+            <a:r>
+              <a:rPr sz="1200" b="0">
+                <a:solidFill>
+                  <a:srgbClr val="1B1B2C"/>
+                </a:solidFill>
+                <a:latin typeface="Segoe UI"/>
+              </a:rPr>
+              <a:t>Turn a sprawling OneDrive into a structured catalog you can actually act on.</a:t>
+            </a:r>
+          </a:p>
+        </p:txBody>
+      </p:sp>
+      <p:sp>
+        <p:nvSpPr>
+          <p:cNvPr id="11" name="TextBox 10"/>
+          <p:cNvSpPr txBox="1"/>
+          <p:nvPr/>
+        </p:nvSpPr>
+        <p:spPr>
+          <a:xfrm>
+            <a:off x="914400" y="3218688"/>
+            <a:ext cx="1234440" cy="237744"/>
+          </a:xfrm>
+          <a:prstGeom prst="rect">
+            <a:avLst/>
+          </a:prstGeom>
+          <a:noFill/>
+        </p:spPr>
+        <p:txBody>
+          <a:bodyPr wrap="square" lIns="27432" rIns="27432" tIns="18288" bIns="18288">
+            <a:spAutoFit/>
+          </a:bodyPr>
+          <a:lstStyle/>
+          <a:p>
+            <a:r>
+              <a:rPr sz="1300" b="1">
+                <a:solidFill>
+                  <a:srgbClr val="1B1B2C"/>
+                </a:solidFill>
+                <a:latin typeface="Segoe UI"/>
+              </a:rPr>
+              <a:t>Outcome</a:t>
+            </a:r>
+          </a:p>
+        </p:txBody>
+      </p:sp>
+      <p:sp>
+        <p:nvSpPr>
+          <p:cNvPr id="12" name="TextBox 11"/>
+          <p:cNvSpPr txBox="1"/>
+          <p:nvPr/>
+        </p:nvSpPr>
+        <p:spPr>
+          <a:xfrm>
+            <a:off x="1874519" y="3182112"/>
+            <a:ext cx="6263640" cy="438912"/>
+          </a:xfrm>
+          <a:prstGeom prst="rect">
+            <a:avLst/>
+          </a:prstGeom>
+          <a:noFill/>
+        </p:spPr>
+        <p:txBody>
+          <a:bodyPr wrap="square" lIns="27432" rIns="27432" tIns="18288" bIns="18288">
+            <a:spAutoFit/>
+          </a:bodyPr>
+          <a:lstStyle/>
+          <a:p>
+            <a:r>
+              <a:rPr sz="1200" b="0">
+                <a:solidFill>
+                  <a:srgbClr val="1B1B2C"/>
+                </a:solidFill>
+                <a:latin typeface="Segoe UI"/>
+              </a:rPr>
+              <a:t>An organization plan and visual overview of your files, with cleanup decisions queued up for your approval.</a:t>
+            </a:r>
+          </a:p>
+        </p:txBody>
+      </p:sp>
+    </p:spTree>
+  </p:cSld>
+  <p:clrMapOvr>
+    <a:masterClrMapping/>
+  </p:clrMapOvr>
+</p:sld>
+</file>
+
+<file path=ppt/slides/slide23.xml><?xml version="1.0" encoding="utf-8"?>
+<p:sld xmlns:a="http://schemas.openxmlformats.org/drawingml/2006/main" xmlns:p="http://schemas.openxmlformats.org/presentationml/2006/main" xmlns:r="http://schemas.openxmlformats.org/officeDocument/2006/relationships">
+  <p:cSld>
+    <p:bg>
+      <p:bgPr>
+        <a:solidFill>
+          <a:srgbClr val="FFFAF5"/>
+        </a:solidFill>
+        <a:effectLst/>
+      </p:bgPr>
+    </p:bg>
+    <p:spTree>
+      <p:nvGrpSpPr>
+        <p:cNvPr id="1" name=""/>
+        <p:cNvGrpSpPr/>
+        <p:nvPr/>
+      </p:nvGrpSpPr>
+      <p:grpSpPr/>
+      <p:sp>
+        <p:nvSpPr>
+          <p:cNvPr id="2" name="TextBox 1"/>
+          <p:cNvSpPr txBox="1"/>
+          <p:nvPr/>
+        </p:nvSpPr>
+        <p:spPr>
+          <a:xfrm>
+            <a:off x="502920" y="228600"/>
+            <a:ext cx="6400800" cy="228600"/>
+          </a:xfrm>
+          <a:prstGeom prst="rect">
+            <a:avLst/>
+          </a:prstGeom>
+          <a:noFill/>
+        </p:spPr>
+        <p:txBody>
+          <a:bodyPr wrap="square" lIns="27432" rIns="27432" tIns="18288" bIns="18288">
+            <a:spAutoFit/>
+          </a:bodyPr>
+          <a:lstStyle/>
+          <a:p>
+            <a:r>
+              <a:rPr sz="900" b="1">
+                <a:solidFill>
+                  <a:srgbClr val="5A6078"/>
+                </a:solidFill>
+                <a:latin typeface="Segoe UI"/>
+              </a:rPr>
+              <a:t>ANALYZE AND OPTIMIZE YOUR ONEDRIVE AT SCALE</a:t>
+            </a:r>
+          </a:p>
+        </p:txBody>
+      </p:sp>
+      <p:sp>
+        <p:nvSpPr>
+          <p:cNvPr id="3" name="TextBox 2"/>
+          <p:cNvSpPr txBox="1"/>
+          <p:nvPr/>
+        </p:nvSpPr>
+        <p:spPr>
+          <a:xfrm>
+            <a:off x="502920" y="438912"/>
+            <a:ext cx="7955279" cy="658368"/>
+          </a:xfrm>
+          <a:prstGeom prst="rect">
+            <a:avLst/>
+          </a:prstGeom>
+          <a:noFill/>
+        </p:spPr>
+        <p:txBody>
+          <a:bodyPr wrap="square" lIns="27432" rIns="27432" tIns="18288" bIns="18288">
+            <a:spAutoFit/>
+          </a:bodyPr>
+          <a:lstStyle/>
+          <a:p>
+            <a:r>
+              <a:rPr sz="2200" b="1">
+                <a:solidFill>
+                  <a:srgbClr val="1B1B2C"/>
+                </a:solidFill>
+                <a:latin typeface="Segoe UI"/>
+              </a:rPr>
+              <a:t>Goal, outcome, prompt, flow</a:t>
+            </a:r>
+          </a:p>
+        </p:txBody>
+      </p:sp>
+      <p:sp>
+        <p:nvSpPr>
+          <p:cNvPr id="4" name="Rectangle 3"/>
+          <p:cNvSpPr/>
+          <p:nvPr/>
+        </p:nvSpPr>
+        <p:spPr>
+          <a:xfrm>
+            <a:off x="502920" y="1115568"/>
+            <a:ext cx="1097280" cy="45720"/>
+          </a:xfrm>
+          <a:prstGeom prst="rect">
+            <a:avLst/>
+          </a:prstGeom>
+          <a:solidFill>
+            <a:srgbClr val="1A6FD6"/>
+          </a:solidFill>
+          <a:ln>
+            <a:noFill/>
+          </a:ln>
+        </p:spPr>
+        <p:style>
+          <a:lnRef idx="1">
+            <a:schemeClr val="accent1"/>
+          </a:lnRef>
+          <a:fillRef idx="3">
+            <a:schemeClr val="accent1"/>
+          </a:fillRef>
+          <a:effectRef idx="2">
+            <a:schemeClr val="accent1"/>
+          </a:effectRef>
+          <a:fontRef idx="minor">
+            <a:schemeClr val="lt1"/>
+          </a:fontRef>
+        </p:style>
+        <p:txBody>
+          <a:bodyPr rtlCol="0" anchor="ctr"/>
+          <a:lstStyle/>
+          <a:p>
+            <a:pPr algn="ctr"/>
+          </a:p>
+        </p:txBody>
+      </p:sp>
+      <p:sp>
+        <p:nvSpPr>
+          <p:cNvPr id="5" name="Rounded Rectangle 4"/>
+          <p:cNvSpPr/>
+          <p:nvPr/>
+        </p:nvSpPr>
+        <p:spPr>
+          <a:xfrm>
+            <a:off x="502920" y="1298448"/>
+            <a:ext cx="3886200" cy="3273552"/>
+          </a:xfrm>
+          <a:prstGeom prst="roundRect">
+            <a:avLst/>
+          </a:prstGeom>
+          <a:solidFill>
+            <a:srgbClr val="FFFFFF"/>
+          </a:solidFill>
+          <a:ln>
+            <a:solidFill>
+              <a:srgbClr val="F6F7FB"/>
+            </a:solidFill>
+          </a:ln>
+        </p:spPr>
+        <p:style>
+          <a:lnRef idx="1">
+            <a:schemeClr val="accent1"/>
+          </a:lnRef>
+          <a:fillRef idx="3">
+            <a:schemeClr val="accent1"/>
+          </a:fillRef>
+          <a:effectRef idx="2">
+            <a:schemeClr val="accent1"/>
+          </a:effectRef>
+          <a:fontRef idx="minor">
+            <a:schemeClr val="lt1"/>
+          </a:fontRef>
+        </p:style>
+        <p:txBody>
+          <a:bodyPr rtlCol="0" anchor="ctr"/>
+          <a:lstStyle/>
+          <a:p>
+            <a:pPr algn="ctr"/>
+          </a:p>
+        </p:txBody>
+      </p:sp>
+      <p:sp>
+        <p:nvSpPr>
+          <p:cNvPr id="6" name="Rectangle 5"/>
+          <p:cNvSpPr/>
+          <p:nvPr/>
+        </p:nvSpPr>
+        <p:spPr>
+          <a:xfrm>
+            <a:off x="502920" y="1298448"/>
+            <a:ext cx="3886200" cy="64008"/>
+          </a:xfrm>
+          <a:prstGeom prst="rect">
+            <a:avLst/>
+          </a:prstGeom>
+          <a:solidFill>
+            <a:srgbClr val="C73E78"/>
+          </a:solidFill>
+          <a:ln>
+            <a:noFill/>
+          </a:ln>
+        </p:spPr>
+        <p:style>
+          <a:lnRef idx="1">
+            <a:schemeClr val="accent1"/>
+          </a:lnRef>
+          <a:fillRef idx="3">
+            <a:schemeClr val="accent1"/>
+          </a:fillRef>
+          <a:effectRef idx="2">
+            <a:schemeClr val="accent1"/>
+          </a:effectRef>
+          <a:fontRef idx="minor">
+            <a:schemeClr val="lt1"/>
+          </a:fontRef>
+        </p:style>
+        <p:txBody>
+          <a:bodyPr rtlCol="0" anchor="ctr"/>
+          <a:lstStyle/>
+          <a:p>
+            <a:pPr algn="ctr"/>
+          </a:p>
+        </p:txBody>
+      </p:sp>
+      <p:sp>
+        <p:nvSpPr>
+          <p:cNvPr id="7" name="TextBox 6"/>
+          <p:cNvSpPr txBox="1"/>
+          <p:nvPr/>
+        </p:nvSpPr>
+        <p:spPr>
+          <a:xfrm>
+            <a:off x="749808" y="1554480"/>
+            <a:ext cx="3383280" cy="256032"/>
+          </a:xfrm>
+          <a:prstGeom prst="rect">
+            <a:avLst/>
+          </a:prstGeom>
+          <a:noFill/>
+        </p:spPr>
+        <p:txBody>
+          <a:bodyPr wrap="square" lIns="27432" rIns="27432" tIns="18288" bIns="18288">
+            <a:spAutoFit/>
+          </a:bodyPr>
+          <a:lstStyle/>
+          <a:p>
+            <a:r>
+              <a:rPr sz="1300" b="1">
+                <a:solidFill>
+                  <a:srgbClr val="1B1B2C"/>
+                </a:solidFill>
+                <a:latin typeface="Segoe UI"/>
+              </a:rPr>
+              <a:t>Prompt to give Cowork</a:t>
+            </a:r>
+          </a:p>
+        </p:txBody>
+      </p:sp>
+      <p:sp>
+        <p:nvSpPr>
+          <p:cNvPr id="8" name="TextBox 7"/>
+          <p:cNvSpPr txBox="1"/>
+          <p:nvPr/>
+        </p:nvSpPr>
+        <p:spPr>
+          <a:xfrm>
+            <a:off x="749808" y="1883664"/>
+            <a:ext cx="3383280" cy="2240280"/>
+          </a:xfrm>
+          <a:prstGeom prst="rect">
+            <a:avLst/>
+          </a:prstGeom>
+          <a:noFill/>
+        </p:spPr>
+        <p:txBody>
+          <a:bodyPr wrap="square" lIns="27432" rIns="27432" tIns="18288" bIns="18288">
+            <a:spAutoFit/>
+          </a:bodyPr>
+          <a:lstStyle/>
+          <a:p>
+            <a:r>
+              <a:rPr sz="900" b="0">
+                <a:solidFill>
+                  <a:srgbClr val="5A6078"/>
+                </a:solidFill>
+                <a:latin typeface="Segoe UI"/>
+              </a:rPr>
+              <a:t>Analyze my OneDrive. Catalog and categorize all of the files. Create a dynamic HTML presentation showing the disposition of the files, age, relevancy, customer, product etc. The presentation should be no more than five scrolling screens with an executive overview with animated interactivity. The sixth screen should be recommendations. Create a plan to optimize my files and reorganize them. The plan should include folders and...</a:t>
+            </a:r>
+          </a:p>
+        </p:txBody>
+      </p:sp>
+      <p:sp>
+        <p:nvSpPr>
+          <p:cNvPr id="9" name="Rounded Rectangle 8"/>
+          <p:cNvSpPr/>
+          <p:nvPr/>
+        </p:nvSpPr>
+        <p:spPr>
+          <a:xfrm>
+            <a:off x="4663440" y="1298448"/>
+            <a:ext cx="3977639" cy="3273552"/>
+          </a:xfrm>
+          <a:prstGeom prst="roundRect">
+            <a:avLst/>
+          </a:prstGeom>
+          <a:solidFill>
+            <a:srgbClr val="FFFFFF"/>
+          </a:solidFill>
+          <a:ln>
+            <a:solidFill>
+              <a:srgbClr val="F6F7FB"/>
+            </a:solidFill>
+          </a:ln>
+        </p:spPr>
+        <p:style>
+          <a:lnRef idx="1">
+            <a:schemeClr val="accent1"/>
+          </a:lnRef>
+          <a:fillRef idx="3">
+            <a:schemeClr val="accent1"/>
+          </a:fillRef>
+          <a:effectRef idx="2">
+            <a:schemeClr val="accent1"/>
+          </a:effectRef>
+          <a:fontRef idx="minor">
+            <a:schemeClr val="lt1"/>
+          </a:fontRef>
+        </p:style>
+        <p:txBody>
+          <a:bodyPr rtlCol="0" anchor="ctr"/>
+          <a:lstStyle/>
+          <a:p>
+            <a:pPr algn="ctr"/>
+          </a:p>
+        </p:txBody>
+      </p:sp>
+      <p:sp>
+        <p:nvSpPr>
+          <p:cNvPr id="10" name="Rectangle 9"/>
+          <p:cNvSpPr/>
+          <p:nvPr/>
+        </p:nvSpPr>
+        <p:spPr>
+          <a:xfrm>
+            <a:off x="4663440" y="1298448"/>
+            <a:ext cx="3977639" cy="64008"/>
+          </a:xfrm>
+          <a:prstGeom prst="rect">
+            <a:avLst/>
+          </a:prstGeom>
+          <a:solidFill>
+            <a:srgbClr val="C73E78"/>
+          </a:solidFill>
+          <a:ln>
+            <a:noFill/>
+          </a:ln>
+        </p:spPr>
+        <p:style>
+          <a:lnRef idx="1">
+            <a:schemeClr val="accent1"/>
+          </a:lnRef>
+          <a:fillRef idx="3">
+            <a:schemeClr val="accent1"/>
+          </a:fillRef>
+          <a:effectRef idx="2">
+            <a:schemeClr val="accent1"/>
+          </a:effectRef>
+          <a:fontRef idx="minor">
+            <a:schemeClr val="lt1"/>
+          </a:fontRef>
+        </p:style>
+        <p:txBody>
+          <a:bodyPr rtlCol="0" anchor="ctr"/>
+          <a:lstStyle/>
+          <a:p>
+            <a:pPr algn="ctr"/>
+          </a:p>
+        </p:txBody>
+      </p:sp>
+      <p:sp>
+        <p:nvSpPr>
+          <p:cNvPr id="11" name="TextBox 10"/>
+          <p:cNvSpPr txBox="1"/>
+          <p:nvPr/>
+        </p:nvSpPr>
+        <p:spPr>
+          <a:xfrm>
+            <a:off x="4910328" y="1554480"/>
+            <a:ext cx="3383280" cy="256032"/>
+          </a:xfrm>
+          <a:prstGeom prst="rect">
+            <a:avLst/>
+          </a:prstGeom>
+          <a:noFill/>
+        </p:spPr>
+        <p:txBody>
+          <a:bodyPr wrap="square" lIns="27432" rIns="27432" tIns="18288" bIns="18288">
+            <a:spAutoFit/>
+          </a:bodyPr>
+          <a:lstStyle/>
+          <a:p>
+            <a:r>
+              <a:rPr sz="1300" b="1">
+                <a:solidFill>
+                  <a:srgbClr val="1B1B2C"/>
+                </a:solidFill>
+                <a:latin typeface="Segoe UI"/>
+              </a:rPr>
+              <a:t>Execution flow</a:t>
+            </a:r>
+          </a:p>
+        </p:txBody>
+      </p:sp>
+      <p:sp>
+        <p:nvSpPr>
+          <p:cNvPr id="12" name="TextBox 11"/>
+          <p:cNvSpPr txBox="1"/>
+          <p:nvPr/>
+        </p:nvSpPr>
+        <p:spPr>
+          <a:xfrm>
+            <a:off x="4892040" y="1874519"/>
+            <a:ext cx="3429000" cy="2148840"/>
+          </a:xfrm>
+          <a:prstGeom prst="rect">
+            <a:avLst/>
+          </a:prstGeom>
+          <a:noFill/>
+        </p:spPr>
+        <p:txBody>
+          <a:bodyPr wrap="none" lIns="73152" rIns="73152" tIns="36576">
+            <a:spAutoFit/>
+          </a:bodyPr>
+          <a:lstStyle/>
+          <a:p>
+            <a:pPr>
+              <a:spcAft>
+                <a:spcPts val="500"/>
+              </a:spcAft>
+              <a:defRPr sz="1000">
+                <a:solidFill>
+                  <a:srgbClr val="1B1B2C"/>
+                </a:solidFill>
+                <a:latin typeface="Segoe UI"/>
+              </a:defRPr>
+            </a:pPr>
+            <a:r>
+              <a:t>• OneDrive -&gt; Scan file inventory</a:t>
+            </a:r>
+          </a:p>
+          <a:p>
+            <a:pPr>
+              <a:spcAft>
+                <a:spcPts val="500"/>
+              </a:spcAft>
+              <a:defRPr sz="1000">
+                <a:solidFill>
+                  <a:srgbClr val="1B1B2C"/>
+                </a:solidFill>
+                <a:latin typeface="Segoe UI"/>
+              </a:defRPr>
+            </a:pPr>
+            <a:r>
+              <a:t>• Catalog -&gt; Age + relevance</a:t>
+            </a:r>
+          </a:p>
+          <a:p>
+            <a:pPr>
+              <a:spcAft>
+                <a:spcPts val="500"/>
+              </a:spcAft>
+              <a:defRPr sz="1000">
+                <a:solidFill>
+                  <a:srgbClr val="1B1B2C"/>
+                </a:solidFill>
+                <a:latin typeface="Segoe UI"/>
+              </a:defRPr>
+            </a:pPr>
+            <a:r>
+              <a:t>• Categorize -&gt; Customer / product</a:t>
+            </a:r>
+          </a:p>
+          <a:p>
+            <a:pPr>
+              <a:spcAft>
+                <a:spcPts val="500"/>
+              </a:spcAft>
+              <a:defRPr sz="1000">
+                <a:solidFill>
+                  <a:srgbClr val="1B1B2C"/>
+                </a:solidFill>
+                <a:latin typeface="Segoe UI"/>
+              </a:defRPr>
+            </a:pPr>
+            <a:r>
+              <a:t>• Visualize -&gt; HTML dashboard</a:t>
+            </a:r>
+          </a:p>
+          <a:p>
+            <a:pPr>
+              <a:spcAft>
+                <a:spcPts val="500"/>
+              </a:spcAft>
+              <a:defRPr sz="1000">
+                <a:solidFill>
+                  <a:srgbClr val="1B1B2C"/>
+                </a:solidFill>
+                <a:latin typeface="Segoe UI"/>
+              </a:defRPr>
+            </a:pPr>
+            <a:r>
+              <a:t>• Recommend -&gt; Optimization plan</a:t>
+            </a:r>
+          </a:p>
+        </p:txBody>
+      </p:sp>
+      <p:sp>
+        <p:nvSpPr>
+          <p:cNvPr id="13" name="TextBox 12"/>
+          <p:cNvSpPr txBox="1"/>
+          <p:nvPr/>
+        </p:nvSpPr>
+        <p:spPr>
+          <a:xfrm>
+            <a:off x="4910328" y="4133087"/>
+            <a:ext cx="3337560" cy="310896"/>
+          </a:xfrm>
+          <a:prstGeom prst="rect">
+            <a:avLst/>
+          </a:prstGeom>
+          <a:noFill/>
+        </p:spPr>
+        <p:txBody>
+          <a:bodyPr wrap="square" lIns="27432" rIns="27432" tIns="18288" bIns="18288">
+            <a:spAutoFit/>
+          </a:bodyPr>
+          <a:lstStyle/>
+          <a:p>
+            <a:r>
+              <a:rPr sz="1000" b="0">
+                <a:solidFill>
+                  <a:srgbClr val="5A6078"/>
+                </a:solidFill>
+                <a:latin typeface="Segoe UI"/>
+              </a:rPr>
+              <a:t>An organization plan and visual overview of your files, with cleanup decisions queued up for your approval.</a:t>
+            </a:r>
+          </a:p>
+        </p:txBody>
+      </p:sp>
+    </p:spTree>
+  </p:cSld>
+  <p:clrMapOvr>
+    <a:masterClrMapping/>
+  </p:clrMapOvr>
+</p:sld>
+</file>
+
+<file path=ppt/slides/slide24.xml><?xml version="1.0" encoding="utf-8"?>
+<p:sld xmlns:a="http://schemas.openxmlformats.org/drawingml/2006/main" xmlns:p="http://schemas.openxmlformats.org/presentationml/2006/main" xmlns:r="http://schemas.openxmlformats.org/officeDocument/2006/relationships">
+  <p:cSld>
+    <p:bg>
+      <p:bgPr>
+        <a:solidFill>
+          <a:srgbClr val="FFFAF5"/>
+        </a:solidFill>
+        <a:effectLst/>
+      </p:bgPr>
+    </p:bg>
+    <p:spTree>
+      <p:nvGrpSpPr>
+        <p:cNvPr id="1" name=""/>
+        <p:cNvGrpSpPr/>
+        <p:nvPr/>
+      </p:nvGrpSpPr>
+      <p:grpSpPr/>
+      <p:sp>
+        <p:nvSpPr>
+          <p:cNvPr id="2" name="TextBox 1"/>
+          <p:cNvSpPr txBox="1"/>
+          <p:nvPr/>
+        </p:nvSpPr>
+        <p:spPr>
+          <a:xfrm>
+            <a:off x="502920" y="228600"/>
+            <a:ext cx="6400800" cy="228600"/>
+          </a:xfrm>
+          <a:prstGeom prst="rect">
+            <a:avLst/>
+          </a:prstGeom>
+          <a:noFill/>
+        </p:spPr>
+        <p:txBody>
+          <a:bodyPr wrap="square" lIns="27432" rIns="27432" tIns="18288" bIns="18288">
+            <a:spAutoFit/>
+          </a:bodyPr>
+          <a:lstStyle/>
+          <a:p>
+            <a:r>
+              <a:rPr sz="900" b="1">
+                <a:solidFill>
+                  <a:srgbClr val="5A6078"/>
+                </a:solidFill>
+                <a:latin typeface="Segoe UI"/>
+              </a:rPr>
+              <a:t>COPILOT COWORK</a:t>
+            </a:r>
+          </a:p>
+        </p:txBody>
+      </p:sp>
+      <p:sp>
+        <p:nvSpPr>
+          <p:cNvPr id="3" name="TextBox 2"/>
+          <p:cNvSpPr txBox="1"/>
+          <p:nvPr/>
+        </p:nvSpPr>
+        <p:spPr>
+          <a:xfrm>
+            <a:off x="502920" y="438912"/>
+            <a:ext cx="7955279" cy="658368"/>
+          </a:xfrm>
+          <a:prstGeom prst="rect">
+            <a:avLst/>
+          </a:prstGeom>
+          <a:noFill/>
+        </p:spPr>
+        <p:txBody>
+          <a:bodyPr wrap="square" lIns="27432" rIns="27432" tIns="18288" bIns="18288">
+            <a:spAutoFit/>
+          </a:bodyPr>
+          <a:lstStyle/>
+          <a:p>
+            <a:r>
+              <a:rPr sz="2200" b="1">
+                <a:solidFill>
+                  <a:srgbClr val="1B1B2C"/>
+                </a:solidFill>
+                <a:latin typeface="Segoe UI"/>
+              </a:rPr>
+              <a:t>Add-on tip: schedule Cowork prompts</a:t>
+            </a:r>
+          </a:p>
+        </p:txBody>
+      </p:sp>
+      <p:sp>
+        <p:nvSpPr>
+          <p:cNvPr id="4" name="Rectangle 3"/>
+          <p:cNvSpPr/>
+          <p:nvPr/>
+        </p:nvSpPr>
+        <p:spPr>
+          <a:xfrm>
+            <a:off x="502920" y="1115568"/>
+            <a:ext cx="1097280" cy="45720"/>
+          </a:xfrm>
+          <a:prstGeom prst="rect">
+            <a:avLst/>
+          </a:prstGeom>
+          <a:solidFill>
+            <a:srgbClr val="1A6FD6"/>
+          </a:solidFill>
+          <a:ln>
+            <a:noFill/>
+          </a:ln>
+        </p:spPr>
+        <p:style>
+          <a:lnRef idx="1">
+            <a:schemeClr val="accent1"/>
+          </a:lnRef>
+          <a:fillRef idx="3">
+            <a:schemeClr val="accent1"/>
+          </a:fillRef>
+          <a:effectRef idx="2">
+            <a:schemeClr val="accent1"/>
+          </a:effectRef>
+          <a:fontRef idx="minor">
+            <a:schemeClr val="lt1"/>
+          </a:fontRef>
+        </p:style>
+        <p:txBody>
+          <a:bodyPr rtlCol="0" anchor="ctr"/>
+          <a:lstStyle/>
+          <a:p>
+            <a:pPr algn="ctr"/>
+          </a:p>
+        </p:txBody>
+      </p:sp>
+      <p:sp>
+        <p:nvSpPr>
+          <p:cNvPr id="5" name="Rounded Rectangle 4"/>
+          <p:cNvSpPr/>
+          <p:nvPr/>
+        </p:nvSpPr>
+        <p:spPr>
+          <a:xfrm>
+            <a:off x="914400" y="1600200"/>
+            <a:ext cx="7315200" cy="2240280"/>
+          </a:xfrm>
+          <a:prstGeom prst="roundRect">
+            <a:avLst/>
+          </a:prstGeom>
+          <a:solidFill>
+            <a:srgbClr val="FFFFFF"/>
+          </a:solidFill>
+          <a:ln>
+            <a:solidFill>
+              <a:srgbClr val="F6F7FB"/>
+            </a:solidFill>
+          </a:ln>
+        </p:spPr>
+        <p:style>
+          <a:lnRef idx="1">
+            <a:schemeClr val="accent1"/>
+          </a:lnRef>
+          <a:fillRef idx="3">
+            <a:schemeClr val="accent1"/>
+          </a:fillRef>
+          <a:effectRef idx="2">
+            <a:schemeClr val="accent1"/>
+          </a:effectRef>
+          <a:fontRef idx="minor">
+            <a:schemeClr val="lt1"/>
+          </a:fontRef>
+        </p:style>
+        <p:txBody>
+          <a:bodyPr rtlCol="0" anchor="ctr"/>
+          <a:lstStyle/>
+          <a:p>
+            <a:pPr algn="ctr"/>
+          </a:p>
+        </p:txBody>
+      </p:sp>
+      <p:sp>
+        <p:nvSpPr>
+          <p:cNvPr id="6" name="Rectangle 5"/>
+          <p:cNvSpPr/>
+          <p:nvPr/>
+        </p:nvSpPr>
+        <p:spPr>
+          <a:xfrm>
+            <a:off x="914400" y="1600200"/>
+            <a:ext cx="7315200" cy="64008"/>
+          </a:xfrm>
+          <a:prstGeom prst="rect">
+            <a:avLst/>
+          </a:prstGeom>
+          <a:solidFill>
+            <a:srgbClr val="3E8E22"/>
+          </a:solidFill>
+          <a:ln>
+            <a:noFill/>
+          </a:ln>
+        </p:spPr>
+        <p:style>
+          <a:lnRef idx="1">
+            <a:schemeClr val="accent1"/>
+          </a:lnRef>
+          <a:fillRef idx="3">
+            <a:schemeClr val="accent1"/>
+          </a:fillRef>
+          <a:effectRef idx="2">
+            <a:schemeClr val="accent1"/>
+          </a:effectRef>
+          <a:fontRef idx="minor">
+            <a:schemeClr val="lt1"/>
+          </a:fontRef>
+        </p:style>
+        <p:txBody>
+          <a:bodyPr rtlCol="0" anchor="ctr"/>
+          <a:lstStyle/>
+          <a:p>
+            <a:pPr algn="ctr"/>
+          </a:p>
+        </p:txBody>
+      </p:sp>
+      <p:sp>
+        <p:nvSpPr>
+          <p:cNvPr id="7" name="TextBox 6"/>
+          <p:cNvSpPr txBox="1"/>
+          <p:nvPr/>
+        </p:nvSpPr>
+        <p:spPr>
+          <a:xfrm>
+            <a:off x="1234440" y="1901952"/>
+            <a:ext cx="1097280" cy="411480"/>
+          </a:xfrm>
+          <a:prstGeom prst="rect">
+            <a:avLst/>
+          </a:prstGeom>
+          <a:noFill/>
+        </p:spPr>
+        <p:txBody>
+          <a:bodyPr wrap="square" lIns="27432" rIns="27432" tIns="18288" bIns="18288">
+            <a:spAutoFit/>
+          </a:bodyPr>
+          <a:lstStyle/>
+          <a:p>
+            <a:r>
+              <a:rPr sz="2200" b="1">
+                <a:solidFill>
+                  <a:srgbClr val="3E8E22"/>
+                </a:solidFill>
+                <a:latin typeface="Segoe UI"/>
+              </a:rPr>
+              <a:t>Tip</a:t>
+            </a:r>
+          </a:p>
+        </p:txBody>
+      </p:sp>
+      <p:sp>
+        <p:nvSpPr>
+          <p:cNvPr id="8" name="TextBox 7"/>
+          <p:cNvSpPr txBox="1"/>
+          <p:nvPr/>
+        </p:nvSpPr>
+        <p:spPr>
+          <a:xfrm>
+            <a:off x="1234440" y="2514600"/>
+            <a:ext cx="6583680" cy="868680"/>
+          </a:xfrm>
+          <a:prstGeom prst="rect">
+            <a:avLst/>
+          </a:prstGeom>
+          <a:noFill/>
+        </p:spPr>
+        <p:txBody>
+          <a:bodyPr wrap="square" lIns="27432" rIns="27432" tIns="18288" bIns="18288">
+            <a:spAutoFit/>
+          </a:bodyPr>
+          <a:lstStyle/>
+          <a:p>
+            <a:r>
+              <a:rPr sz="1700" b="0">
+                <a:solidFill>
+                  <a:srgbClr val="1B1B2C"/>
+                </a:solidFill>
+                <a:latin typeface="Segoe UI"/>
+              </a:rPr>
+              <a:t>Any of these Cowork tasks can be scheduled to run automatically. In Microsoft 365 Copilot, hover a saved prompt and pick "Schedule this prompt", then choose a daily or weekly cadence (requires a Microsoft 365 Copilot licence).</a:t>
+            </a:r>
+          </a:p>
+        </p:txBody>
+      </p:sp>
+    </p:spTree>
+  </p:cSld>
+  <p:clrMapOvr>
+    <a:masterClrMapping/>
+  </p:clrMapOvr>
+</p:sld>
+</file>
+
+<file path=ppt/slides/slide25.xml><?xml version="1.0" encoding="utf-8"?>
+<p:sld xmlns:a="http://schemas.openxmlformats.org/drawingml/2006/main" xmlns:p="http://schemas.openxmlformats.org/presentationml/2006/main" xmlns:r="http://schemas.openxmlformats.org/officeDocument/2006/relationships">
+  <p:cSld>
+    <p:bg>
+      <p:bgPr>
+        <a:solidFill>
+          <a:srgbClr val="FFFAF5"/>
+        </a:solidFill>
+        <a:effectLst/>
+      </p:bgPr>
+    </p:bg>
+    <p:spTree>
+      <p:nvGrpSpPr>
+        <p:cNvPr id="1" name=""/>
+        <p:cNvGrpSpPr/>
+        <p:nvPr/>
+      </p:nvGrpSpPr>
+      <p:grpSpPr/>
+      <p:sp>
+        <p:nvSpPr>
+          <p:cNvPr id="2" name="TextBox 1"/>
+          <p:cNvSpPr txBox="1"/>
+          <p:nvPr/>
+        </p:nvSpPr>
+        <p:spPr>
+          <a:xfrm>
+            <a:off x="502920" y="228600"/>
+            <a:ext cx="6400800" cy="228600"/>
+          </a:xfrm>
+          <a:prstGeom prst="rect">
+            <a:avLst/>
+          </a:prstGeom>
+          <a:noFill/>
+        </p:spPr>
+        <p:txBody>
+          <a:bodyPr wrap="square" lIns="27432" rIns="27432" tIns="18288" bIns="18288">
+            <a:spAutoFit/>
+          </a:bodyPr>
+          <a:lstStyle/>
+          <a:p>
+            <a:r>
+              <a:rPr sz="900" b="1">
+                <a:solidFill>
+                  <a:srgbClr val="5A6078"/>
+                </a:solidFill>
+                <a:latin typeface="Segoe UI"/>
+              </a:rPr>
+              <a:t>MICROSOFT SOURCES</a:t>
+            </a:r>
+          </a:p>
+        </p:txBody>
+      </p:sp>
+      <p:sp>
+        <p:nvSpPr>
+          <p:cNvPr id="3" name="TextBox 2"/>
+          <p:cNvSpPr txBox="1"/>
+          <p:nvPr/>
+        </p:nvSpPr>
+        <p:spPr>
+          <a:xfrm>
+            <a:off x="502920" y="438912"/>
+            <a:ext cx="7955279" cy="658368"/>
+          </a:xfrm>
+          <a:prstGeom prst="rect">
+            <a:avLst/>
+          </a:prstGeom>
+          <a:noFill/>
+        </p:spPr>
+        <p:txBody>
+          <a:bodyPr wrap="square" lIns="27432" rIns="27432" tIns="18288" bIns="18288">
+            <a:spAutoFit/>
+          </a:bodyPr>
+          <a:lstStyle/>
+          <a:p>
+            <a:r>
+              <a:rPr sz="2200" b="1">
+                <a:solidFill>
+                  <a:srgbClr val="1B1B2C"/>
+                </a:solidFill>
+                <a:latin typeface="Segoe UI"/>
+              </a:rPr>
+              <a:t>References</a:t>
+            </a:r>
+          </a:p>
+        </p:txBody>
+      </p:sp>
+      <p:sp>
+        <p:nvSpPr>
+          <p:cNvPr id="4" name="Rectangle 3"/>
+          <p:cNvSpPr/>
+          <p:nvPr/>
+        </p:nvSpPr>
+        <p:spPr>
+          <a:xfrm>
+            <a:off x="502920" y="1115568"/>
+            <a:ext cx="1097280" cy="45720"/>
+          </a:xfrm>
+          <a:prstGeom prst="rect">
+            <a:avLst/>
+          </a:prstGeom>
+          <a:solidFill>
+            <a:srgbClr val="1A6FD6"/>
+          </a:solidFill>
+          <a:ln>
+            <a:noFill/>
+          </a:ln>
+        </p:spPr>
+        <p:style>
+          <a:lnRef idx="1">
+            <a:schemeClr val="accent1"/>
+          </a:lnRef>
+          <a:fillRef idx="3">
+            <a:schemeClr val="accent1"/>
+          </a:fillRef>
+          <a:effectRef idx="2">
+            <a:schemeClr val="accent1"/>
+          </a:effectRef>
+          <a:fontRef idx="minor">
+            <a:schemeClr val="lt1"/>
+          </a:fontRef>
+        </p:style>
+        <p:txBody>
+          <a:bodyPr rtlCol="0" anchor="ctr"/>
+          <a:lstStyle/>
+          <a:p>
+            <a:pPr algn="ctr"/>
+          </a:p>
+        </p:txBody>
+      </p:sp>
+      <p:sp>
+        <p:nvSpPr>
+          <p:cNvPr id="5" name="TextBox 4"/>
+          <p:cNvSpPr txBox="1"/>
+          <p:nvPr/>
+        </p:nvSpPr>
+        <p:spPr>
+          <a:xfrm>
+            <a:off x="731520" y="1325880"/>
+            <a:ext cx="7680960" cy="3108960"/>
+          </a:xfrm>
+          <a:prstGeom prst="rect">
+            <a:avLst/>
+          </a:prstGeom>
+          <a:noFill/>
+        </p:spPr>
+        <p:txBody>
+          <a:bodyPr wrap="none" lIns="73152" rIns="73152" tIns="36576">
+            <a:spAutoFit/>
+          </a:bodyPr>
+          <a:lstStyle/>
+          <a:p>
+            <a:pPr>
+              <a:spcAft>
+                <a:spcPts val="500"/>
+              </a:spcAft>
+              <a:defRPr sz="1200">
+                <a:solidFill>
+                  <a:srgbClr val="1B1B2C"/>
+                </a:solidFill>
+                <a:latin typeface="Segoe UI"/>
+              </a:defRPr>
+            </a:pPr>
+            <a:r>
+              <a:t>• LEARN Decide which Copilot is right for you</a:t>
+            </a:r>
+          </a:p>
+          <a:p>
+            <a:pPr>
+              <a:spcAft>
+                <a:spcPts val="500"/>
+              </a:spcAft>
+              <a:defRPr sz="1200">
+                <a:solidFill>
+                  <a:srgbClr val="1B1B2C"/>
+                </a:solidFill>
+                <a:latin typeface="Segoe UI"/>
+              </a:defRPr>
+            </a:pPr>
+            <a:r>
+              <a:t>• LEARN Copilot Cowork overview</a:t>
+            </a:r>
+          </a:p>
+          <a:p>
+            <a:pPr>
+              <a:spcAft>
+                <a:spcPts val="500"/>
+              </a:spcAft>
+              <a:defRPr sz="1200">
+                <a:solidFill>
+                  <a:srgbClr val="1B1B2C"/>
+                </a:solidFill>
+                <a:latin typeface="Segoe UI"/>
+              </a:defRPr>
+            </a:pPr>
+            <a:r>
+              <a:t>• LEARN Copilot Cowork common questions</a:t>
+            </a:r>
+          </a:p>
+          <a:p>
+            <a:pPr>
+              <a:spcAft>
+                <a:spcPts val="500"/>
+              </a:spcAft>
+              <a:defRPr sz="1200">
+                <a:solidFill>
+                  <a:srgbClr val="1B1B2C"/>
+                </a:solidFill>
+                <a:latin typeface="Segoe UI"/>
+              </a:defRPr>
+            </a:pPr>
+            <a:r>
+              <a:t>• LEARN Researcher agent in Microsoft 365 Copilot</a:t>
+            </a:r>
+          </a:p>
+          <a:p>
+            <a:pPr>
+              <a:spcAft>
+                <a:spcPts val="500"/>
+              </a:spcAft>
+              <a:defRPr sz="1200">
+                <a:solidFill>
+                  <a:srgbClr val="1B1B2C"/>
+                </a:solidFill>
+                <a:latin typeface="Segoe UI"/>
+              </a:defRPr>
+            </a:pPr>
+            <a:r>
+              <a:t>• LEARN Agents for Microsoft 365 Copilot Chat</a:t>
+            </a:r>
+          </a:p>
+          <a:p>
+            <a:pPr>
+              <a:spcAft>
+                <a:spcPts val="500"/>
+              </a:spcAft>
+              <a:defRPr sz="1200">
+                <a:solidFill>
+                  <a:srgbClr val="1B1B2C"/>
+                </a:solidFill>
+                <a:latin typeface="Segoe UI"/>
+              </a:defRPr>
+            </a:pPr>
+            <a:r>
+              <a:t>• SUPPORT Schedule your most used Copilot prompts</a:t>
+            </a:r>
+          </a:p>
+          <a:p>
+            <a:pPr>
+              <a:spcAft>
+                <a:spcPts val="500"/>
+              </a:spcAft>
+              <a:defRPr sz="1200">
+                <a:solidFill>
+                  <a:srgbClr val="1B1B2C"/>
+                </a:solidFill>
+                <a:latin typeface="Segoe UI"/>
+              </a:defRPr>
+            </a:pPr>
+            <a:r>
+              <a:t>• ADOPT Cowork for the AI user (prompt structure)</a:t>
+            </a:r>
+          </a:p>
+          <a:p>
+            <a:pPr>
+              <a:spcAft>
+                <a:spcPts val="500"/>
+              </a:spcAft>
+              <a:defRPr sz="1200">
+                <a:solidFill>
+                  <a:srgbClr val="1B1B2C"/>
+                </a:solidFill>
+                <a:latin typeface="Segoe UI"/>
+              </a:defRPr>
+            </a:pPr>
+            <a:r>
+              <a:t>• ADOPT Microsoft Copilot Adoption hub</a:t>
             </a:r>
           </a:p>
         </p:txBody>

--- a/slides/business-lite.pptx
+++ b/slides/business-lite.pptx
@@ -5887,7 +5887,7 @@
         <p:spPr>
           <a:xfrm>
             <a:off x="4892040" y="1874519"/>
-            <a:ext cx="3429000" cy="2148840"/>
+            <a:ext cx="3429000" cy="1783080"/>
           </a:xfrm>
           <a:prstGeom prst="rect">
             <a:avLst/>
@@ -5989,28 +5989,62 @@
         </p:nvSpPr>
         <p:spPr>
           <a:xfrm>
-            <a:off x="4910328" y="4133087"/>
-            <a:ext cx="3337560" cy="310896"/>
-          </a:xfrm>
-          <a:prstGeom prst="rect">
-            <a:avLst/>
-          </a:prstGeom>
-          <a:noFill/>
-        </p:spPr>
-        <p:txBody>
-          <a:bodyPr wrap="square" lIns="27432" rIns="27432" tIns="18288" bIns="18288">
-            <a:spAutoFit/>
-          </a:bodyPr>
-          <a:lstStyle/>
-          <a:p>
-            <a:r>
-              <a:rPr sz="1000" b="0">
+            <a:off x="4910328" y="3968496"/>
+            <a:ext cx="530352" cy="182880"/>
+          </a:xfrm>
+          <a:prstGeom prst="rect">
+            <a:avLst/>
+          </a:prstGeom>
+          <a:noFill/>
+        </p:spPr>
+        <p:txBody>
+          <a:bodyPr wrap="square" lIns="27432" rIns="27432" tIns="18288" bIns="18288">
+            <a:spAutoFit/>
+          </a:bodyPr>
+          <a:lstStyle/>
+          <a:p>
+            <a:r>
+              <a:rPr sz="900" b="1">
+                <a:solidFill>
+                  <a:srgbClr val="1B1B2C"/>
+                </a:solidFill>
+                <a:latin typeface="Segoe UI"/>
+              </a:rPr>
+              <a:t>Note:</a:t>
+            </a:r>
+          </a:p>
+        </p:txBody>
+      </p:sp>
+      <p:sp>
+        <p:nvSpPr>
+          <p:cNvPr id="14" name="TextBox 13"/>
+          <p:cNvSpPr txBox="1"/>
+          <p:nvPr/>
+        </p:nvSpPr>
+        <p:spPr>
+          <a:xfrm>
+            <a:off x="5440680" y="3950208"/>
+            <a:ext cx="2926080" cy="411480"/>
+          </a:xfrm>
+          <a:prstGeom prst="rect">
+            <a:avLst/>
+          </a:prstGeom>
+          <a:noFill/>
+        </p:spPr>
+        <p:txBody>
+          <a:bodyPr wrap="square" lIns="27432" rIns="27432" tIns="18288" bIns="18288">
+            <a:spAutoFit/>
+          </a:bodyPr>
+          <a:lstStyle/>
+          <a:p>
+            <a:r>
+              <a:rPr sz="800" b="0">
                 <a:solidFill>
                   <a:srgbClr val="5A6078"/>
                 </a:solidFill>
                 <a:latin typeface="Segoe UI"/>
               </a:rPr>
-              <a:t>A rebalanced schedule that protects focus time, prioritizes high-impact meetings, and resolves conflicts, without manually negotiating...</a:t>
+              <a:t>You can schedule this to run automatically by starting your prompt with "Create a skill where this occurs every Monday morning."</a:t>
             </a:r>
           </a:p>
         </p:txBody>
@@ -7851,7 +7885,7 @@
         <p:spPr>
           <a:xfrm>
             <a:off x="4892040" y="1874519"/>
-            <a:ext cx="3429000" cy="2148840"/>
+            <a:ext cx="3429000" cy="1783080"/>
           </a:xfrm>
           <a:prstGeom prst="rect">
             <a:avLst/>
@@ -7953,28 +7987,62 @@
         </p:nvSpPr>
         <p:spPr>
           <a:xfrm>
-            <a:off x="4910328" y="4133087"/>
-            <a:ext cx="3337560" cy="310896"/>
-          </a:xfrm>
-          <a:prstGeom prst="rect">
-            <a:avLst/>
-          </a:prstGeom>
-          <a:noFill/>
-        </p:spPr>
-        <p:txBody>
-          <a:bodyPr wrap="square" lIns="27432" rIns="27432" tIns="18288" bIns="18288">
-            <a:spAutoFit/>
-          </a:bodyPr>
-          <a:lstStyle/>
-          <a:p>
-            <a:r>
-              <a:rPr sz="1000" b="0">
+            <a:off x="4910328" y="3968496"/>
+            <a:ext cx="530352" cy="182880"/>
+          </a:xfrm>
+          <a:prstGeom prst="rect">
+            <a:avLst/>
+          </a:prstGeom>
+          <a:noFill/>
+        </p:spPr>
+        <p:txBody>
+          <a:bodyPr wrap="square" lIns="27432" rIns="27432" tIns="18288" bIns="18288">
+            <a:spAutoFit/>
+          </a:bodyPr>
+          <a:lstStyle/>
+          <a:p>
+            <a:r>
+              <a:rPr sz="900" b="1">
+                <a:solidFill>
+                  <a:srgbClr val="1B1B2C"/>
+                </a:solidFill>
+                <a:latin typeface="Segoe UI"/>
+              </a:rPr>
+              <a:t>Note:</a:t>
+            </a:r>
+          </a:p>
+        </p:txBody>
+      </p:sp>
+      <p:sp>
+        <p:nvSpPr>
+          <p:cNvPr id="14" name="TextBox 13"/>
+          <p:cNvSpPr txBox="1"/>
+          <p:nvPr/>
+        </p:nvSpPr>
+        <p:spPr>
+          <a:xfrm>
+            <a:off x="5440680" y="3950208"/>
+            <a:ext cx="2926080" cy="411480"/>
+          </a:xfrm>
+          <a:prstGeom prst="rect">
+            <a:avLst/>
+          </a:prstGeom>
+          <a:noFill/>
+        </p:spPr>
+        <p:txBody>
+          <a:bodyPr wrap="square" lIns="27432" rIns="27432" tIns="18288" bIns="18288">
+            <a:spAutoFit/>
+          </a:bodyPr>
+          <a:lstStyle/>
+          <a:p>
+            <a:r>
+              <a:rPr sz="800" b="0">
                 <a:solidFill>
                   <a:srgbClr val="5A6078"/>
                 </a:solidFill>
                 <a:latin typeface="Segoe UI"/>
               </a:rPr>
-              <a:t>A curated weekly brief that surfaces meaningful trends across the publications you follow, without the time spent reading them.</a:t>
+              <a:t>This task features a scheduled prompt, which tells Cowork you want it to run automatically on a recurring basis. To create a scheduled prompt, simply describe what...</a:t>
             </a:r>
           </a:p>
         </p:txBody>
